--- a/eventus_architecture.pptx
+++ b/eventus_architecture.pptx
@@ -120,6 +120,314 @@
     </p:ext>
   </p:extLst>
 </p:presentation>
+</file>
+
+<file path=ppt/ink/ink1.xml><?xml version="1.0" encoding="utf-8"?>
+<inkml:ink xmlns:inkml="http://www.w3.org/2003/InkML">
+  <inkml:definitions>
+    <inkml:context xml:id="ctx0">
+      <inkml:inkSource xml:id="inkSrc0">
+        <inkml:traceFormat>
+          <inkml:channel name="X" type="integer" min="-2.14748E9" max="2.14748E9" units="cm"/>
+          <inkml:channel name="Y" type="integer" min="-2.14748E9" max="2.14748E9" units="cm"/>
+          <inkml:channel name="F" type="integer" max="32767" units="dev"/>
+        </inkml:traceFormat>
+        <inkml:channelProperties>
+          <inkml:channelProperty channel="X" name="resolution" value="1000" units="1/cm"/>
+          <inkml:channelProperty channel="Y" name="resolution" value="1000" units="1/cm"/>
+          <inkml:channelProperty channel="F" name="resolution" value="0" units="1/dev"/>
+        </inkml:channelProperties>
+      </inkml:inkSource>
+      <inkml:timestamp xml:id="ts0" timeString="2026-04-01T20:42:07.175"/>
+    </inkml:context>
+    <inkml:brush xml:id="br0">
+      <inkml:brushProperty name="width" value="0.035" units="cm"/>
+      <inkml:brushProperty name="height" value="0.035" units="cm"/>
+      <inkml:brushProperty name="color" value="#004F8B"/>
+    </inkml:brush>
+  </inkml:definitions>
+  <inkml:trace contextRef="#ctx0" brushRef="#br0">0 0 24575,'7'1'0,"0"0"0,0 0 0,0 0 0,0 1 0,-1 0 0,1 1 0,-1-1 0,1 1 0,-1 0 0,0 1 0,10 7 0,8 7 0,32 32 0,-24-20 0,182 161 0,462 376 0,-573-499-1365,-72-49-5461</inkml:trace>
+</inkml:ink>
+</file>
+
+<file path=ppt/ink/ink10.xml><?xml version="1.0" encoding="utf-8"?>
+<inkml:ink xmlns:inkml="http://www.w3.org/2003/InkML">
+  <inkml:definitions>
+    <inkml:context xml:id="ctx0">
+      <inkml:inkSource xml:id="inkSrc0">
+        <inkml:traceFormat>
+          <inkml:channel name="X" type="integer" min="-2.14748E9" max="2.14748E9" units="cm"/>
+          <inkml:channel name="Y" type="integer" min="-2.14748E9" max="2.14748E9" units="cm"/>
+          <inkml:channel name="F" type="integer" max="32767" units="dev"/>
+        </inkml:traceFormat>
+        <inkml:channelProperties>
+          <inkml:channelProperty channel="X" name="resolution" value="1000" units="1/cm"/>
+          <inkml:channelProperty channel="Y" name="resolution" value="1000" units="1/cm"/>
+          <inkml:channelProperty channel="F" name="resolution" value="0" units="1/dev"/>
+        </inkml:channelProperties>
+      </inkml:inkSource>
+      <inkml:timestamp xml:id="ts0" timeString="2026-04-01T20:42:16.170"/>
+    </inkml:context>
+    <inkml:brush xml:id="br0">
+      <inkml:brushProperty name="width" value="0.035" units="cm"/>
+      <inkml:brushProperty name="height" value="0.035" units="cm"/>
+      <inkml:brushProperty name="color" value="#004F8B"/>
+    </inkml:brush>
+  </inkml:definitions>
+  <inkml:trace contextRef="#ctx0" brushRef="#br0">0 0 24575,'17'2'0,"-1"0"0,0 1 0,0 1 0,0 0 0,-1 2 0,20 8 0,-2-2 0,164 68 0,-109-41 0,1-5 0,118 29 0,-199-62 6,0 0 0,1 0-1,-1-1 1,1 0 0,-1-1-1,1 0 1,-1 0 0,0-1-1,0 0 1,1 0 0,-1-1-1,-1 0 1,1 0 0,0-1-1,-1 0 1,11-8 0,9-8-300,0-1 0,41-45 0,-50 48-286,16-16-6246</inkml:trace>
+</inkml:ink>
+</file>
+
+<file path=ppt/ink/ink11.xml><?xml version="1.0" encoding="utf-8"?>
+<inkml:ink xmlns:inkml="http://www.w3.org/2003/InkML">
+  <inkml:definitions>
+    <inkml:context xml:id="ctx0">
+      <inkml:inkSource xml:id="inkSrc0">
+        <inkml:traceFormat>
+          <inkml:channel name="X" type="integer" min="-2.14748E9" max="2.14748E9" units="cm"/>
+          <inkml:channel name="Y" type="integer" min="-2.14748E9" max="2.14748E9" units="cm"/>
+          <inkml:channel name="F" type="integer" max="32767" units="dev"/>
+        </inkml:traceFormat>
+        <inkml:channelProperties>
+          <inkml:channelProperty channel="X" name="resolution" value="1000" units="1/cm"/>
+          <inkml:channelProperty channel="Y" name="resolution" value="1000" units="1/cm"/>
+          <inkml:channelProperty channel="F" name="resolution" value="0" units="1/dev"/>
+        </inkml:channelProperties>
+      </inkml:inkSource>
+      <inkml:timestamp xml:id="ts0" timeString="2026-04-01T20:42:23.096"/>
+    </inkml:context>
+    <inkml:brush xml:id="br0">
+      <inkml:brushProperty name="width" value="0.035" units="cm"/>
+      <inkml:brushProperty name="height" value="0.035" units="cm"/>
+      <inkml:brushProperty name="color" value="#004F8B"/>
+    </inkml:brush>
+  </inkml:definitions>
+  <inkml:trace contextRef="#ctx0" brushRef="#br0">1 1 24575,'0'0'-8191</inkml:trace>
+</inkml:ink>
+</file>
+
+<file path=ppt/ink/ink2.xml><?xml version="1.0" encoding="utf-8"?>
+<inkml:ink xmlns:inkml="http://www.w3.org/2003/InkML">
+  <inkml:definitions>
+    <inkml:context xml:id="ctx0">
+      <inkml:inkSource xml:id="inkSrc0">
+        <inkml:traceFormat>
+          <inkml:channel name="X" type="integer" min="-2.14748E9" max="2.14748E9" units="cm"/>
+          <inkml:channel name="Y" type="integer" min="-2.14748E9" max="2.14748E9" units="cm"/>
+          <inkml:channel name="F" type="integer" max="32767" units="dev"/>
+        </inkml:traceFormat>
+        <inkml:channelProperties>
+          <inkml:channelProperty channel="X" name="resolution" value="1000" units="1/cm"/>
+          <inkml:channelProperty channel="Y" name="resolution" value="1000" units="1/cm"/>
+          <inkml:channelProperty channel="F" name="resolution" value="0" units="1/dev"/>
+        </inkml:channelProperties>
+      </inkml:inkSource>
+      <inkml:timestamp xml:id="ts0" timeString="2026-04-01T20:42:08.125"/>
+    </inkml:context>
+    <inkml:brush xml:id="br0">
+      <inkml:brushProperty name="width" value="0.035" units="cm"/>
+      <inkml:brushProperty name="height" value="0.035" units="cm"/>
+      <inkml:brushProperty name="color" value="#004F8B"/>
+    </inkml:brush>
+  </inkml:definitions>
+  <inkml:trace contextRef="#ctx0" brushRef="#br0">1 0 24575,'4'1'0,"0"0"0,0 1 0,0-1 0,0 0 0,0 1 0,0 0 0,-1 0 0,1 0 0,0 1 0,-1-1 0,0 1 0,1 0 0,3 5 0,3 0 0,579 476 0,34-40 0,129-30 0,-706-389 0,-1 3 0,-2 1 0,63 54 0,-13-9 0,224 129-1365,-289-186-5461</inkml:trace>
+</inkml:ink>
+</file>
+
+<file path=ppt/ink/ink3.xml><?xml version="1.0" encoding="utf-8"?>
+<inkml:ink xmlns:inkml="http://www.w3.org/2003/InkML">
+  <inkml:definitions>
+    <inkml:context xml:id="ctx0">
+      <inkml:inkSource xml:id="inkSrc0">
+        <inkml:traceFormat>
+          <inkml:channel name="X" type="integer" min="-2.14748E9" max="2.14748E9" units="cm"/>
+          <inkml:channel name="Y" type="integer" min="-2.14748E9" max="2.14748E9" units="cm"/>
+          <inkml:channel name="F" type="integer" max="32767" units="dev"/>
+        </inkml:traceFormat>
+        <inkml:channelProperties>
+          <inkml:channelProperty channel="X" name="resolution" value="1000" units="1/cm"/>
+          <inkml:channelProperty channel="Y" name="resolution" value="1000" units="1/cm"/>
+          <inkml:channelProperty channel="F" name="resolution" value="0" units="1/dev"/>
+        </inkml:channelProperties>
+      </inkml:inkSource>
+      <inkml:timestamp xml:id="ts0" timeString="2026-04-01T20:42:11.212"/>
+    </inkml:context>
+    <inkml:brush xml:id="br0">
+      <inkml:brushProperty name="width" value="0.035" units="cm"/>
+      <inkml:brushProperty name="height" value="0.035" units="cm"/>
+      <inkml:brushProperty name="color" value="#004F8B"/>
+    </inkml:brush>
+  </inkml:definitions>
+  <inkml:trace contextRef="#ctx0" brushRef="#br0">203 1 24575,'3'0'0,"0"1"0,0-1 0,0 1 0,0 0 0,0 0 0,0 0 0,0 1 0,-1-1 0,1 1 0,0-1 0,-1 1 0,1 0 0,-1 0 0,0 0 0,0 0 0,1 1 0,-1-1 0,-1 1 0,1-1 0,0 1 0,-1-1 0,1 1 0,1 5 0,5 11 0,-1-1 0,8 33 0,-8-26 0,-3-11 0,19 70 0,-21-76 0,-1 0 0,0 0 0,0 1 0,-1-1 0,0 0 0,0 0 0,-1 1 0,-2 8 0,2-13 0,-1-1 0,1 0 0,-1 1 0,0-1 0,0 0 0,0 0 0,-1 0 0,1 0 0,-1 0 0,1-1 0,-1 1 0,0-1 0,0 0 0,0 1 0,-1-1 0,-5 2 0,-64 23 0,52-20 0,-109 31-1365,74-24-5461</inkml:trace>
+</inkml:ink>
+</file>
+
+<file path=ppt/ink/ink4.xml><?xml version="1.0" encoding="utf-8"?>
+<inkml:ink xmlns:inkml="http://www.w3.org/2003/InkML">
+  <inkml:definitions>
+    <inkml:context xml:id="ctx0">
+      <inkml:inkSource xml:id="inkSrc0">
+        <inkml:traceFormat>
+          <inkml:channel name="X" type="integer" min="-2.14748E9" max="2.14748E9" units="cm"/>
+          <inkml:channel name="Y" type="integer" min="-2.14748E9" max="2.14748E9" units="cm"/>
+          <inkml:channel name="F" type="integer" max="32767" units="dev"/>
+        </inkml:traceFormat>
+        <inkml:channelProperties>
+          <inkml:channelProperty channel="X" name="resolution" value="1000" units="1/cm"/>
+          <inkml:channelProperty channel="Y" name="resolution" value="1000" units="1/cm"/>
+          <inkml:channelProperty channel="F" name="resolution" value="0" units="1/dev"/>
+        </inkml:channelProperties>
+      </inkml:inkSource>
+      <inkml:timestamp xml:id="ts0" timeString="2026-04-01T20:42:09.538"/>
+    </inkml:context>
+    <inkml:brush xml:id="br0">
+      <inkml:brushProperty name="width" value="0.035" units="cm"/>
+      <inkml:brushProperty name="height" value="0.035" units="cm"/>
+      <inkml:brushProperty name="color" value="#004F8B"/>
+    </inkml:brush>
+  </inkml:definitions>
+  <inkml:trace contextRef="#ctx0" brushRef="#br0">3971 0 24575,'-4'3'0,"0"-1"0,0 0 0,0 0 0,-1 0 0,1-1 0,-1 1 0,1-1 0,-1 0 0,1 0 0,-1-1 0,1 1 0,-1-1 0,0 0 0,-5-1 0,-16 2 0,-113 19 0,-217 60 0,232-49 0,-835 239 0,28 90 0,621-189 0,259-140 0,37-23 0,-1-1 0,0-1 0,0 0 0,-1 0 0,1-2 0,-18 3 0,-99 9 0,88-12 0,-57 11 0,43 0 0,0-3 0,-1-3 0,-108 4 0,-57-15-1365,188 2-5461</inkml:trace>
+</inkml:ink>
+</file>
+
+<file path=ppt/ink/ink5.xml><?xml version="1.0" encoding="utf-8"?>
+<inkml:ink xmlns:inkml="http://www.w3.org/2003/InkML">
+  <inkml:definitions>
+    <inkml:context xml:id="ctx0">
+      <inkml:inkSource xml:id="inkSrc0">
+        <inkml:traceFormat>
+          <inkml:channel name="X" type="integer" min="-2.14748E9" max="2.14748E9" units="cm"/>
+          <inkml:channel name="Y" type="integer" min="-2.14748E9" max="2.14748E9" units="cm"/>
+          <inkml:channel name="F" type="integer" max="32767" units="dev"/>
+        </inkml:traceFormat>
+        <inkml:channelProperties>
+          <inkml:channelProperty channel="X" name="resolution" value="1000" units="1/cm"/>
+          <inkml:channelProperty channel="Y" name="resolution" value="1000" units="1/cm"/>
+          <inkml:channelProperty channel="F" name="resolution" value="0" units="1/dev"/>
+        </inkml:channelProperties>
+      </inkml:inkSource>
+      <inkml:timestamp xml:id="ts0" timeString="2026-04-01T20:42:10.162"/>
+    </inkml:context>
+    <inkml:brush xml:id="br0">
+      <inkml:brushProperty name="width" value="0.035" units="cm"/>
+      <inkml:brushProperty name="height" value="0.035" units="cm"/>
+      <inkml:brushProperty name="color" value="#004F8B"/>
+    </inkml:brush>
+  </inkml:definitions>
+  <inkml:trace contextRef="#ctx0" brushRef="#br0">286 0 24575,'-25'24'0,"-2"-2"0,0 0 0,-53 31 0,-24 18 0,102-70 0,1 0 0,-1 0 0,1 0 0,-1 1 0,1-1 0,-1 0 0,1 1 0,0-1 0,0 1 0,0 0 0,0-1 0,0 1 0,0 0 0,0-1 0,0 1 0,1 0 0,-1 0 0,0 0 0,1 0 0,-1 3 0,2-3 0,-1-1 0,1 1 0,-1 0 0,1-1 0,0 1 0,0-1 0,0 1 0,0-1 0,0 0 0,0 1 0,0-1 0,0 0 0,0 0 0,0 1 0,1-1 0,-1 0 0,1 0 0,2 1 0,9 4 0,1 0 0,-1 0 0,1-2 0,20 5 0,-22-6 0,28 6 25,0-3 0,43 3 0,-1-1-1465,-59-5-5386</inkml:trace>
+</inkml:ink>
+</file>
+
+<file path=ppt/ink/ink6.xml><?xml version="1.0" encoding="utf-8"?>
+<inkml:ink xmlns:inkml="http://www.w3.org/2003/InkML">
+  <inkml:definitions>
+    <inkml:context xml:id="ctx0">
+      <inkml:inkSource xml:id="inkSrc0">
+        <inkml:traceFormat>
+          <inkml:channel name="X" type="integer" min="-2.14748E9" max="2.14748E9" units="cm"/>
+          <inkml:channel name="Y" type="integer" min="-2.14748E9" max="2.14748E9" units="cm"/>
+          <inkml:channel name="F" type="integer" max="32767" units="dev"/>
+        </inkml:traceFormat>
+        <inkml:channelProperties>
+          <inkml:channelProperty channel="X" name="resolution" value="1000" units="1/cm"/>
+          <inkml:channelProperty channel="Y" name="resolution" value="1000" units="1/cm"/>
+          <inkml:channelProperty channel="F" name="resolution" value="0" units="1/dev"/>
+        </inkml:channelProperties>
+      </inkml:inkSource>
+      <inkml:timestamp xml:id="ts0" timeString="2026-04-01T20:42:12.457"/>
+    </inkml:context>
+    <inkml:brush xml:id="br0">
+      <inkml:brushProperty name="width" value="0.035" units="cm"/>
+      <inkml:brushProperty name="height" value="0.035" units="cm"/>
+      <inkml:brushProperty name="color" value="#004F8B"/>
+    </inkml:brush>
+  </inkml:definitions>
+  <inkml:trace contextRef="#ctx0" brushRef="#br0">4662 0 24575,'0'18'0,"1"17"0,-1 1 0,-2 0 0,-2-1 0,-13 54 0,-5-18 0,-3-2 0,-3 0 0,-4-2 0,-2-2 0,-3-1 0,-2-2 0,-4-1 0,-2-2 0,-80 80 0,53-70 0,-3-3 0,-3-4 0,-2-3 0,-3-3 0,-2-5 0,-146 66 0,-265 83 0,1-1 0,182-64 0,-280 131 0,486-221 0,-3-4 0,-201 48 0,237-70 0,-120 32-107,-581 130-1151,737-175-5568</inkml:trace>
+</inkml:ink>
+</file>
+
+<file path=ppt/ink/ink7.xml><?xml version="1.0" encoding="utf-8"?>
+<inkml:ink xmlns:inkml="http://www.w3.org/2003/InkML">
+  <inkml:definitions>
+    <inkml:context xml:id="ctx0">
+      <inkml:inkSource xml:id="inkSrc0">
+        <inkml:traceFormat>
+          <inkml:channel name="X" type="integer" min="-2.14748E9" max="2.14748E9" units="cm"/>
+          <inkml:channel name="Y" type="integer" min="-2.14748E9" max="2.14748E9" units="cm"/>
+          <inkml:channel name="F" type="integer" max="32767" units="dev"/>
+        </inkml:traceFormat>
+        <inkml:channelProperties>
+          <inkml:channelProperty channel="X" name="resolution" value="1000" units="1/cm"/>
+          <inkml:channelProperty channel="Y" name="resolution" value="1000" units="1/cm"/>
+          <inkml:channelProperty channel="F" name="resolution" value="0" units="1/dev"/>
+        </inkml:channelProperties>
+      </inkml:inkSource>
+      <inkml:timestamp xml:id="ts0" timeString="2026-04-01T20:42:13.585"/>
+    </inkml:context>
+    <inkml:brush xml:id="br0">
+      <inkml:brushProperty name="width" value="0.035" units="cm"/>
+      <inkml:brushProperty name="height" value="0.035" units="cm"/>
+      <inkml:brushProperty name="color" value="#004F8B"/>
+    </inkml:brush>
+  </inkml:definitions>
+  <inkml:trace contextRef="#ctx0" brushRef="#br0">357 1 24575,'-3'1'0,"-1"0"0,1 0 0,0 0 0,0 1 0,0-1 0,0 1 0,0 0 0,0 0 0,0 0 0,0 0 0,0 0 0,1 1 0,0-1 0,-1 1 0,-2 4 0,-7 6 0,-99 80 0,76-67 0,2 2 0,0 2 0,-34 40 0,65-68 0,1 0 0,-1 0 0,1 0 0,-1 0 0,1 0 0,0 0 0,0 0 0,0 0 0,0 0 0,0 0 0,0 1 0,1-1 0,-1 0 0,1 0 0,0 1 0,-1-1 0,1 1 0,0-1 0,1 5 0,0-5 0,0 0 0,0 0 0,0 0 0,0 0 0,1 0 0,-1 0 0,0-1 0,1 1 0,0 0 0,-1-1 0,1 1 0,0-1 0,0 1 0,0-1 0,0 0 0,3 2 0,12 3 0,0 0 0,0-1 0,0-1 0,27 4 0,-13-3 0,293 64-1365,-271-60-5461</inkml:trace>
+</inkml:ink>
+</file>
+
+<file path=ppt/ink/ink8.xml><?xml version="1.0" encoding="utf-8"?>
+<inkml:ink xmlns:inkml="http://www.w3.org/2003/InkML">
+  <inkml:definitions>
+    <inkml:context xml:id="ctx0">
+      <inkml:inkSource xml:id="inkSrc0">
+        <inkml:traceFormat>
+          <inkml:channel name="X" type="integer" min="-2.14748E9" max="2.14748E9" units="cm"/>
+          <inkml:channel name="Y" type="integer" min="-2.14748E9" max="2.14748E9" units="cm"/>
+          <inkml:channel name="F" type="integer" max="32767" units="dev"/>
+        </inkml:traceFormat>
+        <inkml:channelProperties>
+          <inkml:channelProperty channel="X" name="resolution" value="1000" units="1/cm"/>
+          <inkml:channelProperty channel="Y" name="resolution" value="1000" units="1/cm"/>
+          <inkml:channelProperty channel="F" name="resolution" value="0" units="1/dev"/>
+        </inkml:channelProperties>
+      </inkml:inkSource>
+      <inkml:timestamp xml:id="ts0" timeString="2026-04-01T20:42:14.489"/>
+    </inkml:context>
+    <inkml:brush xml:id="br0">
+      <inkml:brushProperty name="width" value="0.035" units="cm"/>
+      <inkml:brushProperty name="height" value="0.035" units="cm"/>
+      <inkml:brushProperty name="color" value="#004F8B"/>
+    </inkml:brush>
+  </inkml:definitions>
+  <inkml:trace contextRef="#ctx0" brushRef="#br0">516 1 24575,'10'1'0,"0"1"0,0 0 0,0 1 0,-1 0 0,1 0 0,-1 1 0,0 1 0,0-1 0,-1 1 0,1 1 0,-1 0 0,0 0 0,0 0 0,-1 1 0,0 0 0,0 1 0,-1-1 0,0 1 0,0 1 0,6 11 0,-11-17 0,0 0 0,0 0 0,-1-1 0,1 1 0,-1 0 0,0 0 0,0 0 0,0 0 0,0 0 0,0 0 0,-1 0 0,1-1 0,-1 1 0,0 0 0,0 0 0,0 0 0,0-1 0,0 1 0,0-1 0,-1 1 0,0-1 0,1 1 0,-1-1 0,0 0 0,0 0 0,0 0 0,0 0 0,0 0 0,-4 2 0,-9 7 0,0-2 0,0 0 0,-31 12 0,30-13 0,-293 115 73,154-64-1511,60-21-5388</inkml:trace>
+</inkml:ink>
+</file>
+
+<file path=ppt/ink/ink9.xml><?xml version="1.0" encoding="utf-8"?>
+<inkml:ink xmlns:inkml="http://www.w3.org/2003/InkML">
+  <inkml:definitions>
+    <inkml:context xml:id="ctx0">
+      <inkml:inkSource xml:id="inkSrc0">
+        <inkml:traceFormat>
+          <inkml:channel name="X" type="integer" min="-2.14748E9" max="2.14748E9" units="cm"/>
+          <inkml:channel name="Y" type="integer" min="-2.14748E9" max="2.14748E9" units="cm"/>
+          <inkml:channel name="F" type="integer" max="32767" units="dev"/>
+        </inkml:traceFormat>
+        <inkml:channelProperties>
+          <inkml:channelProperty channel="X" name="resolution" value="1000" units="1/cm"/>
+          <inkml:channelProperty channel="Y" name="resolution" value="1000" units="1/cm"/>
+          <inkml:channelProperty channel="F" name="resolution" value="0" units="1/dev"/>
+        </inkml:channelProperties>
+      </inkml:inkSource>
+      <inkml:timestamp xml:id="ts0" timeString="2026-04-01T20:42:15.347"/>
+    </inkml:context>
+    <inkml:brush xml:id="br0">
+      <inkml:brushProperty name="width" value="0.035" units="cm"/>
+      <inkml:brushProperty name="height" value="0.035" units="cm"/>
+      <inkml:brushProperty name="color" value="#004F8B"/>
+    </inkml:brush>
+  </inkml:definitions>
+  <inkml:trace contextRef="#ctx0" brushRef="#br0">1 0 24575,'3'0'0,"1"6"0,0 9 0,-1 13 0,0 9 0,1 7 0,1 8 0,-1 5 0,3 2 0,-1 6 0,-1 2 0,1-2 0,1-2 0,-2-7 0,-1-5 0,-2-6 0,3-8 0,-1-9-8191</inkml:trace>
+</inkml:ink>
 </file>
 
 <file path=ppt/notesMasters/notesMaster1.xml><?xml version="1.0" encoding="utf-8"?>
@@ -3365,7 +3673,7 @@
         <p:spPr>
           <a:xfrm>
             <a:off x="6936377" y="102716"/>
-            <a:ext cx="2207623" cy="369332"/>
+            <a:ext cx="2207623" cy="646331"/>
           </a:xfrm>
           <a:prstGeom prst="rect">
             <a:avLst/>
@@ -3380,7 +3688,7 @@
           <a:p>
             <a:r>
               <a:rPr lang="en-US"/>
-              <a:t>Parallelism</a:t>
+              <a:t>Parallelism and Compositionism(?)</a:t>
             </a:r>
           </a:p>
         </p:txBody>
@@ -3820,6 +4128,664 @@
           </a:p>
         </p:txBody>
       </p:sp>
+      <p:sp>
+        <p:nvSpPr>
+          <p:cNvPr id="9" name="TextBox 8">
+            <a:extLst>
+              <a:ext uri="{FF2B5EF4-FFF2-40B4-BE49-F238E27FC236}">
+                <a16:creationId xmlns:a16="http://schemas.microsoft.com/office/drawing/2014/main" id="{E201D2B9-E328-98D6-72D3-A0C7AE802AC3}"/>
+              </a:ext>
+            </a:extLst>
+          </p:cNvPr>
+          <p:cNvSpPr txBox="1"/>
+          <p:nvPr/>
+        </p:nvSpPr>
+        <p:spPr>
+          <a:xfrm>
+            <a:off x="3725092" y="3575281"/>
+            <a:ext cx="796834" cy="369332"/>
+          </a:xfrm>
+          <a:prstGeom prst="rect">
+            <a:avLst/>
+          </a:prstGeom>
+          <a:noFill/>
+        </p:spPr>
+        <p:txBody>
+          <a:bodyPr wrap="square" rtlCol="0">
+            <a:spAutoFit/>
+          </a:bodyPr>
+          <a:lstStyle/>
+          <a:p>
+            <a:r>
+              <a:rPr lang="en-US"/>
+              <a:t>add</a:t>
+            </a:r>
+          </a:p>
+        </p:txBody>
+      </p:sp>
+      <p:sp>
+        <p:nvSpPr>
+          <p:cNvPr id="10" name="TextBox 9">
+            <a:extLst>
+              <a:ext uri="{FF2B5EF4-FFF2-40B4-BE49-F238E27FC236}">
+                <a16:creationId xmlns:a16="http://schemas.microsoft.com/office/drawing/2014/main" id="{995CEDC0-9C5A-E38F-9BD7-C7E8C8B95AEA}"/>
+              </a:ext>
+            </a:extLst>
+          </p:cNvPr>
+          <p:cNvSpPr txBox="1"/>
+          <p:nvPr/>
+        </p:nvSpPr>
+        <p:spPr>
+          <a:xfrm>
+            <a:off x="2582091" y="4281658"/>
+            <a:ext cx="3979818" cy="923330"/>
+          </a:xfrm>
+          <a:prstGeom prst="rect">
+            <a:avLst/>
+          </a:prstGeom>
+          <a:noFill/>
+        </p:spPr>
+        <p:txBody>
+          <a:bodyPr wrap="square" rtlCol="0">
+            <a:spAutoFit/>
+          </a:bodyPr>
+          <a:lstStyle/>
+          <a:p>
+            <a:r>
+              <a:rPr lang="en-US"/>
+              <a:t>visualizer</a:t>
+            </a:r>
+          </a:p>
+          <a:p>
+            <a:r>
+              <a:rPr lang="en-US"/>
+              <a:t>plot events, plot occurrences, plot both within span</a:t>
+            </a:r>
+          </a:p>
+        </p:txBody>
+      </p:sp>
+      <p:grpSp>
+        <p:nvGrpSpPr>
+          <p:cNvPr id="24" name="Group 23">
+            <a:extLst>
+              <a:ext uri="{FF2B5EF4-FFF2-40B4-BE49-F238E27FC236}">
+                <a16:creationId xmlns:a16="http://schemas.microsoft.com/office/drawing/2014/main" id="{D7618054-AE0C-A05E-7520-88078A6F8EAB}"/>
+              </a:ext>
+            </a:extLst>
+          </p:cNvPr>
+          <p:cNvGrpSpPr/>
+          <p:nvPr/>
+        </p:nvGrpSpPr>
+        <p:grpSpPr>
+          <a:xfrm>
+            <a:off x="2116029" y="3317811"/>
+            <a:ext cx="4363920" cy="1075680"/>
+            <a:chOff x="2116029" y="3317811"/>
+            <a:chExt cx="4363920" cy="1075680"/>
+          </a:xfrm>
+        </p:grpSpPr>
+        <mc:AlternateContent xmlns:mc="http://schemas.openxmlformats.org/markup-compatibility/2006">
+          <mc:Choice xmlns:p14="http://schemas.microsoft.com/office/powerpoint/2010/main" Requires="p14">
+            <p:contentPart p14:bwMode="auto" r:id="rId2">
+              <p14:nvContentPartPr>
+                <p14:cNvPr id="11" name="Ink 10">
+                  <a:extLst>
+                    <a:ext uri="{FF2B5EF4-FFF2-40B4-BE49-F238E27FC236}">
+                      <a16:creationId xmlns:a16="http://schemas.microsoft.com/office/drawing/2014/main" id="{F96C396D-6EAB-E5EE-09DD-67B820FE4518}"/>
+                    </a:ext>
+                  </a:extLst>
+                </p14:cNvPr>
+                <p14:cNvContentPartPr/>
+                <p14:nvPr/>
+              </p14:nvContentPartPr>
+              <p14:xfrm>
+                <a:off x="2873829" y="3422211"/>
+                <a:ext cx="441360" cy="352080"/>
+              </p14:xfrm>
+            </p:contentPart>
+          </mc:Choice>
+          <mc:Fallback>
+            <p:pic>
+              <p:nvPicPr>
+                <p:cNvPr id="11" name="Ink 10">
+                  <a:extLst>
+                    <a:ext uri="{FF2B5EF4-FFF2-40B4-BE49-F238E27FC236}">
+                      <a16:creationId xmlns:a16="http://schemas.microsoft.com/office/drawing/2014/main" id="{F96C396D-6EAB-E5EE-09DD-67B820FE4518}"/>
+                    </a:ext>
+                  </a:extLst>
+                </p:cNvPr>
+                <p:cNvPicPr/>
+                <p:nvPr/>
+              </p:nvPicPr>
+              <p:blipFill>
+                <a:blip r:embed="rId3"/>
+                <a:stretch>
+                  <a:fillRect/>
+                </a:stretch>
+              </p:blipFill>
+              <p:spPr>
+                <a:xfrm>
+                  <a:off x="2867709" y="3416091"/>
+                  <a:ext cx="453600" cy="364320"/>
+                </a:xfrm>
+                <a:prstGeom prst="rect">
+                  <a:avLst/>
+                </a:prstGeom>
+              </p:spPr>
+            </p:pic>
+          </mc:Fallback>
+        </mc:AlternateContent>
+        <mc:AlternateContent xmlns:mc="http://schemas.openxmlformats.org/markup-compatibility/2006">
+          <mc:Choice xmlns:p14="http://schemas.microsoft.com/office/powerpoint/2010/main" Requires="p14">
+            <p:contentPart p14:bwMode="auto" r:id="rId4">
+              <p14:nvContentPartPr>
+                <p14:cNvPr id="12" name="Ink 11">
+                  <a:extLst>
+                    <a:ext uri="{FF2B5EF4-FFF2-40B4-BE49-F238E27FC236}">
+                      <a16:creationId xmlns:a16="http://schemas.microsoft.com/office/drawing/2014/main" id="{3F88F4EB-7A78-0DFD-8B33-2C43159774C1}"/>
+                    </a:ext>
+                  </a:extLst>
+                </p14:cNvPr>
+                <p14:cNvContentPartPr/>
+                <p14:nvPr/>
+              </p14:nvContentPartPr>
+              <p14:xfrm>
+                <a:off x="2116029" y="3526971"/>
+                <a:ext cx="975600" cy="663120"/>
+              </p14:xfrm>
+            </p:contentPart>
+          </mc:Choice>
+          <mc:Fallback>
+            <p:pic>
+              <p:nvPicPr>
+                <p:cNvPr id="12" name="Ink 11">
+                  <a:extLst>
+                    <a:ext uri="{FF2B5EF4-FFF2-40B4-BE49-F238E27FC236}">
+                      <a16:creationId xmlns:a16="http://schemas.microsoft.com/office/drawing/2014/main" id="{3F88F4EB-7A78-0DFD-8B33-2C43159774C1}"/>
+                    </a:ext>
+                  </a:extLst>
+                </p:cNvPr>
+                <p:cNvPicPr/>
+                <p:nvPr/>
+              </p:nvPicPr>
+              <p:blipFill>
+                <a:blip r:embed="rId5"/>
+                <a:stretch>
+                  <a:fillRect/>
+                </a:stretch>
+              </p:blipFill>
+              <p:spPr>
+                <a:xfrm>
+                  <a:off x="2109909" y="3520851"/>
+                  <a:ext cx="987840" cy="675360"/>
+                </a:xfrm>
+                <a:prstGeom prst="rect">
+                  <a:avLst/>
+                </a:prstGeom>
+              </p:spPr>
+            </p:pic>
+          </mc:Fallback>
+        </mc:AlternateContent>
+        <mc:AlternateContent xmlns:mc="http://schemas.openxmlformats.org/markup-compatibility/2006">
+          <mc:Choice xmlns:p14="http://schemas.microsoft.com/office/powerpoint/2010/main" Requires="p14">
+            <p:contentPart p14:bwMode="auto" r:id="rId6">
+              <p14:nvContentPartPr>
+                <p14:cNvPr id="16" name="Ink 15">
+                  <a:extLst>
+                    <a:ext uri="{FF2B5EF4-FFF2-40B4-BE49-F238E27FC236}">
+                      <a16:creationId xmlns:a16="http://schemas.microsoft.com/office/drawing/2014/main" id="{0DEF11E4-5EFB-9492-8012-68D5C2BF9FFE}"/>
+                    </a:ext>
+                  </a:extLst>
+                </p14:cNvPr>
+                <p14:cNvContentPartPr/>
+                <p14:nvPr/>
+              </p14:nvContentPartPr>
+              <p14:xfrm>
+                <a:off x="3395109" y="3670611"/>
+                <a:ext cx="119520" cy="172440"/>
+              </p14:xfrm>
+            </p:contentPart>
+          </mc:Choice>
+          <mc:Fallback>
+            <p:pic>
+              <p:nvPicPr>
+                <p:cNvPr id="16" name="Ink 15">
+                  <a:extLst>
+                    <a:ext uri="{FF2B5EF4-FFF2-40B4-BE49-F238E27FC236}">
+                      <a16:creationId xmlns:a16="http://schemas.microsoft.com/office/drawing/2014/main" id="{0DEF11E4-5EFB-9492-8012-68D5C2BF9FFE}"/>
+                    </a:ext>
+                  </a:extLst>
+                </p:cNvPr>
+                <p:cNvPicPr/>
+                <p:nvPr/>
+              </p:nvPicPr>
+              <p:blipFill>
+                <a:blip r:embed="rId7"/>
+                <a:stretch>
+                  <a:fillRect/>
+                </a:stretch>
+              </p:blipFill>
+              <p:spPr>
+                <a:xfrm>
+                  <a:off x="3388989" y="3664491"/>
+                  <a:ext cx="131760" cy="184680"/>
+                </a:xfrm>
+                <a:prstGeom prst="rect">
+                  <a:avLst/>
+                </a:prstGeom>
+              </p:spPr>
+            </p:pic>
+          </mc:Fallback>
+        </mc:AlternateContent>
+        <mc:AlternateContent xmlns:mc="http://schemas.openxmlformats.org/markup-compatibility/2006">
+          <mc:Choice xmlns:p14="http://schemas.microsoft.com/office/powerpoint/2010/main" Requires="p14">
+            <p:contentPart p14:bwMode="auto" r:id="rId8">
+              <p14:nvContentPartPr>
+                <p14:cNvPr id="14" name="Ink 13">
+                  <a:extLst>
+                    <a:ext uri="{FF2B5EF4-FFF2-40B4-BE49-F238E27FC236}">
+                      <a16:creationId xmlns:a16="http://schemas.microsoft.com/office/drawing/2014/main" id="{73D81E33-FE18-69E4-C9A4-A70DFE59538B}"/>
+                    </a:ext>
+                  </a:extLst>
+                </p14:cNvPr>
+                <p14:cNvContentPartPr/>
+                <p14:nvPr/>
+              </p14:nvContentPartPr>
+              <p14:xfrm>
+                <a:off x="4435869" y="3409251"/>
+                <a:ext cx="1429560" cy="399240"/>
+              </p14:xfrm>
+            </p:contentPart>
+          </mc:Choice>
+          <mc:Fallback>
+            <p:pic>
+              <p:nvPicPr>
+                <p:cNvPr id="14" name="Ink 13">
+                  <a:extLst>
+                    <a:ext uri="{FF2B5EF4-FFF2-40B4-BE49-F238E27FC236}">
+                      <a16:creationId xmlns:a16="http://schemas.microsoft.com/office/drawing/2014/main" id="{73D81E33-FE18-69E4-C9A4-A70DFE59538B}"/>
+                    </a:ext>
+                  </a:extLst>
+                </p:cNvPr>
+                <p:cNvPicPr/>
+                <p:nvPr/>
+              </p:nvPicPr>
+              <p:blipFill>
+                <a:blip r:embed="rId9"/>
+                <a:stretch>
+                  <a:fillRect/>
+                </a:stretch>
+              </p:blipFill>
+              <p:spPr>
+                <a:xfrm>
+                  <a:off x="4429749" y="3403131"/>
+                  <a:ext cx="1441800" cy="411480"/>
+                </a:xfrm>
+                <a:prstGeom prst="rect">
+                  <a:avLst/>
+                </a:prstGeom>
+              </p:spPr>
+            </p:pic>
+          </mc:Fallback>
+        </mc:AlternateContent>
+        <mc:AlternateContent xmlns:mc="http://schemas.openxmlformats.org/markup-compatibility/2006">
+          <mc:Choice xmlns:p14="http://schemas.microsoft.com/office/powerpoint/2010/main" Requires="p14">
+            <p:contentPart p14:bwMode="auto" r:id="rId10">
+              <p14:nvContentPartPr>
+                <p14:cNvPr id="15" name="Ink 14">
+                  <a:extLst>
+                    <a:ext uri="{FF2B5EF4-FFF2-40B4-BE49-F238E27FC236}">
+                      <a16:creationId xmlns:a16="http://schemas.microsoft.com/office/drawing/2014/main" id="{0EBA67D8-7AC1-4E64-E93A-F3EE9FD4E8C6}"/>
+                    </a:ext>
+                  </a:extLst>
+                </p14:cNvPr>
+                <p14:cNvContentPartPr/>
+                <p14:nvPr/>
+              </p14:nvContentPartPr>
+              <p14:xfrm>
+                <a:off x="4299069" y="3716331"/>
+                <a:ext cx="140760" cy="117000"/>
+              </p14:xfrm>
+            </p:contentPart>
+          </mc:Choice>
+          <mc:Fallback>
+            <p:pic>
+              <p:nvPicPr>
+                <p:cNvPr id="15" name="Ink 14">
+                  <a:extLst>
+                    <a:ext uri="{FF2B5EF4-FFF2-40B4-BE49-F238E27FC236}">
+                      <a16:creationId xmlns:a16="http://schemas.microsoft.com/office/drawing/2014/main" id="{0EBA67D8-7AC1-4E64-E93A-F3EE9FD4E8C6}"/>
+                    </a:ext>
+                  </a:extLst>
+                </p:cNvPr>
+                <p:cNvPicPr/>
+                <p:nvPr/>
+              </p:nvPicPr>
+              <p:blipFill>
+                <a:blip r:embed="rId11"/>
+                <a:stretch>
+                  <a:fillRect/>
+                </a:stretch>
+              </p:blipFill>
+              <p:spPr>
+                <a:xfrm>
+                  <a:off x="4292949" y="3710211"/>
+                  <a:ext cx="153000" cy="129240"/>
+                </a:xfrm>
+                <a:prstGeom prst="rect">
+                  <a:avLst/>
+                </a:prstGeom>
+              </p:spPr>
+            </p:pic>
+          </mc:Fallback>
+        </mc:AlternateContent>
+        <mc:AlternateContent xmlns:mc="http://schemas.openxmlformats.org/markup-compatibility/2006">
+          <mc:Choice xmlns:p14="http://schemas.microsoft.com/office/powerpoint/2010/main" Requires="p14">
+            <p:contentPart p14:bwMode="auto" r:id="rId12">
+              <p14:nvContentPartPr>
+                <p14:cNvPr id="17" name="Ink 16">
+                  <a:extLst>
+                    <a:ext uri="{FF2B5EF4-FFF2-40B4-BE49-F238E27FC236}">
+                      <a16:creationId xmlns:a16="http://schemas.microsoft.com/office/drawing/2014/main" id="{C43B50F9-8A76-A5AB-A996-FE08C5CC2BF7}"/>
+                    </a:ext>
+                  </a:extLst>
+                </p14:cNvPr>
+                <p14:cNvContentPartPr/>
+                <p14:nvPr/>
+              </p14:nvContentPartPr>
+              <p14:xfrm>
+                <a:off x="4800909" y="3317811"/>
+                <a:ext cx="1679040" cy="967680"/>
+              </p14:xfrm>
+            </p:contentPart>
+          </mc:Choice>
+          <mc:Fallback>
+            <p:pic>
+              <p:nvPicPr>
+                <p:cNvPr id="17" name="Ink 16">
+                  <a:extLst>
+                    <a:ext uri="{FF2B5EF4-FFF2-40B4-BE49-F238E27FC236}">
+                      <a16:creationId xmlns:a16="http://schemas.microsoft.com/office/drawing/2014/main" id="{C43B50F9-8A76-A5AB-A996-FE08C5CC2BF7}"/>
+                    </a:ext>
+                  </a:extLst>
+                </p:cNvPr>
+                <p:cNvPicPr/>
+                <p:nvPr/>
+              </p:nvPicPr>
+              <p:blipFill>
+                <a:blip r:embed="rId13"/>
+                <a:stretch>
+                  <a:fillRect/>
+                </a:stretch>
+              </p:blipFill>
+              <p:spPr>
+                <a:xfrm>
+                  <a:off x="4794789" y="3311691"/>
+                  <a:ext cx="1691280" cy="979920"/>
+                </a:xfrm>
+                <a:prstGeom prst="rect">
+                  <a:avLst/>
+                </a:prstGeom>
+              </p:spPr>
+            </p:pic>
+          </mc:Fallback>
+        </mc:AlternateContent>
+        <mc:AlternateContent xmlns:mc="http://schemas.openxmlformats.org/markup-compatibility/2006">
+          <mc:Choice xmlns:p14="http://schemas.microsoft.com/office/powerpoint/2010/main" Requires="p14">
+            <p:contentPart p14:bwMode="auto" r:id="rId14">
+              <p14:nvContentPartPr>
+                <p14:cNvPr id="18" name="Ink 17">
+                  <a:extLst>
+                    <a:ext uri="{FF2B5EF4-FFF2-40B4-BE49-F238E27FC236}">
+                      <a16:creationId xmlns:a16="http://schemas.microsoft.com/office/drawing/2014/main" id="{7CD42570-DF2F-BFDE-EFF8-0F93CDCFA359}"/>
+                    </a:ext>
+                  </a:extLst>
+                </p14:cNvPr>
+                <p14:cNvContentPartPr/>
+                <p14:nvPr/>
+              </p14:nvContentPartPr>
+              <p14:xfrm>
+                <a:off x="4652229" y="4218891"/>
+                <a:ext cx="198000" cy="174600"/>
+              </p14:xfrm>
+            </p:contentPart>
+          </mc:Choice>
+          <mc:Fallback>
+            <p:pic>
+              <p:nvPicPr>
+                <p:cNvPr id="18" name="Ink 17">
+                  <a:extLst>
+                    <a:ext uri="{FF2B5EF4-FFF2-40B4-BE49-F238E27FC236}">
+                      <a16:creationId xmlns:a16="http://schemas.microsoft.com/office/drawing/2014/main" id="{7CD42570-DF2F-BFDE-EFF8-0F93CDCFA359}"/>
+                    </a:ext>
+                  </a:extLst>
+                </p:cNvPr>
+                <p:cNvPicPr/>
+                <p:nvPr/>
+              </p:nvPicPr>
+              <p:blipFill>
+                <a:blip r:embed="rId15"/>
+                <a:stretch>
+                  <a:fillRect/>
+                </a:stretch>
+              </p:blipFill>
+              <p:spPr>
+                <a:xfrm>
+                  <a:off x="4646109" y="4212771"/>
+                  <a:ext cx="210240" cy="186840"/>
+                </a:xfrm>
+                <a:prstGeom prst="rect">
+                  <a:avLst/>
+                </a:prstGeom>
+              </p:spPr>
+            </p:pic>
+          </mc:Fallback>
+        </mc:AlternateContent>
+        <mc:AlternateContent xmlns:mc="http://schemas.openxmlformats.org/markup-compatibility/2006">
+          <mc:Choice xmlns:p14="http://schemas.microsoft.com/office/powerpoint/2010/main" Requires="p14">
+            <p:contentPart p14:bwMode="auto" r:id="rId16">
+              <p14:nvContentPartPr>
+                <p14:cNvPr id="21" name="Ink 20">
+                  <a:extLst>
+                    <a:ext uri="{FF2B5EF4-FFF2-40B4-BE49-F238E27FC236}">
+                      <a16:creationId xmlns:a16="http://schemas.microsoft.com/office/drawing/2014/main" id="{3AF404F0-C381-1094-1E81-5156F3880789}"/>
+                    </a:ext>
+                  </a:extLst>
+                </p14:cNvPr>
+                <p14:cNvContentPartPr/>
+                <p14:nvPr/>
+              </p14:nvContentPartPr>
+              <p14:xfrm>
+                <a:off x="3027549" y="4153731"/>
+                <a:ext cx="251280" cy="173520"/>
+              </p14:xfrm>
+            </p:contentPart>
+          </mc:Choice>
+          <mc:Fallback>
+            <p:pic>
+              <p:nvPicPr>
+                <p:cNvPr id="21" name="Ink 20">
+                  <a:extLst>
+                    <a:ext uri="{FF2B5EF4-FFF2-40B4-BE49-F238E27FC236}">
+                      <a16:creationId xmlns:a16="http://schemas.microsoft.com/office/drawing/2014/main" id="{3AF404F0-C381-1094-1E81-5156F3880789}"/>
+                    </a:ext>
+                  </a:extLst>
+                </p:cNvPr>
+                <p:cNvPicPr/>
+                <p:nvPr/>
+              </p:nvPicPr>
+              <p:blipFill>
+                <a:blip r:embed="rId17"/>
+                <a:stretch>
+                  <a:fillRect/>
+                </a:stretch>
+              </p:blipFill>
+              <p:spPr>
+                <a:xfrm>
+                  <a:off x="3021429" y="4147611"/>
+                  <a:ext cx="263520" cy="185760"/>
+                </a:xfrm>
+                <a:prstGeom prst="rect">
+                  <a:avLst/>
+                </a:prstGeom>
+              </p:spPr>
+            </p:pic>
+          </mc:Fallback>
+        </mc:AlternateContent>
+        <mc:AlternateContent xmlns:mc="http://schemas.openxmlformats.org/markup-compatibility/2006">
+          <mc:Choice xmlns:p14="http://schemas.microsoft.com/office/powerpoint/2010/main" Requires="p14">
+            <p:contentPart p14:bwMode="auto" r:id="rId18">
+              <p14:nvContentPartPr>
+                <p14:cNvPr id="22" name="Ink 21">
+                  <a:extLst>
+                    <a:ext uri="{FF2B5EF4-FFF2-40B4-BE49-F238E27FC236}">
+                      <a16:creationId xmlns:a16="http://schemas.microsoft.com/office/drawing/2014/main" id="{C9A059F5-B6AB-4AD1-9247-F3BB53788259}"/>
+                    </a:ext>
+                  </a:extLst>
+                </p14:cNvPr>
+                <p14:cNvContentPartPr/>
+                <p14:nvPr/>
+              </p14:nvContentPartPr>
+              <p14:xfrm>
+                <a:off x="3931509" y="3899211"/>
+                <a:ext cx="29880" cy="279000"/>
+              </p14:xfrm>
+            </p:contentPart>
+          </mc:Choice>
+          <mc:Fallback>
+            <p:pic>
+              <p:nvPicPr>
+                <p:cNvPr id="22" name="Ink 21">
+                  <a:extLst>
+                    <a:ext uri="{FF2B5EF4-FFF2-40B4-BE49-F238E27FC236}">
+                      <a16:creationId xmlns:a16="http://schemas.microsoft.com/office/drawing/2014/main" id="{C9A059F5-B6AB-4AD1-9247-F3BB53788259}"/>
+                    </a:ext>
+                  </a:extLst>
+                </p:cNvPr>
+                <p:cNvPicPr/>
+                <p:nvPr/>
+              </p:nvPicPr>
+              <p:blipFill>
+                <a:blip r:embed="rId19"/>
+                <a:stretch>
+                  <a:fillRect/>
+                </a:stretch>
+              </p:blipFill>
+              <p:spPr>
+                <a:xfrm>
+                  <a:off x="3925389" y="3893091"/>
+                  <a:ext cx="42120" cy="291240"/>
+                </a:xfrm>
+                <a:prstGeom prst="rect">
+                  <a:avLst/>
+                </a:prstGeom>
+              </p:spPr>
+            </p:pic>
+          </mc:Fallback>
+        </mc:AlternateContent>
+        <mc:AlternateContent xmlns:mc="http://schemas.openxmlformats.org/markup-compatibility/2006">
+          <mc:Choice xmlns:p14="http://schemas.microsoft.com/office/powerpoint/2010/main" Requires="p14">
+            <p:contentPart p14:bwMode="auto" r:id="rId20">
+              <p14:nvContentPartPr>
+                <p14:cNvPr id="23" name="Ink 22">
+                  <a:extLst>
+                    <a:ext uri="{FF2B5EF4-FFF2-40B4-BE49-F238E27FC236}">
+                      <a16:creationId xmlns:a16="http://schemas.microsoft.com/office/drawing/2014/main" id="{9065FC9E-9001-D51D-3A21-8E9A4362638E}"/>
+                    </a:ext>
+                  </a:extLst>
+                </p14:cNvPr>
+                <p14:cNvContentPartPr/>
+                <p14:nvPr/>
+              </p14:nvContentPartPr>
+              <p14:xfrm>
+                <a:off x="3846909" y="4238691"/>
+                <a:ext cx="384480" cy="96120"/>
+              </p14:xfrm>
+            </p:contentPart>
+          </mc:Choice>
+          <mc:Fallback>
+            <p:pic>
+              <p:nvPicPr>
+                <p:cNvPr id="23" name="Ink 22">
+                  <a:extLst>
+                    <a:ext uri="{FF2B5EF4-FFF2-40B4-BE49-F238E27FC236}">
+                      <a16:creationId xmlns:a16="http://schemas.microsoft.com/office/drawing/2014/main" id="{9065FC9E-9001-D51D-3A21-8E9A4362638E}"/>
+                    </a:ext>
+                  </a:extLst>
+                </p:cNvPr>
+                <p:cNvPicPr/>
+                <p:nvPr/>
+              </p:nvPicPr>
+              <p:blipFill>
+                <a:blip r:embed="rId21"/>
+                <a:stretch>
+                  <a:fillRect/>
+                </a:stretch>
+              </p:blipFill>
+              <p:spPr>
+                <a:xfrm>
+                  <a:off x="3840789" y="4232571"/>
+                  <a:ext cx="396720" cy="108360"/>
+                </a:xfrm>
+                <a:prstGeom prst="rect">
+                  <a:avLst/>
+                </a:prstGeom>
+              </p:spPr>
+            </p:pic>
+          </mc:Fallback>
+        </mc:AlternateContent>
+      </p:grpSp>
+      <mc:AlternateContent xmlns:mc="http://schemas.openxmlformats.org/markup-compatibility/2006">
+        <mc:Choice xmlns:p14="http://schemas.microsoft.com/office/powerpoint/2010/main" Requires="p14">
+          <p:contentPart p14:bwMode="auto" r:id="rId22">
+            <p14:nvContentPartPr>
+              <p14:cNvPr id="25" name="Ink 24">
+                <a:extLst>
+                  <a:ext uri="{FF2B5EF4-FFF2-40B4-BE49-F238E27FC236}">
+                    <a16:creationId xmlns:a16="http://schemas.microsoft.com/office/drawing/2014/main" id="{68DB5CBF-D701-D322-4416-C438505D842C}"/>
+                  </a:ext>
+                </a:extLst>
+              </p14:cNvPr>
+              <p14:cNvContentPartPr/>
+              <p14:nvPr/>
+            </p14:nvContentPartPr>
+            <p14:xfrm>
+              <a:off x="4036269" y="653091"/>
+              <a:ext cx="360" cy="360"/>
+            </p14:xfrm>
+          </p:contentPart>
+        </mc:Choice>
+        <mc:Fallback>
+          <p:pic>
+            <p:nvPicPr>
+              <p:cNvPr id="25" name="Ink 24">
+                <a:extLst>
+                  <a:ext uri="{FF2B5EF4-FFF2-40B4-BE49-F238E27FC236}">
+                    <a16:creationId xmlns:a16="http://schemas.microsoft.com/office/drawing/2014/main" id="{68DB5CBF-D701-D322-4416-C438505D842C}"/>
+                  </a:ext>
+                </a:extLst>
+              </p:cNvPr>
+              <p:cNvPicPr/>
+              <p:nvPr/>
+            </p:nvPicPr>
+            <p:blipFill>
+              <a:blip r:embed="rId23"/>
+              <a:stretch>
+                <a:fillRect/>
+              </a:stretch>
+            </p:blipFill>
+            <p:spPr>
+              <a:xfrm>
+                <a:off x="4030149" y="646971"/>
+                <a:ext cx="12600" cy="12600"/>
+              </a:xfrm>
+              <a:prstGeom prst="rect">
+                <a:avLst/>
+              </a:prstGeom>
+            </p:spPr>
+          </p:pic>
+        </mc:Fallback>
+      </mc:AlternateContent>
     </p:spTree>
     <p:extLst>
       <p:ext uri="{BB962C8B-B14F-4D97-AF65-F5344CB8AC3E}">

--- a/eventus_architecture.pptx
+++ b/eventus_architecture.pptx
@@ -5,39 +5,47 @@
     <p:sldMasterId id="2147483648" r:id="rId1"/>
   </p:sldMasterIdLst>
   <p:notesMasterIdLst>
-    <p:notesMasterId r:id="rId32"/>
+    <p:notesMasterId r:id="rId40"/>
   </p:notesMasterIdLst>
   <p:sldIdLst>
     <p:sldId id="270" r:id="rId2"/>
-    <p:sldId id="271" r:id="rId3"/>
-    <p:sldId id="272" r:id="rId4"/>
-    <p:sldId id="275" r:id="rId5"/>
-    <p:sldId id="277" r:id="rId6"/>
-    <p:sldId id="278" r:id="rId7"/>
-    <p:sldId id="279" r:id="rId8"/>
-    <p:sldId id="280" r:id="rId9"/>
-    <p:sldId id="281" r:id="rId10"/>
-    <p:sldId id="265" r:id="rId11"/>
-    <p:sldId id="268" r:id="rId12"/>
-    <p:sldId id="267" r:id="rId13"/>
-    <p:sldId id="269" r:id="rId14"/>
-    <p:sldId id="266" r:id="rId15"/>
-    <p:sldId id="273" r:id="rId16"/>
-    <p:sldId id="274" r:id="rId17"/>
-    <p:sldId id="276" r:id="rId18"/>
-    <p:sldId id="282" r:id="rId19"/>
-    <p:sldId id="283" r:id="rId20"/>
-    <p:sldId id="284" r:id="rId21"/>
-    <p:sldId id="285" r:id="rId22"/>
-    <p:sldId id="256" r:id="rId23"/>
-    <p:sldId id="257" r:id="rId24"/>
-    <p:sldId id="258" r:id="rId25"/>
-    <p:sldId id="259" r:id="rId26"/>
-    <p:sldId id="260" r:id="rId27"/>
-    <p:sldId id="261" r:id="rId28"/>
-    <p:sldId id="262" r:id="rId29"/>
-    <p:sldId id="263" r:id="rId30"/>
-    <p:sldId id="264" r:id="rId31"/>
+    <p:sldId id="290" r:id="rId3"/>
+    <p:sldId id="271" r:id="rId4"/>
+    <p:sldId id="289" r:id="rId5"/>
+    <p:sldId id="268" r:id="rId6"/>
+    <p:sldId id="291" r:id="rId7"/>
+    <p:sldId id="288" r:id="rId8"/>
+    <p:sldId id="274" r:id="rId9"/>
+    <p:sldId id="292" r:id="rId10"/>
+    <p:sldId id="293" r:id="rId11"/>
+    <p:sldId id="296" r:id="rId12"/>
+    <p:sldId id="294" r:id="rId13"/>
+    <p:sldId id="295" r:id="rId14"/>
+    <p:sldId id="276" r:id="rId15"/>
+    <p:sldId id="278" r:id="rId16"/>
+    <p:sldId id="279" r:id="rId17"/>
+    <p:sldId id="286" r:id="rId18"/>
+    <p:sldId id="280" r:id="rId19"/>
+    <p:sldId id="281" r:id="rId20"/>
+    <p:sldId id="265" r:id="rId21"/>
+    <p:sldId id="267" r:id="rId22"/>
+    <p:sldId id="269" r:id="rId23"/>
+    <p:sldId id="266" r:id="rId24"/>
+    <p:sldId id="273" r:id="rId25"/>
+    <p:sldId id="287" r:id="rId26"/>
+    <p:sldId id="282" r:id="rId27"/>
+    <p:sldId id="283" r:id="rId28"/>
+    <p:sldId id="284" r:id="rId29"/>
+    <p:sldId id="285" r:id="rId30"/>
+    <p:sldId id="256" r:id="rId31"/>
+    <p:sldId id="257" r:id="rId32"/>
+    <p:sldId id="258" r:id="rId33"/>
+    <p:sldId id="259" r:id="rId34"/>
+    <p:sldId id="260" r:id="rId35"/>
+    <p:sldId id="261" r:id="rId36"/>
+    <p:sldId id="262" r:id="rId37"/>
+    <p:sldId id="263" r:id="rId38"/>
+    <p:sldId id="264" r:id="rId39"/>
   </p:sldIdLst>
   <p:sldSz cx="9144000" cy="5143500" type="screen16x9"/>
   <p:notesSz cx="5143500" cy="9144000"/>
@@ -309,6 +317,34 @@
 </inkml:ink>
 </file>
 
+<file path=ppt/ink/ink7.xml><?xml version="1.0" encoding="utf-8"?>
+<inkml:ink xmlns:inkml="http://www.w3.org/2003/InkML">
+  <inkml:definitions>
+    <inkml:context xml:id="ctx0">
+      <inkml:inkSource xml:id="inkSrc0">
+        <inkml:traceFormat>
+          <inkml:channel name="X" type="integer" min="-2.14748E9" max="2.14748E9" units="cm"/>
+          <inkml:channel name="Y" type="integer" min="-2.14748E9" max="2.14748E9" units="cm"/>
+          <inkml:channel name="F" type="integer" max="32767" units="dev"/>
+        </inkml:traceFormat>
+        <inkml:channelProperties>
+          <inkml:channelProperty channel="X" name="resolution" value="1000" units="1/cm"/>
+          <inkml:channelProperty channel="Y" name="resolution" value="1000" units="1/cm"/>
+          <inkml:channelProperty channel="F" name="resolution" value="0" units="1/dev"/>
+        </inkml:channelProperties>
+      </inkml:inkSource>
+      <inkml:timestamp xml:id="ts0" timeString="2026-04-01T20:42:23.096"/>
+    </inkml:context>
+    <inkml:brush xml:id="br0">
+      <inkml:brushProperty name="width" value="0.035" units="cm"/>
+      <inkml:brushProperty name="height" value="0.035" units="cm"/>
+      <inkml:brushProperty name="color" value="#004F8B"/>
+    </inkml:brush>
+  </inkml:definitions>
+  <inkml:trace contextRef="#ctx0" brushRef="#br0">1 1 24575,'0'0'-8191</inkml:trace>
+</inkml:ink>
+</file>
+
 <file path=ppt/notesMasters/notesMaster1.xml><?xml version="1.0" encoding="utf-8"?>
 <p:notesMaster xmlns:a="http://schemas.openxmlformats.org/drawingml/2006/main" xmlns:r="http://schemas.openxmlformats.org/officeDocument/2006/relationships" xmlns:p="http://schemas.openxmlformats.org/presentationml/2006/main">
   <p:cSld>
@@ -499,7 +535,7 @@
           <a:p>
             <a:fld id="{F7021451-1387-4CA6-816F-3879F97B5CBC}" type="slidenum">
               <a:rPr lang="en-US"/>
-              <a:t>22</a:t>
+              <a:t>30</a:t>
             </a:fld>
             <a:endParaRPr lang="en-US"/>
           </a:p>
@@ -583,7 +619,7 @@
           <a:p>
             <a:fld id="{F7021451-1387-4CA6-816F-3879F97B5CBC}" type="slidenum">
               <a:rPr lang="en-US"/>
-              <a:t>23</a:t>
+              <a:t>31</a:t>
             </a:fld>
             <a:endParaRPr lang="en-US"/>
           </a:p>
@@ -667,7 +703,7 @@
           <a:p>
             <a:fld id="{F7021451-1387-4CA6-816F-3879F97B5CBC}" type="slidenum">
               <a:rPr lang="en-US"/>
-              <a:t>24</a:t>
+              <a:t>32</a:t>
             </a:fld>
             <a:endParaRPr lang="en-US"/>
           </a:p>
@@ -751,7 +787,7 @@
           <a:p>
             <a:fld id="{F7021451-1387-4CA6-816F-3879F97B5CBC}" type="slidenum">
               <a:rPr lang="en-US"/>
-              <a:t>25</a:t>
+              <a:t>33</a:t>
             </a:fld>
             <a:endParaRPr lang="en-US"/>
           </a:p>
@@ -835,7 +871,7 @@
           <a:p>
             <a:fld id="{F7021451-1387-4CA6-816F-3879F97B5CBC}" type="slidenum">
               <a:rPr lang="en-US"/>
-              <a:t>26</a:t>
+              <a:t>34</a:t>
             </a:fld>
             <a:endParaRPr lang="en-US"/>
           </a:p>
@@ -919,7 +955,7 @@
           <a:p>
             <a:fld id="{F7021451-1387-4CA6-816F-3879F97B5CBC}" type="slidenum">
               <a:rPr lang="en-US"/>
-              <a:t>27</a:t>
+              <a:t>35</a:t>
             </a:fld>
             <a:endParaRPr lang="en-US"/>
           </a:p>
@@ -1003,7 +1039,7 @@
           <a:p>
             <a:fld id="{F7021451-1387-4CA6-816F-3879F97B5CBC}" type="slidenum">
               <a:rPr lang="en-US"/>
-              <a:t>28</a:t>
+              <a:t>36</a:t>
             </a:fld>
             <a:endParaRPr lang="en-US"/>
           </a:p>
@@ -1087,7 +1123,7 @@
           <a:p>
             <a:fld id="{F7021451-1387-4CA6-816F-3879F97B5CBC}" type="slidenum">
               <a:rPr lang="en-US"/>
-              <a:t>29</a:t>
+              <a:t>37</a:t>
             </a:fld>
             <a:endParaRPr lang="en-US"/>
           </a:p>
@@ -1171,7 +1207,7 @@
           <a:p>
             <a:fld id="{F7021451-1387-4CA6-816F-3879F97B5CBC}" type="slidenum">
               <a:rPr lang="en-US"/>
-              <a:t>30</a:t>
+              <a:t>38</a:t>
             </a:fld>
             <a:endParaRPr lang="en-US"/>
           </a:p>
@@ -1658,7 +1694,13 @@
   <p:cSld>
     <p:spTree>
       <p:nvGrpSpPr>
-        <p:cNvPr id="1" name=""/>
+        <p:cNvPr id="1" name="">
+          <a:extLst>
+            <a:ext uri="{FF2B5EF4-FFF2-40B4-BE49-F238E27FC236}">
+              <a16:creationId xmlns:a16="http://schemas.microsoft.com/office/drawing/2014/main" id="{AC5B9BBB-39F3-2B7C-DDBF-57DE83AC7EFB}"/>
+            </a:ext>
+          </a:extLst>
+        </p:cNvPr>
         <p:cNvGrpSpPr/>
         <p:nvPr/>
       </p:nvGrpSpPr>
@@ -1672,10 +1714,10 @@
       </p:grpSpPr>
       <p:sp>
         <p:nvSpPr>
-          <p:cNvPr id="2" name="TextBox 1">
+          <p:cNvPr id="3" name="TextBox 2">
             <a:extLst>
               <a:ext uri="{FF2B5EF4-FFF2-40B4-BE49-F238E27FC236}">
-                <a16:creationId xmlns:a16="http://schemas.microsoft.com/office/drawing/2014/main" id="{F4BD98FE-2ECA-29F0-CBC6-27CDFF0C634B}"/>
+                <a16:creationId xmlns:a16="http://schemas.microsoft.com/office/drawing/2014/main" id="{D1E849EF-6A37-0588-C735-BC228242980B}"/>
               </a:ext>
             </a:extLst>
           </p:cNvPr>
@@ -1684,18 +1726,13 @@
         </p:nvSpPr>
         <p:spPr>
           <a:xfrm>
-            <a:off x="169817" y="634526"/>
-            <a:ext cx="2468881" cy="461665"/>
-          </a:xfrm>
-          <a:prstGeom prst="rect">
-            <a:avLst/>
-          </a:prstGeom>
-          <a:noFill/>
-          <a:ln>
-            <a:solidFill>
-              <a:schemeClr val="accent1"/>
-            </a:solidFill>
-          </a:ln>
+            <a:off x="53340" y="114300"/>
+            <a:ext cx="8831580" cy="4832092"/>
+          </a:xfrm>
+          <a:prstGeom prst="rect">
+            <a:avLst/>
+          </a:prstGeom>
+          <a:noFill/>
         </p:spPr>
         <p:txBody>
           <a:bodyPr wrap="square" rtlCol="0">
@@ -1703,472 +1740,231 @@
           </a:bodyPr>
           <a:lstStyle/>
           <a:p>
-            <a:pPr algn="ctr"/>
-            <a:r>
-              <a:rPr lang="en-US" sz="1200">
+            <a:r>
+              <a:rPr lang="en-US" sz="1400" b="1">
                 <a:latin typeface="Times New Roman" panose="02020603050405020304" pitchFamily="18" charset="0"/>
                 <a:cs typeface="Times New Roman" panose="02020603050405020304" pitchFamily="18" charset="0"/>
               </a:rPr>
-              <a:t>Semantics</a:t>
-            </a:r>
-          </a:p>
-          <a:p>
-            <a:pPr algn="ctr"/>
-            <a:r>
-              <a:rPr lang="en-US" sz="1200">
+              <a:t>Without Eventus:</a:t>
+            </a:r>
+          </a:p>
+          <a:p>
+            <a:endParaRPr lang="en-US" sz="1400">
+              <a:latin typeface="Times New Roman" panose="02020603050405020304" pitchFamily="18" charset="0"/>
+              <a:cs typeface="Times New Roman" panose="02020603050405020304" pitchFamily="18" charset="0"/>
+            </a:endParaRPr>
+          </a:p>
+          <a:p>
+            <a:r>
+              <a:rPr lang="en-US" sz="1400">
                 <a:latin typeface="Times New Roman" panose="02020603050405020304" pitchFamily="18" charset="0"/>
                 <a:cs typeface="Times New Roman" panose="02020603050405020304" pitchFamily="18" charset="0"/>
               </a:rPr>
-              <a:t>"I know what columns mean"</a:t>
-            </a:r>
-          </a:p>
-        </p:txBody>
-      </p:sp>
-      <p:sp>
-        <p:nvSpPr>
-          <p:cNvPr id="4" name="TextBox 3">
-            <a:extLst>
-              <a:ext uri="{FF2B5EF4-FFF2-40B4-BE49-F238E27FC236}">
-                <a16:creationId xmlns:a16="http://schemas.microsoft.com/office/drawing/2014/main" id="{60D0BECE-032C-B05E-8016-6B42864B4776}"/>
-              </a:ext>
-            </a:extLst>
-          </p:cNvPr>
-          <p:cNvSpPr txBox="1"/>
-          <p:nvPr/>
-        </p:nvSpPr>
-        <p:spPr>
-          <a:xfrm>
-            <a:off x="169816" y="1329034"/>
-            <a:ext cx="2468881" cy="461665"/>
-          </a:xfrm>
-          <a:prstGeom prst="rect">
-            <a:avLst/>
-          </a:prstGeom>
-          <a:noFill/>
-          <a:ln>
-            <a:solidFill>
-              <a:schemeClr val="accent1"/>
-            </a:solidFill>
-          </a:ln>
-        </p:spPr>
-        <p:txBody>
-          <a:bodyPr wrap="square" rtlCol="0">
-            <a:spAutoFit/>
-          </a:bodyPr>
-          <a:lstStyle/>
-          <a:p>
-            <a:pPr algn="ctr"/>
-            <a:r>
-              <a:rPr lang="en-US" sz="1200">
+              <a:t>We asked Claude to write code to plot a duration histogram with the following choices:</a:t>
+            </a:r>
+          </a:p>
+          <a:p>
+            <a:pPr marL="285750" indent="-285750">
+              <a:buFont typeface="Arial" panose="020B0604020202020204" pitchFamily="34" charset="0"/>
+              <a:buChar char="•"/>
+            </a:pPr>
+            <a:r>
+              <a:rPr lang="en-US" sz="1400">
                 <a:latin typeface="Times New Roman" panose="02020603050405020304" pitchFamily="18" charset="0"/>
                 <a:cs typeface="Times New Roman" panose="02020603050405020304" pitchFamily="18" charset="0"/>
               </a:rPr>
-              <a:t>Data Objects</a:t>
-            </a:r>
-          </a:p>
-          <a:p>
-            <a:pPr algn="ctr"/>
-            <a:r>
-              <a:rPr lang="en-US" sz="1200">
+              <a:t>7-day bins from 0 to 180 days</a:t>
+            </a:r>
+          </a:p>
+          <a:p>
+            <a:pPr marL="285750" indent="-285750">
+              <a:buFont typeface="Arial" panose="020B0604020202020204" pitchFamily="34" charset="0"/>
+              <a:buChar char="•"/>
+            </a:pPr>
+            <a:r>
+              <a:rPr lang="en-US" sz="1400">
                 <a:latin typeface="Times New Roman" panose="02020603050405020304" pitchFamily="18" charset="0"/>
                 <a:cs typeface="Times New Roman" panose="02020603050405020304" pitchFamily="18" charset="0"/>
               </a:rPr>
-              <a:t>"I hold clean/validated data"</a:t>
-            </a:r>
-          </a:p>
-        </p:txBody>
-      </p:sp>
-      <p:sp>
-        <p:nvSpPr>
-          <p:cNvPr id="5" name="TextBox 4">
-            <a:extLst>
-              <a:ext uri="{FF2B5EF4-FFF2-40B4-BE49-F238E27FC236}">
-                <a16:creationId xmlns:a16="http://schemas.microsoft.com/office/drawing/2014/main" id="{AAD37947-6237-1437-B713-3D564F8E3ED7}"/>
-              </a:ext>
-            </a:extLst>
-          </p:cNvPr>
-          <p:cNvSpPr txBox="1"/>
-          <p:nvPr/>
-        </p:nvSpPr>
-        <p:spPr>
-          <a:xfrm>
-            <a:off x="141515" y="2001237"/>
-            <a:ext cx="2468881" cy="461665"/>
-          </a:xfrm>
-          <a:prstGeom prst="rect">
-            <a:avLst/>
-          </a:prstGeom>
-          <a:noFill/>
-          <a:ln>
-            <a:solidFill>
-              <a:schemeClr val="accent1"/>
-            </a:solidFill>
-          </a:ln>
-        </p:spPr>
-        <p:txBody>
-          <a:bodyPr wrap="square" rtlCol="0">
-            <a:spAutoFit/>
-          </a:bodyPr>
-          <a:lstStyle/>
-          <a:p>
-            <a:pPr algn="ctr"/>
-            <a:r>
-              <a:rPr lang="en-US" sz="1200">
+              <a:t>Percentile lines at p25, p50, p75, p90</a:t>
+            </a:r>
+          </a:p>
+          <a:p>
+            <a:pPr marL="285750" indent="-285750">
+              <a:buFont typeface="Arial" panose="020B0604020202020204" pitchFamily="34" charset="0"/>
+              <a:buChar char="•"/>
+            </a:pPr>
+            <a:r>
+              <a:rPr lang="en-US" sz="1400">
                 <a:latin typeface="Times New Roman" panose="02020603050405020304" pitchFamily="18" charset="0"/>
                 <a:cs typeface="Times New Roman" panose="02020603050405020304" pitchFamily="18" charset="0"/>
               </a:rPr>
-              <a:t>Analyzers</a:t>
-            </a:r>
-          </a:p>
-          <a:p>
-            <a:pPr algn="ctr"/>
-            <a:r>
-              <a:rPr lang="en-US" sz="1200">
+              <a:t>Single color, white edges, 0.85 alpha</a:t>
+            </a:r>
+          </a:p>
+          <a:p>
+            <a:pPr marL="285750" indent="-285750">
+              <a:buFont typeface="Arial" panose="020B0604020202020204" pitchFamily="34" charset="0"/>
+              <a:buChar char="•"/>
+            </a:pPr>
+            <a:r>
+              <a:rPr lang="en-US" sz="1400">
                 <a:latin typeface="Times New Roman" panose="02020603050405020304" pitchFamily="18" charset="0"/>
                 <a:cs typeface="Times New Roman" panose="02020603050405020304" pitchFamily="18" charset="0"/>
               </a:rPr>
-              <a:t>"I compute shareable stuff"</a:t>
-            </a:r>
-          </a:p>
-        </p:txBody>
-      </p:sp>
-      <p:sp>
-        <p:nvSpPr>
-          <p:cNvPr id="6" name="TextBox 5">
-            <a:extLst>
-              <a:ext uri="{FF2B5EF4-FFF2-40B4-BE49-F238E27FC236}">
-                <a16:creationId xmlns:a16="http://schemas.microsoft.com/office/drawing/2014/main" id="{F2F159B6-AAD1-8C7B-FB9A-D5654E8FD269}"/>
-              </a:ext>
-            </a:extLst>
-          </p:cNvPr>
-          <p:cNvSpPr txBox="1"/>
-          <p:nvPr/>
-        </p:nvSpPr>
-        <p:spPr>
-          <a:xfrm>
-            <a:off x="169814" y="2676460"/>
-            <a:ext cx="2468881" cy="461665"/>
-          </a:xfrm>
-          <a:prstGeom prst="rect">
-            <a:avLst/>
-          </a:prstGeom>
-          <a:noFill/>
-          <a:ln>
-            <a:solidFill>
-              <a:schemeClr val="accent1"/>
-            </a:solidFill>
-          </a:ln>
-        </p:spPr>
-        <p:txBody>
-          <a:bodyPr wrap="square" rtlCol="0">
-            <a:spAutoFit/>
-          </a:bodyPr>
-          <a:lstStyle/>
-          <a:p>
-            <a:pPr algn="ctr"/>
-            <a:r>
-              <a:rPr lang="en-US" sz="1200">
+              <a:t>Save to PNG at 150 dpi</a:t>
+            </a:r>
+          </a:p>
+          <a:p>
+            <a:endParaRPr lang="en-US" sz="1400">
+              <a:latin typeface="Times New Roman" panose="02020603050405020304" pitchFamily="18" charset="0"/>
+              <a:cs typeface="Times New Roman" panose="02020603050405020304" pitchFamily="18" charset="0"/>
+            </a:endParaRPr>
+          </a:p>
+          <a:p>
+            <a:r>
+              <a:rPr lang="en-US" sz="1400" b="1">
                 <a:latin typeface="Times New Roman" panose="02020603050405020304" pitchFamily="18" charset="0"/>
                 <a:cs typeface="Times New Roman" panose="02020603050405020304" pitchFamily="18" charset="0"/>
               </a:rPr>
-              <a:t>Intermediates</a:t>
-            </a:r>
-          </a:p>
-          <a:p>
-            <a:pPr algn="ctr"/>
-            <a:r>
-              <a:rPr lang="en-US" sz="1200">
+              <a:t>Unstratified: 34 lines, 25 lines of actual code</a:t>
+            </a:r>
+          </a:p>
+          <a:p>
+            <a:endParaRPr lang="en-US" sz="1400">
+              <a:latin typeface="Times New Roman" panose="02020603050405020304" pitchFamily="18" charset="0"/>
+              <a:cs typeface="Times New Roman" panose="02020603050405020304" pitchFamily="18" charset="0"/>
+            </a:endParaRPr>
+          </a:p>
+          <a:p>
+            <a:r>
+              <a:rPr lang="en-US" sz="1400">
                 <a:latin typeface="Times New Roman" panose="02020603050405020304" pitchFamily="18" charset="0"/>
                 <a:cs typeface="Times New Roman" panose="02020603050405020304" pitchFamily="18" charset="0"/>
               </a:rPr>
-              <a:t>"Pipe-delimited columnar contract"</a:t>
-            </a:r>
-          </a:p>
-        </p:txBody>
-      </p:sp>
-      <p:sp>
-        <p:nvSpPr>
-          <p:cNvPr id="7" name="TextBox 6">
-            <a:extLst>
-              <a:ext uri="{FF2B5EF4-FFF2-40B4-BE49-F238E27FC236}">
-                <a16:creationId xmlns:a16="http://schemas.microsoft.com/office/drawing/2014/main" id="{0798FD70-B53D-EFA2-F0F4-CE70E0B3D67C}"/>
-              </a:ext>
-            </a:extLst>
-          </p:cNvPr>
-          <p:cNvSpPr txBox="1"/>
-          <p:nvPr/>
-        </p:nvSpPr>
-        <p:spPr>
-          <a:xfrm>
-            <a:off x="169817" y="3517334"/>
-            <a:ext cx="2468881" cy="461665"/>
-          </a:xfrm>
-          <a:prstGeom prst="rect">
-            <a:avLst/>
-          </a:prstGeom>
-          <a:noFill/>
-          <a:ln>
-            <a:solidFill>
-              <a:schemeClr val="accent1"/>
-            </a:solidFill>
-          </a:ln>
-        </p:spPr>
-        <p:txBody>
-          <a:bodyPr wrap="square" rtlCol="0">
-            <a:spAutoFit/>
-          </a:bodyPr>
-          <a:lstStyle/>
-          <a:p>
-            <a:pPr algn="ctr"/>
-            <a:r>
-              <a:rPr lang="en-US" sz="1200">
+              <a:t>We then asked Claude to add stratification by hospital</a:t>
+            </a:r>
+          </a:p>
+          <a:p>
+            <a:endParaRPr lang="en-US" sz="1400" b="1">
+              <a:latin typeface="Times New Roman" panose="02020603050405020304" pitchFamily="18" charset="0"/>
+              <a:cs typeface="Times New Roman" panose="02020603050405020304" pitchFamily="18" charset="0"/>
+            </a:endParaRPr>
+          </a:p>
+          <a:p>
+            <a:r>
+              <a:rPr lang="en-US" sz="1400" b="1">
                 <a:latin typeface="Times New Roman" panose="02020603050405020304" pitchFamily="18" charset="0"/>
                 <a:cs typeface="Times New Roman" panose="02020603050405020304" pitchFamily="18" charset="0"/>
               </a:rPr>
-              <a:t>Visualizers</a:t>
-            </a:r>
-          </a:p>
-          <a:p>
-            <a:pPr algn="ctr"/>
-            <a:r>
-              <a:rPr lang="en-US" sz="1200">
+              <a:t>Stratified: 53 lines, 41 lines of actual code</a:t>
+            </a:r>
+          </a:p>
+          <a:p>
+            <a:endParaRPr lang="en-US" sz="1400">
+              <a:latin typeface="Times New Roman" panose="02020603050405020304" pitchFamily="18" charset="0"/>
+              <a:cs typeface="Times New Roman" panose="02020603050405020304" pitchFamily="18" charset="0"/>
+            </a:endParaRPr>
+          </a:p>
+          <a:p>
+            <a:r>
+              <a:rPr lang="en-US" sz="1400">
                 <a:latin typeface="Times New Roman" panose="02020603050405020304" pitchFamily="18" charset="0"/>
                 <a:cs typeface="Times New Roman" panose="02020603050405020304" pitchFamily="18" charset="0"/>
               </a:rPr>
-              <a:t>"I draw pictures"</a:t>
-            </a:r>
-          </a:p>
-        </p:txBody>
-      </p:sp>
-      <p:sp>
-        <p:nvSpPr>
-          <p:cNvPr id="8" name="TextBox 7">
-            <a:extLst>
-              <a:ext uri="{FF2B5EF4-FFF2-40B4-BE49-F238E27FC236}">
-                <a16:creationId xmlns:a16="http://schemas.microsoft.com/office/drawing/2014/main" id="{5D17D607-8AB3-D7CA-2898-CC19C4FAC22D}"/>
-              </a:ext>
-            </a:extLst>
-          </p:cNvPr>
-          <p:cNvSpPr txBox="1"/>
-          <p:nvPr/>
-        </p:nvSpPr>
-        <p:spPr>
-          <a:xfrm>
-            <a:off x="2984862" y="726858"/>
-            <a:ext cx="2847703" cy="461665"/>
-          </a:xfrm>
-          <a:prstGeom prst="rect">
-            <a:avLst/>
-          </a:prstGeom>
-          <a:noFill/>
-        </p:spPr>
-        <p:txBody>
-          <a:bodyPr wrap="square" rtlCol="0">
-            <a:spAutoFit/>
-          </a:bodyPr>
-          <a:lstStyle/>
-          <a:p>
-            <a:r>
-              <a:rPr lang="en-US" sz="1200">
-                <a:latin typeface="Consolas" panose="020B0609020204030204" pitchFamily="49" charset="0"/>
-                <a:cs typeface="Vrinda" panose="020B0502040204020203" pitchFamily="34" charset="0"/>
-              </a:rPr>
-              <a:t>EventSemantics, OccurrenceSemantics</a:t>
-            </a:r>
-          </a:p>
-        </p:txBody>
-      </p:sp>
-      <p:sp>
-        <p:nvSpPr>
-          <p:cNvPr id="9" name="TextBox 8">
-            <a:extLst>
-              <a:ext uri="{FF2B5EF4-FFF2-40B4-BE49-F238E27FC236}">
-                <a16:creationId xmlns:a16="http://schemas.microsoft.com/office/drawing/2014/main" id="{0FC39483-E1D0-FA0F-7227-A0A4E5CD4E10}"/>
-              </a:ext>
-            </a:extLst>
-          </p:cNvPr>
-          <p:cNvSpPr txBox="1"/>
-          <p:nvPr/>
-        </p:nvSpPr>
-        <p:spPr>
-          <a:xfrm>
-            <a:off x="2984862" y="1421366"/>
-            <a:ext cx="5225144" cy="461665"/>
-          </a:xfrm>
-          <a:prstGeom prst="rect">
-            <a:avLst/>
-          </a:prstGeom>
-          <a:noFill/>
-        </p:spPr>
-        <p:txBody>
-          <a:bodyPr wrap="square" rtlCol="0">
-            <a:spAutoFit/>
-          </a:bodyPr>
-          <a:lstStyle/>
-          <a:p>
-            <a:r>
-              <a:rPr lang="en-US" sz="1200">
-                <a:latin typeface="Consolas" panose="020B0609020204030204" pitchFamily="49" charset="0"/>
-                <a:cs typeface="Vrinda" panose="020B0502040204020203" pitchFamily="34" charset="0"/>
-              </a:rPr>
-              <a:t>Events, EventsPerEntity, Spans, Occurrences, OccurrencesPerEntity</a:t>
-            </a:r>
-          </a:p>
-        </p:txBody>
-      </p:sp>
-      <p:sp>
-        <p:nvSpPr>
-          <p:cNvPr id="10" name="TextBox 9">
-            <a:extLst>
-              <a:ext uri="{FF2B5EF4-FFF2-40B4-BE49-F238E27FC236}">
-                <a16:creationId xmlns:a16="http://schemas.microsoft.com/office/drawing/2014/main" id="{5AD248FF-441C-8730-A19A-C6709E01C765}"/>
-              </a:ext>
-            </a:extLst>
-          </p:cNvPr>
-          <p:cNvSpPr txBox="1"/>
-          <p:nvPr/>
-        </p:nvSpPr>
-        <p:spPr>
-          <a:xfrm>
-            <a:off x="2984862" y="2001237"/>
-            <a:ext cx="5989323" cy="461665"/>
-          </a:xfrm>
-          <a:prstGeom prst="rect">
-            <a:avLst/>
-          </a:prstGeom>
-          <a:noFill/>
-        </p:spPr>
-        <p:txBody>
-          <a:bodyPr wrap="square" rtlCol="0">
-            <a:spAutoFit/>
-          </a:bodyPr>
-          <a:lstStyle/>
-          <a:p>
-            <a:r>
-              <a:rPr lang="en-US" sz="1200">
-                <a:latin typeface="Consolas" panose="020B0609020204030204" pitchFamily="49" charset="0"/>
-                <a:cs typeface="Vrinda" panose="020B0502040204020203" pitchFamily="34" charset="0"/>
-              </a:rPr>
-              <a:t>EventsWithinSpanAnalyzer, OccurrencesWithinSpanAnalyzer, ***OccurrencesWithinEventsAnalyzer</a:t>
-            </a:r>
-          </a:p>
-        </p:txBody>
-      </p:sp>
-      <p:sp>
-        <p:nvSpPr>
-          <p:cNvPr id="11" name="TextBox 10">
-            <a:extLst>
-              <a:ext uri="{FF2B5EF4-FFF2-40B4-BE49-F238E27FC236}">
-                <a16:creationId xmlns:a16="http://schemas.microsoft.com/office/drawing/2014/main" id="{E9E67F2D-B886-0FA2-5EAB-6CE2D88D6F8A}"/>
-              </a:ext>
-            </a:extLst>
-          </p:cNvPr>
-          <p:cNvSpPr txBox="1"/>
-          <p:nvPr/>
-        </p:nvSpPr>
-        <p:spPr>
-          <a:xfrm>
-            <a:off x="2984861" y="2692503"/>
-            <a:ext cx="5989323" cy="461665"/>
-          </a:xfrm>
-          <a:prstGeom prst="rect">
-            <a:avLst/>
-          </a:prstGeom>
-          <a:noFill/>
-        </p:spPr>
-        <p:txBody>
-          <a:bodyPr wrap="square" rtlCol="0">
-            <a:spAutoFit/>
-          </a:bodyPr>
-          <a:lstStyle/>
-          <a:p>
-            <a:r>
-              <a:rPr lang="en-US" sz="1200">
-                <a:latin typeface="Consolas" panose="020B0609020204030204" pitchFamily="49" charset="0"/>
-                <a:cs typeface="Vrinda" panose="020B0502040204020203" pitchFamily="34" charset="0"/>
-              </a:rPr>
-              <a:t>PipeDelimitedIntermediate, PipeDelimitedIntermediateEvents, PipeDelimitedIntermediateOccurrences, ***EventsOccurrences</a:t>
-            </a:r>
-          </a:p>
-        </p:txBody>
-      </p:sp>
-      <p:sp>
-        <p:nvSpPr>
-          <p:cNvPr id="12" name="TextBox 11">
-            <a:extLst>
-              <a:ext uri="{FF2B5EF4-FFF2-40B4-BE49-F238E27FC236}">
-                <a16:creationId xmlns:a16="http://schemas.microsoft.com/office/drawing/2014/main" id="{5EF75954-011D-DEB2-35B2-808EF5106C86}"/>
-              </a:ext>
-            </a:extLst>
-          </p:cNvPr>
-          <p:cNvSpPr txBox="1"/>
-          <p:nvPr/>
-        </p:nvSpPr>
-        <p:spPr>
-          <a:xfrm>
-            <a:off x="2984862" y="3562209"/>
-            <a:ext cx="5989323" cy="461665"/>
-          </a:xfrm>
-          <a:prstGeom prst="rect">
-            <a:avLst/>
-          </a:prstGeom>
-          <a:noFill/>
-        </p:spPr>
-        <p:txBody>
-          <a:bodyPr wrap="square" rtlCol="0">
-            <a:spAutoFit/>
-          </a:bodyPr>
-          <a:lstStyle/>
-          <a:p>
-            <a:r>
-              <a:rPr lang="en-US" sz="1200">
-                <a:latin typeface="Consolas" panose="020B0609020204030204" pitchFamily="49" charset="0"/>
-                <a:cs typeface="Vrinda" panose="020B0502040204020203" pitchFamily="34" charset="0"/>
-              </a:rPr>
-              <a:t>StackedBarsPlotter(change name), ActivityOverTimePlotter, EventWithinSpanAnalysisHistogramPlotter</a:t>
-            </a:r>
-          </a:p>
-        </p:txBody>
-      </p:sp>
-      <p:sp>
-        <p:nvSpPr>
-          <p:cNvPr id="13" name="TextBox 12">
-            <a:extLst>
-              <a:ext uri="{FF2B5EF4-FFF2-40B4-BE49-F238E27FC236}">
-                <a16:creationId xmlns:a16="http://schemas.microsoft.com/office/drawing/2014/main" id="{9DE8C2BE-F953-734F-60AF-10A9420782FC}"/>
-              </a:ext>
-            </a:extLst>
-          </p:cNvPr>
-          <p:cNvSpPr txBox="1"/>
-          <p:nvPr/>
-        </p:nvSpPr>
-        <p:spPr>
-          <a:xfrm>
-            <a:off x="6936377" y="102716"/>
-            <a:ext cx="2207623" cy="646331"/>
-          </a:xfrm>
-          <a:prstGeom prst="rect">
-            <a:avLst/>
-          </a:prstGeom>
-          <a:noFill/>
-        </p:spPr>
-        <p:txBody>
-          <a:bodyPr wrap="square" rtlCol="0">
-            <a:spAutoFit/>
-          </a:bodyPr>
-          <a:lstStyle/>
-          <a:p>
-            <a:r>
-              <a:rPr lang="en-US"/>
-              <a:t>Five Main Abstractions</a:t>
-            </a:r>
+              <a:t>What you don't get:</a:t>
+            </a:r>
+          </a:p>
+          <a:p>
+            <a:pPr marL="285750" indent="-285750">
+              <a:buFont typeface="Arial" panose="020B0604020202020204" pitchFamily="34" charset="0"/>
+              <a:buChar char="•"/>
+            </a:pPr>
+            <a:r>
+              <a:rPr lang="en-US" sz="1400">
+                <a:latin typeface="Times New Roman" panose="02020603050405020304" pitchFamily="18" charset="0"/>
+                <a:cs typeface="Times New Roman" panose="02020603050405020304" pitchFamily="18" charset="0"/>
+              </a:rPr>
+              <a:t>Bin width, max, and start are three silent choices buried in bins=range(0, 181, 7) on one line</a:t>
+            </a:r>
+          </a:p>
+          <a:p>
+            <a:pPr marL="285750" indent="-285750">
+              <a:buFont typeface="Arial" panose="020B0604020202020204" pitchFamily="34" charset="0"/>
+              <a:buChar char="•"/>
+            </a:pPr>
+            <a:r>
+              <a:rPr lang="en-US" sz="1400">
+                <a:latin typeface="Times New Roman" panose="02020603050405020304" pitchFamily="18" charset="0"/>
+                <a:cs typeface="Times New Roman" panose="02020603050405020304" pitchFamily="18" charset="0"/>
+              </a:rPr>
+              <a:t>Percentile choices appear in two different places in the stratified script</a:t>
+            </a:r>
+          </a:p>
+          <a:p>
+            <a:pPr marL="285750" indent="-285750">
+              <a:buFont typeface="Arial" panose="020B0604020202020204" pitchFamily="34" charset="0"/>
+              <a:buChar char="•"/>
+            </a:pPr>
+            <a:r>
+              <a:rPr lang="en-US" sz="1400">
+                <a:latin typeface="Times New Roman" panose="02020603050405020304" pitchFamily="18" charset="0"/>
+                <a:cs typeface="Times New Roman" panose="02020603050405020304" pitchFamily="18" charset="0"/>
+              </a:rPr>
+              <a:t>Color list breaks silently if you have more strata than hardcoded colors</a:t>
+            </a:r>
+          </a:p>
+          <a:p>
+            <a:pPr marL="285750" indent="-285750">
+              <a:buFont typeface="Arial" panose="020B0604020202020204" pitchFamily="34" charset="0"/>
+              <a:buChar char="•"/>
+            </a:pPr>
+            <a:r>
+              <a:rPr lang="en-US" sz="1400">
+                <a:latin typeface="Times New Roman" panose="02020603050405020304" pitchFamily="18" charset="0"/>
+                <a:cs typeface="Times New Roman" panose="02020603050405020304" pitchFamily="18" charset="0"/>
+              </a:rPr>
+              <a:t>No shared configuration between the two scripts — changing bin width requires editing both</a:t>
+            </a:r>
+          </a:p>
+          <a:p>
+            <a:pPr marL="285750" indent="-285750">
+              <a:buFont typeface="Arial" panose="020B0604020202020204" pitchFamily="34" charset="0"/>
+              <a:buChar char="•"/>
+            </a:pPr>
+            <a:r>
+              <a:rPr lang="en-US" sz="1400">
+                <a:latin typeface="Times New Roman" panose="02020603050405020304" pitchFamily="18" charset="0"/>
+                <a:cs typeface="Times New Roman" panose="02020603050405020304" pitchFamily="18" charset="0"/>
+              </a:rPr>
+              <a:t>No validation — negative or null durations are silently plotted</a:t>
+            </a:r>
+          </a:p>
+          <a:p>
+            <a:pPr marL="285750" indent="-285750">
+              <a:buFont typeface="Arial" panose="020B0604020202020204" pitchFamily="34" charset="0"/>
+              <a:buChar char="•"/>
+            </a:pPr>
+            <a:r>
+              <a:rPr lang="en-US" sz="1400">
+                <a:latin typeface="Times New Roman" panose="02020603050405020304" pitchFamily="18" charset="0"/>
+                <a:cs typeface="Times New Roman" panose="02020603050405020304" pitchFamily="18" charset="0"/>
+              </a:rPr>
+              <a:t>Rerun next month on updated data: are you using the same bins? Only if nobody touched the script</a:t>
+            </a:r>
+          </a:p>
+          <a:p>
+            <a:endParaRPr lang="en-US" sz="1400">
+              <a:latin typeface="Times New Roman" panose="02020603050405020304" pitchFamily="18" charset="0"/>
+              <a:cs typeface="Times New Roman" panose="02020603050405020304" pitchFamily="18" charset="0"/>
+            </a:endParaRPr>
           </a:p>
         </p:txBody>
       </p:sp>
     </p:spTree>
     <p:extLst>
       <p:ext uri="{BB962C8B-B14F-4D97-AF65-F5344CB8AC3E}">
-        <p14:creationId xmlns:p14="http://schemas.microsoft.com/office/powerpoint/2010/main" val="4279311133"/>
+        <p14:creationId xmlns:p14="http://schemas.microsoft.com/office/powerpoint/2010/main" val="779076695"/>
       </p:ext>
     </p:extLst>
   </p:cSld>
@@ -2183,10 +1979,743 @@
   <p:cSld>
     <p:spTree>
       <p:nvGrpSpPr>
+        <p:cNvPr id="1" name=""/>
+        <p:cNvGrpSpPr/>
+        <p:nvPr/>
+      </p:nvGrpSpPr>
+      <p:grpSpPr>
+        <a:xfrm>
+          <a:off x="0" y="0"/>
+          <a:ext cx="0" cy="0"/>
+          <a:chOff x="0" y="0"/>
+          <a:chExt cx="0" cy="0"/>
+        </a:xfrm>
+      </p:grpSpPr>
+      <p:pic>
+        <p:nvPicPr>
+          <p:cNvPr id="2" name="Picture 1">
+            <a:extLst>
+              <a:ext uri="{FF2B5EF4-FFF2-40B4-BE49-F238E27FC236}">
+                <a16:creationId xmlns:a16="http://schemas.microsoft.com/office/drawing/2014/main" id="{92E92C63-DF6B-CFFE-E3C1-0B68805040BD}"/>
+              </a:ext>
+            </a:extLst>
+          </p:cNvPr>
+          <p:cNvPicPr>
+            <a:picLocks noChangeAspect="1"/>
+          </p:cNvPicPr>
+          <p:nvPr/>
+        </p:nvPicPr>
+        <p:blipFill>
+          <a:blip r:embed="rId2"/>
+          <a:stretch>
+            <a:fillRect/>
+          </a:stretch>
+        </p:blipFill>
+        <p:spPr>
+          <a:xfrm>
+            <a:off x="31569" y="782955"/>
+            <a:ext cx="2668453" cy="3420836"/>
+          </a:xfrm>
+          <a:prstGeom prst="rect">
+            <a:avLst/>
+          </a:prstGeom>
+        </p:spPr>
+      </p:pic>
+      <p:pic>
+        <p:nvPicPr>
+          <p:cNvPr id="3" name="Picture 2">
+            <a:extLst>
+              <a:ext uri="{FF2B5EF4-FFF2-40B4-BE49-F238E27FC236}">
+                <a16:creationId xmlns:a16="http://schemas.microsoft.com/office/drawing/2014/main" id="{C1961B7E-1433-9E45-3FC9-64653761B194}"/>
+              </a:ext>
+            </a:extLst>
+          </p:cNvPr>
+          <p:cNvPicPr>
+            <a:picLocks noChangeAspect="1"/>
+          </p:cNvPicPr>
+          <p:nvPr/>
+        </p:nvPicPr>
+        <p:blipFill>
+          <a:blip r:embed="rId3"/>
+          <a:stretch>
+            <a:fillRect/>
+          </a:stretch>
+        </p:blipFill>
+        <p:spPr>
+          <a:xfrm>
+            <a:off x="2776332" y="782955"/>
+            <a:ext cx="6216970" cy="1219263"/>
+          </a:xfrm>
+          <a:prstGeom prst="rect">
+            <a:avLst/>
+          </a:prstGeom>
+        </p:spPr>
+      </p:pic>
+      <p:sp>
+        <p:nvSpPr>
+          <p:cNvPr id="5" name="TextBox 4">
+            <a:extLst>
+              <a:ext uri="{FF2B5EF4-FFF2-40B4-BE49-F238E27FC236}">
+                <a16:creationId xmlns:a16="http://schemas.microsoft.com/office/drawing/2014/main" id="{7E3D2E04-CD69-9F86-A946-3E65B340BB7E}"/>
+              </a:ext>
+            </a:extLst>
+          </p:cNvPr>
+          <p:cNvSpPr txBox="1"/>
+          <p:nvPr/>
+        </p:nvSpPr>
+        <p:spPr>
+          <a:xfrm>
+            <a:off x="175260" y="108704"/>
+            <a:ext cx="4572000" cy="369332"/>
+          </a:xfrm>
+          <a:prstGeom prst="rect">
+            <a:avLst/>
+          </a:prstGeom>
+          <a:noFill/>
+        </p:spPr>
+        <p:txBody>
+          <a:bodyPr wrap="square">
+            <a:spAutoFit/>
+          </a:bodyPr>
+          <a:lstStyle/>
+          <a:p>
+            <a:r>
+              <a:rPr lang="en-US" sz="1800" b="1">
+                <a:latin typeface="Times New Roman" panose="02020603050405020304" pitchFamily="18" charset="0"/>
+                <a:cs typeface="Times New Roman" panose="02020603050405020304" pitchFamily="18" charset="0"/>
+              </a:rPr>
+              <a:t>With Eventus</a:t>
+            </a:r>
+          </a:p>
+        </p:txBody>
+      </p:sp>
+      <p:sp>
+        <p:nvSpPr>
+          <p:cNvPr id="4" name="TextBox 3">
+            <a:extLst>
+              <a:ext uri="{FF2B5EF4-FFF2-40B4-BE49-F238E27FC236}">
+                <a16:creationId xmlns:a16="http://schemas.microsoft.com/office/drawing/2014/main" id="{3EC848BD-2938-A382-3D40-168444B12EDE}"/>
+              </a:ext>
+            </a:extLst>
+          </p:cNvPr>
+          <p:cNvSpPr txBox="1"/>
+          <p:nvPr/>
+        </p:nvSpPr>
+        <p:spPr>
+          <a:xfrm>
+            <a:off x="3016431" y="2818117"/>
+            <a:ext cx="4610100" cy="1015663"/>
+          </a:xfrm>
+          <a:prstGeom prst="rect">
+            <a:avLst/>
+          </a:prstGeom>
+          <a:noFill/>
+        </p:spPr>
+        <p:txBody>
+          <a:bodyPr wrap="square">
+            <a:spAutoFit/>
+          </a:bodyPr>
+          <a:lstStyle/>
+          <a:p>
+            <a:r>
+              <a:rPr lang="en-US" sz="1200"/>
+              <a:t>30 lines in the configuration</a:t>
+            </a:r>
+          </a:p>
+          <a:p>
+            <a:r>
+              <a:rPr lang="en-US" sz="1200"/>
+              <a:t>8 lines in the code</a:t>
+            </a:r>
+          </a:p>
+          <a:p>
+            <a:endParaRPr lang="en-US" sz="1200"/>
+          </a:p>
+          <a:p>
+            <a:r>
+              <a:rPr lang="en-US" sz="1200"/>
+              <a:t>Now available compared to previous script</a:t>
+            </a:r>
+          </a:p>
+          <a:p>
+            <a:r>
+              <a:rPr lang="en-US" sz="1200"/>
+              <a:t>Ability to change colors of percentile lines, title, etc...</a:t>
+            </a:r>
+          </a:p>
+        </p:txBody>
+      </p:sp>
+    </p:spTree>
+    <p:extLst>
+      <p:ext uri="{BB962C8B-B14F-4D97-AF65-F5344CB8AC3E}">
+        <p14:creationId xmlns:p14="http://schemas.microsoft.com/office/powerpoint/2010/main" val="3568894722"/>
+      </p:ext>
+    </p:extLst>
+  </p:cSld>
+  <p:clrMapOvr>
+    <a:masterClrMapping/>
+  </p:clrMapOvr>
+</p:sld>
+</file>
+
+<file path=ppt/slides/slide12.xml><?xml version="1.0" encoding="utf-8"?>
+<p:sld xmlns:a="http://schemas.openxmlformats.org/drawingml/2006/main" xmlns:r="http://schemas.openxmlformats.org/officeDocument/2006/relationships" xmlns:p="http://schemas.openxmlformats.org/presentationml/2006/main">
+  <p:cSld>
+    <p:spTree>
+      <p:nvGrpSpPr>
+        <p:cNvPr id="1" name=""/>
+        <p:cNvGrpSpPr/>
+        <p:nvPr/>
+      </p:nvGrpSpPr>
+      <p:grpSpPr>
+        <a:xfrm>
+          <a:off x="0" y="0"/>
+          <a:ext cx="0" cy="0"/>
+          <a:chOff x="0" y="0"/>
+          <a:chExt cx="0" cy="0"/>
+        </a:xfrm>
+      </p:grpSpPr>
+      <p:pic>
+        <p:nvPicPr>
+          <p:cNvPr id="3" name="Picture 2">
+            <a:extLst>
+              <a:ext uri="{FF2B5EF4-FFF2-40B4-BE49-F238E27FC236}">
+                <a16:creationId xmlns:a16="http://schemas.microsoft.com/office/drawing/2014/main" id="{3E58DD6D-A032-EA4B-5E42-8B0BE9C55D90}"/>
+              </a:ext>
+            </a:extLst>
+          </p:cNvPr>
+          <p:cNvPicPr>
+            <a:picLocks noChangeAspect="1"/>
+          </p:cNvPicPr>
+          <p:nvPr/>
+        </p:nvPicPr>
+        <p:blipFill>
+          <a:blip r:embed="rId2"/>
+          <a:stretch>
+            <a:fillRect/>
+          </a:stretch>
+        </p:blipFill>
+        <p:spPr>
+          <a:xfrm>
+            <a:off x="479844" y="293370"/>
+            <a:ext cx="1661667" cy="2766037"/>
+          </a:xfrm>
+          <a:prstGeom prst="rect">
+            <a:avLst/>
+          </a:prstGeom>
+        </p:spPr>
+      </p:pic>
+      <p:cxnSp>
+        <p:nvCxnSpPr>
+          <p:cNvPr id="6" name="Straight Arrow Connector 5">
+            <a:extLst>
+              <a:ext uri="{FF2B5EF4-FFF2-40B4-BE49-F238E27FC236}">
+                <a16:creationId xmlns:a16="http://schemas.microsoft.com/office/drawing/2014/main" id="{8CACE841-F5C2-5EE8-AA77-6D6D9288E326}"/>
+              </a:ext>
+            </a:extLst>
+          </p:cNvPr>
+          <p:cNvCxnSpPr/>
+          <p:nvPr/>
+        </p:nvCxnSpPr>
+        <p:spPr>
+          <a:xfrm>
+            <a:off x="3202577" y="1096023"/>
+            <a:ext cx="1690372" cy="0"/>
+          </a:xfrm>
+          <a:prstGeom prst="straightConnector1">
+            <a:avLst/>
+          </a:prstGeom>
+          <a:ln>
+            <a:tailEnd type="triangle"/>
+          </a:ln>
+        </p:spPr>
+        <p:style>
+          <a:lnRef idx="1">
+            <a:schemeClr val="accent1"/>
+          </a:lnRef>
+          <a:fillRef idx="0">
+            <a:schemeClr val="accent1"/>
+          </a:fillRef>
+          <a:effectRef idx="0">
+            <a:schemeClr val="accent1"/>
+          </a:effectRef>
+          <a:fontRef idx="minor">
+            <a:schemeClr val="tx1"/>
+          </a:fontRef>
+        </p:style>
+      </p:cxnSp>
+      <p:sp>
+        <p:nvSpPr>
+          <p:cNvPr id="7" name="TextBox 6">
+            <a:extLst>
+              <a:ext uri="{FF2B5EF4-FFF2-40B4-BE49-F238E27FC236}">
+                <a16:creationId xmlns:a16="http://schemas.microsoft.com/office/drawing/2014/main" id="{ADA85780-509D-8B9B-6FEB-966E2605AE9F}"/>
+              </a:ext>
+            </a:extLst>
+          </p:cNvPr>
+          <p:cNvSpPr txBox="1"/>
+          <p:nvPr/>
+        </p:nvSpPr>
+        <p:spPr>
+          <a:xfrm>
+            <a:off x="5353414" y="957523"/>
+            <a:ext cx="3307081" cy="276999"/>
+          </a:xfrm>
+          <a:prstGeom prst="rect">
+            <a:avLst/>
+          </a:prstGeom>
+          <a:ln w="38100">
+            <a:solidFill>
+              <a:schemeClr val="tx1"/>
+            </a:solidFill>
+          </a:ln>
+          <a:effectLst>
+            <a:glow rad="139700">
+              <a:schemeClr val="accent2">
+                <a:satMod val="175000"/>
+                <a:alpha val="40000"/>
+              </a:schemeClr>
+            </a:glow>
+          </a:effectLst>
+        </p:spPr>
+        <p:style>
+          <a:lnRef idx="2">
+            <a:schemeClr val="accent1"/>
+          </a:lnRef>
+          <a:fillRef idx="1">
+            <a:schemeClr val="lt1"/>
+          </a:fillRef>
+          <a:effectRef idx="0">
+            <a:schemeClr val="accent1"/>
+          </a:effectRef>
+          <a:fontRef idx="minor">
+            <a:schemeClr val="dk1"/>
+          </a:fontRef>
+        </p:style>
+        <p:txBody>
+          <a:bodyPr wrap="square" rtlCol="0">
+            <a:spAutoFit/>
+          </a:bodyPr>
+          <a:lstStyle/>
+          <a:p>
+            <a:pPr algn="ctr"/>
+            <a:r>
+              <a:rPr lang="en-US" sz="1200" b="1">
+                <a:latin typeface="Consolas" panose="020B0609020204030204" pitchFamily="49" charset="0"/>
+                <a:cs typeface="Times New Roman" panose="02020603050405020304" pitchFamily="18" charset="0"/>
+              </a:rPr>
+              <a:t>HistogramConfig</a:t>
+            </a:r>
+          </a:p>
+        </p:txBody>
+      </p:sp>
+      <p:sp>
+        <p:nvSpPr>
+          <p:cNvPr id="8" name="TextBox 7">
+            <a:extLst>
+              <a:ext uri="{FF2B5EF4-FFF2-40B4-BE49-F238E27FC236}">
+                <a16:creationId xmlns:a16="http://schemas.microsoft.com/office/drawing/2014/main" id="{BD93D951-A208-A2A4-1EEB-5FF7E2791949}"/>
+              </a:ext>
+            </a:extLst>
+          </p:cNvPr>
+          <p:cNvSpPr txBox="1"/>
+          <p:nvPr/>
+        </p:nvSpPr>
+        <p:spPr>
+          <a:xfrm>
+            <a:off x="6537960" y="3908978"/>
+            <a:ext cx="2468881" cy="276999"/>
+          </a:xfrm>
+          <a:prstGeom prst="rect">
+            <a:avLst/>
+          </a:prstGeom>
+          <a:noFill/>
+          <a:ln>
+            <a:solidFill>
+              <a:srgbClr val="FFCCFF"/>
+            </a:solidFill>
+          </a:ln>
+          <a:effectLst>
+            <a:glow rad="101600">
+              <a:schemeClr val="accent1">
+                <a:satMod val="175000"/>
+                <a:alpha val="40000"/>
+              </a:schemeClr>
+            </a:glow>
+          </a:effectLst>
+          <a:scene3d>
+            <a:camera prst="orthographicFront"/>
+            <a:lightRig rig="threePt" dir="t"/>
+          </a:scene3d>
+          <a:sp3d>
+            <a:bevelT w="114300" prst="artDeco"/>
+          </a:sp3d>
+        </p:spPr>
+        <p:txBody>
+          <a:bodyPr wrap="square" rtlCol="0">
+            <a:spAutoFit/>
+          </a:bodyPr>
+          <a:lstStyle/>
+          <a:p>
+            <a:pPr algn="ctr"/>
+            <a:r>
+              <a:rPr lang="en-US" sz="1200" b="1">
+                <a:latin typeface="Consolas" panose="020B0609020204030204" pitchFamily="49" charset="0"/>
+                <a:cs typeface="Times New Roman" panose="02020603050405020304" pitchFamily="18" charset="0"/>
+              </a:rPr>
+              <a:t>Events</a:t>
+            </a:r>
+          </a:p>
+        </p:txBody>
+      </p:sp>
+      <p:sp>
+        <p:nvSpPr>
+          <p:cNvPr id="10" name="TextBox 9">
+            <a:extLst>
+              <a:ext uri="{FF2B5EF4-FFF2-40B4-BE49-F238E27FC236}">
+                <a16:creationId xmlns:a16="http://schemas.microsoft.com/office/drawing/2014/main" id="{8143688A-196F-75BF-BADF-0A2693B3D962}"/>
+              </a:ext>
+            </a:extLst>
+          </p:cNvPr>
+          <p:cNvSpPr txBox="1"/>
+          <p:nvPr/>
+        </p:nvSpPr>
+        <p:spPr>
+          <a:xfrm>
+            <a:off x="3498488" y="2736993"/>
+            <a:ext cx="3307081" cy="276999"/>
+          </a:xfrm>
+          <a:prstGeom prst="rect">
+            <a:avLst/>
+          </a:prstGeom>
+          <a:ln>
+            <a:solidFill>
+              <a:schemeClr val="accent1"/>
+            </a:solidFill>
+          </a:ln>
+          <a:effectLst>
+            <a:glow rad="101600">
+              <a:srgbClr val="7030A0">
+                <a:alpha val="60000"/>
+              </a:srgbClr>
+            </a:glow>
+          </a:effectLst>
+        </p:spPr>
+        <p:style>
+          <a:lnRef idx="2">
+            <a:schemeClr val="accent1"/>
+          </a:lnRef>
+          <a:fillRef idx="1">
+            <a:schemeClr val="lt1"/>
+          </a:fillRef>
+          <a:effectRef idx="0">
+            <a:schemeClr val="accent1"/>
+          </a:effectRef>
+          <a:fontRef idx="minor">
+            <a:schemeClr val="dk1"/>
+          </a:fontRef>
+        </p:style>
+        <p:txBody>
+          <a:bodyPr wrap="square" rtlCol="0">
+            <a:spAutoFit/>
+          </a:bodyPr>
+          <a:lstStyle/>
+          <a:p>
+            <a:pPr algn="ctr"/>
+            <a:r>
+              <a:rPr lang="en-US" sz="1200" b="1">
+                <a:latin typeface="Consolas" panose="020B0609020204030204" pitchFamily="49" charset="0"/>
+                <a:cs typeface="Times New Roman" panose="02020603050405020304" pitchFamily="18" charset="0"/>
+              </a:rPr>
+              <a:t>EventsDurationPlotter</a:t>
+            </a:r>
+          </a:p>
+        </p:txBody>
+      </p:sp>
+      <p:cxnSp>
+        <p:nvCxnSpPr>
+          <p:cNvPr id="11" name="Straight Arrow Connector 10">
+            <a:extLst>
+              <a:ext uri="{FF2B5EF4-FFF2-40B4-BE49-F238E27FC236}">
+                <a16:creationId xmlns:a16="http://schemas.microsoft.com/office/drawing/2014/main" id="{5180FF59-F59B-6A46-5E4D-42B54D6F06F8}"/>
+              </a:ext>
+            </a:extLst>
+          </p:cNvPr>
+          <p:cNvCxnSpPr>
+            <a:cxnSpLocks/>
+            <a:stCxn id="7" idx="2"/>
+            <a:endCxn id="10" idx="0"/>
+          </p:cNvCxnSpPr>
+          <p:nvPr/>
+        </p:nvCxnSpPr>
+        <p:spPr>
+          <a:xfrm flipH="1">
+            <a:off x="5152029" y="1234522"/>
+            <a:ext cx="1854926" cy="1502471"/>
+          </a:xfrm>
+          <a:prstGeom prst="straightConnector1">
+            <a:avLst/>
+          </a:prstGeom>
+          <a:ln>
+            <a:tailEnd type="triangle"/>
+          </a:ln>
+        </p:spPr>
+        <p:style>
+          <a:lnRef idx="1">
+            <a:schemeClr val="accent1"/>
+          </a:lnRef>
+          <a:fillRef idx="0">
+            <a:schemeClr val="accent1"/>
+          </a:fillRef>
+          <a:effectRef idx="0">
+            <a:schemeClr val="accent1"/>
+          </a:effectRef>
+          <a:fontRef idx="minor">
+            <a:schemeClr val="tx1"/>
+          </a:fontRef>
+        </p:style>
+      </p:cxnSp>
+      <p:cxnSp>
+        <p:nvCxnSpPr>
+          <p:cNvPr id="14" name="Straight Arrow Connector 13">
+            <a:extLst>
+              <a:ext uri="{FF2B5EF4-FFF2-40B4-BE49-F238E27FC236}">
+                <a16:creationId xmlns:a16="http://schemas.microsoft.com/office/drawing/2014/main" id="{2231FB2C-3DCF-1058-D949-9EB9CA944FC4}"/>
+              </a:ext>
+            </a:extLst>
+          </p:cNvPr>
+          <p:cNvCxnSpPr>
+            <a:cxnSpLocks/>
+            <a:stCxn id="8" idx="0"/>
+            <a:endCxn id="10" idx="2"/>
+          </p:cNvCxnSpPr>
+          <p:nvPr/>
+        </p:nvCxnSpPr>
+        <p:spPr>
+          <a:xfrm flipH="1" flipV="1">
+            <a:off x="5152029" y="3013992"/>
+            <a:ext cx="2620372" cy="894986"/>
+          </a:xfrm>
+          <a:prstGeom prst="straightConnector1">
+            <a:avLst/>
+          </a:prstGeom>
+          <a:ln>
+            <a:tailEnd type="triangle"/>
+          </a:ln>
+        </p:spPr>
+        <p:style>
+          <a:lnRef idx="1">
+            <a:schemeClr val="accent1"/>
+          </a:lnRef>
+          <a:fillRef idx="0">
+            <a:schemeClr val="accent1"/>
+          </a:fillRef>
+          <a:effectRef idx="0">
+            <a:schemeClr val="accent1"/>
+          </a:effectRef>
+          <a:fontRef idx="minor">
+            <a:schemeClr val="tx1"/>
+          </a:fontRef>
+        </p:style>
+      </p:cxnSp>
+      <p:cxnSp>
+        <p:nvCxnSpPr>
+          <p:cNvPr id="21" name="Straight Arrow Connector 20">
+            <a:extLst>
+              <a:ext uri="{FF2B5EF4-FFF2-40B4-BE49-F238E27FC236}">
+                <a16:creationId xmlns:a16="http://schemas.microsoft.com/office/drawing/2014/main" id="{6ABAE77F-0AF0-A6AF-25A2-260535EEB8AA}"/>
+              </a:ext>
+            </a:extLst>
+          </p:cNvPr>
+          <p:cNvCxnSpPr>
+            <a:cxnSpLocks/>
+          </p:cNvCxnSpPr>
+          <p:nvPr/>
+        </p:nvCxnSpPr>
+        <p:spPr>
+          <a:xfrm flipH="1">
+            <a:off x="1691640" y="2880830"/>
+            <a:ext cx="1770445" cy="633079"/>
+          </a:xfrm>
+          <a:prstGeom prst="straightConnector1">
+            <a:avLst/>
+          </a:prstGeom>
+          <a:ln>
+            <a:tailEnd type="triangle"/>
+          </a:ln>
+        </p:spPr>
+        <p:style>
+          <a:lnRef idx="1">
+            <a:schemeClr val="accent1"/>
+          </a:lnRef>
+          <a:fillRef idx="0">
+            <a:schemeClr val="accent1"/>
+          </a:fillRef>
+          <a:effectRef idx="0">
+            <a:schemeClr val="accent1"/>
+          </a:effectRef>
+          <a:fontRef idx="minor">
+            <a:schemeClr val="tx1"/>
+          </a:fontRef>
+        </p:style>
+      </p:cxnSp>
+      <p:sp>
+        <p:nvSpPr>
+          <p:cNvPr id="28" name="TextBox 27">
+            <a:extLst>
+              <a:ext uri="{FF2B5EF4-FFF2-40B4-BE49-F238E27FC236}">
+                <a16:creationId xmlns:a16="http://schemas.microsoft.com/office/drawing/2014/main" id="{E8C2F4E1-A1DB-0571-EE44-4367B03B2021}"/>
+              </a:ext>
+            </a:extLst>
+          </p:cNvPr>
+          <p:cNvSpPr txBox="1"/>
+          <p:nvPr/>
+        </p:nvSpPr>
+        <p:spPr>
+          <a:xfrm>
+            <a:off x="6805569" y="1398164"/>
+            <a:ext cx="2400299" cy="1200329"/>
+          </a:xfrm>
+          <a:prstGeom prst="rect">
+            <a:avLst/>
+          </a:prstGeom>
+          <a:noFill/>
+        </p:spPr>
+        <p:txBody>
+          <a:bodyPr wrap="square">
+            <a:spAutoFit/>
+          </a:bodyPr>
+          <a:lstStyle/>
+          <a:p>
+            <a:r>
+              <a:rPr lang="en-US" sz="1200"/>
+              <a:t>The plotter receives a HistogramConfig object — not a dictionary, not keyword arguments. If it exists, it passed validation. No defensive checks needed inside the plotter."</a:t>
+            </a:r>
+          </a:p>
+        </p:txBody>
+      </p:sp>
+      <p:sp>
+        <p:nvSpPr>
+          <p:cNvPr id="30" name="TextBox 29">
+            <a:extLst>
+              <a:ext uri="{FF2B5EF4-FFF2-40B4-BE49-F238E27FC236}">
+                <a16:creationId xmlns:a16="http://schemas.microsoft.com/office/drawing/2014/main" id="{6931BFF8-AF16-3585-34E8-F928C6843F8B}"/>
+              </a:ext>
+            </a:extLst>
+          </p:cNvPr>
+          <p:cNvSpPr txBox="1"/>
+          <p:nvPr/>
+        </p:nvSpPr>
+        <p:spPr>
+          <a:xfrm>
+            <a:off x="4533899" y="4377962"/>
+            <a:ext cx="4610100" cy="646331"/>
+          </a:xfrm>
+          <a:prstGeom prst="rect">
+            <a:avLst/>
+          </a:prstGeom>
+          <a:noFill/>
+        </p:spPr>
+        <p:txBody>
+          <a:bodyPr wrap="square">
+            <a:spAutoFit/>
+          </a:bodyPr>
+          <a:lstStyle/>
+          <a:p>
+            <a:r>
+              <a:rPr lang="en-US" sz="1200"/>
+              <a:t>The plotter receives an Events object — not a raw DataFrame. The contract was already enforced at construction. The plotter knows exactly what it's getting: clean data, valid columns, no nulls</a:t>
+            </a:r>
+          </a:p>
+        </p:txBody>
+      </p:sp>
+      <p:sp>
+        <p:nvSpPr>
+          <p:cNvPr id="31" name="TextBox 30">
+            <a:extLst>
+              <a:ext uri="{FF2B5EF4-FFF2-40B4-BE49-F238E27FC236}">
+                <a16:creationId xmlns:a16="http://schemas.microsoft.com/office/drawing/2014/main" id="{14B616DE-1141-9991-EAD0-B0FC3ADD5C41}"/>
+              </a:ext>
+            </a:extLst>
+          </p:cNvPr>
+          <p:cNvSpPr txBox="1"/>
+          <p:nvPr/>
+        </p:nvSpPr>
+        <p:spPr>
+          <a:xfrm>
+            <a:off x="2232660" y="255842"/>
+            <a:ext cx="4610100" cy="646331"/>
+          </a:xfrm>
+          <a:prstGeom prst="rect">
+            <a:avLst/>
+          </a:prstGeom>
+          <a:noFill/>
+        </p:spPr>
+        <p:txBody>
+          <a:bodyPr wrap="square">
+            <a:spAutoFit/>
+          </a:bodyPr>
+          <a:lstStyle/>
+          <a:p>
+            <a:r>
+              <a:rPr lang="en-US" sz="1200"/>
+              <a:t>Every analytical and visual choice lives in the YAML — bin width, percentile lines, colors, figure size. Change one number in one file. Nothing in your code changes</a:t>
+            </a:r>
+          </a:p>
+        </p:txBody>
+      </p:sp>
+      <p:pic>
+        <p:nvPicPr>
+          <p:cNvPr id="12" name="Picture 11">
+            <a:extLst>
+              <a:ext uri="{FF2B5EF4-FFF2-40B4-BE49-F238E27FC236}">
+                <a16:creationId xmlns:a16="http://schemas.microsoft.com/office/drawing/2014/main" id="{41A1AE51-A094-117A-494F-8BF84282E1B7}"/>
+              </a:ext>
+            </a:extLst>
+          </p:cNvPr>
+          <p:cNvPicPr>
+            <a:picLocks noChangeAspect="1"/>
+          </p:cNvPicPr>
+          <p:nvPr/>
+        </p:nvPicPr>
+        <p:blipFill>
+          <a:blip r:embed="rId3"/>
+          <a:stretch>
+            <a:fillRect/>
+          </a:stretch>
+        </p:blipFill>
+        <p:spPr>
+          <a:xfrm>
+            <a:off x="0" y="3618742"/>
+            <a:ext cx="3105214" cy="1530621"/>
+          </a:xfrm>
+          <a:prstGeom prst="rect">
+            <a:avLst/>
+          </a:prstGeom>
+        </p:spPr>
+      </p:pic>
+    </p:spTree>
+    <p:extLst>
+      <p:ext uri="{BB962C8B-B14F-4D97-AF65-F5344CB8AC3E}">
+        <p14:creationId xmlns:p14="http://schemas.microsoft.com/office/powerpoint/2010/main" val="3405523453"/>
+      </p:ext>
+    </p:extLst>
+  </p:cSld>
+  <p:clrMapOvr>
+    <a:masterClrMapping/>
+  </p:clrMapOvr>
+</p:sld>
+</file>
+
+<file path=ppt/slides/slide13.xml><?xml version="1.0" encoding="utf-8"?>
+<p:sld xmlns:a="http://schemas.openxmlformats.org/drawingml/2006/main" xmlns:r="http://schemas.openxmlformats.org/officeDocument/2006/relationships" xmlns:p="http://schemas.openxmlformats.org/presentationml/2006/main">
+  <p:cSld>
+    <p:spTree>
+      <p:nvGrpSpPr>
         <p:cNvPr id="1" name="">
           <a:extLst>
             <a:ext uri="{FF2B5EF4-FFF2-40B4-BE49-F238E27FC236}">
-              <a16:creationId xmlns:a16="http://schemas.microsoft.com/office/drawing/2014/main" id="{63C6626E-754E-90A5-C750-75506B18273A}"/>
+              <a16:creationId xmlns:a16="http://schemas.microsoft.com/office/drawing/2014/main" id="{AAF405FE-66B9-BAAA-2C0B-1DCD27333BC5}"/>
             </a:ext>
           </a:extLst>
         </p:cNvPr>
@@ -2203,10 +2732,10 @@
       </p:grpSpPr>
       <p:sp>
         <p:nvSpPr>
-          <p:cNvPr id="2" name="TextBox 1">
+          <p:cNvPr id="3" name="TextBox 2">
             <a:extLst>
               <a:ext uri="{FF2B5EF4-FFF2-40B4-BE49-F238E27FC236}">
-                <a16:creationId xmlns:a16="http://schemas.microsoft.com/office/drawing/2014/main" id="{B7F21EF0-00F1-010D-BC21-4BCF4735C809}"/>
+                <a16:creationId xmlns:a16="http://schemas.microsoft.com/office/drawing/2014/main" id="{EECCE796-3030-BCD4-2912-9AB98EA9D40C}"/>
               </a:ext>
             </a:extLst>
           </p:cNvPr>
@@ -2215,180 +2744,8 @@
         </p:nvSpPr>
         <p:spPr>
           <a:xfrm>
-            <a:off x="5596166" y="287382"/>
-            <a:ext cx="3448594" cy="369332"/>
-          </a:xfrm>
-          <a:prstGeom prst="rect">
-            <a:avLst/>
-          </a:prstGeom>
-          <a:noFill/>
-        </p:spPr>
-        <p:txBody>
-          <a:bodyPr wrap="square" rtlCol="0">
-            <a:spAutoFit/>
-          </a:bodyPr>
-          <a:lstStyle/>
-          <a:p>
-            <a:r>
-              <a:rPr lang="en-US"/>
-              <a:t>Configurability/Reproducibility</a:t>
-            </a:r>
-          </a:p>
-        </p:txBody>
-      </p:sp>
-      <mc:AlternateContent xmlns:mc="http://schemas.openxmlformats.org/markup-compatibility/2006" xmlns:p14="http://schemas.microsoft.com/office/powerpoint/2010/main">
-        <mc:Choice Requires="p14">
-          <p:contentPart p14:bwMode="auto" r:id="rId2">
-            <p14:nvContentPartPr>
-              <p14:cNvPr id="25" name="Ink 24">
-                <a:extLst>
-                  <a:ext uri="{FF2B5EF4-FFF2-40B4-BE49-F238E27FC236}">
-                    <a16:creationId xmlns:a16="http://schemas.microsoft.com/office/drawing/2014/main" id="{934C1257-0597-70AC-ABBC-46F404245F6D}"/>
-                  </a:ext>
-                </a:extLst>
-              </p14:cNvPr>
-              <p14:cNvContentPartPr/>
-              <p14:nvPr/>
-            </p14:nvContentPartPr>
-            <p14:xfrm>
-              <a:off x="4036269" y="653091"/>
-              <a:ext cx="360" cy="360"/>
-            </p14:xfrm>
-          </p:contentPart>
-        </mc:Choice>
-        <mc:Fallback xmlns="">
-          <p:pic>
-            <p:nvPicPr>
-              <p:cNvPr id="25" name="Ink 24">
-                <a:extLst>
-                  <a:ext uri="{FF2B5EF4-FFF2-40B4-BE49-F238E27FC236}">
-                    <a16:creationId xmlns:a16="http://schemas.microsoft.com/office/drawing/2014/main" id="{68DB5CBF-D701-D322-4416-C438505D842C}"/>
-                  </a:ext>
-                </a:extLst>
-              </p:cNvPr>
-              <p:cNvPicPr/>
-              <p:nvPr/>
-            </p:nvPicPr>
-            <p:blipFill>
-              <a:blip r:embed="rId23"/>
-              <a:stretch>
-                <a:fillRect/>
-              </a:stretch>
-            </p:blipFill>
-            <p:spPr>
-              <a:xfrm>
-                <a:off x="4030149" y="646971"/>
-                <a:ext cx="12600" cy="12600"/>
-              </a:xfrm>
-              <a:prstGeom prst="rect">
-                <a:avLst/>
-              </a:prstGeom>
-            </p:spPr>
-          </p:pic>
-        </mc:Fallback>
-      </mc:AlternateContent>
-      <p:sp>
-        <p:nvSpPr>
-          <p:cNvPr id="23" name="TextBox 22">
-            <a:extLst>
-              <a:ext uri="{FF2B5EF4-FFF2-40B4-BE49-F238E27FC236}">
-                <a16:creationId xmlns:a16="http://schemas.microsoft.com/office/drawing/2014/main" id="{C30085CE-B221-AF99-8754-B7ED129D807B}"/>
-              </a:ext>
-            </a:extLst>
-          </p:cNvPr>
-          <p:cNvSpPr txBox="1"/>
-          <p:nvPr/>
-        </p:nvSpPr>
-        <p:spPr>
-          <a:xfrm>
-            <a:off x="438240" y="3056289"/>
-            <a:ext cx="4572000" cy="1754326"/>
-          </a:xfrm>
-          <a:prstGeom prst="rect">
-            <a:avLst/>
-          </a:prstGeom>
-          <a:noFill/>
-        </p:spPr>
-        <p:txBody>
-          <a:bodyPr wrap="square">
-            <a:spAutoFit/>
-          </a:bodyPr>
-          <a:lstStyle/>
-          <a:p>
-            <a:r>
-              <a:rPr lang="en-US" sz="1200" i="1"/>
-              <a:t>Why is the semantics abstraction needed:</a:t>
-            </a:r>
-          </a:p>
-          <a:p>
-            <a:r>
-              <a:rPr lang="en-US" sz="1200" i="1"/>
-              <a:t>A pandas DataFrame does not know what its columns mean — 'begin_date' could be a birth date, a coverage start, or a contract signing. EventSemantics is built for exactly one purpose: to hold that meaning explicitly, validate it on construction, and carry it through the entire pipeline so no downstream function ever has to guess.</a:t>
-            </a:r>
-          </a:p>
-          <a:p>
-            <a:endParaRPr lang="en-US" sz="1200"/>
-          </a:p>
-          <a:p>
-            <a:r>
-              <a:rPr lang="en-US" sz="1200" i="1"/>
-              <a:t>Nothing else in your script needs to remember that the column to describe this particular event was 'enrollment_start_date'.</a:t>
-            </a:r>
-          </a:p>
-        </p:txBody>
-      </p:sp>
-      <p:sp>
-        <p:nvSpPr>
-          <p:cNvPr id="5" name="TextBox 4">
-            <a:extLst>
-              <a:ext uri="{FF2B5EF4-FFF2-40B4-BE49-F238E27FC236}">
-                <a16:creationId xmlns:a16="http://schemas.microsoft.com/office/drawing/2014/main" id="{22F377D5-6B9D-4B1E-592A-C4DA8D7CC6C5}"/>
-              </a:ext>
-            </a:extLst>
-          </p:cNvPr>
-          <p:cNvSpPr txBox="1"/>
-          <p:nvPr/>
-        </p:nvSpPr>
-        <p:spPr>
-          <a:xfrm>
-            <a:off x="3794757" y="1276809"/>
-            <a:ext cx="1951632" cy="400110"/>
-          </a:xfrm>
-          <a:prstGeom prst="rect">
-            <a:avLst/>
-          </a:prstGeom>
-          <a:noFill/>
-        </p:spPr>
-        <p:txBody>
-          <a:bodyPr wrap="square" rtlCol="0">
-            <a:spAutoFit/>
-          </a:bodyPr>
-          <a:lstStyle/>
-          <a:p>
-            <a:pPr algn="ctr"/>
-            <a:r>
-              <a:rPr lang="en-US" sz="1000" i="1"/>
-              <a:t>EventSemantics.build_from_yaml(filename)</a:t>
-            </a:r>
-          </a:p>
-        </p:txBody>
-      </p:sp>
-      <p:sp>
-        <p:nvSpPr>
-          <p:cNvPr id="7" name="TextBox 6">
-            <a:extLst>
-              <a:ext uri="{FF2B5EF4-FFF2-40B4-BE49-F238E27FC236}">
-                <a16:creationId xmlns:a16="http://schemas.microsoft.com/office/drawing/2014/main" id="{6F50E3F5-BB79-2DC0-B257-815FC6EE8DA5}"/>
-              </a:ext>
-            </a:extLst>
-          </p:cNvPr>
-          <p:cNvSpPr txBox="1"/>
-          <p:nvPr/>
-        </p:nvSpPr>
-        <p:spPr>
-          <a:xfrm>
-            <a:off x="5746389" y="1197309"/>
-            <a:ext cx="2468881" cy="1015663"/>
+            <a:off x="209004" y="159848"/>
+            <a:ext cx="2468881" cy="646331"/>
           </a:xfrm>
           <a:prstGeom prst="rect">
             <a:avLst/>
@@ -2430,7 +2787,7 @@
                 <a:latin typeface="Consolas" panose="020B0609020204030204" pitchFamily="49" charset="0"/>
                 <a:cs typeface="Times New Roman" panose="02020603050405020304" pitchFamily="18" charset="0"/>
               </a:rPr>
-              <a:t>EventSemantics</a:t>
+              <a:t>Events</a:t>
             </a:r>
           </a:p>
           <a:p>
@@ -2440,7 +2797,7 @@
                 <a:latin typeface="Centaur" panose="02030504050205020304" pitchFamily="18" charset="0"/>
                 <a:cs typeface="Times New Roman" panose="02020603050405020304" pitchFamily="18" charset="0"/>
               </a:rPr>
-              <a:t>type: str</a:t>
+              <a:t>data: pd.Dataframe</a:t>
             </a:r>
           </a:p>
           <a:p>
@@ -2450,67 +2807,17 @@
                 <a:latin typeface="Centaur" panose="02030504050205020304" pitchFamily="18" charset="0"/>
                 <a:cs typeface="Times New Roman" panose="02020603050405020304" pitchFamily="18" charset="0"/>
               </a:rPr>
-              <a:t>entity_id_col: str</a:t>
-            </a:r>
-          </a:p>
-          <a:p>
-            <a:pPr algn="ctr"/>
-            <a:r>
-              <a:rPr lang="en-US" sz="1200">
-                <a:latin typeface="Centaur" panose="02030504050205020304" pitchFamily="18" charset="0"/>
-                <a:cs typeface="Times New Roman" panose="02020603050405020304" pitchFamily="18" charset="0"/>
-              </a:rPr>
-              <a:t>start_time_col: str</a:t>
-            </a:r>
-          </a:p>
-          <a:p>
-            <a:pPr algn="ctr"/>
-            <a:r>
-              <a:rPr lang="en-US" sz="1200">
-                <a:latin typeface="Centaur" panose="02030504050205020304" pitchFamily="18" charset="0"/>
-                <a:cs typeface="Times New Roman" panose="02020603050405020304" pitchFamily="18" charset="0"/>
-              </a:rPr>
-              <a:t>end_time_col: str</a:t>
-            </a:r>
-          </a:p>
-        </p:txBody>
-      </p:sp>
-      <p:pic>
-        <p:nvPicPr>
-          <p:cNvPr id="9" name="Picture 8">
+              <a:t>semantics: EventSemantics</a:t>
+            </a:r>
+          </a:p>
+        </p:txBody>
+      </p:sp>
+      <p:sp>
+        <p:nvSpPr>
+          <p:cNvPr id="4" name="TextBox 3">
             <a:extLst>
               <a:ext uri="{FF2B5EF4-FFF2-40B4-BE49-F238E27FC236}">
-                <a16:creationId xmlns:a16="http://schemas.microsoft.com/office/drawing/2014/main" id="{EF81AB5A-5A1A-6E45-3E27-DC9724B6574D}"/>
-              </a:ext>
-            </a:extLst>
-          </p:cNvPr>
-          <p:cNvPicPr>
-            <a:picLocks noChangeAspect="1"/>
-          </p:cNvPicPr>
-          <p:nvPr/>
-        </p:nvPicPr>
-        <p:blipFill>
-          <a:blip r:embed="rId24"/>
-          <a:stretch>
-            <a:fillRect/>
-          </a:stretch>
-        </p:blipFill>
-        <p:spPr>
-          <a:xfrm>
-            <a:off x="209007" y="1067268"/>
-            <a:ext cx="3435527" cy="819192"/>
-          </a:xfrm>
-          <a:prstGeom prst="rect">
-            <a:avLst/>
-          </a:prstGeom>
-        </p:spPr>
-      </p:pic>
-      <p:sp>
-        <p:nvSpPr>
-          <p:cNvPr id="12" name="TextBox 11">
-            <a:extLst>
-              <a:ext uri="{FF2B5EF4-FFF2-40B4-BE49-F238E27FC236}">
-                <a16:creationId xmlns:a16="http://schemas.microsoft.com/office/drawing/2014/main" id="{72646052-BDF4-47ED-FEBB-394801542414}"/>
+                <a16:creationId xmlns:a16="http://schemas.microsoft.com/office/drawing/2014/main" id="{D9AA9C49-8692-6E01-D2A5-42F498DDBBB9}"/>
               </a:ext>
             </a:extLst>
           </p:cNvPr>
@@ -2519,114 +2826,177 @@
         </p:nvSpPr>
         <p:spPr>
           <a:xfrm>
-            <a:off x="4086950" y="2587309"/>
-            <a:ext cx="4572000" cy="600164"/>
-          </a:xfrm>
-          <a:prstGeom prst="rect">
-            <a:avLst/>
-          </a:prstGeom>
-          <a:noFill/>
-        </p:spPr>
-        <p:txBody>
-          <a:bodyPr wrap="square">
+            <a:off x="2868387" y="159848"/>
+            <a:ext cx="5882640" cy="2292935"/>
+          </a:xfrm>
+          <a:prstGeom prst="rect">
+            <a:avLst/>
+          </a:prstGeom>
+          <a:noFill/>
+        </p:spPr>
+        <p:txBody>
+          <a:bodyPr wrap="square" rtlCol="0">
             <a:spAutoFit/>
           </a:bodyPr>
           <a:lstStyle/>
           <a:p>
-            <a:pPr algn="ctr"/>
-            <a:r>
-              <a:rPr lang="en-US" sz="1100" i="1"/>
-              <a:t>Validated on construction. If your YAML cannot fully describe the events — the object does not get built. You get specific errors, not silent failures downstream.</a:t>
-            </a:r>
-          </a:p>
-        </p:txBody>
-      </p:sp>
-      <p:cxnSp>
-        <p:nvCxnSpPr>
-          <p:cNvPr id="14" name="Straight Arrow Connector 13">
-            <a:extLst>
-              <a:ext uri="{FF2B5EF4-FFF2-40B4-BE49-F238E27FC236}">
-                <a16:creationId xmlns:a16="http://schemas.microsoft.com/office/drawing/2014/main" id="{2EB97454-440A-6B72-D276-6E456796A21E}"/>
-              </a:ext>
-            </a:extLst>
-          </p:cNvPr>
-          <p:cNvCxnSpPr/>
-          <p:nvPr/>
-        </p:nvCxnSpPr>
-        <p:spPr>
-          <a:xfrm>
-            <a:off x="3905794" y="1705140"/>
-            <a:ext cx="1690372" cy="0"/>
-          </a:xfrm>
-          <a:prstGeom prst="straightConnector1">
-            <a:avLst/>
-          </a:prstGeom>
-          <a:ln>
-            <a:tailEnd type="triangle"/>
-          </a:ln>
-        </p:spPr>
-        <p:style>
-          <a:lnRef idx="1">
-            <a:schemeClr val="accent1"/>
-          </a:lnRef>
-          <a:fillRef idx="0">
-            <a:schemeClr val="accent1"/>
-          </a:fillRef>
-          <a:effectRef idx="0">
-            <a:schemeClr val="accent1"/>
-          </a:effectRef>
-          <a:fontRef idx="minor">
-            <a:schemeClr val="tx1"/>
-          </a:fontRef>
-        </p:style>
-      </p:cxnSp>
-      <p:sp>
-        <p:nvSpPr>
-          <p:cNvPr id="20" name="TextBox 19">
-            <a:extLst>
-              <a:ext uri="{FF2B5EF4-FFF2-40B4-BE49-F238E27FC236}">
-                <a16:creationId xmlns:a16="http://schemas.microsoft.com/office/drawing/2014/main" id="{04EECC1A-3B46-8054-AD8B-BFB5AD1449C9}"/>
-              </a:ext>
-            </a:extLst>
-          </p:cNvPr>
-          <p:cNvSpPr txBox="1"/>
-          <p:nvPr/>
-        </p:nvSpPr>
-        <p:spPr>
-          <a:xfrm>
-            <a:off x="6419761" y="4302120"/>
-            <a:ext cx="2404834" cy="553998"/>
-          </a:xfrm>
-          <a:prstGeom prst="rect">
-            <a:avLst/>
-          </a:prstGeom>
-          <a:noFill/>
-        </p:spPr>
-        <p:txBody>
-          <a:bodyPr wrap="square">
-            <a:spAutoFit/>
-          </a:bodyPr>
-          <a:lstStyle/>
-          <a:p>
-            <a:pPr algn="ctr"/>
-            <a:r>
-              <a:rPr lang="en-US" sz="1000"/>
-              <a:t>Declarative construction of the object</a:t>
-            </a:r>
-          </a:p>
-          <a:p>
-            <a:pPr algn="ctr"/>
-            <a:r>
-              <a:rPr lang="en-US" sz="1000"/>
-              <a:t>(as opposed to manually writing code to create the object)</a:t>
-            </a:r>
+            <a:r>
+              <a:rPr lang="en-US" sz="1100" b="1">
+                <a:latin typeface="Consolas" panose="020B0609020204030204" pitchFamily="49" charset="0"/>
+              </a:rPr>
+              <a:t>Constructor</a:t>
+            </a:r>
+          </a:p>
+          <a:p>
+            <a:r>
+              <a:rPr lang="en-US" sz="1100" i="1">
+                <a:latin typeface="Consolas" panose="020B0609020204030204" pitchFamily="49" charset="0"/>
+              </a:rPr>
+              <a:t>__init__</a:t>
+            </a:r>
+            <a:r>
+              <a:rPr lang="en-US" sz="1100">
+                <a:latin typeface="Consolas" panose="020B0609020204030204" pitchFamily="49" charset="0"/>
+              </a:rPr>
+              <a:t>(data, semantics) -&gt; Events</a:t>
+            </a:r>
+            <a:endParaRPr lang="en-US" sz="1100" i="1">
+              <a:latin typeface="Consolas" panose="020B0609020204030204" pitchFamily="49" charset="0"/>
+            </a:endParaRPr>
+          </a:p>
+          <a:p>
+            <a:endParaRPr lang="en-US" sz="1100" i="1">
+              <a:latin typeface="Consolas" panose="020B0609020204030204" pitchFamily="49" charset="0"/>
+            </a:endParaRPr>
+          </a:p>
+          <a:p>
+            <a:r>
+              <a:rPr lang="en-US" sz="1100" b="1">
+                <a:latin typeface="Consolas" panose="020B0609020204030204" pitchFamily="49" charset="0"/>
+              </a:rPr>
+              <a:t>Methods</a:t>
+            </a:r>
+          </a:p>
+          <a:p>
+            <a:r>
+              <a:rPr lang="en-US" sz="1100" i="1">
+                <a:latin typeface="Consolas" panose="020B0609020204030204" pitchFamily="49" charset="0"/>
+              </a:rPr>
+              <a:t>filter_by_entities</a:t>
+            </a:r>
+            <a:r>
+              <a:rPr lang="en-US" sz="1100">
+                <a:latin typeface="Consolas" panose="020B0609020204030204" pitchFamily="49" charset="0"/>
+              </a:rPr>
+              <a:t>(ids) -&gt; Events</a:t>
+            </a:r>
+          </a:p>
+          <a:p>
+            <a:r>
+              <a:rPr lang="en-US" sz="1100" i="1">
+                <a:latin typeface="Consolas" panose="020B0609020204030204" pitchFamily="49" charset="0"/>
+              </a:rPr>
+              <a:t>filter_by_dates</a:t>
+            </a:r>
+            <a:r>
+              <a:rPr lang="en-US" sz="1100">
+                <a:latin typeface="Consolas" panose="020B0609020204030204" pitchFamily="49" charset="0"/>
+              </a:rPr>
+              <a:t>(start, end) -&gt; Events</a:t>
+            </a:r>
+            <a:br>
+              <a:rPr lang="en-US" sz="1100">
+                <a:latin typeface="Consolas" panose="020B0609020204030204" pitchFamily="49" charset="0"/>
+              </a:rPr>
+            </a:br>
+            <a:r>
+              <a:rPr lang="en-US" sz="1100" i="1">
+                <a:latin typeface="Consolas" panose="020B0609020204030204" pitchFamily="49" charset="0"/>
+              </a:rPr>
+              <a:t>copy</a:t>
+            </a:r>
+            <a:r>
+              <a:rPr lang="en-US" sz="1100">
+                <a:latin typeface="Consolas" panose="020B0609020204030204" pitchFamily="49" charset="0"/>
+              </a:rPr>
+              <a:t>() -&gt; Events</a:t>
+            </a:r>
+            <a:br>
+              <a:rPr lang="en-US" sz="1100">
+                <a:latin typeface="Consolas" panose="020B0609020204030204" pitchFamily="49" charset="0"/>
+              </a:rPr>
+            </a:br>
+            <a:r>
+              <a:rPr lang="en-US" sz="1100">
+                <a:latin typeface="Consolas" panose="020B0609020204030204" pitchFamily="49" charset="0"/>
+              </a:rPr>
+              <a:t>build_</a:t>
+            </a:r>
+            <a:r>
+              <a:rPr lang="en-US" sz="1100" i="1">
+                <a:latin typeface="Consolas" panose="020B0609020204030204" pitchFamily="49" charset="0"/>
+              </a:rPr>
+              <a:t>summary</a:t>
+            </a:r>
+            <a:r>
+              <a:rPr lang="en-US" sz="1100">
+                <a:latin typeface="Consolas" panose="020B0609020204030204" pitchFamily="49" charset="0"/>
+              </a:rPr>
+              <a:t>() -&gt; dict</a:t>
+            </a:r>
+          </a:p>
+          <a:p>
+            <a:r>
+              <a:rPr lang="en-US" sz="1100">
+                <a:latin typeface="Consolas" panose="020B0609020204030204" pitchFamily="49" charset="0"/>
+              </a:rPr>
+              <a:t>print_summary() -&gt; None</a:t>
+            </a:r>
+          </a:p>
+          <a:p>
+            <a:endParaRPr lang="en-US" sz="1100" i="1">
+              <a:latin typeface="Consolas" panose="020B0609020204030204" pitchFamily="49" charset="0"/>
+            </a:endParaRPr>
+          </a:p>
+          <a:p>
+            <a:r>
+              <a:rPr lang="en-US" sz="1100" i="1">
+                <a:latin typeface="Consolas" panose="020B0609020204030204" pitchFamily="49" charset="0"/>
+              </a:rPr>
+              <a:t>__len__ </a:t>
+            </a:r>
+            <a:r>
+              <a:rPr lang="en-US" sz="1100">
+                <a:latin typeface="Consolas" panose="020B0609020204030204" pitchFamily="49" charset="0"/>
+              </a:rPr>
+              <a:t>-&gt; int</a:t>
+            </a:r>
+          </a:p>
+          <a:p>
+            <a:r>
+              <a:rPr lang="en-US" sz="1100" i="1">
+                <a:latin typeface="Consolas" panose="020B0609020204030204" pitchFamily="49" charset="0"/>
+              </a:rPr>
+              <a:t>__repr__</a:t>
+            </a:r>
+            <a:r>
+              <a:rPr lang="en-US" sz="1100">
+                <a:latin typeface="Consolas" panose="020B0609020204030204" pitchFamily="49" charset="0"/>
+              </a:rPr>
+              <a:t> -&gt; str</a:t>
+            </a:r>
+          </a:p>
+          <a:p>
+            <a:endParaRPr lang="en-US" sz="1100">
+              <a:latin typeface="Consolas" panose="020B0609020204030204" pitchFamily="49" charset="0"/>
+            </a:endParaRPr>
           </a:p>
         </p:txBody>
       </p:sp>
     </p:spTree>
     <p:extLst>
       <p:ext uri="{BB962C8B-B14F-4D97-AF65-F5344CB8AC3E}">
-        <p14:creationId xmlns:p14="http://schemas.microsoft.com/office/powerpoint/2010/main" val="3903071290"/>
+        <p14:creationId xmlns:p14="http://schemas.microsoft.com/office/powerpoint/2010/main" val="2559188448"/>
       </p:ext>
     </p:extLst>
   </p:cSld>
@@ -2636,7 +3006,1751 @@
 </p:sld>
 </file>
 
-<file path=ppt/slides/slide12.xml><?xml version="1.0" encoding="utf-8"?>
+<file path=ppt/slides/slide14.xml><?xml version="1.0" encoding="utf-8"?>
+<p:sld xmlns:a="http://schemas.openxmlformats.org/drawingml/2006/main" xmlns:r="http://schemas.openxmlformats.org/officeDocument/2006/relationships" xmlns:p="http://schemas.openxmlformats.org/presentationml/2006/main">
+  <p:cSld>
+    <p:spTree>
+      <p:nvGrpSpPr>
+        <p:cNvPr id="1" name="">
+          <a:extLst>
+            <a:ext uri="{FF2B5EF4-FFF2-40B4-BE49-F238E27FC236}">
+              <a16:creationId xmlns:a16="http://schemas.microsoft.com/office/drawing/2014/main" id="{AA36DC87-1488-B144-8BEE-2947361EB1FA}"/>
+            </a:ext>
+          </a:extLst>
+        </p:cNvPr>
+        <p:cNvGrpSpPr/>
+        <p:nvPr/>
+      </p:nvGrpSpPr>
+      <p:grpSpPr>
+        <a:xfrm>
+          <a:off x="0" y="0"/>
+          <a:ext cx="0" cy="0"/>
+          <a:chOff x="0" y="0"/>
+          <a:chExt cx="0" cy="0"/>
+        </a:xfrm>
+      </p:grpSpPr>
+      <p:sp>
+        <p:nvSpPr>
+          <p:cNvPr id="4" name="TextBox 3">
+            <a:extLst>
+              <a:ext uri="{FF2B5EF4-FFF2-40B4-BE49-F238E27FC236}">
+                <a16:creationId xmlns:a16="http://schemas.microsoft.com/office/drawing/2014/main" id="{63E81083-C30D-514E-02F4-A4C83B2BC0B2}"/>
+              </a:ext>
+            </a:extLst>
+          </p:cNvPr>
+          <p:cNvSpPr txBox="1"/>
+          <p:nvPr/>
+        </p:nvSpPr>
+        <p:spPr>
+          <a:xfrm>
+            <a:off x="3721826" y="2791280"/>
+            <a:ext cx="5882640" cy="1200329"/>
+          </a:xfrm>
+          <a:prstGeom prst="rect">
+            <a:avLst/>
+          </a:prstGeom>
+          <a:noFill/>
+        </p:spPr>
+        <p:txBody>
+          <a:bodyPr wrap="square" rtlCol="0">
+            <a:spAutoFit/>
+          </a:bodyPr>
+          <a:lstStyle/>
+          <a:p>
+            <a:r>
+              <a:rPr lang="en-US" sz="1200" b="1">
+                <a:latin typeface="Consolas" panose="020B0609020204030204" pitchFamily="49" charset="0"/>
+              </a:rPr>
+              <a:t>Constructor</a:t>
+            </a:r>
+          </a:p>
+          <a:p>
+            <a:r>
+              <a:rPr lang="en-US" sz="1200" i="1">
+                <a:latin typeface="Consolas" panose="020B0609020204030204" pitchFamily="49" charset="0"/>
+              </a:rPr>
+              <a:t>__init__</a:t>
+            </a:r>
+            <a:r>
+              <a:rPr lang="en-US" sz="1200">
+                <a:latin typeface="Consolas" panose="020B0609020204030204" pitchFamily="49" charset="0"/>
+              </a:rPr>
+              <a:t>(events, stratify_by) -&gt; EventsDurationPlotter</a:t>
+            </a:r>
+          </a:p>
+          <a:p>
+            <a:endParaRPr lang="en-US" sz="1200">
+              <a:latin typeface="Consolas" panose="020B0609020204030204" pitchFamily="49" charset="0"/>
+            </a:endParaRPr>
+          </a:p>
+          <a:p>
+            <a:r>
+              <a:rPr lang="en-US" sz="1200" b="1">
+                <a:latin typeface="Consolas" panose="020B0609020204030204" pitchFamily="49" charset="0"/>
+              </a:rPr>
+              <a:t>Methods</a:t>
+            </a:r>
+          </a:p>
+          <a:p>
+            <a:r>
+              <a:rPr lang="en-US" sz="1200" i="1">
+                <a:latin typeface="Consolas" panose="020B0609020204030204" pitchFamily="49" charset="0"/>
+              </a:rPr>
+              <a:t>plot_histogram</a:t>
+            </a:r>
+            <a:r>
+              <a:rPr lang="en-US" sz="1200">
+                <a:latin typeface="Consolas" panose="020B0609020204030204" pitchFamily="49" charset="0"/>
+              </a:rPr>
+              <a:t>(path, histogram_config)</a:t>
+            </a:r>
+            <a:br>
+              <a:rPr lang="en-US" sz="1200">
+                <a:latin typeface="Consolas" panose="020B0609020204030204" pitchFamily="49" charset="0"/>
+              </a:rPr>
+            </a:br>
+            <a:r>
+              <a:rPr lang="en-US" sz="1200" i="1">
+                <a:latin typeface="Consolas" panose="020B0609020204030204" pitchFamily="49" charset="0"/>
+              </a:rPr>
+              <a:t>plot_violin</a:t>
+            </a:r>
+            <a:r>
+              <a:rPr lang="en-US" sz="1200">
+                <a:latin typeface="Consolas" panose="020B0609020204030204" pitchFamily="49" charset="0"/>
+              </a:rPr>
+              <a:t>(violin_config)</a:t>
+            </a:r>
+          </a:p>
+        </p:txBody>
+      </p:sp>
+      <p:sp>
+        <p:nvSpPr>
+          <p:cNvPr id="2" name="TextBox 1">
+            <a:extLst>
+              <a:ext uri="{FF2B5EF4-FFF2-40B4-BE49-F238E27FC236}">
+                <a16:creationId xmlns:a16="http://schemas.microsoft.com/office/drawing/2014/main" id="{4F0C5A8C-0845-2ABF-4572-5E72F63C184F}"/>
+              </a:ext>
+            </a:extLst>
+          </p:cNvPr>
+          <p:cNvSpPr txBox="1"/>
+          <p:nvPr/>
+        </p:nvSpPr>
+        <p:spPr>
+          <a:xfrm>
+            <a:off x="117565" y="2801530"/>
+            <a:ext cx="3307081" cy="830997"/>
+          </a:xfrm>
+          <a:prstGeom prst="rect">
+            <a:avLst/>
+          </a:prstGeom>
+          <a:ln>
+            <a:solidFill>
+              <a:schemeClr val="accent1"/>
+            </a:solidFill>
+          </a:ln>
+          <a:effectLst>
+            <a:glow rad="101600">
+              <a:srgbClr val="7030A0">
+                <a:alpha val="60000"/>
+              </a:srgbClr>
+            </a:glow>
+          </a:effectLst>
+        </p:spPr>
+        <p:style>
+          <a:lnRef idx="2">
+            <a:schemeClr val="accent1"/>
+          </a:lnRef>
+          <a:fillRef idx="1">
+            <a:schemeClr val="lt1"/>
+          </a:fillRef>
+          <a:effectRef idx="0">
+            <a:schemeClr val="accent1"/>
+          </a:effectRef>
+          <a:fontRef idx="minor">
+            <a:schemeClr val="dk1"/>
+          </a:fontRef>
+        </p:style>
+        <p:txBody>
+          <a:bodyPr wrap="square" rtlCol="0">
+            <a:spAutoFit/>
+          </a:bodyPr>
+          <a:lstStyle/>
+          <a:p>
+            <a:pPr algn="ctr"/>
+            <a:r>
+              <a:rPr lang="en-US" sz="1200" b="1">
+                <a:latin typeface="Consolas" panose="020B0609020204030204" pitchFamily="49" charset="0"/>
+                <a:cs typeface="Times New Roman" panose="02020603050405020304" pitchFamily="18" charset="0"/>
+              </a:rPr>
+              <a:t>EventsDurationPlotter</a:t>
+            </a:r>
+          </a:p>
+          <a:p>
+            <a:pPr algn="ctr"/>
+            <a:r>
+              <a:rPr lang="en-US" sz="1200">
+                <a:latin typeface="Consolas" panose="020B0609020204030204" pitchFamily="49" charset="0"/>
+                <a:cs typeface="Times New Roman" panose="02020603050405020304" pitchFamily="18" charset="0"/>
+              </a:rPr>
+              <a:t>events: Events</a:t>
+            </a:r>
+          </a:p>
+          <a:p>
+            <a:pPr algn="ctr"/>
+            <a:r>
+              <a:rPr lang="en-US" sz="1200">
+                <a:latin typeface="Consolas" panose="020B0609020204030204" pitchFamily="49" charset="0"/>
+                <a:cs typeface="Times New Roman" panose="02020603050405020304" pitchFamily="18" charset="0"/>
+              </a:rPr>
+              <a:t>stratify_by: str | None</a:t>
+            </a:r>
+          </a:p>
+          <a:p>
+            <a:pPr algn="ctr"/>
+            <a:endParaRPr lang="en-US" sz="1200" b="1">
+              <a:latin typeface="Consolas" panose="020B0609020204030204" pitchFamily="49" charset="0"/>
+              <a:cs typeface="Times New Roman" panose="02020603050405020304" pitchFamily="18" charset="0"/>
+            </a:endParaRPr>
+          </a:p>
+        </p:txBody>
+      </p:sp>
+      <p:sp>
+        <p:nvSpPr>
+          <p:cNvPr id="6" name="TextBox 5">
+            <a:extLst>
+              <a:ext uri="{FF2B5EF4-FFF2-40B4-BE49-F238E27FC236}">
+                <a16:creationId xmlns:a16="http://schemas.microsoft.com/office/drawing/2014/main" id="{342C601A-70BD-9466-ACE5-11BC6F74DC4C}"/>
+              </a:ext>
+            </a:extLst>
+          </p:cNvPr>
+          <p:cNvSpPr txBox="1"/>
+          <p:nvPr/>
+        </p:nvSpPr>
+        <p:spPr>
+          <a:xfrm>
+            <a:off x="117565" y="88810"/>
+            <a:ext cx="3307081" cy="1384995"/>
+          </a:xfrm>
+          <a:prstGeom prst="rect">
+            <a:avLst/>
+          </a:prstGeom>
+          <a:ln w="38100">
+            <a:solidFill>
+              <a:schemeClr val="tx1"/>
+            </a:solidFill>
+          </a:ln>
+          <a:effectLst>
+            <a:glow rad="139700">
+              <a:schemeClr val="accent2">
+                <a:satMod val="175000"/>
+                <a:alpha val="40000"/>
+              </a:schemeClr>
+            </a:glow>
+          </a:effectLst>
+        </p:spPr>
+        <p:style>
+          <a:lnRef idx="2">
+            <a:schemeClr val="accent1"/>
+          </a:lnRef>
+          <a:fillRef idx="1">
+            <a:schemeClr val="lt1"/>
+          </a:fillRef>
+          <a:effectRef idx="0">
+            <a:schemeClr val="accent1"/>
+          </a:effectRef>
+          <a:fontRef idx="minor">
+            <a:schemeClr val="dk1"/>
+          </a:fontRef>
+        </p:style>
+        <p:txBody>
+          <a:bodyPr wrap="square" rtlCol="0">
+            <a:spAutoFit/>
+          </a:bodyPr>
+          <a:lstStyle/>
+          <a:p>
+            <a:pPr algn="ctr"/>
+            <a:r>
+              <a:rPr lang="en-US" sz="1200" b="1">
+                <a:latin typeface="Consolas" panose="020B0609020204030204" pitchFamily="49" charset="0"/>
+                <a:cs typeface="Times New Roman" panose="02020603050405020304" pitchFamily="18" charset="0"/>
+              </a:rPr>
+              <a:t>HistogramConfig</a:t>
+            </a:r>
+          </a:p>
+          <a:p>
+            <a:pPr algn="ctr"/>
+            <a:r>
+              <a:rPr lang="en-US" sz="1200">
+                <a:latin typeface="Consolas" panose="020B0609020204030204" pitchFamily="49" charset="0"/>
+                <a:cs typeface="Times New Roman" panose="02020603050405020304" pitchFamily="18" charset="0"/>
+              </a:rPr>
+              <a:t>bins: BinsConfig</a:t>
+            </a:r>
+          </a:p>
+          <a:p>
+            <a:pPr algn="ctr"/>
+            <a:r>
+              <a:rPr lang="en-US" sz="1200">
+                <a:latin typeface="Consolas" panose="020B0609020204030204" pitchFamily="49" charset="0"/>
+                <a:cs typeface="Times New Roman" panose="02020603050405020304" pitchFamily="18" charset="0"/>
+              </a:rPr>
+              <a:t>labels: LabelsConfig</a:t>
+            </a:r>
+          </a:p>
+          <a:p>
+            <a:pPr algn="ctr"/>
+            <a:r>
+              <a:rPr lang="en-US" sz="1200">
+                <a:latin typeface="Consolas" panose="020B0609020204030204" pitchFamily="49" charset="0"/>
+                <a:cs typeface="Times New Roman" panose="02020603050405020304" pitchFamily="18" charset="0"/>
+              </a:rPr>
+              <a:t>style: StyleConfig</a:t>
+            </a:r>
+          </a:p>
+          <a:p>
+            <a:pPr algn="ctr"/>
+            <a:r>
+              <a:rPr lang="en-US" sz="1200">
+                <a:latin typeface="Consolas" panose="020B0609020204030204" pitchFamily="49" charset="0"/>
+                <a:cs typeface="Times New Roman" panose="02020603050405020304" pitchFamily="18" charset="0"/>
+              </a:rPr>
+              <a:t>percentile_lines: PercentilesConfig</a:t>
+            </a:r>
+          </a:p>
+          <a:p>
+            <a:pPr algn="ctr"/>
+            <a:r>
+              <a:rPr lang="en-US" sz="1200">
+                <a:latin typeface="Consolas" panose="020B0609020204030204" pitchFamily="49" charset="0"/>
+                <a:cs typeface="Times New Roman" panose="02020603050405020304" pitchFamily="18" charset="0"/>
+              </a:rPr>
+              <a:t>stratification: StratificationConfig</a:t>
+            </a:r>
+          </a:p>
+          <a:p>
+            <a:pPr algn="ctr"/>
+            <a:endParaRPr lang="en-US" sz="1200" b="1">
+              <a:latin typeface="Consolas" panose="020B0609020204030204" pitchFamily="49" charset="0"/>
+              <a:cs typeface="Times New Roman" panose="02020603050405020304" pitchFamily="18" charset="0"/>
+            </a:endParaRPr>
+          </a:p>
+        </p:txBody>
+      </p:sp>
+      <p:sp>
+        <p:nvSpPr>
+          <p:cNvPr id="8" name="TextBox 7">
+            <a:extLst>
+              <a:ext uri="{FF2B5EF4-FFF2-40B4-BE49-F238E27FC236}">
+                <a16:creationId xmlns:a16="http://schemas.microsoft.com/office/drawing/2014/main" id="{C371DB02-8447-1BB9-B74E-B2ED3427D236}"/>
+              </a:ext>
+            </a:extLst>
+          </p:cNvPr>
+          <p:cNvSpPr txBox="1"/>
+          <p:nvPr/>
+        </p:nvSpPr>
+        <p:spPr>
+          <a:xfrm>
+            <a:off x="3874226" y="181142"/>
+            <a:ext cx="5882640" cy="1200329"/>
+          </a:xfrm>
+          <a:prstGeom prst="rect">
+            <a:avLst/>
+          </a:prstGeom>
+          <a:noFill/>
+        </p:spPr>
+        <p:txBody>
+          <a:bodyPr wrap="square" rtlCol="0">
+            <a:spAutoFit/>
+          </a:bodyPr>
+          <a:lstStyle/>
+          <a:p>
+            <a:r>
+              <a:rPr lang="en-US" sz="1200" b="1">
+                <a:latin typeface="Consolas" panose="020B0609020204030204" pitchFamily="49" charset="0"/>
+              </a:rPr>
+              <a:t>Class Method Constructors</a:t>
+            </a:r>
+          </a:p>
+          <a:p>
+            <a:r>
+              <a:rPr lang="en-US" sz="1200" i="1">
+                <a:latin typeface="Consolas" panose="020B0609020204030204" pitchFamily="49" charset="0"/>
+              </a:rPr>
+              <a:t>build_with_defaults</a:t>
+            </a:r>
+            <a:r>
+              <a:rPr lang="en-US" sz="1200">
+                <a:latin typeface="Consolas" panose="020B0609020204030204" pitchFamily="49" charset="0"/>
+              </a:rPr>
+              <a:t>() -&gt; HistogramConfig</a:t>
+            </a:r>
+          </a:p>
+          <a:p>
+            <a:r>
+              <a:rPr lang="en-US" sz="1200" i="1">
+                <a:latin typeface="Consolas" panose="020B0609020204030204" pitchFamily="49" charset="0"/>
+              </a:rPr>
+              <a:t>build_from_yaml</a:t>
+            </a:r>
+            <a:r>
+              <a:rPr lang="en-US" sz="1200">
+                <a:latin typeface="Consolas" panose="020B0609020204030204" pitchFamily="49" charset="0"/>
+              </a:rPr>
+              <a:t>(path) -&gt; HistogramConfig</a:t>
+            </a:r>
+            <a:br>
+              <a:rPr lang="en-US" sz="1200">
+                <a:latin typeface="Consolas" panose="020B0609020204030204" pitchFamily="49" charset="0"/>
+              </a:rPr>
+            </a:br>
+            <a:endParaRPr lang="en-US" sz="1200">
+              <a:latin typeface="Consolas" panose="020B0609020204030204" pitchFamily="49" charset="0"/>
+            </a:endParaRPr>
+          </a:p>
+          <a:p>
+            <a:r>
+              <a:rPr lang="en-US" sz="1200" b="1">
+                <a:latin typeface="Consolas" panose="020B0609020204030204" pitchFamily="49" charset="0"/>
+              </a:rPr>
+              <a:t>Method</a:t>
+            </a:r>
+          </a:p>
+          <a:p>
+            <a:r>
+              <a:rPr lang="en-US" sz="1200" i="1">
+                <a:latin typeface="Consolas" panose="020B0609020204030204" pitchFamily="49" charset="0"/>
+              </a:rPr>
+              <a:t>to_yaml</a:t>
+            </a:r>
+            <a:r>
+              <a:rPr lang="en-US" sz="1200">
+                <a:latin typeface="Consolas" panose="020B0609020204030204" pitchFamily="49" charset="0"/>
+              </a:rPr>
+              <a:t>(path) -&gt; None</a:t>
+            </a:r>
+          </a:p>
+        </p:txBody>
+      </p:sp>
+      <p:sp>
+        <p:nvSpPr>
+          <p:cNvPr id="3" name="TextBox 2">
+            <a:extLst>
+              <a:ext uri="{FF2B5EF4-FFF2-40B4-BE49-F238E27FC236}">
+                <a16:creationId xmlns:a16="http://schemas.microsoft.com/office/drawing/2014/main" id="{159900D8-9F94-3733-850B-DA6FEFA1EFC5}"/>
+              </a:ext>
+            </a:extLst>
+          </p:cNvPr>
+          <p:cNvSpPr txBox="1"/>
+          <p:nvPr/>
+        </p:nvSpPr>
+        <p:spPr>
+          <a:xfrm>
+            <a:off x="564204" y="1563068"/>
+            <a:ext cx="3044758" cy="430887"/>
+          </a:xfrm>
+          <a:prstGeom prst="rect">
+            <a:avLst/>
+          </a:prstGeom>
+          <a:noFill/>
+        </p:spPr>
+        <p:txBody>
+          <a:bodyPr wrap="square" rtlCol="0">
+            <a:spAutoFit/>
+          </a:bodyPr>
+          <a:lstStyle/>
+          <a:p>
+            <a:r>
+              <a:rPr lang="en-US" sz="1100">
+                <a:latin typeface="Times New Roman" panose="02020603050405020304" pitchFamily="18" charset="0"/>
+                <a:cs typeface="Times New Roman" panose="02020603050405020304" pitchFamily="18" charset="0"/>
+              </a:rPr>
+              <a:t>subclasses check that there is enough information for bins, labels, etc...</a:t>
+            </a:r>
+          </a:p>
+        </p:txBody>
+      </p:sp>
+    </p:spTree>
+    <p:extLst>
+      <p:ext uri="{BB962C8B-B14F-4D97-AF65-F5344CB8AC3E}">
+        <p14:creationId xmlns:p14="http://schemas.microsoft.com/office/powerpoint/2010/main" val="1887631711"/>
+      </p:ext>
+    </p:extLst>
+  </p:cSld>
+  <p:clrMapOvr>
+    <a:masterClrMapping/>
+  </p:clrMapOvr>
+</p:sld>
+</file>
+
+<file path=ppt/slides/slide15.xml><?xml version="1.0" encoding="utf-8"?>
+<p:sld xmlns:a="http://schemas.openxmlformats.org/drawingml/2006/main" xmlns:r="http://schemas.openxmlformats.org/officeDocument/2006/relationships" xmlns:p="http://schemas.openxmlformats.org/presentationml/2006/main">
+  <p:cSld>
+    <p:spTree>
+      <p:nvGrpSpPr>
+        <p:cNvPr id="1" name=""/>
+        <p:cNvGrpSpPr/>
+        <p:nvPr/>
+      </p:nvGrpSpPr>
+      <p:grpSpPr>
+        <a:xfrm>
+          <a:off x="0" y="0"/>
+          <a:ext cx="0" cy="0"/>
+          <a:chOff x="0" y="0"/>
+          <a:chExt cx="0" cy="0"/>
+        </a:xfrm>
+      </p:grpSpPr>
+      <p:sp>
+        <p:nvSpPr>
+          <p:cNvPr id="2" name="TextBox 1">
+            <a:extLst>
+              <a:ext uri="{FF2B5EF4-FFF2-40B4-BE49-F238E27FC236}">
+                <a16:creationId xmlns:a16="http://schemas.microsoft.com/office/drawing/2014/main" id="{0C378200-6871-541B-180D-80B335EA2BAA}"/>
+              </a:ext>
+            </a:extLst>
+          </p:cNvPr>
+          <p:cNvSpPr txBox="1"/>
+          <p:nvPr/>
+        </p:nvSpPr>
+        <p:spPr>
+          <a:xfrm>
+            <a:off x="312420" y="371147"/>
+            <a:ext cx="8831580" cy="4185761"/>
+          </a:xfrm>
+          <a:prstGeom prst="rect">
+            <a:avLst/>
+          </a:prstGeom>
+          <a:noFill/>
+        </p:spPr>
+        <p:txBody>
+          <a:bodyPr wrap="square" rtlCol="0">
+            <a:spAutoFit/>
+          </a:bodyPr>
+          <a:lstStyle/>
+          <a:p>
+            <a:r>
+              <a:rPr lang="en-US" sz="1400" b="1"/>
+              <a:t>Vignette # 3:</a:t>
+            </a:r>
+          </a:p>
+          <a:p>
+            <a:r>
+              <a:rPr lang="en-US" sz="1400"/>
+              <a:t>You have cleaned your hospitalization data and you know how long individual stays last. Now you want to understand each patient's full hospitalization burden during their observation period. You want to know: how many days was each patient hospitalized? Where in their observation period did those hospitalizations fall? This sounds like a simple aggregation. It is not. Before writing a single line of code you must make at least six decisions.</a:t>
+            </a:r>
+          </a:p>
+          <a:p>
+            <a:r>
+              <a:rPr lang="en-US" sz="1400" b="1"/>
+              <a:t>Problem 1 — What is the observation period? A fixed calendar year, an age window, or a window anchored to an index date — three different designs, three different constructions, same downstream analysis. A script that hardcodes obs_start = "2022-01-01" has made this choice silently.Problem 2 — What happens when a hospitalization crosses the boundary? A patient admitted December 15 and discharged January 20 must be clipped to the period. A script that does not clip systematically overcounts active days for patients near the boundaries.Problem 3 — What is a meaningful gap? A discharge on March 14 and readmission on March 15 — one hospitalization or two? This decision must be explicit, documented, and consistent with your cleaning choices. A script buries it in a comparison operator on line 47.Problem 4 — What about patients with no hospitalizations? They are real patients with real observation periods. A script that joins on hospitalizations silently drops them. Your denominator is wrong and you may not notice.Problem 5 — What about overlapping stays? Already handled by EventsCleaner — but only if you made that choice explicitly. If you skipped it, your active day counts are inflated.Problem 6 — How do you see the patterns before you summarize? A table of active days per patient tells you the distribution. It does not tell you whether patients tend to cluster hospitalizations early, finish early, have long gaps, or have a single dominant stay. You need to see the data before you summarize it.</a:t>
+            </a:r>
+            <a:endParaRPr lang="en-US" sz="1400"/>
+          </a:p>
+        </p:txBody>
+      </p:sp>
+    </p:spTree>
+    <p:extLst>
+      <p:ext uri="{BB962C8B-B14F-4D97-AF65-F5344CB8AC3E}">
+        <p14:creationId xmlns:p14="http://schemas.microsoft.com/office/powerpoint/2010/main" val="3549107990"/>
+      </p:ext>
+    </p:extLst>
+  </p:cSld>
+  <p:clrMapOvr>
+    <a:masterClrMapping/>
+  </p:clrMapOvr>
+</p:sld>
+</file>
+
+<file path=ppt/slides/slide16.xml><?xml version="1.0" encoding="utf-8"?>
+<p:sld xmlns:a="http://schemas.openxmlformats.org/drawingml/2006/main" xmlns:r="http://schemas.openxmlformats.org/officeDocument/2006/relationships" xmlns:p="http://schemas.openxmlformats.org/presentationml/2006/main">
+  <p:cSld>
+    <p:spTree>
+      <p:nvGrpSpPr>
+        <p:cNvPr id="1" name=""/>
+        <p:cNvGrpSpPr/>
+        <p:nvPr/>
+      </p:nvGrpSpPr>
+      <p:grpSpPr>
+        <a:xfrm>
+          <a:off x="0" y="0"/>
+          <a:ext cx="0" cy="0"/>
+          <a:chOff x="0" y="0"/>
+          <a:chExt cx="0" cy="0"/>
+        </a:xfrm>
+      </p:grpSpPr>
+      <p:sp>
+        <p:nvSpPr>
+          <p:cNvPr id="4" name="TextBox 3">
+            <a:extLst>
+              <a:ext uri="{FF2B5EF4-FFF2-40B4-BE49-F238E27FC236}">
+                <a16:creationId xmlns:a16="http://schemas.microsoft.com/office/drawing/2014/main" id="{E6F31E6C-6343-C599-499C-7C985D1DC1FA}"/>
+              </a:ext>
+            </a:extLst>
+          </p:cNvPr>
+          <p:cNvSpPr txBox="1"/>
+          <p:nvPr/>
+        </p:nvSpPr>
+        <p:spPr>
+          <a:xfrm>
+            <a:off x="2727960" y="3771346"/>
+            <a:ext cx="6187440" cy="1200329"/>
+          </a:xfrm>
+          <a:prstGeom prst="rect">
+            <a:avLst/>
+          </a:prstGeom>
+          <a:noFill/>
+        </p:spPr>
+        <p:txBody>
+          <a:bodyPr wrap="square">
+            <a:spAutoFit/>
+          </a:bodyPr>
+          <a:lstStyle/>
+          <a:p>
+            <a:r>
+              <a:rPr lang="en-US" sz="1200"/>
+              <a:t>No configuration files. No specific error messages — a wrong column name gives you a KeyError, a bad date gives you a silent NaN, a logic error gives you wrong numbers with no warning. The meaningful gap is hardcoded. </a:t>
+            </a:r>
+          </a:p>
+          <a:p>
+            <a:endParaRPr lang="en-US" sz="1200"/>
+          </a:p>
+          <a:p>
+            <a:r>
+              <a:rPr lang="en-US" sz="1200"/>
+              <a:t>The eventus version is 6 lines of code, two YAML files, and specific errors that tell you exactly what went wrong.</a:t>
+            </a:r>
+            <a:endParaRPr lang="en-US" sz="1200" i="1"/>
+          </a:p>
+        </p:txBody>
+      </p:sp>
+      <p:pic>
+        <p:nvPicPr>
+          <p:cNvPr id="8" name="Picture 7">
+            <a:extLst>
+              <a:ext uri="{FF2B5EF4-FFF2-40B4-BE49-F238E27FC236}">
+                <a16:creationId xmlns:a16="http://schemas.microsoft.com/office/drawing/2014/main" id="{6A1AEF2B-E7B4-9BA0-B09C-E25CF08B102D}"/>
+              </a:ext>
+            </a:extLst>
+          </p:cNvPr>
+          <p:cNvPicPr>
+            <a:picLocks noChangeAspect="1"/>
+          </p:cNvPicPr>
+          <p:nvPr/>
+        </p:nvPicPr>
+        <p:blipFill>
+          <a:blip r:embed="rId2"/>
+          <a:stretch>
+            <a:fillRect/>
+          </a:stretch>
+        </p:blipFill>
+        <p:spPr>
+          <a:xfrm>
+            <a:off x="603975" y="413763"/>
+            <a:ext cx="7086964" cy="3124361"/>
+          </a:xfrm>
+          <a:prstGeom prst="rect">
+            <a:avLst/>
+          </a:prstGeom>
+        </p:spPr>
+      </p:pic>
+    </p:spTree>
+    <p:extLst>
+      <p:ext uri="{BB962C8B-B14F-4D97-AF65-F5344CB8AC3E}">
+        <p14:creationId xmlns:p14="http://schemas.microsoft.com/office/powerpoint/2010/main" val="2387680696"/>
+      </p:ext>
+    </p:extLst>
+  </p:cSld>
+  <p:clrMapOvr>
+    <a:masterClrMapping/>
+  </p:clrMapOvr>
+</p:sld>
+</file>
+
+<file path=ppt/slides/slide17.xml><?xml version="1.0" encoding="utf-8"?>
+<p:sld xmlns:a="http://schemas.openxmlformats.org/drawingml/2006/main" xmlns:r="http://schemas.openxmlformats.org/officeDocument/2006/relationships" xmlns:p="http://schemas.openxmlformats.org/presentationml/2006/main">
+  <p:cSld>
+    <p:spTree>
+      <p:nvGrpSpPr>
+        <p:cNvPr id="1" name=""/>
+        <p:cNvGrpSpPr/>
+        <p:nvPr/>
+      </p:nvGrpSpPr>
+      <p:grpSpPr>
+        <a:xfrm>
+          <a:off x="0" y="0"/>
+          <a:ext cx="0" cy="0"/>
+          <a:chOff x="0" y="0"/>
+          <a:chExt cx="0" cy="0"/>
+        </a:xfrm>
+      </p:grpSpPr>
+    </p:spTree>
+    <p:extLst>
+      <p:ext uri="{BB962C8B-B14F-4D97-AF65-F5344CB8AC3E}">
+        <p14:creationId xmlns:p14="http://schemas.microsoft.com/office/powerpoint/2010/main" val="678041041"/>
+      </p:ext>
+    </p:extLst>
+  </p:cSld>
+  <p:clrMapOvr>
+    <a:masterClrMapping/>
+  </p:clrMapOvr>
+</p:sld>
+</file>
+
+<file path=ppt/slides/slide18.xml><?xml version="1.0" encoding="utf-8"?>
+<p:sld xmlns:a="http://schemas.openxmlformats.org/drawingml/2006/main" xmlns:r="http://schemas.openxmlformats.org/officeDocument/2006/relationships" xmlns:p="http://schemas.openxmlformats.org/presentationml/2006/main">
+  <p:cSld>
+    <p:spTree>
+      <p:nvGrpSpPr>
+        <p:cNvPr id="1" name="">
+          <a:extLst>
+            <a:ext uri="{FF2B5EF4-FFF2-40B4-BE49-F238E27FC236}">
+              <a16:creationId xmlns:a16="http://schemas.microsoft.com/office/drawing/2014/main" id="{9FA8E370-2D86-267B-C161-050A9525F147}"/>
+            </a:ext>
+          </a:extLst>
+        </p:cNvPr>
+        <p:cNvGrpSpPr/>
+        <p:nvPr/>
+      </p:nvGrpSpPr>
+      <p:grpSpPr>
+        <a:xfrm>
+          <a:off x="0" y="0"/>
+          <a:ext cx="0" cy="0"/>
+          <a:chOff x="0" y="0"/>
+          <a:chExt cx="0" cy="0"/>
+        </a:xfrm>
+      </p:grpSpPr>
+      <p:sp>
+        <p:nvSpPr>
+          <p:cNvPr id="3" name="TextBox 2">
+            <a:extLst>
+              <a:ext uri="{FF2B5EF4-FFF2-40B4-BE49-F238E27FC236}">
+                <a16:creationId xmlns:a16="http://schemas.microsoft.com/office/drawing/2014/main" id="{63A2609B-A8FE-52AB-94BD-9EA64CC875B8}"/>
+              </a:ext>
+            </a:extLst>
+          </p:cNvPr>
+          <p:cNvSpPr txBox="1"/>
+          <p:nvPr/>
+        </p:nvSpPr>
+        <p:spPr>
+          <a:xfrm>
+            <a:off x="53340" y="175260"/>
+            <a:ext cx="8831580" cy="2893100"/>
+          </a:xfrm>
+          <a:prstGeom prst="rect">
+            <a:avLst/>
+          </a:prstGeom>
+          <a:noFill/>
+        </p:spPr>
+        <p:txBody>
+          <a:bodyPr wrap="square" rtlCol="0">
+            <a:spAutoFit/>
+          </a:bodyPr>
+          <a:lstStyle/>
+          <a:p>
+            <a:r>
+              <a:rPr lang="en-US" sz="1400" b="1"/>
+              <a:t>Vignette #4:</a:t>
+            </a:r>
+          </a:p>
+          <a:p>
+            <a:r>
+              <a:rPr lang="en-US" sz="1400"/>
+              <a:t>You have clean hospitalization data. You want to see it — not a summary statistic, but the actual events: where in each patient's period did they occur? Were they clustered early? Spread throughout? Did some patients have long gaps and then a burst? These questions generate hypotheses. You cannot ask them from a table.The right visualization is a stacked bar chart. </a:t>
+            </a:r>
+          </a:p>
+          <a:p>
+            <a:endParaRPr lang="en-US" sz="1400"/>
+          </a:p>
+          <a:p>
+            <a:r>
+              <a:rPr lang="en-US" sz="1400"/>
+              <a:t>The problems:</a:t>
+            </a:r>
+          </a:p>
+          <a:p>
+            <a:pPr marL="285750" indent="-285750">
+              <a:buFont typeface="Arial" panose="020B0604020202020204" pitchFamily="34" charset="0"/>
+              <a:buChar char="•"/>
+            </a:pPr>
+            <a:r>
+              <a:rPr lang="en-US" sz="1400"/>
+              <a:t>Cleaning the events: null dates, duplicates, causality violations, overlapping stays</a:t>
+            </a:r>
+          </a:p>
+          <a:p>
+            <a:pPr marL="285750" indent="-285750">
+              <a:buFont typeface="Arial" panose="020B0604020202020204" pitchFamily="34" charset="0"/>
+              <a:buChar char="•"/>
+            </a:pPr>
+            <a:r>
+              <a:rPr lang="en-US" sz="1400"/>
+              <a:t>Building the observation period: calendar, age window, or index date — each requires different logic</a:t>
+            </a:r>
+          </a:p>
+          <a:p>
+            <a:pPr marL="285750" indent="-285750">
+              <a:buFont typeface="Arial" panose="020B0604020202020204" pitchFamily="34" charset="0"/>
+              <a:buChar char="•"/>
+            </a:pPr>
+            <a:r>
+              <a:rPr lang="en-US" sz="1400"/>
+              <a:t>Clipping events to each patient's personal period boundary</a:t>
+            </a:r>
+          </a:p>
+          <a:p>
+            <a:pPr marL="285750" indent="-285750">
+              <a:buFont typeface="Arial" panose="020B0604020202020204" pitchFamily="34" charset="0"/>
+              <a:buChar char="•"/>
+            </a:pPr>
+            <a:r>
+              <a:rPr lang="en-US" sz="1400"/>
+              <a:t>Normalizing every event to each patient's own timeline — a different calculation per patient</a:t>
+            </a:r>
+          </a:p>
+          <a:p>
+            <a:pPr marL="285750" indent="-285750">
+              <a:buFont typeface="Arial" panose="020B0604020202020204" pitchFamily="34" charset="0"/>
+              <a:buChar char="•"/>
+            </a:pPr>
+            <a:r>
+              <a:rPr lang="en-US" sz="1400"/>
+              <a:t>Handling patients with no hospitalizations — they still get a row</a:t>
+            </a:r>
+          </a:p>
+          <a:p>
+            <a:pPr marL="285750" indent="-285750">
+              <a:buFont typeface="Arial" panose="020B0604020202020204" pitchFamily="34" charset="0"/>
+              <a:buChar char="•"/>
+            </a:pPr>
+            <a:r>
+              <a:rPr lang="en-US" sz="1400"/>
+              <a:t>Every visual choice hardcoded — colors, bar height, marker style, figure size</a:t>
+            </a:r>
+          </a:p>
+        </p:txBody>
+      </p:sp>
+      <p:sp>
+        <p:nvSpPr>
+          <p:cNvPr id="4" name="TextBox 3">
+            <a:extLst>
+              <a:ext uri="{FF2B5EF4-FFF2-40B4-BE49-F238E27FC236}">
+                <a16:creationId xmlns:a16="http://schemas.microsoft.com/office/drawing/2014/main" id="{B53CA666-4A15-491F-E8A2-CC7C25141802}"/>
+              </a:ext>
+            </a:extLst>
+          </p:cNvPr>
+          <p:cNvSpPr txBox="1"/>
+          <p:nvPr/>
+        </p:nvSpPr>
+        <p:spPr>
+          <a:xfrm>
+            <a:off x="2598420" y="3308925"/>
+            <a:ext cx="6187440" cy="1015663"/>
+          </a:xfrm>
+          <a:prstGeom prst="rect">
+            <a:avLst/>
+          </a:prstGeom>
+          <a:noFill/>
+        </p:spPr>
+        <p:txBody>
+          <a:bodyPr wrap="square">
+            <a:spAutoFit/>
+          </a:bodyPr>
+          <a:lstStyle/>
+          <a:p>
+            <a:r>
+              <a:rPr lang="en-US" sz="1200"/>
+              <a:t>We used Claude to estimate the equivalent pandas and matplotlib script: approximately 490 lines for one observation period type. No configuration file. Switching observation period type requires rewriting three sections. The normalization logic alone is 50 lines.</a:t>
+            </a:r>
+          </a:p>
+          <a:p>
+            <a:r>
+              <a:rPr lang="en-US" sz="1200">
+                <a:solidFill>
+                  <a:srgbClr val="FF0000"/>
+                </a:solidFill>
+              </a:rPr>
+              <a:t>At this length, plotting choices are hardcoded in the script and there are no specific errors thrown. </a:t>
+            </a:r>
+          </a:p>
+        </p:txBody>
+      </p:sp>
+    </p:spTree>
+    <p:extLst>
+      <p:ext uri="{BB962C8B-B14F-4D97-AF65-F5344CB8AC3E}">
+        <p14:creationId xmlns:p14="http://schemas.microsoft.com/office/powerpoint/2010/main" val="2155384216"/>
+      </p:ext>
+    </p:extLst>
+  </p:cSld>
+  <p:clrMapOvr>
+    <a:masterClrMapping/>
+  </p:clrMapOvr>
+</p:sld>
+</file>
+
+<file path=ppt/slides/slide19.xml><?xml version="1.0" encoding="utf-8"?>
+<p:sld xmlns:a="http://schemas.openxmlformats.org/drawingml/2006/main" xmlns:r="http://schemas.openxmlformats.org/officeDocument/2006/relationships" xmlns:p="http://schemas.openxmlformats.org/presentationml/2006/main">
+  <p:cSld>
+    <p:spTree>
+      <p:nvGrpSpPr>
+        <p:cNvPr id="1" name=""/>
+        <p:cNvGrpSpPr/>
+        <p:nvPr/>
+      </p:nvGrpSpPr>
+      <p:grpSpPr>
+        <a:xfrm>
+          <a:off x="0" y="0"/>
+          <a:ext cx="0" cy="0"/>
+          <a:chOff x="0" y="0"/>
+          <a:chExt cx="0" cy="0"/>
+        </a:xfrm>
+      </p:grpSpPr>
+    </p:spTree>
+    <p:extLst>
+      <p:ext uri="{BB962C8B-B14F-4D97-AF65-F5344CB8AC3E}">
+        <p14:creationId xmlns:p14="http://schemas.microsoft.com/office/powerpoint/2010/main" val="1996516940"/>
+      </p:ext>
+    </p:extLst>
+  </p:cSld>
+  <p:clrMapOvr>
+    <a:masterClrMapping/>
+  </p:clrMapOvr>
+</p:sld>
+</file>
+
+<file path=ppt/slides/slide2.xml><?xml version="1.0" encoding="utf-8"?>
+<p:sld xmlns:a="http://schemas.openxmlformats.org/drawingml/2006/main" xmlns:r="http://schemas.openxmlformats.org/officeDocument/2006/relationships" xmlns:p="http://schemas.openxmlformats.org/presentationml/2006/main">
+  <p:cSld>
+    <p:spTree>
+      <p:nvGrpSpPr>
+        <p:cNvPr id="1" name="">
+          <a:extLst>
+            <a:ext uri="{FF2B5EF4-FFF2-40B4-BE49-F238E27FC236}">
+              <a16:creationId xmlns:a16="http://schemas.microsoft.com/office/drawing/2014/main" id="{88B2311B-5986-D612-FC0E-A25E4F7DF889}"/>
+            </a:ext>
+          </a:extLst>
+        </p:cNvPr>
+        <p:cNvGrpSpPr/>
+        <p:nvPr/>
+      </p:nvGrpSpPr>
+      <p:grpSpPr>
+        <a:xfrm>
+          <a:off x="0" y="0"/>
+          <a:ext cx="0" cy="0"/>
+          <a:chOff x="0" y="0"/>
+          <a:chExt cx="0" cy="0"/>
+        </a:xfrm>
+      </p:grpSpPr>
+      <p:sp>
+        <p:nvSpPr>
+          <p:cNvPr id="3" name="TextBox 2">
+            <a:extLst>
+              <a:ext uri="{FF2B5EF4-FFF2-40B4-BE49-F238E27FC236}">
+                <a16:creationId xmlns:a16="http://schemas.microsoft.com/office/drawing/2014/main" id="{501DB637-2C1C-FBDB-3EF1-87BA8019556C}"/>
+              </a:ext>
+            </a:extLst>
+          </p:cNvPr>
+          <p:cNvSpPr txBox="1"/>
+          <p:nvPr/>
+        </p:nvSpPr>
+        <p:spPr>
+          <a:xfrm>
+            <a:off x="53340" y="114300"/>
+            <a:ext cx="8831580" cy="5478423"/>
+          </a:xfrm>
+          <a:prstGeom prst="rect">
+            <a:avLst/>
+          </a:prstGeom>
+          <a:noFill/>
+        </p:spPr>
+        <p:txBody>
+          <a:bodyPr wrap="square" rtlCol="0">
+            <a:spAutoFit/>
+          </a:bodyPr>
+          <a:lstStyle/>
+          <a:p>
+            <a:r>
+              <a:rPr lang="en-US" sz="1400" b="1">
+                <a:latin typeface="Times New Roman" panose="02020603050405020304" pitchFamily="18" charset="0"/>
+                <a:cs typeface="Times New Roman" panose="02020603050405020304" pitchFamily="18" charset="0"/>
+              </a:rPr>
+              <a:t>Without Eventus:</a:t>
+            </a:r>
+          </a:p>
+          <a:p>
+            <a:endParaRPr lang="en-US" sz="1400">
+              <a:latin typeface="Times New Roman" panose="02020603050405020304" pitchFamily="18" charset="0"/>
+              <a:cs typeface="Times New Roman" panose="02020603050405020304" pitchFamily="18" charset="0"/>
+            </a:endParaRPr>
+          </a:p>
+          <a:p>
+            <a:r>
+              <a:rPr lang="en-US" sz="1400">
+                <a:latin typeface="Times New Roman" panose="02020603050405020304" pitchFamily="18" charset="0"/>
+                <a:cs typeface="Times New Roman" panose="02020603050405020304" pitchFamily="18" charset="0"/>
+              </a:rPr>
+              <a:t>We asked Claude to write code to clean hospitalization data with these choices:</a:t>
+            </a:r>
+          </a:p>
+          <a:p>
+            <a:pPr marL="285750" indent="-285750">
+              <a:buFont typeface="Arial" panose="020B0604020202020204" pitchFamily="34" charset="0"/>
+              <a:buChar char="•"/>
+            </a:pPr>
+            <a:r>
+              <a:rPr lang="en-US" sz="1400">
+                <a:latin typeface="Times New Roman" panose="02020603050405020304" pitchFamily="18" charset="0"/>
+                <a:cs typeface="Times New Roman" panose="02020603050405020304" pitchFamily="18" charset="0"/>
+              </a:rPr>
+              <a:t>Drop nulls on patient_id, admit_date, discharge_date</a:t>
+            </a:r>
+          </a:p>
+          <a:p>
+            <a:pPr marL="285750" indent="-285750">
+              <a:buFont typeface="Arial" panose="020B0604020202020204" pitchFamily="34" charset="0"/>
+              <a:buChar char="•"/>
+            </a:pPr>
+            <a:r>
+              <a:rPr lang="en-US" sz="1400">
+                <a:latin typeface="Times New Roman" panose="02020603050405020304" pitchFamily="18" charset="0"/>
+                <a:cs typeface="Times New Roman" panose="02020603050405020304" pitchFamily="18" charset="0"/>
+              </a:rPr>
+              <a:t>Drop implausible dates (before 1920, after 2100)</a:t>
+            </a:r>
+          </a:p>
+          <a:p>
+            <a:pPr marL="285750" indent="-285750">
+              <a:buFont typeface="Arial" panose="020B0604020202020204" pitchFamily="34" charset="0"/>
+              <a:buChar char="•"/>
+            </a:pPr>
+            <a:r>
+              <a:rPr lang="en-US" sz="1400">
+                <a:latin typeface="Times New Roman" panose="02020603050405020304" pitchFamily="18" charset="0"/>
+                <a:cs typeface="Times New Roman" panose="02020603050405020304" pitchFamily="18" charset="0"/>
+              </a:rPr>
+              <a:t>Enforce causality (admit ≤ discharge)</a:t>
+            </a:r>
+          </a:p>
+          <a:p>
+            <a:pPr marL="285750" indent="-285750">
+              <a:buFont typeface="Arial" panose="020B0604020202020204" pitchFamily="34" charset="0"/>
+              <a:buChar char="•"/>
+            </a:pPr>
+            <a:r>
+              <a:rPr lang="en-US" sz="1400">
+                <a:latin typeface="Times New Roman" panose="02020603050405020304" pitchFamily="18" charset="0"/>
+                <a:cs typeface="Times New Roman" panose="02020603050405020304" pitchFamily="18" charset="0"/>
+              </a:rPr>
+              <a:t>Drop exact duplicates</a:t>
+            </a:r>
+          </a:p>
+          <a:p>
+            <a:pPr marL="285750" indent="-285750">
+              <a:buFont typeface="Arial" panose="020B0604020202020204" pitchFamily="34" charset="0"/>
+              <a:buChar char="•"/>
+            </a:pPr>
+            <a:r>
+              <a:rPr lang="en-US" sz="1400">
+                <a:latin typeface="Times New Roman" panose="02020603050405020304" pitchFamily="18" charset="0"/>
+                <a:cs typeface="Times New Roman" panose="02020603050405020304" pitchFamily="18" charset="0"/>
+              </a:rPr>
+              <a:t>Merge overlapping stays (gap = 0 days)</a:t>
+            </a:r>
+          </a:p>
+          <a:p>
+            <a:endParaRPr lang="en-US" sz="1400">
+              <a:latin typeface="Times New Roman" panose="02020603050405020304" pitchFamily="18" charset="0"/>
+              <a:cs typeface="Times New Roman" panose="02020603050405020304" pitchFamily="18" charset="0"/>
+            </a:endParaRPr>
+          </a:p>
+          <a:p>
+            <a:r>
+              <a:rPr lang="en-US" sz="1400">
+                <a:latin typeface="Times New Roman" panose="02020603050405020304" pitchFamily="18" charset="0"/>
+                <a:cs typeface="Times New Roman" panose="02020603050405020304" pitchFamily="18" charset="0"/>
+              </a:rPr>
+              <a:t>Result: </a:t>
+            </a:r>
+          </a:p>
+          <a:p>
+            <a:pPr marL="285750" indent="-285750">
+              <a:buFont typeface="Arial" panose="020B0604020202020204" pitchFamily="34" charset="0"/>
+              <a:buChar char="•"/>
+            </a:pPr>
+            <a:r>
+              <a:rPr lang="en-US" sz="1400">
+                <a:latin typeface="Times New Roman" panose="02020603050405020304" pitchFamily="18" charset="0"/>
+                <a:cs typeface="Times New Roman" panose="02020603050405020304" pitchFamily="18" charset="0"/>
+              </a:rPr>
+              <a:t>61 total lines, 42 lines of actual code</a:t>
+            </a:r>
+          </a:p>
+          <a:p>
+            <a:pPr marL="285750" indent="-285750">
+              <a:buFont typeface="Arial" panose="020B0604020202020204" pitchFamily="34" charset="0"/>
+              <a:buChar char="•"/>
+            </a:pPr>
+            <a:r>
+              <a:rPr lang="en-US" sz="1400">
+                <a:latin typeface="Times New Roman" panose="02020603050405020304" pitchFamily="18" charset="0"/>
+                <a:cs typeface="Times New Roman" panose="02020603050405020304" pitchFamily="18" charset="0"/>
+              </a:rPr>
+              <a:t>The column name "patient_id", "admit_date", "discharge_date" appear hardcoded 33 times across the script.</a:t>
+            </a:r>
+          </a:p>
+          <a:p>
+            <a:endParaRPr lang="en-US" sz="1400">
+              <a:latin typeface="Times New Roman" panose="02020603050405020304" pitchFamily="18" charset="0"/>
+              <a:cs typeface="Times New Roman" panose="02020603050405020304" pitchFamily="18" charset="0"/>
+            </a:endParaRPr>
+          </a:p>
+          <a:p>
+            <a:r>
+              <a:rPr lang="en-US" sz="1400">
+                <a:latin typeface="Times New Roman" panose="02020603050405020304" pitchFamily="18" charset="0"/>
+                <a:cs typeface="Times New Roman" panose="02020603050405020304" pitchFamily="18" charset="0"/>
+              </a:rPr>
+              <a:t>What you don't get:</a:t>
+            </a:r>
+          </a:p>
+          <a:p>
+            <a:pPr marL="285750" indent="-285750">
+              <a:buFont typeface="Arial" panose="020B0604020202020204" pitchFamily="34" charset="0"/>
+              <a:buChar char="•"/>
+            </a:pPr>
+            <a:r>
+              <a:rPr lang="en-US" sz="1400">
+                <a:latin typeface="Times New Roman" panose="02020603050405020304" pitchFamily="18" charset="0"/>
+                <a:cs typeface="Times New Roman" panose="02020603050405020304" pitchFamily="18" charset="0"/>
+              </a:rPr>
+              <a:t>No count of rows dropped at each step</a:t>
+            </a:r>
+          </a:p>
+          <a:p>
+            <a:pPr marL="285750" indent="-285750">
+              <a:buFont typeface="Arial" panose="020B0604020202020204" pitchFamily="34" charset="0"/>
+              <a:buChar char="•"/>
+            </a:pPr>
+            <a:r>
+              <a:rPr lang="en-US" sz="1400">
+                <a:latin typeface="Times New Roman" panose="02020603050405020304" pitchFamily="18" charset="0"/>
+                <a:cs typeface="Times New Roman" panose="02020603050405020304" pitchFamily="18" charset="0"/>
+              </a:rPr>
+              <a:t>No named reason per dropped row</a:t>
+            </a:r>
+          </a:p>
+          <a:p>
+            <a:pPr marL="285750" indent="-285750">
+              <a:buFont typeface="Arial" panose="020B0604020202020204" pitchFamily="34" charset="0"/>
+              <a:buChar char="•"/>
+            </a:pPr>
+            <a:r>
+              <a:rPr lang="en-US" sz="1400">
+                <a:latin typeface="Times New Roman" panose="02020603050405020304" pitchFamily="18" charset="0"/>
+                <a:cs typeface="Times New Roman" panose="02020603050405020304" pitchFamily="18" charset="0"/>
+              </a:rPr>
+              <a:t>The gap=0 choice is a &lt;= buried inside a loop on line 40 — undocumented, not configurable</a:t>
+            </a:r>
+          </a:p>
+          <a:p>
+            <a:pPr marL="285750" indent="-285750">
+              <a:buFont typeface="Arial" panose="020B0604020202020204" pitchFamily="34" charset="0"/>
+              <a:buChar char="•"/>
+            </a:pPr>
+            <a:r>
+              <a:rPr lang="en-US" sz="1400">
+                <a:latin typeface="Times New Roman" panose="02020603050405020304" pitchFamily="18" charset="0"/>
+                <a:cs typeface="Times New Roman" panose="02020603050405020304" pitchFamily="18" charset="0"/>
+              </a:rPr>
+              <a:t>Script is single-use — rename one column in your data warehouse and it breaks in multiple placesN</a:t>
+            </a:r>
+          </a:p>
+          <a:p>
+            <a:pPr marL="285750" indent="-285750">
+              <a:buFont typeface="Arial" panose="020B0604020202020204" pitchFamily="34" charset="0"/>
+              <a:buChar char="•"/>
+            </a:pPr>
+            <a:r>
+              <a:rPr lang="en-US" sz="1400">
+                <a:latin typeface="Times New Roman" panose="02020603050405020304" pitchFamily="18" charset="0"/>
+                <a:cs typeface="Times New Roman" panose="02020603050405020304" pitchFamily="18" charset="0"/>
+              </a:rPr>
+              <a:t>No errors raised — silent failures</a:t>
+            </a:r>
+          </a:p>
+          <a:p>
+            <a:endParaRPr lang="en-US" sz="1400">
+              <a:latin typeface="Times New Roman" panose="02020603050405020304" pitchFamily="18" charset="0"/>
+              <a:cs typeface="Times New Roman" panose="02020603050405020304" pitchFamily="18" charset="0"/>
+            </a:endParaRPr>
+          </a:p>
+          <a:p>
+            <a:r>
+              <a:rPr lang="en-US" sz="1400"/>
+              <a:t>Further tweaks were added to move column names and cleaning choices to global constants at the top — refactored to ~59 lines. Still no audit trail per row, and no documented record of cleaning choices outside of a long script.z</a:t>
+            </a:r>
+          </a:p>
+          <a:p>
+            <a:r>
+              <a:rPr lang="en-US" sz="1400">
+                <a:latin typeface="Times New Roman" panose="02020603050405020304" pitchFamily="18" charset="0"/>
+                <a:cs typeface="Times New Roman" panose="02020603050405020304" pitchFamily="18" charset="0"/>
+              </a:rPr>
+              <a:t>There were also no errors raised. Claude estimated that ~90 lines of code were required to add error transparency.</a:t>
+            </a:r>
+          </a:p>
+          <a:p>
+            <a:endParaRPr lang="en-US" sz="1400">
+              <a:latin typeface="Times New Roman" panose="02020603050405020304" pitchFamily="18" charset="0"/>
+              <a:cs typeface="Times New Roman" panose="02020603050405020304" pitchFamily="18" charset="0"/>
+            </a:endParaRPr>
+          </a:p>
+          <a:p>
+            <a:endParaRPr lang="en-US" sz="1400">
+              <a:latin typeface="Times New Roman" panose="02020603050405020304" pitchFamily="18" charset="0"/>
+              <a:cs typeface="Times New Roman" panose="02020603050405020304" pitchFamily="18" charset="0"/>
+            </a:endParaRPr>
+          </a:p>
+        </p:txBody>
+      </p:sp>
+    </p:spTree>
+    <p:extLst>
+      <p:ext uri="{BB962C8B-B14F-4D97-AF65-F5344CB8AC3E}">
+        <p14:creationId xmlns:p14="http://schemas.microsoft.com/office/powerpoint/2010/main" val="4007074166"/>
+      </p:ext>
+    </p:extLst>
+  </p:cSld>
+  <p:clrMapOvr>
+    <a:masterClrMapping/>
+  </p:clrMapOvr>
+</p:sld>
+</file>
+
+<file path=ppt/slides/slide20.xml><?xml version="1.0" encoding="utf-8"?>
+<p:sld xmlns:a="http://schemas.openxmlformats.org/drawingml/2006/main" xmlns:r="http://schemas.openxmlformats.org/officeDocument/2006/relationships" xmlns:p="http://schemas.openxmlformats.org/presentationml/2006/main">
+  <p:cSld>
+    <p:spTree>
+      <p:nvGrpSpPr>
+        <p:cNvPr id="1" name=""/>
+        <p:cNvGrpSpPr/>
+        <p:nvPr/>
+      </p:nvGrpSpPr>
+      <p:grpSpPr>
+        <a:xfrm>
+          <a:off x="0" y="0"/>
+          <a:ext cx="0" cy="0"/>
+          <a:chOff x="0" y="0"/>
+          <a:chExt cx="0" cy="0"/>
+        </a:xfrm>
+      </p:grpSpPr>
+      <p:sp>
+        <p:nvSpPr>
+          <p:cNvPr id="2" name="TextBox 1">
+            <a:extLst>
+              <a:ext uri="{FF2B5EF4-FFF2-40B4-BE49-F238E27FC236}">
+                <a16:creationId xmlns:a16="http://schemas.microsoft.com/office/drawing/2014/main" id="{F4BD98FE-2ECA-29F0-CBC6-27CDFF0C634B}"/>
+              </a:ext>
+            </a:extLst>
+          </p:cNvPr>
+          <p:cNvSpPr txBox="1"/>
+          <p:nvPr/>
+        </p:nvSpPr>
+        <p:spPr>
+          <a:xfrm>
+            <a:off x="169817" y="634526"/>
+            <a:ext cx="2468881" cy="461665"/>
+          </a:xfrm>
+          <a:prstGeom prst="rect">
+            <a:avLst/>
+          </a:prstGeom>
+          <a:noFill/>
+          <a:ln>
+            <a:solidFill>
+              <a:schemeClr val="accent1"/>
+            </a:solidFill>
+          </a:ln>
+        </p:spPr>
+        <p:txBody>
+          <a:bodyPr wrap="square" rtlCol="0">
+            <a:spAutoFit/>
+          </a:bodyPr>
+          <a:lstStyle/>
+          <a:p>
+            <a:pPr algn="ctr"/>
+            <a:r>
+              <a:rPr lang="en-US" sz="1200">
+                <a:latin typeface="Times New Roman" panose="02020603050405020304" pitchFamily="18" charset="0"/>
+                <a:cs typeface="Times New Roman" panose="02020603050405020304" pitchFamily="18" charset="0"/>
+              </a:rPr>
+              <a:t>Semantics</a:t>
+            </a:r>
+          </a:p>
+          <a:p>
+            <a:pPr algn="ctr"/>
+            <a:r>
+              <a:rPr lang="en-US" sz="1200">
+                <a:latin typeface="Times New Roman" panose="02020603050405020304" pitchFamily="18" charset="0"/>
+                <a:cs typeface="Times New Roman" panose="02020603050405020304" pitchFamily="18" charset="0"/>
+              </a:rPr>
+              <a:t>"I know what columns mean"</a:t>
+            </a:r>
+          </a:p>
+        </p:txBody>
+      </p:sp>
+      <p:sp>
+        <p:nvSpPr>
+          <p:cNvPr id="4" name="TextBox 3">
+            <a:extLst>
+              <a:ext uri="{FF2B5EF4-FFF2-40B4-BE49-F238E27FC236}">
+                <a16:creationId xmlns:a16="http://schemas.microsoft.com/office/drawing/2014/main" id="{60D0BECE-032C-B05E-8016-6B42864B4776}"/>
+              </a:ext>
+            </a:extLst>
+          </p:cNvPr>
+          <p:cNvSpPr txBox="1"/>
+          <p:nvPr/>
+        </p:nvSpPr>
+        <p:spPr>
+          <a:xfrm>
+            <a:off x="169816" y="1329034"/>
+            <a:ext cx="2468881" cy="461665"/>
+          </a:xfrm>
+          <a:prstGeom prst="rect">
+            <a:avLst/>
+          </a:prstGeom>
+          <a:noFill/>
+          <a:ln>
+            <a:solidFill>
+              <a:schemeClr val="accent1"/>
+            </a:solidFill>
+          </a:ln>
+        </p:spPr>
+        <p:txBody>
+          <a:bodyPr wrap="square" rtlCol="0">
+            <a:spAutoFit/>
+          </a:bodyPr>
+          <a:lstStyle/>
+          <a:p>
+            <a:pPr algn="ctr"/>
+            <a:r>
+              <a:rPr lang="en-US" sz="1200">
+                <a:latin typeface="Times New Roman" panose="02020603050405020304" pitchFamily="18" charset="0"/>
+                <a:cs typeface="Times New Roman" panose="02020603050405020304" pitchFamily="18" charset="0"/>
+              </a:rPr>
+              <a:t>Data Objects</a:t>
+            </a:r>
+          </a:p>
+          <a:p>
+            <a:pPr algn="ctr"/>
+            <a:r>
+              <a:rPr lang="en-US" sz="1200">
+                <a:latin typeface="Times New Roman" panose="02020603050405020304" pitchFamily="18" charset="0"/>
+                <a:cs typeface="Times New Roman" panose="02020603050405020304" pitchFamily="18" charset="0"/>
+              </a:rPr>
+              <a:t>"I hold clean/validated data"</a:t>
+            </a:r>
+          </a:p>
+        </p:txBody>
+      </p:sp>
+      <p:sp>
+        <p:nvSpPr>
+          <p:cNvPr id="5" name="TextBox 4">
+            <a:extLst>
+              <a:ext uri="{FF2B5EF4-FFF2-40B4-BE49-F238E27FC236}">
+                <a16:creationId xmlns:a16="http://schemas.microsoft.com/office/drawing/2014/main" id="{AAD37947-6237-1437-B713-3D564F8E3ED7}"/>
+              </a:ext>
+            </a:extLst>
+          </p:cNvPr>
+          <p:cNvSpPr txBox="1"/>
+          <p:nvPr/>
+        </p:nvSpPr>
+        <p:spPr>
+          <a:xfrm>
+            <a:off x="141515" y="2001237"/>
+            <a:ext cx="2468881" cy="461665"/>
+          </a:xfrm>
+          <a:prstGeom prst="rect">
+            <a:avLst/>
+          </a:prstGeom>
+          <a:noFill/>
+          <a:ln>
+            <a:solidFill>
+              <a:schemeClr val="accent1"/>
+            </a:solidFill>
+          </a:ln>
+        </p:spPr>
+        <p:txBody>
+          <a:bodyPr wrap="square" rtlCol="0">
+            <a:spAutoFit/>
+          </a:bodyPr>
+          <a:lstStyle/>
+          <a:p>
+            <a:pPr algn="ctr"/>
+            <a:r>
+              <a:rPr lang="en-US" sz="1200">
+                <a:latin typeface="Times New Roman" panose="02020603050405020304" pitchFamily="18" charset="0"/>
+                <a:cs typeface="Times New Roman" panose="02020603050405020304" pitchFamily="18" charset="0"/>
+              </a:rPr>
+              <a:t>Analyzers</a:t>
+            </a:r>
+          </a:p>
+          <a:p>
+            <a:pPr algn="ctr"/>
+            <a:r>
+              <a:rPr lang="en-US" sz="1200">
+                <a:latin typeface="Times New Roman" panose="02020603050405020304" pitchFamily="18" charset="0"/>
+                <a:cs typeface="Times New Roman" panose="02020603050405020304" pitchFamily="18" charset="0"/>
+              </a:rPr>
+              <a:t>"I compute shareable stuff"</a:t>
+            </a:r>
+          </a:p>
+        </p:txBody>
+      </p:sp>
+      <p:sp>
+        <p:nvSpPr>
+          <p:cNvPr id="6" name="TextBox 5">
+            <a:extLst>
+              <a:ext uri="{FF2B5EF4-FFF2-40B4-BE49-F238E27FC236}">
+                <a16:creationId xmlns:a16="http://schemas.microsoft.com/office/drawing/2014/main" id="{F2F159B6-AAD1-8C7B-FB9A-D5654E8FD269}"/>
+              </a:ext>
+            </a:extLst>
+          </p:cNvPr>
+          <p:cNvSpPr txBox="1"/>
+          <p:nvPr/>
+        </p:nvSpPr>
+        <p:spPr>
+          <a:xfrm>
+            <a:off x="169814" y="2676460"/>
+            <a:ext cx="2468881" cy="461665"/>
+          </a:xfrm>
+          <a:prstGeom prst="rect">
+            <a:avLst/>
+          </a:prstGeom>
+          <a:noFill/>
+          <a:ln>
+            <a:solidFill>
+              <a:schemeClr val="accent1"/>
+            </a:solidFill>
+          </a:ln>
+        </p:spPr>
+        <p:txBody>
+          <a:bodyPr wrap="square" rtlCol="0">
+            <a:spAutoFit/>
+          </a:bodyPr>
+          <a:lstStyle/>
+          <a:p>
+            <a:pPr algn="ctr"/>
+            <a:r>
+              <a:rPr lang="en-US" sz="1200">
+                <a:latin typeface="Times New Roman" panose="02020603050405020304" pitchFamily="18" charset="0"/>
+                <a:cs typeface="Times New Roman" panose="02020603050405020304" pitchFamily="18" charset="0"/>
+              </a:rPr>
+              <a:t>Intermediates</a:t>
+            </a:r>
+          </a:p>
+          <a:p>
+            <a:pPr algn="ctr"/>
+            <a:r>
+              <a:rPr lang="en-US" sz="1200">
+                <a:latin typeface="Times New Roman" panose="02020603050405020304" pitchFamily="18" charset="0"/>
+                <a:cs typeface="Times New Roman" panose="02020603050405020304" pitchFamily="18" charset="0"/>
+              </a:rPr>
+              <a:t>"Pipe-delimited columnar contract"</a:t>
+            </a:r>
+          </a:p>
+        </p:txBody>
+      </p:sp>
+      <p:sp>
+        <p:nvSpPr>
+          <p:cNvPr id="7" name="TextBox 6">
+            <a:extLst>
+              <a:ext uri="{FF2B5EF4-FFF2-40B4-BE49-F238E27FC236}">
+                <a16:creationId xmlns:a16="http://schemas.microsoft.com/office/drawing/2014/main" id="{0798FD70-B53D-EFA2-F0F4-CE70E0B3D67C}"/>
+              </a:ext>
+            </a:extLst>
+          </p:cNvPr>
+          <p:cNvSpPr txBox="1"/>
+          <p:nvPr/>
+        </p:nvSpPr>
+        <p:spPr>
+          <a:xfrm>
+            <a:off x="169817" y="3517334"/>
+            <a:ext cx="2468881" cy="461665"/>
+          </a:xfrm>
+          <a:prstGeom prst="rect">
+            <a:avLst/>
+          </a:prstGeom>
+          <a:noFill/>
+          <a:ln>
+            <a:solidFill>
+              <a:schemeClr val="accent1"/>
+            </a:solidFill>
+          </a:ln>
+        </p:spPr>
+        <p:txBody>
+          <a:bodyPr wrap="square" rtlCol="0">
+            <a:spAutoFit/>
+          </a:bodyPr>
+          <a:lstStyle/>
+          <a:p>
+            <a:pPr algn="ctr"/>
+            <a:r>
+              <a:rPr lang="en-US" sz="1200">
+                <a:latin typeface="Times New Roman" panose="02020603050405020304" pitchFamily="18" charset="0"/>
+                <a:cs typeface="Times New Roman" panose="02020603050405020304" pitchFamily="18" charset="0"/>
+              </a:rPr>
+              <a:t>Visualizers</a:t>
+            </a:r>
+          </a:p>
+          <a:p>
+            <a:pPr algn="ctr"/>
+            <a:r>
+              <a:rPr lang="en-US" sz="1200">
+                <a:latin typeface="Times New Roman" panose="02020603050405020304" pitchFamily="18" charset="0"/>
+                <a:cs typeface="Times New Roman" panose="02020603050405020304" pitchFamily="18" charset="0"/>
+              </a:rPr>
+              <a:t>"I draw pictures"</a:t>
+            </a:r>
+          </a:p>
+        </p:txBody>
+      </p:sp>
+      <p:sp>
+        <p:nvSpPr>
+          <p:cNvPr id="8" name="TextBox 7">
+            <a:extLst>
+              <a:ext uri="{FF2B5EF4-FFF2-40B4-BE49-F238E27FC236}">
+                <a16:creationId xmlns:a16="http://schemas.microsoft.com/office/drawing/2014/main" id="{5D17D607-8AB3-D7CA-2898-CC19C4FAC22D}"/>
+              </a:ext>
+            </a:extLst>
+          </p:cNvPr>
+          <p:cNvSpPr txBox="1"/>
+          <p:nvPr/>
+        </p:nvSpPr>
+        <p:spPr>
+          <a:xfrm>
+            <a:off x="2984862" y="726858"/>
+            <a:ext cx="2847703" cy="461665"/>
+          </a:xfrm>
+          <a:prstGeom prst="rect">
+            <a:avLst/>
+          </a:prstGeom>
+          <a:noFill/>
+        </p:spPr>
+        <p:txBody>
+          <a:bodyPr wrap="square" rtlCol="0">
+            <a:spAutoFit/>
+          </a:bodyPr>
+          <a:lstStyle/>
+          <a:p>
+            <a:r>
+              <a:rPr lang="en-US" sz="1200">
+                <a:latin typeface="Consolas" panose="020B0609020204030204" pitchFamily="49" charset="0"/>
+                <a:cs typeface="Vrinda" panose="020B0502040204020203" pitchFamily="34" charset="0"/>
+              </a:rPr>
+              <a:t>EventSemantics, OccurrenceSemantics</a:t>
+            </a:r>
+          </a:p>
+        </p:txBody>
+      </p:sp>
+      <p:sp>
+        <p:nvSpPr>
+          <p:cNvPr id="9" name="TextBox 8">
+            <a:extLst>
+              <a:ext uri="{FF2B5EF4-FFF2-40B4-BE49-F238E27FC236}">
+                <a16:creationId xmlns:a16="http://schemas.microsoft.com/office/drawing/2014/main" id="{0FC39483-E1D0-FA0F-7227-A0A4E5CD4E10}"/>
+              </a:ext>
+            </a:extLst>
+          </p:cNvPr>
+          <p:cNvSpPr txBox="1"/>
+          <p:nvPr/>
+        </p:nvSpPr>
+        <p:spPr>
+          <a:xfrm>
+            <a:off x="2984862" y="1421366"/>
+            <a:ext cx="5225144" cy="461665"/>
+          </a:xfrm>
+          <a:prstGeom prst="rect">
+            <a:avLst/>
+          </a:prstGeom>
+          <a:noFill/>
+        </p:spPr>
+        <p:txBody>
+          <a:bodyPr wrap="square" rtlCol="0">
+            <a:spAutoFit/>
+          </a:bodyPr>
+          <a:lstStyle/>
+          <a:p>
+            <a:r>
+              <a:rPr lang="en-US" sz="1200">
+                <a:latin typeface="Consolas" panose="020B0609020204030204" pitchFamily="49" charset="0"/>
+                <a:cs typeface="Vrinda" panose="020B0502040204020203" pitchFamily="34" charset="0"/>
+              </a:rPr>
+              <a:t>Events, EventsPerEntity, Spans, Occurrences, OccurrencesPerEntity</a:t>
+            </a:r>
+          </a:p>
+        </p:txBody>
+      </p:sp>
+      <p:sp>
+        <p:nvSpPr>
+          <p:cNvPr id="10" name="TextBox 9">
+            <a:extLst>
+              <a:ext uri="{FF2B5EF4-FFF2-40B4-BE49-F238E27FC236}">
+                <a16:creationId xmlns:a16="http://schemas.microsoft.com/office/drawing/2014/main" id="{5AD248FF-441C-8730-A19A-C6709E01C765}"/>
+              </a:ext>
+            </a:extLst>
+          </p:cNvPr>
+          <p:cNvSpPr txBox="1"/>
+          <p:nvPr/>
+        </p:nvSpPr>
+        <p:spPr>
+          <a:xfrm>
+            <a:off x="2984862" y="2001237"/>
+            <a:ext cx="5989323" cy="461665"/>
+          </a:xfrm>
+          <a:prstGeom prst="rect">
+            <a:avLst/>
+          </a:prstGeom>
+          <a:noFill/>
+        </p:spPr>
+        <p:txBody>
+          <a:bodyPr wrap="square" rtlCol="0">
+            <a:spAutoFit/>
+          </a:bodyPr>
+          <a:lstStyle/>
+          <a:p>
+            <a:r>
+              <a:rPr lang="en-US" sz="1200">
+                <a:latin typeface="Consolas" panose="020B0609020204030204" pitchFamily="49" charset="0"/>
+                <a:cs typeface="Vrinda" panose="020B0502040204020203" pitchFamily="34" charset="0"/>
+              </a:rPr>
+              <a:t>EventsWithinSpanAnalyzer, OccurrencesWithinSpanAnalyzer, ***OccurrencesWithinEventsAnalyzer</a:t>
+            </a:r>
+          </a:p>
+        </p:txBody>
+      </p:sp>
+      <p:sp>
+        <p:nvSpPr>
+          <p:cNvPr id="11" name="TextBox 10">
+            <a:extLst>
+              <a:ext uri="{FF2B5EF4-FFF2-40B4-BE49-F238E27FC236}">
+                <a16:creationId xmlns:a16="http://schemas.microsoft.com/office/drawing/2014/main" id="{E9E67F2D-B886-0FA2-5EAB-6CE2D88D6F8A}"/>
+              </a:ext>
+            </a:extLst>
+          </p:cNvPr>
+          <p:cNvSpPr txBox="1"/>
+          <p:nvPr/>
+        </p:nvSpPr>
+        <p:spPr>
+          <a:xfrm>
+            <a:off x="2984861" y="2692503"/>
+            <a:ext cx="5989323" cy="461665"/>
+          </a:xfrm>
+          <a:prstGeom prst="rect">
+            <a:avLst/>
+          </a:prstGeom>
+          <a:noFill/>
+        </p:spPr>
+        <p:txBody>
+          <a:bodyPr wrap="square" rtlCol="0">
+            <a:spAutoFit/>
+          </a:bodyPr>
+          <a:lstStyle/>
+          <a:p>
+            <a:r>
+              <a:rPr lang="en-US" sz="1200">
+                <a:latin typeface="Consolas" panose="020B0609020204030204" pitchFamily="49" charset="0"/>
+                <a:cs typeface="Vrinda" panose="020B0502040204020203" pitchFamily="34" charset="0"/>
+              </a:rPr>
+              <a:t>PipeDelimitedIntermediate, PipeDelimitedIntermediateEvents, PipeDelimitedIntermediateOccurrences, ***EventsOccurrences</a:t>
+            </a:r>
+          </a:p>
+        </p:txBody>
+      </p:sp>
+      <p:sp>
+        <p:nvSpPr>
+          <p:cNvPr id="12" name="TextBox 11">
+            <a:extLst>
+              <a:ext uri="{FF2B5EF4-FFF2-40B4-BE49-F238E27FC236}">
+                <a16:creationId xmlns:a16="http://schemas.microsoft.com/office/drawing/2014/main" id="{5EF75954-011D-DEB2-35B2-808EF5106C86}"/>
+              </a:ext>
+            </a:extLst>
+          </p:cNvPr>
+          <p:cNvSpPr txBox="1"/>
+          <p:nvPr/>
+        </p:nvSpPr>
+        <p:spPr>
+          <a:xfrm>
+            <a:off x="2984862" y="3562209"/>
+            <a:ext cx="5989323" cy="461665"/>
+          </a:xfrm>
+          <a:prstGeom prst="rect">
+            <a:avLst/>
+          </a:prstGeom>
+          <a:noFill/>
+        </p:spPr>
+        <p:txBody>
+          <a:bodyPr wrap="square" rtlCol="0">
+            <a:spAutoFit/>
+          </a:bodyPr>
+          <a:lstStyle/>
+          <a:p>
+            <a:r>
+              <a:rPr lang="en-US" sz="1200">
+                <a:latin typeface="Consolas" panose="020B0609020204030204" pitchFamily="49" charset="0"/>
+                <a:cs typeface="Vrinda" panose="020B0502040204020203" pitchFamily="34" charset="0"/>
+              </a:rPr>
+              <a:t>StackedBarsPlotter(change name), ActivityOverTimePlotter, EventWithinSpanAnalysisHistogramPlotter</a:t>
+            </a:r>
+          </a:p>
+        </p:txBody>
+      </p:sp>
+      <p:sp>
+        <p:nvSpPr>
+          <p:cNvPr id="13" name="TextBox 12">
+            <a:extLst>
+              <a:ext uri="{FF2B5EF4-FFF2-40B4-BE49-F238E27FC236}">
+                <a16:creationId xmlns:a16="http://schemas.microsoft.com/office/drawing/2014/main" id="{9DE8C2BE-F953-734F-60AF-10A9420782FC}"/>
+              </a:ext>
+            </a:extLst>
+          </p:cNvPr>
+          <p:cNvSpPr txBox="1"/>
+          <p:nvPr/>
+        </p:nvSpPr>
+        <p:spPr>
+          <a:xfrm>
+            <a:off x="6936377" y="102716"/>
+            <a:ext cx="2207623" cy="646331"/>
+          </a:xfrm>
+          <a:prstGeom prst="rect">
+            <a:avLst/>
+          </a:prstGeom>
+          <a:noFill/>
+        </p:spPr>
+        <p:txBody>
+          <a:bodyPr wrap="square" rtlCol="0">
+            <a:spAutoFit/>
+          </a:bodyPr>
+          <a:lstStyle/>
+          <a:p>
+            <a:r>
+              <a:rPr lang="en-US"/>
+              <a:t>Five Main Abstractions</a:t>
+            </a:r>
+          </a:p>
+        </p:txBody>
+      </p:sp>
+    </p:spTree>
+    <p:extLst>
+      <p:ext uri="{BB962C8B-B14F-4D97-AF65-F5344CB8AC3E}">
+        <p14:creationId xmlns:p14="http://schemas.microsoft.com/office/powerpoint/2010/main" val="4279311133"/>
+      </p:ext>
+    </p:extLst>
+  </p:cSld>
+  <p:clrMapOvr>
+    <a:masterClrMapping/>
+  </p:clrMapOvr>
+</p:sld>
+</file>
+
+<file path=ppt/slides/slide21.xml><?xml version="1.0" encoding="utf-8"?>
 <p:sld xmlns:a="http://schemas.openxmlformats.org/drawingml/2006/main" xmlns:r="http://schemas.openxmlformats.org/officeDocument/2006/relationships" xmlns:p="http://schemas.openxmlformats.org/presentationml/2006/main">
   <p:cSld>
     <p:spTree>
@@ -2717,15 +4831,12 @@
           <a:noFill/>
           <a:ln>
             <a:solidFill>
-              <a:schemeClr val="accent5">
-                <a:lumMod val="20000"/>
-                <a:lumOff val="80000"/>
-              </a:schemeClr>
+              <a:srgbClr val="FFCCFF"/>
             </a:solidFill>
           </a:ln>
           <a:effectLst>
             <a:glow rad="101600">
-              <a:schemeClr val="accent2">
+              <a:schemeClr val="accent1">
                 <a:satMod val="175000"/>
                 <a:alpha val="40000"/>
               </a:schemeClr>
@@ -2858,7 +4969,7 @@
           </a:ln>
           <a:effectLst>
             <a:glow rad="101600">
-              <a:schemeClr val="accent2">
+              <a:schemeClr val="accent1">
                 <a:satMod val="175000"/>
                 <a:alpha val="40000"/>
               </a:schemeClr>
@@ -3103,7 +5214,7 @@
           </a:ln>
           <a:effectLst>
             <a:glow rad="101600">
-              <a:schemeClr val="accent2">
+              <a:schemeClr val="accent1">
                 <a:satMod val="175000"/>
                 <a:alpha val="40000"/>
               </a:schemeClr>
@@ -3167,7 +5278,7 @@
 </p:sld>
 </file>
 
-<file path=ppt/slides/slide13.xml><?xml version="1.0" encoding="utf-8"?>
+<file path=ppt/slides/slide22.xml><?xml version="1.0" encoding="utf-8"?>
 <p:sld xmlns:a="http://schemas.openxmlformats.org/drawingml/2006/main" xmlns:r="http://schemas.openxmlformats.org/officeDocument/2006/relationships" xmlns:p="http://schemas.openxmlformats.org/presentationml/2006/main">
   <p:cSld>
     <p:spTree>
@@ -3450,7 +5561,7 @@
 </p:sld>
 </file>
 
-<file path=ppt/slides/slide14.xml><?xml version="1.0" encoding="utf-8"?>
+<file path=ppt/slides/slide23.xml><?xml version="1.0" encoding="utf-8"?>
 <p:sld xmlns:a="http://schemas.openxmlformats.org/drawingml/2006/main" xmlns:r="http://schemas.openxmlformats.org/officeDocument/2006/relationships" xmlns:p="http://schemas.openxmlformats.org/presentationml/2006/main">
   <p:cSld>
     <p:spTree>
@@ -4367,7 +6478,7 @@
 </p:sld>
 </file>
 
-<file path=ppt/slides/slide15.xml><?xml version="1.0" encoding="utf-8"?>
+<file path=ppt/slides/slide24.xml><?xml version="1.0" encoding="utf-8"?>
 <p:sld xmlns:a="http://schemas.openxmlformats.org/drawingml/2006/main" xmlns:r="http://schemas.openxmlformats.org/officeDocument/2006/relationships" xmlns:p="http://schemas.openxmlformats.org/presentationml/2006/main">
   <p:cSld>
     <p:spTree>
@@ -4481,7 +6592,7 @@
         <p:spPr>
           <a:xfrm>
             <a:off x="2868387" y="159848"/>
-            <a:ext cx="5882640" cy="2123658"/>
+            <a:ext cx="5882640" cy="2292935"/>
           </a:xfrm>
           <a:prstGeom prst="rect">
             <a:avLst/>
@@ -4581,6 +6692,12 @@
               </a:rPr>
             </a:br>
             <a:r>
+              <a:rPr lang="en-US" sz="1100">
+                <a:latin typeface="Consolas" panose="020B0609020204030204" pitchFamily="49" charset="0"/>
+              </a:rPr>
+              <a:t>build_</a:t>
+            </a:r>
+            <a:r>
               <a:rPr lang="en-US" sz="1100" i="1">
                 <a:latin typeface="Consolas" panose="020B0609020204030204" pitchFamily="49" charset="0"/>
               </a:rPr>
@@ -4590,7 +6707,15 @@
               <a:rPr lang="en-US" sz="1100">
                 <a:latin typeface="Consolas" panose="020B0609020204030204" pitchFamily="49" charset="0"/>
               </a:rPr>
-              <a:t>() -&gt; human-readable summary</a:t>
+              <a:t>() -&gt; dict</a:t>
+            </a:r>
+          </a:p>
+          <a:p>
+            <a:r>
+              <a:rPr lang="en-US" sz="1100">
+                <a:latin typeface="Consolas" panose="020B0609020204030204" pitchFamily="49" charset="0"/>
+              </a:rPr>
+              <a:t>print_summary() -&gt; None</a:t>
             </a:r>
           </a:p>
           <a:p>
@@ -4647,7 +6772,7 @@
         </p:nvSpPr>
         <p:spPr>
           <a:xfrm>
-            <a:off x="209005" y="2332038"/>
+            <a:off x="209005" y="2530158"/>
             <a:ext cx="2468881" cy="646331"/>
           </a:xfrm>
           <a:prstGeom prst="rect">
@@ -4729,7 +6854,7 @@
         </p:nvSpPr>
         <p:spPr>
           <a:xfrm>
-            <a:off x="2868387" y="2283506"/>
+            <a:off x="2868387" y="2481626"/>
             <a:ext cx="5882640" cy="1107996"/>
           </a:xfrm>
           <a:prstGeom prst="rect">
@@ -4785,7 +6910,7 @@
               <a:rPr lang="en-US" sz="1100" i="1">
                 <a:latin typeface="Consolas" panose="020B0609020204030204" pitchFamily="49" charset="0"/>
               </a:rPr>
-              <a:t>as_obs_period</a:t>
+              <a:t>return_as_obs_period</a:t>
             </a:r>
             <a:r>
               <a:rPr lang="en-US" sz="1100">
@@ -4815,7 +6940,7 @@
         </p:nvSpPr>
         <p:spPr>
           <a:xfrm>
-            <a:off x="209005" y="3564753"/>
+            <a:off x="209005" y="3762873"/>
             <a:ext cx="2468881" cy="646331"/>
           </a:xfrm>
           <a:prstGeom prst="rect">
@@ -4897,8 +7022,8 @@
         </p:nvSpPr>
         <p:spPr>
           <a:xfrm>
-            <a:off x="2868387" y="3564753"/>
-            <a:ext cx="6066608" cy="769441"/>
+            <a:off x="2868387" y="3694293"/>
+            <a:ext cx="6066608" cy="938719"/>
           </a:xfrm>
           <a:prstGeom prst="rect">
             <a:avLst/>
@@ -4923,7 +7048,7 @@
               <a:rPr lang="en-US" sz="1100" i="1">
                 <a:latin typeface="Consolas" panose="020B0609020204030204" pitchFamily="49" charset="0"/>
               </a:rPr>
-              <a:t>from_calendar</a:t>
+              <a:t>construct_from_calendar</a:t>
             </a:r>
             <a:r>
               <a:rPr lang="en-US" sz="1100">
@@ -4940,13 +7065,13 @@
               <a:rPr lang="en-US" sz="1100" i="1">
                 <a:latin typeface="Consolas" panose="020B0609020204030204" pitchFamily="49" charset="0"/>
               </a:rPr>
-              <a:t>from_age_window</a:t>
+              <a:t>construct_from_age_window</a:t>
             </a:r>
             <a:r>
               <a:rPr lang="en-US" sz="1100">
                 <a:latin typeface="Consolas" panose="020B0609020204030204" pitchFamily="49" charset="0"/>
               </a:rPr>
-              <a:t>(entity_df, dob_col, age_start, age_end, entity_col, identity)</a:t>
+              <a:t>(entity_df, dob_col, age_start, age_end, entity_col, age_unit, identity)</a:t>
             </a:r>
             <a:endParaRPr lang="en-US" sz="1100" i="1">
               <a:latin typeface="Consolas" panose="020B0609020204030204" pitchFamily="49" charset="0"/>
@@ -4957,7 +7082,7 @@
               <a:rPr lang="en-US" sz="1100" i="1">
                 <a:latin typeface="Consolas" panose="020B0609020204030204" pitchFamily="49" charset="0"/>
               </a:rPr>
-              <a:t>from_events</a:t>
+              <a:t>construct_from_events</a:t>
             </a:r>
             <a:r>
               <a:rPr lang="en-US" sz="1100">
@@ -5023,7 +7148,7 @@
         </p:nvCxnSpPr>
         <p:spPr>
           <a:xfrm>
-            <a:off x="1574074" y="3094809"/>
+            <a:off x="1574074" y="3292929"/>
             <a:ext cx="0" cy="328748"/>
           </a:xfrm>
           <a:prstGeom prst="straightConnector1">
@@ -5061,7 +7186,7 @@
 </p:sld>
 </file>
 
-<file path=ppt/slides/slide16.xml><?xml version="1.0" encoding="utf-8"?>
+<file path=ppt/slides/slide25.xml><?xml version="1.0" encoding="utf-8"?>
 <p:sld xmlns:a="http://schemas.openxmlformats.org/drawingml/2006/main" xmlns:r="http://schemas.openxmlformats.org/officeDocument/2006/relationships" xmlns:p="http://schemas.openxmlformats.org/presentationml/2006/main">
   <p:cSld>
     <p:spTree>
@@ -5069,7 +7194,7 @@
         <p:cNvPr id="1" name="">
           <a:extLst>
             <a:ext uri="{FF2B5EF4-FFF2-40B4-BE49-F238E27FC236}">
-              <a16:creationId xmlns:a16="http://schemas.microsoft.com/office/drawing/2014/main" id="{31D0075B-BD41-D2E6-3846-891E48C58571}"/>
+              <a16:creationId xmlns:a16="http://schemas.microsoft.com/office/drawing/2014/main" id="{E23EAAF7-3B65-D177-B93A-E43553E28F53}"/>
             </a:ext>
           </a:extLst>
         </p:cNvPr>
@@ -5089,7 +7214,7 @@
           <p:cNvPr id="3" name="TextBox 2">
             <a:extLst>
               <a:ext uri="{FF2B5EF4-FFF2-40B4-BE49-F238E27FC236}">
-                <a16:creationId xmlns:a16="http://schemas.microsoft.com/office/drawing/2014/main" id="{3EC86F6A-2D08-2CD3-14B3-7960846FF045}"/>
+                <a16:creationId xmlns:a16="http://schemas.microsoft.com/office/drawing/2014/main" id="{4EC60447-FF59-8A11-315C-51AE0C47ABC2}"/>
               </a:ext>
             </a:extLst>
           </p:cNvPr>
@@ -5098,406 +7223,503 @@
         </p:nvSpPr>
         <p:spPr>
           <a:xfrm>
-            <a:off x="209005" y="2961550"/>
-            <a:ext cx="2922815" cy="830997"/>
-          </a:xfrm>
-          <a:prstGeom prst="rect">
-            <a:avLst/>
-          </a:prstGeom>
+            <a:off x="209004" y="159848"/>
+            <a:ext cx="2468881" cy="646331"/>
+          </a:xfrm>
+          <a:prstGeom prst="rect">
+            <a:avLst/>
+          </a:prstGeom>
+          <a:noFill/>
           <a:ln>
             <a:solidFill>
-              <a:srgbClr val="FF0000"/>
+              <a:schemeClr val="accent5">
+                <a:lumMod val="20000"/>
+                <a:lumOff val="80000"/>
+              </a:schemeClr>
             </a:solidFill>
           </a:ln>
+          <a:effectLst>
+            <a:glow rad="101600">
+              <a:schemeClr val="accent2">
+                <a:satMod val="175000"/>
+                <a:alpha val="40000"/>
+              </a:schemeClr>
+            </a:glow>
+          </a:effectLst>
+          <a:scene3d>
+            <a:camera prst="orthographicFront"/>
+            <a:lightRig rig="threePt" dir="t"/>
+          </a:scene3d>
+          <a:sp3d>
+            <a:bevelT w="114300" prst="artDeco"/>
+          </a:sp3d>
+        </p:spPr>
+        <p:txBody>
+          <a:bodyPr wrap="square" rtlCol="0">
+            <a:spAutoFit/>
+          </a:bodyPr>
+          <a:lstStyle/>
+          <a:p>
+            <a:pPr algn="ctr"/>
+            <a:r>
+              <a:rPr lang="en-US" sz="1200" b="1">
+                <a:latin typeface="Consolas" panose="020B0609020204030204" pitchFamily="49" charset="0"/>
+                <a:cs typeface="Times New Roman" panose="02020603050405020304" pitchFamily="18" charset="0"/>
+              </a:rPr>
+              <a:t>Occurrences</a:t>
+            </a:r>
+          </a:p>
+          <a:p>
+            <a:pPr algn="ctr"/>
+            <a:r>
+              <a:rPr lang="en-US" sz="1200">
+                <a:latin typeface="Centaur" panose="02030504050205020304" pitchFamily="18" charset="0"/>
+                <a:cs typeface="Times New Roman" panose="02020603050405020304" pitchFamily="18" charset="0"/>
+              </a:rPr>
+              <a:t>data: pd.Dataframe</a:t>
+            </a:r>
+          </a:p>
+          <a:p>
+            <a:pPr algn="ctr"/>
+            <a:r>
+              <a:rPr lang="en-US" sz="1200">
+                <a:latin typeface="Centaur" panose="02030504050205020304" pitchFamily="18" charset="0"/>
+                <a:cs typeface="Times New Roman" panose="02020603050405020304" pitchFamily="18" charset="0"/>
+              </a:rPr>
+              <a:t>semantics: OccurrenceSemantics</a:t>
+            </a:r>
+          </a:p>
+        </p:txBody>
+      </p:sp>
+      <p:sp>
+        <p:nvSpPr>
+          <p:cNvPr id="4" name="TextBox 3">
+            <a:extLst>
+              <a:ext uri="{FF2B5EF4-FFF2-40B4-BE49-F238E27FC236}">
+                <a16:creationId xmlns:a16="http://schemas.microsoft.com/office/drawing/2014/main" id="{BAEA84C1-49A2-1C1C-5178-1AE5D20FA9F0}"/>
+              </a:ext>
+            </a:extLst>
+          </p:cNvPr>
+          <p:cNvSpPr txBox="1"/>
+          <p:nvPr/>
+        </p:nvSpPr>
+        <p:spPr>
+          <a:xfrm>
+            <a:off x="2868387" y="159848"/>
+            <a:ext cx="5882640" cy="2462213"/>
+          </a:xfrm>
+          <a:prstGeom prst="rect">
+            <a:avLst/>
+          </a:prstGeom>
+          <a:noFill/>
+        </p:spPr>
+        <p:txBody>
+          <a:bodyPr wrap="square" rtlCol="0">
+            <a:spAutoFit/>
+          </a:bodyPr>
+          <a:lstStyle/>
+          <a:p>
+            <a:r>
+              <a:rPr lang="en-US" sz="1100" b="1">
+                <a:latin typeface="Consolas" panose="020B0609020204030204" pitchFamily="49" charset="0"/>
+              </a:rPr>
+              <a:t>Constructor</a:t>
+            </a:r>
+          </a:p>
+          <a:p>
+            <a:r>
+              <a:rPr lang="en-US" sz="1100" i="1">
+                <a:latin typeface="Consolas" panose="020B0609020204030204" pitchFamily="49" charset="0"/>
+              </a:rPr>
+              <a:t>__init__</a:t>
+            </a:r>
+            <a:r>
+              <a:rPr lang="en-US" sz="1100">
+                <a:latin typeface="Consolas" panose="020B0609020204030204" pitchFamily="49" charset="0"/>
+              </a:rPr>
+              <a:t>(data, semantics)</a:t>
+            </a:r>
+            <a:endParaRPr lang="en-US" sz="1100" i="1">
+              <a:latin typeface="Consolas" panose="020B0609020204030204" pitchFamily="49" charset="0"/>
+            </a:endParaRPr>
+          </a:p>
+          <a:p>
+            <a:endParaRPr lang="en-US" sz="1100" i="1">
+              <a:latin typeface="Consolas" panose="020B0609020204030204" pitchFamily="49" charset="0"/>
+            </a:endParaRPr>
+          </a:p>
+          <a:p>
+            <a:r>
+              <a:rPr lang="en-US" sz="1100" b="1">
+                <a:latin typeface="Consolas" panose="020B0609020204030204" pitchFamily="49" charset="0"/>
+              </a:rPr>
+              <a:t>Methods</a:t>
+            </a:r>
+          </a:p>
+          <a:p>
+            <a:r>
+              <a:rPr lang="en-US" sz="1100" i="1">
+                <a:latin typeface="Consolas" panose="020B0609020204030204" pitchFamily="49" charset="0"/>
+              </a:rPr>
+              <a:t>filter_by_entities</a:t>
+            </a:r>
+            <a:r>
+              <a:rPr lang="en-US" sz="1100">
+                <a:latin typeface="Consolas" panose="020B0609020204030204" pitchFamily="49" charset="0"/>
+              </a:rPr>
+              <a:t>(ids) -&gt; Occurrences</a:t>
+            </a:r>
+          </a:p>
+          <a:p>
+            <a:r>
+              <a:rPr lang="en-US" sz="1100" i="1">
+                <a:latin typeface="Consolas" panose="020B0609020204030204" pitchFamily="49" charset="0"/>
+              </a:rPr>
+              <a:t>filter_by_dates</a:t>
+            </a:r>
+            <a:r>
+              <a:rPr lang="en-US" sz="1100">
+                <a:latin typeface="Consolas" panose="020B0609020204030204" pitchFamily="49" charset="0"/>
+              </a:rPr>
+              <a:t>(start, end) -&gt; Occurrences</a:t>
+            </a:r>
+            <a:br>
+              <a:rPr lang="en-US" sz="1100">
+                <a:latin typeface="Consolas" panose="020B0609020204030204" pitchFamily="49" charset="0"/>
+              </a:rPr>
+            </a:br>
+            <a:r>
+              <a:rPr lang="en-US" sz="1100" i="1">
+                <a:latin typeface="Consolas" panose="020B0609020204030204" pitchFamily="49" charset="0"/>
+              </a:rPr>
+              <a:t>count_per_entity</a:t>
+            </a:r>
+            <a:r>
+              <a:rPr lang="en-US" sz="1100">
+                <a:latin typeface="Consolas" panose="020B0609020204030204" pitchFamily="49" charset="0"/>
+              </a:rPr>
+              <a:t>() -&gt; pd.Series</a:t>
+            </a:r>
+          </a:p>
+          <a:p>
+            <a:r>
+              <a:rPr lang="en-US" sz="1100" i="1">
+                <a:latin typeface="Consolas" panose="020B0609020204030204" pitchFamily="49" charset="0"/>
+              </a:rPr>
+              <a:t>copy</a:t>
+            </a:r>
+            <a:r>
+              <a:rPr lang="en-US" sz="1100">
+                <a:latin typeface="Consolas" panose="020B0609020204030204" pitchFamily="49" charset="0"/>
+              </a:rPr>
+              <a:t>() -&gt; Occurrences</a:t>
+            </a:r>
+            <a:br>
+              <a:rPr lang="en-US" sz="1100">
+                <a:latin typeface="Consolas" panose="020B0609020204030204" pitchFamily="49" charset="0"/>
+              </a:rPr>
+            </a:br>
+            <a:r>
+              <a:rPr lang="en-US" sz="1100">
+                <a:latin typeface="Consolas" panose="020B0609020204030204" pitchFamily="49" charset="0"/>
+              </a:rPr>
+              <a:t>build_</a:t>
+            </a:r>
+            <a:r>
+              <a:rPr lang="en-US" sz="1100" i="1">
+                <a:latin typeface="Consolas" panose="020B0609020204030204" pitchFamily="49" charset="0"/>
+              </a:rPr>
+              <a:t>summary</a:t>
+            </a:r>
+            <a:r>
+              <a:rPr lang="en-US" sz="1100">
+                <a:latin typeface="Consolas" panose="020B0609020204030204" pitchFamily="49" charset="0"/>
+              </a:rPr>
+              <a:t>() -&gt; dict</a:t>
+            </a:r>
+          </a:p>
+          <a:p>
+            <a:r>
+              <a:rPr lang="en-US" sz="1100">
+                <a:latin typeface="Consolas" panose="020B0609020204030204" pitchFamily="49" charset="0"/>
+              </a:rPr>
+              <a:t>print_summary() -&gt; None</a:t>
+            </a:r>
+          </a:p>
+          <a:p>
+            <a:endParaRPr lang="en-US" sz="1100" i="1">
+              <a:latin typeface="Consolas" panose="020B0609020204030204" pitchFamily="49" charset="0"/>
+            </a:endParaRPr>
+          </a:p>
+          <a:p>
+            <a:r>
+              <a:rPr lang="en-US" sz="1100" i="1">
+                <a:latin typeface="Consolas" panose="020B0609020204030204" pitchFamily="49" charset="0"/>
+              </a:rPr>
+              <a:t>__len__ </a:t>
+            </a:r>
+            <a:r>
+              <a:rPr lang="en-US" sz="1100">
+                <a:latin typeface="Consolas" panose="020B0609020204030204" pitchFamily="49" charset="0"/>
+              </a:rPr>
+              <a:t>-&gt; int</a:t>
+            </a:r>
+          </a:p>
+          <a:p>
+            <a:r>
+              <a:rPr lang="en-US" sz="1100" i="1">
+                <a:latin typeface="Consolas" panose="020B0609020204030204" pitchFamily="49" charset="0"/>
+              </a:rPr>
+              <a:t>__repr__</a:t>
+            </a:r>
+            <a:r>
+              <a:rPr lang="en-US" sz="1100">
+                <a:latin typeface="Consolas" panose="020B0609020204030204" pitchFamily="49" charset="0"/>
+              </a:rPr>
+              <a:t> -&gt; str</a:t>
+            </a:r>
+          </a:p>
+          <a:p>
+            <a:endParaRPr lang="en-US" sz="1100">
+              <a:latin typeface="Consolas" panose="020B0609020204030204" pitchFamily="49" charset="0"/>
+            </a:endParaRPr>
+          </a:p>
+        </p:txBody>
+      </p:sp>
+      <p:sp>
+        <p:nvSpPr>
+          <p:cNvPr id="2" name="TextBox 1">
+            <a:extLst>
+              <a:ext uri="{FF2B5EF4-FFF2-40B4-BE49-F238E27FC236}">
+                <a16:creationId xmlns:a16="http://schemas.microsoft.com/office/drawing/2014/main" id="{67E08284-8D1E-414D-07F5-3F1D9E3EE10B}"/>
+              </a:ext>
+            </a:extLst>
+          </p:cNvPr>
+          <p:cNvSpPr txBox="1"/>
+          <p:nvPr/>
+        </p:nvSpPr>
+        <p:spPr>
+          <a:xfrm>
+            <a:off x="209005" y="2773998"/>
+            <a:ext cx="2468881" cy="646331"/>
+          </a:xfrm>
+          <a:prstGeom prst="rect">
+            <a:avLst/>
+          </a:prstGeom>
+          <a:noFill/>
+          <a:ln>
+            <a:solidFill>
+              <a:schemeClr val="accent5">
+                <a:lumMod val="20000"/>
+                <a:lumOff val="80000"/>
+              </a:schemeClr>
+            </a:solidFill>
+          </a:ln>
+          <a:effectLst>
+            <a:glow rad="101600">
+              <a:schemeClr val="accent2">
+                <a:satMod val="175000"/>
+                <a:alpha val="40000"/>
+              </a:schemeClr>
+            </a:glow>
+          </a:effectLst>
+          <a:scene3d>
+            <a:camera prst="orthographicFront"/>
+            <a:lightRig rig="threePt" dir="t"/>
+          </a:scene3d>
+          <a:sp3d>
+            <a:bevelT w="114300" prst="artDeco"/>
+          </a:sp3d>
+        </p:spPr>
+        <p:txBody>
+          <a:bodyPr wrap="square" rtlCol="0">
+            <a:spAutoFit/>
+          </a:bodyPr>
+          <a:lstStyle/>
+          <a:p>
+            <a:pPr algn="ctr"/>
+            <a:r>
+              <a:rPr lang="en-US" sz="1200" b="1">
+                <a:latin typeface="Consolas" panose="020B0609020204030204" pitchFamily="49" charset="0"/>
+                <a:cs typeface="Times New Roman" panose="02020603050405020304" pitchFamily="18" charset="0"/>
+              </a:rPr>
+              <a:t>OccurrencesPerEntity</a:t>
+            </a:r>
+          </a:p>
+          <a:p>
+            <a:pPr algn="ctr"/>
+            <a:r>
+              <a:rPr lang="en-US" sz="1200">
+                <a:latin typeface="Centaur" panose="02030504050205020304" pitchFamily="18" charset="0"/>
+                <a:cs typeface="Times New Roman" panose="02020603050405020304" pitchFamily="18" charset="0"/>
+              </a:rPr>
+              <a:t>data: pd.Dataframe</a:t>
+            </a:r>
+          </a:p>
+          <a:p>
+            <a:pPr algn="ctr"/>
+            <a:r>
+              <a:rPr lang="en-US" sz="1200">
+                <a:latin typeface="Centaur" panose="02030504050205020304" pitchFamily="18" charset="0"/>
+                <a:cs typeface="Times New Roman" panose="02020603050405020304" pitchFamily="18" charset="0"/>
+              </a:rPr>
+              <a:t>semantics: EventSemantics</a:t>
+            </a:r>
+          </a:p>
+        </p:txBody>
+      </p:sp>
+      <p:sp>
+        <p:nvSpPr>
+          <p:cNvPr id="5" name="TextBox 4">
+            <a:extLst>
+              <a:ext uri="{FF2B5EF4-FFF2-40B4-BE49-F238E27FC236}">
+                <a16:creationId xmlns:a16="http://schemas.microsoft.com/office/drawing/2014/main" id="{7F8C5E50-F235-8397-C119-EB02DE6FCEA2}"/>
+              </a:ext>
+            </a:extLst>
+          </p:cNvPr>
+          <p:cNvSpPr txBox="1"/>
+          <p:nvPr/>
+        </p:nvSpPr>
+        <p:spPr>
+          <a:xfrm>
+            <a:off x="2868387" y="2697054"/>
+            <a:ext cx="5882640" cy="1277273"/>
+          </a:xfrm>
+          <a:prstGeom prst="rect">
+            <a:avLst/>
+          </a:prstGeom>
+          <a:noFill/>
+        </p:spPr>
+        <p:txBody>
+          <a:bodyPr wrap="square" rtlCol="0">
+            <a:spAutoFit/>
+          </a:bodyPr>
+          <a:lstStyle/>
+          <a:p>
+            <a:r>
+              <a:rPr lang="en-US" sz="1100" b="1">
+                <a:latin typeface="Consolas" panose="020B0609020204030204" pitchFamily="49" charset="0"/>
+              </a:rPr>
+              <a:t>Constructor</a:t>
+            </a:r>
+          </a:p>
+          <a:p>
+            <a:r>
+              <a:rPr lang="en-US" sz="1100" i="1">
+                <a:latin typeface="Consolas" panose="020B0609020204030204" pitchFamily="49" charset="0"/>
+              </a:rPr>
+              <a:t>__init__</a:t>
+            </a:r>
+            <a:r>
+              <a:rPr lang="en-US" sz="1100">
+                <a:latin typeface="Consolas" panose="020B0609020204030204" pitchFamily="49" charset="0"/>
+              </a:rPr>
+              <a:t>(data, semantics)</a:t>
+            </a:r>
+            <a:br>
+              <a:rPr lang="en-US" sz="1100">
+                <a:latin typeface="Consolas" panose="020B0609020204030204" pitchFamily="49" charset="0"/>
+              </a:rPr>
+            </a:br>
+            <a:br>
+              <a:rPr lang="en-US" sz="1100">
+                <a:latin typeface="Consolas" panose="020B0609020204030204" pitchFamily="49" charset="0"/>
+              </a:rPr>
+            </a:br>
+            <a:r>
+              <a:rPr lang="en-US" sz="1100" b="1">
+                <a:latin typeface="Consolas" panose="020B0609020204030204" pitchFamily="49" charset="0"/>
+              </a:rPr>
+              <a:t>Methods</a:t>
+            </a:r>
+          </a:p>
+          <a:p>
+            <a:r>
+              <a:rPr lang="en-US" sz="1100" i="1">
+                <a:latin typeface="Consolas" panose="020B0609020204030204" pitchFamily="49" charset="0"/>
+              </a:rPr>
+              <a:t>filter_by_entities</a:t>
+            </a:r>
+            <a:r>
+              <a:rPr lang="en-US" sz="1100">
+                <a:latin typeface="Consolas" panose="020B0609020204030204" pitchFamily="49" charset="0"/>
+              </a:rPr>
+              <a:t>(ids) -&gt; OccurrencesPerEntity</a:t>
+            </a:r>
+          </a:p>
+          <a:p>
+            <a:r>
+              <a:rPr lang="en-US" sz="1100" i="1">
+                <a:latin typeface="Consolas" panose="020B0609020204030204" pitchFamily="49" charset="0"/>
+              </a:rPr>
+              <a:t>copy</a:t>
+            </a:r>
+            <a:r>
+              <a:rPr lang="en-US" sz="1100">
+                <a:latin typeface="Consolas" panose="020B0609020204030204" pitchFamily="49" charset="0"/>
+              </a:rPr>
+              <a:t>() -&gt; OccurrencesPerEntity</a:t>
+            </a:r>
+          </a:p>
+          <a:p>
+            <a:r>
+              <a:rPr lang="en-US" sz="1100" i="1">
+                <a:latin typeface="Consolas" panose="020B0609020204030204" pitchFamily="49" charset="0"/>
+              </a:rPr>
+              <a:t>build_obs_period</a:t>
+            </a:r>
+            <a:r>
+              <a:rPr lang="en-US" sz="1100">
+                <a:latin typeface="Consolas" panose="020B0609020204030204" pitchFamily="49" charset="0"/>
+              </a:rPr>
+              <a:t>(identity) -&gt; ObsPeriodPerEntity</a:t>
+            </a:r>
+          </a:p>
+        </p:txBody>
+      </p:sp>
+      <p:cxnSp>
+        <p:nvCxnSpPr>
+          <p:cNvPr id="9" name="Straight Arrow Connector 8">
+            <a:extLst>
+              <a:ext uri="{FF2B5EF4-FFF2-40B4-BE49-F238E27FC236}">
+                <a16:creationId xmlns:a16="http://schemas.microsoft.com/office/drawing/2014/main" id="{0A5D7157-F928-F497-117B-0D68CB795CF9}"/>
+              </a:ext>
+            </a:extLst>
+          </p:cNvPr>
+          <p:cNvCxnSpPr/>
+          <p:nvPr/>
+        </p:nvCxnSpPr>
+        <p:spPr>
+          <a:xfrm>
+            <a:off x="1574074" y="1012371"/>
+            <a:ext cx="0" cy="1031966"/>
+          </a:xfrm>
+          <a:prstGeom prst="straightConnector1">
+            <a:avLst/>
+          </a:prstGeom>
+          <a:ln>
+            <a:tailEnd type="triangle"/>
+          </a:ln>
         </p:spPr>
         <p:style>
-          <a:lnRef idx="2">
+          <a:lnRef idx="1">
             <a:schemeClr val="accent1"/>
           </a:lnRef>
-          <a:fillRef idx="1">
-            <a:schemeClr val="lt1"/>
+          <a:fillRef idx="0">
+            <a:schemeClr val="accent1"/>
           </a:fillRef>
           <a:effectRef idx="0">
             <a:schemeClr val="accent1"/>
           </a:effectRef>
           <a:fontRef idx="minor">
-            <a:schemeClr val="dk1"/>
+            <a:schemeClr val="tx1"/>
           </a:fontRef>
         </p:style>
-        <p:txBody>
-          <a:bodyPr wrap="square" rtlCol="0">
-            <a:spAutoFit/>
-          </a:bodyPr>
-          <a:lstStyle/>
-          <a:p>
-            <a:pPr algn="ctr"/>
-            <a:r>
-              <a:rPr lang="en-US" sz="1200" b="1">
-                <a:latin typeface="Consolas" panose="020B0609020204030204" pitchFamily="49" charset="0"/>
-                <a:cs typeface="Times New Roman" panose="02020603050405020304" pitchFamily="18" charset="0"/>
-              </a:rPr>
-              <a:t>EventsCleaner</a:t>
-            </a:r>
-          </a:p>
-          <a:p>
-            <a:pPr algn="ctr"/>
-            <a:r>
-              <a:rPr lang="en-US" sz="1200">
-                <a:latin typeface="Consolas" panose="020B0609020204030204" pitchFamily="49" charset="0"/>
-                <a:cs typeface="Times New Roman" panose="02020603050405020304" pitchFamily="18" charset="0"/>
-              </a:rPr>
-              <a:t>data: pd.DataFrame</a:t>
-            </a:r>
-          </a:p>
-          <a:p>
-            <a:pPr algn="ctr"/>
-            <a:r>
-              <a:rPr lang="en-US" sz="1200">
-                <a:latin typeface="Consolas" panose="020B0609020204030204" pitchFamily="49" charset="0"/>
-                <a:cs typeface="Times New Roman" panose="02020603050405020304" pitchFamily="18" charset="0"/>
-              </a:rPr>
-              <a:t>semantics: EventSemantics</a:t>
-            </a:r>
-          </a:p>
-          <a:p>
-            <a:pPr algn="ctr"/>
-            <a:r>
-              <a:rPr lang="en-US" sz="1200">
-                <a:latin typeface="Consolas" panose="020B0609020204030204" pitchFamily="49" charset="0"/>
-                <a:cs typeface="Times New Roman" panose="02020603050405020304" pitchFamily="18" charset="0"/>
-              </a:rPr>
-              <a:t>config: EventsCleanerConfig|None</a:t>
-            </a:r>
-          </a:p>
-        </p:txBody>
-      </p:sp>
-      <p:sp>
-        <p:nvSpPr>
-          <p:cNvPr id="4" name="TextBox 3">
-            <a:extLst>
-              <a:ext uri="{FF2B5EF4-FFF2-40B4-BE49-F238E27FC236}">
-                <a16:creationId xmlns:a16="http://schemas.microsoft.com/office/drawing/2014/main" id="{A03A41F1-3A6A-4945-F046-F079500918C9}"/>
-              </a:ext>
-            </a:extLst>
-          </p:cNvPr>
-          <p:cNvSpPr txBox="1"/>
-          <p:nvPr/>
-        </p:nvSpPr>
-        <p:spPr>
-          <a:xfrm>
-            <a:off x="3424646" y="172630"/>
-            <a:ext cx="5882640" cy="1384995"/>
-          </a:xfrm>
-          <a:prstGeom prst="rect">
-            <a:avLst/>
-          </a:prstGeom>
-          <a:noFill/>
-        </p:spPr>
-        <p:txBody>
-          <a:bodyPr wrap="square" rtlCol="0">
-            <a:spAutoFit/>
-          </a:bodyPr>
-          <a:lstStyle/>
-          <a:p>
-            <a:r>
-              <a:rPr lang="en-US" sz="1200" b="1">
-                <a:latin typeface="Consolas" panose="020B0609020204030204" pitchFamily="49" charset="0"/>
-              </a:rPr>
-              <a:t>Constructors as Class Methods</a:t>
-            </a:r>
-          </a:p>
-          <a:p>
-            <a:r>
-              <a:rPr lang="en-US" sz="1200" i="1">
-                <a:latin typeface="Consolas" panose="020B0609020204030204" pitchFamily="49" charset="0"/>
-              </a:rPr>
-              <a:t>build_from_yaml</a:t>
-            </a:r>
-            <a:r>
-              <a:rPr lang="en-US" sz="1200">
-                <a:latin typeface="Consolas" panose="020B0609020204030204" pitchFamily="49" charset="0"/>
-              </a:rPr>
-              <a:t>(path) -&gt; EventsCleanerConfig</a:t>
-            </a:r>
-          </a:p>
-          <a:p>
-            <a:r>
-              <a:rPr lang="en-US" sz="1200">
-                <a:latin typeface="Consolas" panose="020B0609020204030204" pitchFamily="49" charset="0"/>
-              </a:rPr>
-              <a:t>build_with_defaults() -&gt; EventsCleanerConfig</a:t>
-            </a:r>
-          </a:p>
-          <a:p>
-            <a:endParaRPr lang="en-US" sz="1200">
-              <a:latin typeface="Consolas" panose="020B0609020204030204" pitchFamily="49" charset="0"/>
-            </a:endParaRPr>
-          </a:p>
-          <a:p>
-            <a:r>
-              <a:rPr lang="en-US" sz="1200" b="1">
-                <a:latin typeface="Consolas" panose="020B0609020204030204" pitchFamily="49" charset="0"/>
-              </a:rPr>
-              <a:t>Methods</a:t>
-            </a:r>
-          </a:p>
-          <a:p>
-            <a:r>
-              <a:rPr lang="en-US" sz="1200">
-                <a:latin typeface="Consolas" panose="020B0609020204030204" pitchFamily="49" charset="0"/>
-              </a:rPr>
-              <a:t>to_yaml(path) -&gt; None</a:t>
-            </a:r>
-          </a:p>
-          <a:p>
-            <a:r>
-              <a:rPr lang="en-US" sz="1200">
-                <a:latin typeface="Consolas" panose="020B0609020204030204" pitchFamily="49" charset="0"/>
-              </a:rPr>
-              <a:t>__repr__() -&gt; str</a:t>
-            </a:r>
-          </a:p>
-        </p:txBody>
-      </p:sp>
-      <p:sp>
-        <p:nvSpPr>
-          <p:cNvPr id="2" name="TextBox 1">
-            <a:extLst>
-              <a:ext uri="{FF2B5EF4-FFF2-40B4-BE49-F238E27FC236}">
-                <a16:creationId xmlns:a16="http://schemas.microsoft.com/office/drawing/2014/main" id="{4F674944-ABAD-1C25-36A6-3DDEE6FF7A9D}"/>
-              </a:ext>
-            </a:extLst>
-          </p:cNvPr>
-          <p:cNvSpPr txBox="1"/>
-          <p:nvPr/>
-        </p:nvSpPr>
-        <p:spPr>
-          <a:xfrm>
-            <a:off x="209005" y="172630"/>
-            <a:ext cx="2922815" cy="2123658"/>
-          </a:xfrm>
-          <a:prstGeom prst="rect">
-            <a:avLst/>
-          </a:prstGeom>
-          <a:ln w="38100">
-            <a:solidFill>
-              <a:srgbClr val="7030A0"/>
-            </a:solidFill>
-          </a:ln>
-        </p:spPr>
-        <p:style>
-          <a:lnRef idx="2">
-            <a:schemeClr val="accent1"/>
-          </a:lnRef>
-          <a:fillRef idx="1">
-            <a:schemeClr val="lt1"/>
-          </a:fillRef>
-          <a:effectRef idx="0">
-            <a:schemeClr val="accent1"/>
-          </a:effectRef>
-          <a:fontRef idx="minor">
-            <a:schemeClr val="dk1"/>
-          </a:fontRef>
-        </p:style>
-        <p:txBody>
-          <a:bodyPr wrap="square" rtlCol="0">
-            <a:spAutoFit/>
-          </a:bodyPr>
-          <a:lstStyle/>
-          <a:p>
-            <a:pPr algn="ctr"/>
-            <a:r>
-              <a:rPr lang="en-US" sz="1200" b="1">
-                <a:latin typeface="Consolas" panose="020B0609020204030204" pitchFamily="49" charset="0"/>
-                <a:cs typeface="Times New Roman" panose="02020603050405020304" pitchFamily="18" charset="0"/>
-              </a:rPr>
-              <a:t>EventsCleanerConfig</a:t>
-            </a:r>
-          </a:p>
-          <a:p>
-            <a:pPr algn="ctr"/>
-            <a:r>
-              <a:rPr lang="en-US" sz="1200">
-                <a:latin typeface="Consolas" panose="020B0609020204030204" pitchFamily="49" charset="0"/>
-                <a:cs typeface="Times New Roman" panose="02020603050405020304" pitchFamily="18" charset="0"/>
-              </a:rPr>
-              <a:t>normalize_dates: bool</a:t>
-            </a:r>
-          </a:p>
-          <a:p>
-            <a:pPr algn="ctr"/>
-            <a:r>
-              <a:rPr lang="en-US" sz="1200">
-                <a:latin typeface="Consolas" panose="020B0609020204030204" pitchFamily="49" charset="0"/>
-                <a:cs typeface="Times New Roman" panose="02020603050405020304" pitchFamily="18" charset="0"/>
-              </a:rPr>
-              <a:t>coalesce_dates: bool</a:t>
-            </a:r>
-          </a:p>
-          <a:p>
-            <a:pPr algn="ctr"/>
-            <a:r>
-              <a:rPr lang="en-US" sz="1200">
-                <a:latin typeface="Consolas" panose="020B0609020204030204" pitchFamily="49" charset="0"/>
-                <a:cs typeface="Times New Roman" panose="02020603050405020304" pitchFamily="18" charset="0"/>
-              </a:rPr>
-              <a:t>causality_check: bool</a:t>
-            </a:r>
-          </a:p>
-          <a:p>
-            <a:pPr algn="ctr"/>
-            <a:r>
-              <a:rPr lang="en-US" sz="1200">
-                <a:latin typeface="Consolas" panose="020B0609020204030204" pitchFamily="49" charset="0"/>
-                <a:cs typeface="Times New Roman" panose="02020603050405020304" pitchFamily="18" charset="0"/>
-              </a:rPr>
-              <a:t>parse_dates: bool</a:t>
-            </a:r>
-          </a:p>
-          <a:p>
-            <a:pPr algn="ctr"/>
-            <a:r>
-              <a:rPr lang="en-US" sz="1200">
-                <a:latin typeface="Consolas" panose="020B0609020204030204" pitchFamily="49" charset="0"/>
-                <a:cs typeface="Times New Roman" panose="02020603050405020304" pitchFamily="18" charset="0"/>
-              </a:rPr>
-              <a:t>drop_duplicates: bool</a:t>
-            </a:r>
-          </a:p>
-          <a:p>
-            <a:pPr algn="ctr"/>
-            <a:r>
-              <a:rPr lang="en-US" sz="1200">
-                <a:latin typeface="Consolas" panose="020B0609020204030204" pitchFamily="49" charset="0"/>
-                <a:cs typeface="Times New Roman" panose="02020603050405020304" pitchFamily="18" charset="0"/>
-              </a:rPr>
-              <a:t>merge_overlapping: bool</a:t>
-            </a:r>
-          </a:p>
-          <a:p>
-            <a:pPr algn="ctr"/>
-            <a:r>
-              <a:rPr lang="en-US" sz="1200">
-                <a:latin typeface="Consolas" panose="020B0609020204030204" pitchFamily="49" charset="0"/>
-                <a:cs typeface="Times New Roman" panose="02020603050405020304" pitchFamily="18" charset="0"/>
-              </a:rPr>
-              <a:t>meaningful_gap: int</a:t>
-            </a:r>
-          </a:p>
-          <a:p>
-            <a:pPr algn="ctr"/>
-            <a:r>
-              <a:rPr lang="en-US" sz="1200">
-                <a:latin typeface="Consolas" panose="020B0609020204030204" pitchFamily="49" charset="0"/>
-                <a:cs typeface="Times New Roman" panose="02020603050405020304" pitchFamily="18" charset="0"/>
-              </a:rPr>
-              <a:t>date_floor: str</a:t>
-            </a:r>
-          </a:p>
-          <a:p>
-            <a:pPr algn="ctr"/>
-            <a:r>
-              <a:rPr lang="en-US" sz="1200">
-                <a:latin typeface="Consolas" panose="020B0609020204030204" pitchFamily="49" charset="0"/>
-                <a:cs typeface="Times New Roman" panose="02020603050405020304" pitchFamily="18" charset="0"/>
-              </a:rPr>
-              <a:t>date_celing: str</a:t>
-            </a:r>
-          </a:p>
-          <a:p>
-            <a:pPr algn="ctr"/>
-            <a:endParaRPr lang="en-US" sz="1200" b="1">
-              <a:latin typeface="Consolas" panose="020B0609020204030204" pitchFamily="49" charset="0"/>
-              <a:cs typeface="Times New Roman" panose="02020603050405020304" pitchFamily="18" charset="0"/>
-            </a:endParaRPr>
-          </a:p>
-        </p:txBody>
-      </p:sp>
-      <p:sp>
-        <p:nvSpPr>
-          <p:cNvPr id="5" name="TextBox 4">
-            <a:extLst>
-              <a:ext uri="{FF2B5EF4-FFF2-40B4-BE49-F238E27FC236}">
-                <a16:creationId xmlns:a16="http://schemas.microsoft.com/office/drawing/2014/main" id="{5D105680-9BEB-6204-9EBE-CE24059395C3}"/>
-              </a:ext>
-            </a:extLst>
-          </p:cNvPr>
-          <p:cNvSpPr txBox="1"/>
-          <p:nvPr/>
-        </p:nvSpPr>
-        <p:spPr>
-          <a:xfrm>
-            <a:off x="3424646" y="2943680"/>
-            <a:ext cx="5882640" cy="1569660"/>
-          </a:xfrm>
-          <a:prstGeom prst="rect">
-            <a:avLst/>
-          </a:prstGeom>
-          <a:noFill/>
-        </p:spPr>
-        <p:txBody>
-          <a:bodyPr wrap="square" rtlCol="0">
-            <a:spAutoFit/>
-          </a:bodyPr>
-          <a:lstStyle/>
-          <a:p>
-            <a:r>
-              <a:rPr lang="en-US" sz="1200" b="1">
-                <a:latin typeface="Consolas" panose="020B0609020204030204" pitchFamily="49" charset="0"/>
-              </a:rPr>
-              <a:t>Constructor</a:t>
-            </a:r>
-          </a:p>
-          <a:p>
-            <a:r>
-              <a:rPr lang="en-US" sz="1200">
-                <a:latin typeface="Consolas" panose="020B0609020204030204" pitchFamily="49" charset="0"/>
-              </a:rPr>
-              <a:t>__init__(dataframe, semantics, config|None) -&gt; EventsCleaner</a:t>
-            </a:r>
-          </a:p>
-          <a:p>
-            <a:endParaRPr lang="en-US" sz="1200">
-              <a:latin typeface="Consolas" panose="020B0609020204030204" pitchFamily="49" charset="0"/>
-            </a:endParaRPr>
-          </a:p>
-          <a:p>
-            <a:r>
-              <a:rPr lang="en-US" sz="1200">
-                <a:latin typeface="Consolas" panose="020B0609020204030204" pitchFamily="49" charset="0"/>
-              </a:rPr>
-              <a:t>Methods</a:t>
-            </a:r>
-          </a:p>
-          <a:p>
-            <a:r>
-              <a:rPr lang="en-US" sz="1200">
-                <a:latin typeface="Consolas" panose="020B0609020204030204" pitchFamily="49" charset="0"/>
-              </a:rPr>
-              <a:t>clean() -&gt; Events</a:t>
-            </a:r>
-          </a:p>
-          <a:p>
-            <a:endParaRPr lang="en-US" sz="1200">
-              <a:latin typeface="Consolas" panose="020B0609020204030204" pitchFamily="49" charset="0"/>
-            </a:endParaRPr>
-          </a:p>
-          <a:p>
-            <a:endParaRPr lang="en-US" sz="1200">
-              <a:latin typeface="Consolas" panose="020B0609020204030204" pitchFamily="49" charset="0"/>
-            </a:endParaRPr>
-          </a:p>
-          <a:p>
-            <a:endParaRPr lang="en-US" sz="1200">
-              <a:latin typeface="Consolas" panose="020B0609020204030204" pitchFamily="49" charset="0"/>
-            </a:endParaRPr>
-          </a:p>
-        </p:txBody>
-      </p:sp>
+      </p:cxnSp>
     </p:spTree>
     <p:extLst>
       <p:ext uri="{BB962C8B-B14F-4D97-AF65-F5344CB8AC3E}">
-        <p14:creationId xmlns:p14="http://schemas.microsoft.com/office/powerpoint/2010/main" val="2844817320"/>
+        <p14:creationId xmlns:p14="http://schemas.microsoft.com/office/powerpoint/2010/main" val="2970453764"/>
       </p:ext>
     </p:extLst>
   </p:cSld>
@@ -5507,355 +7729,7 @@
 </p:sld>
 </file>
 
-<file path=ppt/slides/slide17.xml><?xml version="1.0" encoding="utf-8"?>
-<p:sld xmlns:a="http://schemas.openxmlformats.org/drawingml/2006/main" xmlns:r="http://schemas.openxmlformats.org/officeDocument/2006/relationships" xmlns:p="http://schemas.openxmlformats.org/presentationml/2006/main">
-  <p:cSld>
-    <p:spTree>
-      <p:nvGrpSpPr>
-        <p:cNvPr id="1" name="">
-          <a:extLst>
-            <a:ext uri="{FF2B5EF4-FFF2-40B4-BE49-F238E27FC236}">
-              <a16:creationId xmlns:a16="http://schemas.microsoft.com/office/drawing/2014/main" id="{AA36DC87-1488-B144-8BEE-2947361EB1FA}"/>
-            </a:ext>
-          </a:extLst>
-        </p:cNvPr>
-        <p:cNvGrpSpPr/>
-        <p:nvPr/>
-      </p:nvGrpSpPr>
-      <p:grpSpPr>
-        <a:xfrm>
-          <a:off x="0" y="0"/>
-          <a:ext cx="0" cy="0"/>
-          <a:chOff x="0" y="0"/>
-          <a:chExt cx="0" cy="0"/>
-        </a:xfrm>
-      </p:grpSpPr>
-      <p:sp>
-        <p:nvSpPr>
-          <p:cNvPr id="4" name="TextBox 3">
-            <a:extLst>
-              <a:ext uri="{FF2B5EF4-FFF2-40B4-BE49-F238E27FC236}">
-                <a16:creationId xmlns:a16="http://schemas.microsoft.com/office/drawing/2014/main" id="{63E81083-C30D-514E-02F4-A4C83B2BC0B2}"/>
-              </a:ext>
-            </a:extLst>
-          </p:cNvPr>
-          <p:cNvSpPr txBox="1"/>
-          <p:nvPr/>
-        </p:nvSpPr>
-        <p:spPr>
-          <a:xfrm>
-            <a:off x="3721826" y="2791280"/>
-            <a:ext cx="5882640" cy="1200329"/>
-          </a:xfrm>
-          <a:prstGeom prst="rect">
-            <a:avLst/>
-          </a:prstGeom>
-          <a:noFill/>
-        </p:spPr>
-        <p:txBody>
-          <a:bodyPr wrap="square" rtlCol="0">
-            <a:spAutoFit/>
-          </a:bodyPr>
-          <a:lstStyle/>
-          <a:p>
-            <a:r>
-              <a:rPr lang="en-US" sz="1200" b="1">
-                <a:latin typeface="Consolas" panose="020B0609020204030204" pitchFamily="49" charset="0"/>
-              </a:rPr>
-              <a:t>Constructor</a:t>
-            </a:r>
-          </a:p>
-          <a:p>
-            <a:r>
-              <a:rPr lang="en-US" sz="1200">
-                <a:latin typeface="Consolas" panose="020B0609020204030204" pitchFamily="49" charset="0"/>
-              </a:rPr>
-              <a:t>__init__(events) -&gt; EventsDurationPlotter</a:t>
-            </a:r>
-          </a:p>
-          <a:p>
-            <a:endParaRPr lang="en-US" sz="1200">
-              <a:latin typeface="Consolas" panose="020B0609020204030204" pitchFamily="49" charset="0"/>
-            </a:endParaRPr>
-          </a:p>
-          <a:p>
-            <a:r>
-              <a:rPr lang="en-US" sz="1200">
-                <a:latin typeface="Consolas" panose="020B0609020204030204" pitchFamily="49" charset="0"/>
-              </a:rPr>
-              <a:t>Methods</a:t>
-            </a:r>
-          </a:p>
-          <a:p>
-            <a:r>
-              <a:rPr lang="en-US" sz="1200">
-                <a:latin typeface="Consolas" panose="020B0609020204030204" pitchFamily="49" charset="0"/>
-              </a:rPr>
-              <a:t>plot_duration_histogram(histogram_config)</a:t>
-            </a:r>
-            <a:br>
-              <a:rPr lang="en-US" sz="1200">
-                <a:latin typeface="Consolas" panose="020B0609020204030204" pitchFamily="49" charset="0"/>
-              </a:rPr>
-            </a:br>
-            <a:r>
-              <a:rPr lang="en-US" sz="1200">
-                <a:latin typeface="Consolas" panose="020B0609020204030204" pitchFamily="49" charset="0"/>
-              </a:rPr>
-              <a:t>plot_duration_violin(violin_config)</a:t>
-            </a:r>
-          </a:p>
-        </p:txBody>
-      </p:sp>
-      <p:sp>
-        <p:nvSpPr>
-          <p:cNvPr id="2" name="TextBox 1">
-            <a:extLst>
-              <a:ext uri="{FF2B5EF4-FFF2-40B4-BE49-F238E27FC236}">
-                <a16:creationId xmlns:a16="http://schemas.microsoft.com/office/drawing/2014/main" id="{4F0C5A8C-0845-2ABF-4572-5E72F63C184F}"/>
-              </a:ext>
-            </a:extLst>
-          </p:cNvPr>
-          <p:cNvSpPr txBox="1"/>
-          <p:nvPr/>
-        </p:nvSpPr>
-        <p:spPr>
-          <a:xfrm>
-            <a:off x="117565" y="2801530"/>
-            <a:ext cx="3307081" cy="830997"/>
-          </a:xfrm>
-          <a:prstGeom prst="rect">
-            <a:avLst/>
-          </a:prstGeom>
-          <a:ln>
-            <a:solidFill>
-              <a:srgbClr val="FF0000"/>
-            </a:solidFill>
-          </a:ln>
-        </p:spPr>
-        <p:style>
-          <a:lnRef idx="2">
-            <a:schemeClr val="accent1"/>
-          </a:lnRef>
-          <a:fillRef idx="1">
-            <a:schemeClr val="lt1"/>
-          </a:fillRef>
-          <a:effectRef idx="0">
-            <a:schemeClr val="accent1"/>
-          </a:effectRef>
-          <a:fontRef idx="minor">
-            <a:schemeClr val="dk1"/>
-          </a:fontRef>
-        </p:style>
-        <p:txBody>
-          <a:bodyPr wrap="square" rtlCol="0">
-            <a:spAutoFit/>
-          </a:bodyPr>
-          <a:lstStyle/>
-          <a:p>
-            <a:pPr algn="ctr"/>
-            <a:r>
-              <a:rPr lang="en-US" sz="1200" b="1">
-                <a:latin typeface="Consolas" panose="020B0609020204030204" pitchFamily="49" charset="0"/>
-                <a:cs typeface="Times New Roman" panose="02020603050405020304" pitchFamily="18" charset="0"/>
-              </a:rPr>
-              <a:t>EventsDurationPlotter</a:t>
-            </a:r>
-          </a:p>
-          <a:p>
-            <a:pPr algn="ctr"/>
-            <a:r>
-              <a:rPr lang="en-US" sz="1200">
-                <a:latin typeface="Consolas" panose="020B0609020204030204" pitchFamily="49" charset="0"/>
-                <a:cs typeface="Times New Roman" panose="02020603050405020304" pitchFamily="18" charset="0"/>
-              </a:rPr>
-              <a:t>events: Events</a:t>
-            </a:r>
-          </a:p>
-          <a:p>
-            <a:pPr algn="ctr"/>
-            <a:r>
-              <a:rPr lang="en-US" sz="1200">
-                <a:latin typeface="Consolas" panose="020B0609020204030204" pitchFamily="49" charset="0"/>
-                <a:cs typeface="Times New Roman" panose="02020603050405020304" pitchFamily="18" charset="0"/>
-              </a:rPr>
-              <a:t>stratify_by: </a:t>
-            </a:r>
-          </a:p>
-          <a:p>
-            <a:pPr algn="ctr"/>
-            <a:endParaRPr lang="en-US" sz="1200" b="1">
-              <a:latin typeface="Consolas" panose="020B0609020204030204" pitchFamily="49" charset="0"/>
-              <a:cs typeface="Times New Roman" panose="02020603050405020304" pitchFamily="18" charset="0"/>
-            </a:endParaRPr>
-          </a:p>
-        </p:txBody>
-      </p:sp>
-      <p:sp>
-        <p:nvSpPr>
-          <p:cNvPr id="6" name="TextBox 5">
-            <a:extLst>
-              <a:ext uri="{FF2B5EF4-FFF2-40B4-BE49-F238E27FC236}">
-                <a16:creationId xmlns:a16="http://schemas.microsoft.com/office/drawing/2014/main" id="{342C601A-70BD-9466-ACE5-11BC6F74DC4C}"/>
-              </a:ext>
-            </a:extLst>
-          </p:cNvPr>
-          <p:cNvSpPr txBox="1"/>
-          <p:nvPr/>
-        </p:nvSpPr>
-        <p:spPr>
-          <a:xfrm>
-            <a:off x="117565" y="88810"/>
-            <a:ext cx="3307081" cy="1384995"/>
-          </a:xfrm>
-          <a:prstGeom prst="rect">
-            <a:avLst/>
-          </a:prstGeom>
-          <a:ln w="38100">
-            <a:solidFill>
-              <a:srgbClr val="7030A0"/>
-            </a:solidFill>
-          </a:ln>
-        </p:spPr>
-        <p:style>
-          <a:lnRef idx="2">
-            <a:schemeClr val="accent1"/>
-          </a:lnRef>
-          <a:fillRef idx="1">
-            <a:schemeClr val="lt1"/>
-          </a:fillRef>
-          <a:effectRef idx="0">
-            <a:schemeClr val="accent1"/>
-          </a:effectRef>
-          <a:fontRef idx="minor">
-            <a:schemeClr val="dk1"/>
-          </a:fontRef>
-        </p:style>
-        <p:txBody>
-          <a:bodyPr wrap="square" rtlCol="0">
-            <a:spAutoFit/>
-          </a:bodyPr>
-          <a:lstStyle/>
-          <a:p>
-            <a:pPr algn="ctr"/>
-            <a:r>
-              <a:rPr lang="en-US" sz="1200" b="1">
-                <a:latin typeface="Consolas" panose="020B0609020204030204" pitchFamily="49" charset="0"/>
-                <a:cs typeface="Times New Roman" panose="02020603050405020304" pitchFamily="18" charset="0"/>
-              </a:rPr>
-              <a:t>HistogramConfig</a:t>
-            </a:r>
-          </a:p>
-          <a:p>
-            <a:pPr algn="ctr"/>
-            <a:r>
-              <a:rPr lang="en-US" sz="1200">
-                <a:latin typeface="Consolas" panose="020B0609020204030204" pitchFamily="49" charset="0"/>
-                <a:cs typeface="Times New Roman" panose="02020603050405020304" pitchFamily="18" charset="0"/>
-              </a:rPr>
-              <a:t>bins: BinsConfig</a:t>
-            </a:r>
-          </a:p>
-          <a:p>
-            <a:pPr algn="ctr"/>
-            <a:r>
-              <a:rPr lang="en-US" sz="1200">
-                <a:latin typeface="Consolas" panose="020B0609020204030204" pitchFamily="49" charset="0"/>
-                <a:cs typeface="Times New Roman" panose="02020603050405020304" pitchFamily="18" charset="0"/>
-              </a:rPr>
-              <a:t>labels: LabelsConfig</a:t>
-            </a:r>
-          </a:p>
-          <a:p>
-            <a:pPr algn="ctr"/>
-            <a:r>
-              <a:rPr lang="en-US" sz="1200">
-                <a:latin typeface="Consolas" panose="020B0609020204030204" pitchFamily="49" charset="0"/>
-                <a:cs typeface="Times New Roman" panose="02020603050405020304" pitchFamily="18" charset="0"/>
-              </a:rPr>
-              <a:t>style: StyleConfig</a:t>
-            </a:r>
-          </a:p>
-          <a:p>
-            <a:pPr algn="ctr"/>
-            <a:r>
-              <a:rPr lang="en-US" sz="1200">
-                <a:latin typeface="Consolas" panose="020B0609020204030204" pitchFamily="49" charset="0"/>
-                <a:cs typeface="Times New Roman" panose="02020603050405020304" pitchFamily="18" charset="0"/>
-              </a:rPr>
-              <a:t>percentile_lines: PercentilesConfig</a:t>
-            </a:r>
-          </a:p>
-          <a:p>
-            <a:pPr algn="ctr"/>
-            <a:r>
-              <a:rPr lang="en-US" sz="1200">
-                <a:latin typeface="Consolas" panose="020B0609020204030204" pitchFamily="49" charset="0"/>
-                <a:cs typeface="Times New Roman" panose="02020603050405020304" pitchFamily="18" charset="0"/>
-              </a:rPr>
-              <a:t>stratification: StratificationConfig</a:t>
-            </a:r>
-          </a:p>
-          <a:p>
-            <a:pPr algn="ctr"/>
-            <a:endParaRPr lang="en-US" sz="1200" b="1">
-              <a:latin typeface="Consolas" panose="020B0609020204030204" pitchFamily="49" charset="0"/>
-              <a:cs typeface="Times New Roman" panose="02020603050405020304" pitchFamily="18" charset="0"/>
-            </a:endParaRPr>
-          </a:p>
-        </p:txBody>
-      </p:sp>
-      <p:sp>
-        <p:nvSpPr>
-          <p:cNvPr id="8" name="TextBox 7">
-            <a:extLst>
-              <a:ext uri="{FF2B5EF4-FFF2-40B4-BE49-F238E27FC236}">
-                <a16:creationId xmlns:a16="http://schemas.microsoft.com/office/drawing/2014/main" id="{C371DB02-8447-1BB9-B74E-B2ED3427D236}"/>
-              </a:ext>
-            </a:extLst>
-          </p:cNvPr>
-          <p:cNvSpPr txBox="1"/>
-          <p:nvPr/>
-        </p:nvSpPr>
-        <p:spPr>
-          <a:xfrm>
-            <a:off x="3874226" y="181142"/>
-            <a:ext cx="5882640" cy="276999"/>
-          </a:xfrm>
-          <a:prstGeom prst="rect">
-            <a:avLst/>
-          </a:prstGeom>
-          <a:noFill/>
-        </p:spPr>
-        <p:txBody>
-          <a:bodyPr wrap="square" rtlCol="0">
-            <a:spAutoFit/>
-          </a:bodyPr>
-          <a:lstStyle/>
-          <a:p>
-            <a:r>
-              <a:rPr lang="en-US" sz="1200" b="1">
-                <a:latin typeface="Consolas" panose="020B0609020204030204" pitchFamily="49" charset="0"/>
-              </a:rPr>
-              <a:t>***</a:t>
-            </a:r>
-          </a:p>
-        </p:txBody>
-      </p:sp>
-    </p:spTree>
-    <p:extLst>
-      <p:ext uri="{BB962C8B-B14F-4D97-AF65-F5344CB8AC3E}">
-        <p14:creationId xmlns:p14="http://schemas.microsoft.com/office/powerpoint/2010/main" val="1008464001"/>
-      </p:ext>
-    </p:extLst>
-  </p:cSld>
-  <p:clrMapOvr>
-    <a:masterClrMapping/>
-  </p:clrMapOvr>
-</p:sld>
-</file>
-
-<file path=ppt/slides/slide18.xml><?xml version="1.0" encoding="utf-8"?>
+<file path=ppt/slides/slide26.xml><?xml version="1.0" encoding="utf-8"?>
 <p:sld xmlns:a="http://schemas.openxmlformats.org/drawingml/2006/main" xmlns:r="http://schemas.openxmlformats.org/officeDocument/2006/relationships" xmlns:p="http://schemas.openxmlformats.org/presentationml/2006/main">
   <p:cSld>
     <p:spTree>
@@ -6396,7 +8270,7 @@
 </p:sld>
 </file>
 
-<file path=ppt/slides/slide19.xml><?xml version="1.0" encoding="utf-8"?>
+<file path=ppt/slides/slide27.xml><?xml version="1.0" encoding="utf-8"?>
 <p:sld xmlns:a="http://schemas.openxmlformats.org/drawingml/2006/main" xmlns:r="http://schemas.openxmlformats.org/officeDocument/2006/relationships" xmlns:p="http://schemas.openxmlformats.org/presentationml/2006/main">
   <p:cSld>
     <p:spTree>
@@ -6426,7 +8300,67 @@
 </p:sld>
 </file>
 
-<file path=ppt/slides/slide2.xml><?xml version="1.0" encoding="utf-8"?>
+<file path=ppt/slides/slide28.xml><?xml version="1.0" encoding="utf-8"?>
+<p:sld xmlns:a="http://schemas.openxmlformats.org/drawingml/2006/main" xmlns:r="http://schemas.openxmlformats.org/officeDocument/2006/relationships" xmlns:p="http://schemas.openxmlformats.org/presentationml/2006/main">
+  <p:cSld>
+    <p:spTree>
+      <p:nvGrpSpPr>
+        <p:cNvPr id="1" name=""/>
+        <p:cNvGrpSpPr/>
+        <p:nvPr/>
+      </p:nvGrpSpPr>
+      <p:grpSpPr>
+        <a:xfrm>
+          <a:off x="0" y="0"/>
+          <a:ext cx="0" cy="0"/>
+          <a:chOff x="0" y="0"/>
+          <a:chExt cx="0" cy="0"/>
+        </a:xfrm>
+      </p:grpSpPr>
+    </p:spTree>
+    <p:extLst>
+      <p:ext uri="{BB962C8B-B14F-4D97-AF65-F5344CB8AC3E}">
+        <p14:creationId xmlns:p14="http://schemas.microsoft.com/office/powerpoint/2010/main" val="205324320"/>
+      </p:ext>
+    </p:extLst>
+  </p:cSld>
+  <p:clrMapOvr>
+    <a:masterClrMapping/>
+  </p:clrMapOvr>
+</p:sld>
+</file>
+
+<file path=ppt/slides/slide29.xml><?xml version="1.0" encoding="utf-8"?>
+<p:sld xmlns:a="http://schemas.openxmlformats.org/drawingml/2006/main" xmlns:r="http://schemas.openxmlformats.org/officeDocument/2006/relationships" xmlns:p="http://schemas.openxmlformats.org/presentationml/2006/main">
+  <p:cSld>
+    <p:spTree>
+      <p:nvGrpSpPr>
+        <p:cNvPr id="1" name=""/>
+        <p:cNvGrpSpPr/>
+        <p:nvPr/>
+      </p:nvGrpSpPr>
+      <p:grpSpPr>
+        <a:xfrm>
+          <a:off x="0" y="0"/>
+          <a:ext cx="0" cy="0"/>
+          <a:chOff x="0" y="0"/>
+          <a:chExt cx="0" cy="0"/>
+        </a:xfrm>
+      </p:grpSpPr>
+    </p:spTree>
+    <p:extLst>
+      <p:ext uri="{BB962C8B-B14F-4D97-AF65-F5344CB8AC3E}">
+        <p14:creationId xmlns:p14="http://schemas.microsoft.com/office/powerpoint/2010/main" val="4048529395"/>
+      </p:ext>
+    </p:extLst>
+  </p:cSld>
+  <p:clrMapOvr>
+    <a:masterClrMapping/>
+  </p:clrMapOvr>
+</p:sld>
+</file>
+
+<file path=ppt/slides/slide3.xml><?xml version="1.0" encoding="utf-8"?>
 <p:sld xmlns:a="http://schemas.openxmlformats.org/drawingml/2006/main" xmlns:r="http://schemas.openxmlformats.org/officeDocument/2006/relationships" xmlns:p="http://schemas.openxmlformats.org/presentationml/2006/main">
   <p:cSld>
     <p:spTree>
@@ -6465,7 +8399,7 @@
         </p:blipFill>
         <p:spPr>
           <a:xfrm>
-            <a:off x="1" y="0"/>
+            <a:off x="-1" y="329870"/>
             <a:ext cx="2637064" cy="1315962"/>
           </a:xfrm>
           <a:prstGeom prst="rect">
@@ -6495,7 +8429,7 @@
         </p:blipFill>
         <p:spPr>
           <a:xfrm>
-            <a:off x="-1" y="1469571"/>
+            <a:off x="-1" y="1850589"/>
             <a:ext cx="5527221" cy="1698860"/>
           </a:xfrm>
           <a:prstGeom prst="rect">
@@ -6525,7 +8459,7 @@
         </p:blipFill>
         <p:spPr>
           <a:xfrm>
-            <a:off x="3015238" y="0"/>
+            <a:off x="3719869" y="176261"/>
             <a:ext cx="5424130" cy="1469571"/>
           </a:xfrm>
           <a:prstGeom prst="rect">
@@ -6577,7 +8511,7 @@
         </p:nvGrpSpPr>
         <p:grpSpPr>
           <a:xfrm>
-            <a:off x="2367180" y="3448761"/>
+            <a:off x="667920" y="3738728"/>
             <a:ext cx="1827000" cy="1165320"/>
             <a:chOff x="2367180" y="3448761"/>
             <a:chExt cx="1827000" cy="1165320"/>
@@ -6686,6 +8620,156 @@
           </mc:Fallback>
         </mc:AlternateContent>
       </p:grpSp>
+      <p:sp>
+        <p:nvSpPr>
+          <p:cNvPr id="2" name="TextBox 1">
+            <a:extLst>
+              <a:ext uri="{FF2B5EF4-FFF2-40B4-BE49-F238E27FC236}">
+                <a16:creationId xmlns:a16="http://schemas.microsoft.com/office/drawing/2014/main" id="{4DE62664-011F-EF10-A49D-5C23E9A2D768}"/>
+              </a:ext>
+            </a:extLst>
+          </p:cNvPr>
+          <p:cNvSpPr txBox="1"/>
+          <p:nvPr/>
+        </p:nvSpPr>
+        <p:spPr>
+          <a:xfrm>
+            <a:off x="5978000" y="1971585"/>
+            <a:ext cx="2675106" cy="1200329"/>
+          </a:xfrm>
+          <a:prstGeom prst="rect">
+            <a:avLst/>
+          </a:prstGeom>
+          <a:noFill/>
+        </p:spPr>
+        <p:txBody>
+          <a:bodyPr wrap="square" rtlCol="0">
+            <a:spAutoFit/>
+          </a:bodyPr>
+          <a:lstStyle/>
+          <a:p>
+            <a:r>
+              <a:rPr lang="en-US">
+                <a:latin typeface="Times New Roman" panose="02020603050405020304" pitchFamily="18" charset="0"/>
+                <a:cs typeface="Times New Roman" panose="02020603050405020304" pitchFamily="18" charset="0"/>
+              </a:rPr>
+              <a:t>Two config files: </a:t>
+            </a:r>
+            <a:r>
+              <a:rPr lang="en-US" b="1">
+                <a:latin typeface="Times New Roman" panose="02020603050405020304" pitchFamily="18" charset="0"/>
+                <a:cs typeface="Times New Roman" panose="02020603050405020304" pitchFamily="18" charset="0"/>
+              </a:rPr>
+              <a:t>11 lines</a:t>
+            </a:r>
+          </a:p>
+          <a:p>
+            <a:r>
+              <a:rPr lang="en-US" b="1" i="1">
+                <a:latin typeface="Times New Roman" panose="02020603050405020304" pitchFamily="18" charset="0"/>
+                <a:cs typeface="Times New Roman" panose="02020603050405020304" pitchFamily="18" charset="0"/>
+              </a:rPr>
+              <a:t>Easier to save and audit later</a:t>
+            </a:r>
+            <a:br>
+              <a:rPr lang="en-US" i="1">
+                <a:latin typeface="Times New Roman" panose="02020603050405020304" pitchFamily="18" charset="0"/>
+                <a:cs typeface="Times New Roman" panose="02020603050405020304" pitchFamily="18" charset="0"/>
+              </a:rPr>
+            </a:br>
+            <a:r>
+              <a:rPr lang="en-US">
+                <a:latin typeface="Times New Roman" panose="02020603050405020304" pitchFamily="18" charset="0"/>
+                <a:cs typeface="Times New Roman" panose="02020603050405020304" pitchFamily="18" charset="0"/>
+              </a:rPr>
+              <a:t>Script: </a:t>
+            </a:r>
+            <a:r>
+              <a:rPr lang="en-US" b="1">
+                <a:latin typeface="Times New Roman" panose="02020603050405020304" pitchFamily="18" charset="0"/>
+                <a:cs typeface="Times New Roman" panose="02020603050405020304" pitchFamily="18" charset="0"/>
+              </a:rPr>
+              <a:t>6 lines</a:t>
+            </a:r>
+          </a:p>
+        </p:txBody>
+      </p:sp>
+      <p:sp>
+        <p:nvSpPr>
+          <p:cNvPr id="4" name="TextBox 3">
+            <a:extLst>
+              <a:ext uri="{FF2B5EF4-FFF2-40B4-BE49-F238E27FC236}">
+                <a16:creationId xmlns:a16="http://schemas.microsoft.com/office/drawing/2014/main" id="{051EE5B2-29C3-370E-2006-2FDF98D812C4}"/>
+              </a:ext>
+            </a:extLst>
+          </p:cNvPr>
+          <p:cNvSpPr txBox="1"/>
+          <p:nvPr/>
+        </p:nvSpPr>
+        <p:spPr>
+          <a:xfrm>
+            <a:off x="-34290" y="-8405"/>
+            <a:ext cx="4606290" cy="369332"/>
+          </a:xfrm>
+          <a:prstGeom prst="rect">
+            <a:avLst/>
+          </a:prstGeom>
+          <a:noFill/>
+        </p:spPr>
+        <p:txBody>
+          <a:bodyPr wrap="square">
+            <a:spAutoFit/>
+          </a:bodyPr>
+          <a:lstStyle/>
+          <a:p>
+            <a:r>
+              <a:rPr lang="en-US" sz="1800" b="1">
+                <a:latin typeface="Times New Roman" panose="02020603050405020304" pitchFamily="18" charset="0"/>
+                <a:cs typeface="Times New Roman" panose="02020603050405020304" pitchFamily="18" charset="0"/>
+              </a:rPr>
+              <a:t>With Eventus:</a:t>
+            </a:r>
+          </a:p>
+        </p:txBody>
+      </p:sp>
+      <p:sp>
+        <p:nvSpPr>
+          <p:cNvPr id="5" name="TextBox 4">
+            <a:extLst>
+              <a:ext uri="{FF2B5EF4-FFF2-40B4-BE49-F238E27FC236}">
+                <a16:creationId xmlns:a16="http://schemas.microsoft.com/office/drawing/2014/main" id="{7A8506D8-C064-5E75-9C13-FB31334330A2}"/>
+              </a:ext>
+            </a:extLst>
+          </p:cNvPr>
+          <p:cNvSpPr txBox="1"/>
+          <p:nvPr/>
+        </p:nvSpPr>
+        <p:spPr>
+          <a:xfrm>
+            <a:off x="3154820" y="4681835"/>
+            <a:ext cx="2675106" cy="461665"/>
+          </a:xfrm>
+          <a:prstGeom prst="rect">
+            <a:avLst/>
+          </a:prstGeom>
+          <a:noFill/>
+        </p:spPr>
+        <p:txBody>
+          <a:bodyPr wrap="square" rtlCol="0">
+            <a:spAutoFit/>
+          </a:bodyPr>
+          <a:lstStyle/>
+          <a:p>
+            <a:r>
+              <a:rPr lang="en-US" sz="1200">
+                <a:latin typeface="Times New Roman" panose="02020603050405020304" pitchFamily="18" charset="0"/>
+                <a:cs typeface="Times New Roman" panose="02020603050405020304" pitchFamily="18" charset="0"/>
+              </a:rPr>
+              <a:t>Detailed report of what was dropped or changed</a:t>
+            </a:r>
+          </a:p>
+        </p:txBody>
+      </p:sp>
     </p:spTree>
     <p:extLst>
       <p:ext uri="{BB962C8B-B14F-4D97-AF65-F5344CB8AC3E}">
@@ -6699,67 +8783,7 @@
 </p:sld>
 </file>
 
-<file path=ppt/slides/slide20.xml><?xml version="1.0" encoding="utf-8"?>
-<p:sld xmlns:a="http://schemas.openxmlformats.org/drawingml/2006/main" xmlns:r="http://schemas.openxmlformats.org/officeDocument/2006/relationships" xmlns:p="http://schemas.openxmlformats.org/presentationml/2006/main">
-  <p:cSld>
-    <p:spTree>
-      <p:nvGrpSpPr>
-        <p:cNvPr id="1" name=""/>
-        <p:cNvGrpSpPr/>
-        <p:nvPr/>
-      </p:nvGrpSpPr>
-      <p:grpSpPr>
-        <a:xfrm>
-          <a:off x="0" y="0"/>
-          <a:ext cx="0" cy="0"/>
-          <a:chOff x="0" y="0"/>
-          <a:chExt cx="0" cy="0"/>
-        </a:xfrm>
-      </p:grpSpPr>
-    </p:spTree>
-    <p:extLst>
-      <p:ext uri="{BB962C8B-B14F-4D97-AF65-F5344CB8AC3E}">
-        <p14:creationId xmlns:p14="http://schemas.microsoft.com/office/powerpoint/2010/main" val="205324320"/>
-      </p:ext>
-    </p:extLst>
-  </p:cSld>
-  <p:clrMapOvr>
-    <a:masterClrMapping/>
-  </p:clrMapOvr>
-</p:sld>
-</file>
-
-<file path=ppt/slides/slide21.xml><?xml version="1.0" encoding="utf-8"?>
-<p:sld xmlns:a="http://schemas.openxmlformats.org/drawingml/2006/main" xmlns:r="http://schemas.openxmlformats.org/officeDocument/2006/relationships" xmlns:p="http://schemas.openxmlformats.org/presentationml/2006/main">
-  <p:cSld>
-    <p:spTree>
-      <p:nvGrpSpPr>
-        <p:cNvPr id="1" name=""/>
-        <p:cNvGrpSpPr/>
-        <p:nvPr/>
-      </p:nvGrpSpPr>
-      <p:grpSpPr>
-        <a:xfrm>
-          <a:off x="0" y="0"/>
-          <a:ext cx="0" cy="0"/>
-          <a:chOff x="0" y="0"/>
-          <a:chExt cx="0" cy="0"/>
-        </a:xfrm>
-      </p:grpSpPr>
-    </p:spTree>
-    <p:extLst>
-      <p:ext uri="{BB962C8B-B14F-4D97-AF65-F5344CB8AC3E}">
-        <p14:creationId xmlns:p14="http://schemas.microsoft.com/office/powerpoint/2010/main" val="4048529395"/>
-      </p:ext>
-    </p:extLst>
-  </p:cSld>
-  <p:clrMapOvr>
-    <a:masterClrMapping/>
-  </p:clrMapOvr>
-</p:sld>
-</file>
-
-<file path=ppt/slides/slide22.xml><?xml version="1.0" encoding="utf-8"?>
+<file path=ppt/slides/slide30.xml><?xml version="1.0" encoding="utf-8"?>
 <p:sld xmlns:a="http://schemas.openxmlformats.org/drawingml/2006/main" xmlns:r="http://schemas.openxmlformats.org/officeDocument/2006/relationships" xmlns:p="http://schemas.openxmlformats.org/presentationml/2006/main">
   <p:cSld name="Slide 1">
     <p:bg>
@@ -7011,7 +9035,7 @@
 </p:sld>
 </file>
 
-<file path=ppt/slides/slide23.xml><?xml version="1.0" encoding="utf-8"?>
+<file path=ppt/slides/slide31.xml><?xml version="1.0" encoding="utf-8"?>
 <p:sld xmlns:a="http://schemas.openxmlformats.org/drawingml/2006/main" xmlns:r="http://schemas.openxmlformats.org/officeDocument/2006/relationships" xmlns:p="http://schemas.openxmlformats.org/presentationml/2006/main">
   <p:cSld name="Slide 2">
     <p:bg>
@@ -8560,7 +10584,7 @@
 </p:sld>
 </file>
 
-<file path=ppt/slides/slide24.xml><?xml version="1.0" encoding="utf-8"?>
+<file path=ppt/slides/slide32.xml><?xml version="1.0" encoding="utf-8"?>
 <p:sld xmlns:a="http://schemas.openxmlformats.org/drawingml/2006/main" xmlns:r="http://schemas.openxmlformats.org/officeDocument/2006/relationships" xmlns:p="http://schemas.openxmlformats.org/presentationml/2006/main">
   <p:cSld name="Slide 3">
     <p:bg>
@@ -9872,7 +11896,7 @@
 </p:sld>
 </file>
 
-<file path=ppt/slides/slide25.xml><?xml version="1.0" encoding="utf-8"?>
+<file path=ppt/slides/slide33.xml><?xml version="1.0" encoding="utf-8"?>
 <p:sld xmlns:a="http://schemas.openxmlformats.org/drawingml/2006/main" xmlns:r="http://schemas.openxmlformats.org/officeDocument/2006/relationships" xmlns:p="http://schemas.openxmlformats.org/presentationml/2006/main">
   <p:cSld name="Slide 4">
     <p:bg>
@@ -11295,7 +13319,7 @@
 </p:sld>
 </file>
 
-<file path=ppt/slides/slide26.xml><?xml version="1.0" encoding="utf-8"?>
+<file path=ppt/slides/slide34.xml><?xml version="1.0" encoding="utf-8"?>
 <p:sld xmlns:a="http://schemas.openxmlformats.org/drawingml/2006/main" xmlns:r="http://schemas.openxmlformats.org/officeDocument/2006/relationships" xmlns:p="http://schemas.openxmlformats.org/presentationml/2006/main">
   <p:cSld name="Slide 5">
     <p:bg>
@@ -12728,7 +14752,7 @@
 </p:sld>
 </file>
 
-<file path=ppt/slides/slide27.xml><?xml version="1.0" encoding="utf-8"?>
+<file path=ppt/slides/slide35.xml><?xml version="1.0" encoding="utf-8"?>
 <p:sld xmlns:a="http://schemas.openxmlformats.org/drawingml/2006/main" xmlns:r="http://schemas.openxmlformats.org/officeDocument/2006/relationships" xmlns:p="http://schemas.openxmlformats.org/presentationml/2006/main">
   <p:cSld name="Slide 6">
     <p:bg>
@@ -13672,7 +15696,7 @@
 </p:sld>
 </file>
 
-<file path=ppt/slides/slide28.xml><?xml version="1.0" encoding="utf-8"?>
+<file path=ppt/slides/slide36.xml><?xml version="1.0" encoding="utf-8"?>
 <p:sld xmlns:a="http://schemas.openxmlformats.org/drawingml/2006/main" xmlns:r="http://schemas.openxmlformats.org/officeDocument/2006/relationships" xmlns:p="http://schemas.openxmlformats.org/presentationml/2006/main">
   <p:cSld name="Slide 7">
     <p:bg>
@@ -14173,7 +16197,7 @@
 </p:sld>
 </file>
 
-<file path=ppt/slides/slide29.xml><?xml version="1.0" encoding="utf-8"?>
+<file path=ppt/slides/slide37.xml><?xml version="1.0" encoding="utf-8"?>
 <p:sld xmlns:a="http://schemas.openxmlformats.org/drawingml/2006/main" xmlns:r="http://schemas.openxmlformats.org/officeDocument/2006/relationships" xmlns:p="http://schemas.openxmlformats.org/presentationml/2006/main">
   <p:cSld name="Slide 8">
     <p:bg>
@@ -14820,67 +16844,7 @@
 </p:sld>
 </file>
 
-<file path=ppt/slides/slide3.xml><?xml version="1.0" encoding="utf-8"?>
-<p:sld xmlns:a="http://schemas.openxmlformats.org/drawingml/2006/main" xmlns:r="http://schemas.openxmlformats.org/officeDocument/2006/relationships" xmlns:p="http://schemas.openxmlformats.org/presentationml/2006/main">
-  <p:cSld>
-    <p:spTree>
-      <p:nvGrpSpPr>
-        <p:cNvPr id="1" name=""/>
-        <p:cNvGrpSpPr/>
-        <p:nvPr/>
-      </p:nvGrpSpPr>
-      <p:grpSpPr>
-        <a:xfrm>
-          <a:off x="0" y="0"/>
-          <a:ext cx="0" cy="0"/>
-          <a:chOff x="0" y="0"/>
-          <a:chExt cx="0" cy="0"/>
-        </a:xfrm>
-      </p:grpSpPr>
-      <p:pic>
-        <p:nvPicPr>
-          <p:cNvPr id="3" name="Picture 2">
-            <a:extLst>
-              <a:ext uri="{FF2B5EF4-FFF2-40B4-BE49-F238E27FC236}">
-                <a16:creationId xmlns:a16="http://schemas.microsoft.com/office/drawing/2014/main" id="{52C164C1-B916-989E-C413-F1D5093BEABF}"/>
-              </a:ext>
-            </a:extLst>
-          </p:cNvPr>
-          <p:cNvPicPr>
-            <a:picLocks noChangeAspect="1"/>
-          </p:cNvPicPr>
-          <p:nvPr/>
-        </p:nvPicPr>
-        <p:blipFill>
-          <a:blip r:embed="rId2"/>
-          <a:stretch>
-            <a:fillRect/>
-          </a:stretch>
-        </p:blipFill>
-        <p:spPr>
-          <a:xfrm>
-            <a:off x="2125851" y="545996"/>
-            <a:ext cx="5029458" cy="2025754"/>
-          </a:xfrm>
-          <a:prstGeom prst="rect">
-            <a:avLst/>
-          </a:prstGeom>
-        </p:spPr>
-      </p:pic>
-    </p:spTree>
-    <p:extLst>
-      <p:ext uri="{BB962C8B-B14F-4D97-AF65-F5344CB8AC3E}">
-        <p14:creationId xmlns:p14="http://schemas.microsoft.com/office/powerpoint/2010/main" val="3088910444"/>
-      </p:ext>
-    </p:extLst>
-  </p:cSld>
-  <p:clrMapOvr>
-    <a:masterClrMapping/>
-  </p:clrMapOvr>
-</p:sld>
-</file>
-
-<file path=ppt/slides/slide30.xml><?xml version="1.0" encoding="utf-8"?>
+<file path=ppt/slides/slide38.xml><?xml version="1.0" encoding="utf-8"?>
 <p:sld xmlns:a="http://schemas.openxmlformats.org/drawingml/2006/main" xmlns:r="http://schemas.openxmlformats.org/officeDocument/2006/relationships" xmlns:p="http://schemas.openxmlformats.org/presentationml/2006/main">
   <p:cSld name="Slide 9">
     <p:bg>
@@ -15742,10 +17706,70 @@
   <p:cSld>
     <p:spTree>
       <p:nvGrpSpPr>
+        <p:cNvPr id="1" name=""/>
+        <p:cNvGrpSpPr/>
+        <p:nvPr/>
+      </p:nvGrpSpPr>
+      <p:grpSpPr>
+        <a:xfrm>
+          <a:off x="0" y="0"/>
+          <a:ext cx="0" cy="0"/>
+          <a:chOff x="0" y="0"/>
+          <a:chExt cx="0" cy="0"/>
+        </a:xfrm>
+      </p:grpSpPr>
+      <p:pic>
+        <p:nvPicPr>
+          <p:cNvPr id="3" name="Picture 2">
+            <a:extLst>
+              <a:ext uri="{FF2B5EF4-FFF2-40B4-BE49-F238E27FC236}">
+                <a16:creationId xmlns:a16="http://schemas.microsoft.com/office/drawing/2014/main" id="{97B1A3E7-2F9A-F036-0EB9-A63F6B2EC076}"/>
+              </a:ext>
+            </a:extLst>
+          </p:cNvPr>
+          <p:cNvPicPr>
+            <a:picLocks noChangeAspect="1"/>
+          </p:cNvPicPr>
+          <p:nvPr/>
+        </p:nvPicPr>
+        <p:blipFill>
+          <a:blip r:embed="rId2"/>
+          <a:stretch>
+            <a:fillRect/>
+          </a:stretch>
+        </p:blipFill>
+        <p:spPr>
+          <a:xfrm>
+            <a:off x="1085671" y="1073073"/>
+            <a:ext cx="6972658" cy="2997354"/>
+          </a:xfrm>
+          <a:prstGeom prst="rect">
+            <a:avLst/>
+          </a:prstGeom>
+        </p:spPr>
+      </p:pic>
+    </p:spTree>
+    <p:extLst>
+      <p:ext uri="{BB962C8B-B14F-4D97-AF65-F5344CB8AC3E}">
+        <p14:creationId xmlns:p14="http://schemas.microsoft.com/office/powerpoint/2010/main" val="3748736264"/>
+      </p:ext>
+    </p:extLst>
+  </p:cSld>
+  <p:clrMapOvr>
+    <a:masterClrMapping/>
+  </p:clrMapOvr>
+</p:sld>
+</file>
+
+<file path=ppt/slides/slide5.xml><?xml version="1.0" encoding="utf-8"?>
+<p:sld xmlns:a="http://schemas.openxmlformats.org/drawingml/2006/main" xmlns:r="http://schemas.openxmlformats.org/officeDocument/2006/relationships" xmlns:p="http://schemas.openxmlformats.org/presentationml/2006/main">
+  <p:cSld>
+    <p:spTree>
+      <p:nvGrpSpPr>
         <p:cNvPr id="1" name="">
           <a:extLst>
             <a:ext uri="{FF2B5EF4-FFF2-40B4-BE49-F238E27FC236}">
-              <a16:creationId xmlns:a16="http://schemas.microsoft.com/office/drawing/2014/main" id="{31A0F0DC-1FEC-63E6-67CB-929FE0D04418}"/>
+              <a16:creationId xmlns:a16="http://schemas.microsoft.com/office/drawing/2014/main" id="{63C6626E-754E-90A5-C750-75506B18273A}"/>
             </a:ext>
           </a:extLst>
         </p:cNvPr>
@@ -15762,10 +17786,10 @@
       </p:grpSpPr>
       <p:sp>
         <p:nvSpPr>
-          <p:cNvPr id="3" name="TextBox 2">
+          <p:cNvPr id="2" name="TextBox 1">
             <a:extLst>
               <a:ext uri="{FF2B5EF4-FFF2-40B4-BE49-F238E27FC236}">
-                <a16:creationId xmlns:a16="http://schemas.microsoft.com/office/drawing/2014/main" id="{AF9710E0-C575-E561-7620-78F92E8C2A3F}"/>
+                <a16:creationId xmlns:a16="http://schemas.microsoft.com/office/drawing/2014/main" id="{B7F21EF0-00F1-010D-BC21-4BCF4735C809}"/>
               </a:ext>
             </a:extLst>
           </p:cNvPr>
@@ -15774,13 +17798,18 @@
         </p:nvSpPr>
         <p:spPr>
           <a:xfrm>
-            <a:off x="53340" y="175260"/>
-            <a:ext cx="8831580" cy="2893100"/>
-          </a:xfrm>
-          <a:prstGeom prst="rect">
-            <a:avLst/>
-          </a:prstGeom>
-          <a:noFill/>
+            <a:off x="5695406" y="0"/>
+            <a:ext cx="3448594" cy="646331"/>
+          </a:xfrm>
+          <a:prstGeom prst="rect">
+            <a:avLst/>
+          </a:prstGeom>
+          <a:noFill/>
+          <a:ln>
+            <a:solidFill>
+              <a:schemeClr val="tx1"/>
+            </a:solidFill>
+          </a:ln>
         </p:spPr>
         <p:txBody>
           <a:bodyPr wrap="square" rtlCol="0">
@@ -15788,80 +17817,78 @@
           </a:bodyPr>
           <a:lstStyle/>
           <a:p>
-            <a:r>
-              <a:rPr lang="en-US" sz="1400" b="1"/>
-              <a:t>Vignette #2:</a:t>
-            </a:r>
-          </a:p>
-          <a:p>
-            <a:r>
-              <a:rPr lang="en-US" sz="1400"/>
-              <a:t>You have cleaned the data. Now you want to understand how long hospitalizations last. Matplotlib is powerful, but producing a publication-ready duration histogram requires decisions: </a:t>
-            </a:r>
-          </a:p>
-          <a:p>
-            <a:endParaRPr lang="en-US" sz="1400"/>
-          </a:p>
-          <a:p>
-            <a:r>
-              <a:rPr lang="en-US" sz="1400" b="1"/>
-              <a:t>Considerations</a:t>
-            </a:r>
-          </a:p>
-          <a:p>
-            <a:r>
-              <a:rPr lang="en-US" sz="1400"/>
-              <a:t>How wide should the bins be? </a:t>
-            </a:r>
-          </a:p>
-          <a:p>
-            <a:r>
-              <a:rPr lang="en-US" sz="1400"/>
-              <a:t>Do 7-day bins make more clinical sense than 30? </a:t>
-            </a:r>
-          </a:p>
-          <a:p>
-            <a:r>
-              <a:rPr lang="en-US" sz="1400"/>
-              <a:t>Where do you put the percentile lines? </a:t>
-            </a:r>
-          </a:p>
-          <a:p>
-            <a:r>
-              <a:rPr lang="en-US" sz="1400"/>
-              <a:t>What color is the background? </a:t>
-            </a:r>
-          </a:p>
-          <a:p>
-            <a:r>
-              <a:rPr lang="en-US" sz="1400"/>
-              <a:t>What color is each stratum when you break down by hospital or DRG category? </a:t>
-            </a:r>
-          </a:p>
-          <a:p>
-            <a:endParaRPr lang="en-US" sz="1400"/>
-          </a:p>
-          <a:p>
-            <a:r>
-              <a:rPr lang="en-US" sz="1400" b="1"/>
-              <a:t>Problem 1 -  </a:t>
-            </a:r>
-            <a:r>
-              <a:rPr lang="en-US" sz="1400"/>
-              <a:t>How do you make sure the bins are consistent when you rerun the analysis next month on updated data?</a:t>
-            </a:r>
-          </a:p>
-          <a:p>
-            <a:endParaRPr lang="en-US" sz="1400"/>
-          </a:p>
-        </p:txBody>
-      </p:sp>
-      <p:sp>
-        <p:nvSpPr>
-          <p:cNvPr id="4" name="TextBox 3">
+            <a:pPr algn="ctr"/>
+            <a:r>
+              <a:rPr lang="en-US"/>
+              <a:t>Reproducibility: </a:t>
+            </a:r>
+            <a:br>
+              <a:rPr lang="en-US"/>
+            </a:br>
+            <a:r>
+              <a:rPr lang="en-US"/>
+              <a:t>Configuration-friendly objects</a:t>
+            </a:r>
+          </a:p>
+        </p:txBody>
+      </p:sp>
+      <mc:AlternateContent xmlns:mc="http://schemas.openxmlformats.org/markup-compatibility/2006" xmlns:p14="http://schemas.microsoft.com/office/powerpoint/2010/main">
+        <mc:Choice Requires="p14">
+          <p:contentPart p14:bwMode="auto" r:id="rId2">
+            <p14:nvContentPartPr>
+              <p14:cNvPr id="25" name="Ink 24">
+                <a:extLst>
+                  <a:ext uri="{FF2B5EF4-FFF2-40B4-BE49-F238E27FC236}">
+                    <a16:creationId xmlns:a16="http://schemas.microsoft.com/office/drawing/2014/main" id="{934C1257-0597-70AC-ABBC-46F404245F6D}"/>
+                  </a:ext>
+                </a:extLst>
+              </p14:cNvPr>
+              <p14:cNvContentPartPr/>
+              <p14:nvPr/>
+            </p14:nvContentPartPr>
+            <p14:xfrm>
+              <a:off x="4036269" y="653091"/>
+              <a:ext cx="360" cy="360"/>
+            </p14:xfrm>
+          </p:contentPart>
+        </mc:Choice>
+        <mc:Fallback xmlns="">
+          <p:pic>
+            <p:nvPicPr>
+              <p:cNvPr id="25" name="Ink 24">
+                <a:extLst>
+                  <a:ext uri="{FF2B5EF4-FFF2-40B4-BE49-F238E27FC236}">
+                    <a16:creationId xmlns:a16="http://schemas.microsoft.com/office/drawing/2014/main" id="{68DB5CBF-D701-D322-4416-C438505D842C}"/>
+                  </a:ext>
+                </a:extLst>
+              </p:cNvPr>
+              <p:cNvPicPr/>
+              <p:nvPr/>
+            </p:nvPicPr>
+            <p:blipFill>
+              <a:blip r:embed="rId23"/>
+              <a:stretch>
+                <a:fillRect/>
+              </a:stretch>
+            </p:blipFill>
+            <p:spPr>
+              <a:xfrm>
+                <a:off x="4030149" y="646971"/>
+                <a:ext cx="12600" cy="12600"/>
+              </a:xfrm>
+              <a:prstGeom prst="rect">
+                <a:avLst/>
+              </a:prstGeom>
+            </p:spPr>
+          </p:pic>
+        </mc:Fallback>
+      </mc:AlternateContent>
+      <p:sp>
+        <p:nvSpPr>
+          <p:cNvPr id="23" name="TextBox 22">
             <a:extLst>
               <a:ext uri="{FF2B5EF4-FFF2-40B4-BE49-F238E27FC236}">
-                <a16:creationId xmlns:a16="http://schemas.microsoft.com/office/drawing/2014/main" id="{205DA4C3-92BE-F24A-3A89-68403C69F8BE}"/>
+                <a16:creationId xmlns:a16="http://schemas.microsoft.com/office/drawing/2014/main" id="{C30085CE-B221-AF99-8754-B7ED129D807B}"/>
               </a:ext>
             </a:extLst>
           </p:cNvPr>
@@ -15870,8 +17897,8 @@
         </p:nvSpPr>
         <p:spPr>
           <a:xfrm>
-            <a:off x="2598420" y="3308925"/>
-            <a:ext cx="6187440" cy="1384995"/>
+            <a:off x="4435474" y="2787055"/>
+            <a:ext cx="4572000" cy="1384995"/>
           </a:xfrm>
           <a:prstGeom prst="rect">
             <a:avLst/>
@@ -15886,109 +17913,26 @@
           <a:p>
             <a:r>
               <a:rPr lang="en-US" sz="1200"/>
-              <a:t>We asked Claude to write an equivalent script using only pandas and matplotlib. </a:t>
-            </a:r>
-            <a:r>
-              <a:rPr lang="en-US" sz="1200">
-                <a:solidFill>
-                  <a:srgbClr val="FF0000"/>
-                </a:solidFill>
-              </a:rPr>
-              <a:t>It produced 118 lines of code </a:t>
-            </a:r>
+              <a:t>Why is the semantics abstraction needed:</a:t>
+            </a:r>
+          </a:p>
+          <a:p>
             <a:r>
               <a:rPr lang="en-US" sz="1200"/>
-              <a:t>— and that assumes the data is already clean. It did not utilize configuration files, so every decision is hardcoded directly in the script: bin width, colors, percentile values, figure size. There are no checks that those choices are valid — a typo in a hex color or a negative bin width fails silently </a:t>
-            </a:r>
-            <a:r>
-              <a:rPr lang="en-US" sz="1200">
-                <a:solidFill>
-                  <a:srgbClr val="FF0000"/>
-                </a:solidFill>
-              </a:rPr>
-              <a:t>or throws an unhelpful error at plot time. </a:t>
-            </a:r>
-            <a:r>
-              <a:rPr lang="en-US" sz="1200"/>
-              <a:t>To change a single color you must find it in the script. To share your visualization choices with a colleague you must share the entire script. </a:t>
-            </a:r>
-            <a:r>
-              <a:rPr lang="en-US" sz="1200">
-                <a:solidFill>
-                  <a:srgbClr val="FF0000"/>
-                </a:solidFill>
-              </a:rPr>
-              <a:t>To reuse this plot on a different dataset next month you must edit the script again.</a:t>
-            </a:r>
-          </a:p>
-        </p:txBody>
-      </p:sp>
-    </p:spTree>
-    <p:extLst>
-      <p:ext uri="{BB962C8B-B14F-4D97-AF65-F5344CB8AC3E}">
-        <p14:creationId xmlns:p14="http://schemas.microsoft.com/office/powerpoint/2010/main" val="447144401"/>
-      </p:ext>
-    </p:extLst>
-  </p:cSld>
-  <p:clrMapOvr>
-    <a:masterClrMapping/>
-  </p:clrMapOvr>
-</p:sld>
-</file>
-
-<file path=ppt/slides/slide5.xml><?xml version="1.0" encoding="utf-8"?>
-<p:sld xmlns:a="http://schemas.openxmlformats.org/drawingml/2006/main" xmlns:r="http://schemas.openxmlformats.org/officeDocument/2006/relationships" xmlns:p="http://schemas.openxmlformats.org/presentationml/2006/main">
-  <p:cSld>
-    <p:spTree>
-      <p:nvGrpSpPr>
-        <p:cNvPr id="1" name=""/>
-        <p:cNvGrpSpPr/>
-        <p:nvPr/>
-      </p:nvGrpSpPr>
-      <p:grpSpPr>
-        <a:xfrm>
-          <a:off x="0" y="0"/>
-          <a:ext cx="0" cy="0"/>
-          <a:chOff x="0" y="0"/>
-          <a:chExt cx="0" cy="0"/>
-        </a:xfrm>
-      </p:grpSpPr>
-      <p:pic>
-        <p:nvPicPr>
-          <p:cNvPr id="5" name="Picture 4">
+              <a:t>A pandas DataFrame does not know what its columns mean — 'begin_date' could be a birth date, a coverage start, or a contract signing. EventSemantics is built for exactly one purpose: to hold that meaning explicitly, validate it on construction, and carry it through the entire pipeline so no downstream function ever has to guess.</a:t>
+            </a:r>
+          </a:p>
+          <a:p>
+            <a:endParaRPr lang="en-US" sz="1200"/>
+          </a:p>
+        </p:txBody>
+      </p:sp>
+      <p:sp>
+        <p:nvSpPr>
+          <p:cNvPr id="7" name="TextBox 6">
             <a:extLst>
               <a:ext uri="{FF2B5EF4-FFF2-40B4-BE49-F238E27FC236}">
-                <a16:creationId xmlns:a16="http://schemas.microsoft.com/office/drawing/2014/main" id="{28451C86-78E0-DC66-C747-B2B7A2029977}"/>
-              </a:ext>
-            </a:extLst>
-          </p:cNvPr>
-          <p:cNvPicPr>
-            <a:picLocks noChangeAspect="1"/>
-          </p:cNvPicPr>
-          <p:nvPr/>
-        </p:nvPicPr>
-        <p:blipFill>
-          <a:blip r:embed="rId2"/>
-          <a:stretch>
-            <a:fillRect/>
-          </a:stretch>
-        </p:blipFill>
-        <p:spPr>
-          <a:xfrm>
-            <a:off x="0" y="1"/>
-            <a:ext cx="2668453" cy="3420836"/>
-          </a:xfrm>
-          <a:prstGeom prst="rect">
-            <a:avLst/>
-          </a:prstGeom>
-        </p:spPr>
-      </p:pic>
-      <p:sp>
-        <p:nvSpPr>
-          <p:cNvPr id="6" name="TextBox 5">
-            <a:extLst>
-              <a:ext uri="{FF2B5EF4-FFF2-40B4-BE49-F238E27FC236}">
-                <a16:creationId xmlns:a16="http://schemas.microsoft.com/office/drawing/2014/main" id="{C6AD2EEA-8E09-0B7A-EDC8-577692ABC16F}"/>
+                <a16:creationId xmlns:a16="http://schemas.microsoft.com/office/drawing/2014/main" id="{6F50E3F5-BB79-2DC0-B257-815FC6EE8DA5}"/>
               </a:ext>
             </a:extLst>
           </p:cNvPr>
@@ -15997,93 +17941,139 @@
         </p:nvSpPr>
         <p:spPr>
           <a:xfrm>
-            <a:off x="2956560" y="4424166"/>
-            <a:ext cx="6187440" cy="646331"/>
-          </a:xfrm>
-          <a:prstGeom prst="rect">
-            <a:avLst/>
-          </a:prstGeom>
-          <a:noFill/>
-        </p:spPr>
-        <p:txBody>
-          <a:bodyPr wrap="square">
+            <a:off x="588463" y="1071548"/>
+            <a:ext cx="2468881" cy="1569660"/>
+          </a:xfrm>
+          <a:prstGeom prst="rect">
+            <a:avLst/>
+          </a:prstGeom>
+          <a:noFill/>
+          <a:ln>
+            <a:solidFill>
+              <a:schemeClr val="accent5">
+                <a:lumMod val="20000"/>
+                <a:lumOff val="80000"/>
+              </a:schemeClr>
+            </a:solidFill>
+          </a:ln>
+          <a:effectLst>
+            <a:glow rad="101600">
+              <a:schemeClr val="accent2">
+                <a:satMod val="175000"/>
+                <a:alpha val="40000"/>
+              </a:schemeClr>
+            </a:glow>
+          </a:effectLst>
+          <a:scene3d>
+            <a:camera prst="orthographicFront"/>
+            <a:lightRig rig="threePt" dir="t"/>
+          </a:scene3d>
+          <a:sp3d>
+            <a:bevelT w="114300" prst="artDeco"/>
+          </a:sp3d>
+        </p:spPr>
+        <p:txBody>
+          <a:bodyPr wrap="square" rtlCol="0">
             <a:spAutoFit/>
           </a:bodyPr>
           <a:lstStyle/>
           <a:p>
-            <a:r>
-              <a:rPr lang="en-US" sz="1200" i="1"/>
-              <a:t>With eventus, the configuration is separated from the code entirely. The YAML is validated on construction — a bad hex color raises immediately with a clear message, before a single line of plotting code runs. The code never changes. The config is your methods section</a:t>
-            </a:r>
-          </a:p>
-        </p:txBody>
-      </p:sp>
-      <p:pic>
-        <p:nvPicPr>
-          <p:cNvPr id="8" name="Picture 7">
+            <a:pPr algn="ctr"/>
+            <a:r>
+              <a:rPr lang="en-US" sz="1200" b="1">
+                <a:latin typeface="Consolas" panose="020B0609020204030204" pitchFamily="49" charset="0"/>
+                <a:cs typeface="Times New Roman" panose="02020603050405020304" pitchFamily="18" charset="0"/>
+              </a:rPr>
+              <a:t>EventSemantics</a:t>
+            </a:r>
+          </a:p>
+          <a:p>
+            <a:pPr algn="ctr"/>
+            <a:r>
+              <a:rPr lang="en-US" sz="1200">
+                <a:latin typeface="Centaur" panose="02030504050205020304" pitchFamily="18" charset="0"/>
+                <a:cs typeface="Times New Roman" panose="02020603050405020304" pitchFamily="18" charset="0"/>
+              </a:rPr>
+              <a:t>type: str</a:t>
+            </a:r>
+          </a:p>
+          <a:p>
+            <a:pPr algn="ctr"/>
+            <a:r>
+              <a:rPr lang="en-US" sz="1200">
+                <a:latin typeface="Centaur" panose="02030504050205020304" pitchFamily="18" charset="0"/>
+                <a:cs typeface="Times New Roman" panose="02020603050405020304" pitchFamily="18" charset="0"/>
+              </a:rPr>
+              <a:t>entity_id_col: str</a:t>
+            </a:r>
+          </a:p>
+          <a:p>
+            <a:pPr algn="ctr"/>
+            <a:r>
+              <a:rPr lang="en-US" sz="1200">
+                <a:latin typeface="Centaur" panose="02030504050205020304" pitchFamily="18" charset="0"/>
+                <a:cs typeface="Times New Roman" panose="02020603050405020304" pitchFamily="18" charset="0"/>
+              </a:rPr>
+              <a:t>start_time_col: str</a:t>
+            </a:r>
+          </a:p>
+          <a:p>
+            <a:pPr algn="ctr"/>
+            <a:r>
+              <a:rPr lang="en-US" sz="1200">
+                <a:latin typeface="Centaur" panose="02030504050205020304" pitchFamily="18" charset="0"/>
+                <a:cs typeface="Times New Roman" panose="02020603050405020304" pitchFamily="18" charset="0"/>
+              </a:rPr>
+              <a:t>end_time_col: str</a:t>
+            </a:r>
+            <a:br>
+              <a:rPr lang="en-US" sz="1200">
+                <a:latin typeface="Centaur" panose="02030504050205020304" pitchFamily="18" charset="0"/>
+                <a:cs typeface="Times New Roman" panose="02020603050405020304" pitchFamily="18" charset="0"/>
+              </a:rPr>
+            </a:br>
+            <a:r>
+              <a:rPr lang="en-US" sz="1200">
+                <a:latin typeface="Centaur" panose="02030504050205020304" pitchFamily="18" charset="0"/>
+                <a:cs typeface="Times New Roman" panose="02020603050405020304" pitchFamily="18" charset="0"/>
+              </a:rPr>
+              <a:t>event_id_col: str|None</a:t>
+            </a:r>
+            <a:br>
+              <a:rPr lang="en-US" sz="1200">
+                <a:latin typeface="Centaur" panose="02030504050205020304" pitchFamily="18" charset="0"/>
+                <a:cs typeface="Times New Roman" panose="02020603050405020304" pitchFamily="18" charset="0"/>
+              </a:rPr>
+            </a:br>
+            <a:r>
+              <a:rPr lang="en-US" sz="1200">
+                <a:latin typeface="Centaur" panose="02030504050205020304" pitchFamily="18" charset="0"/>
+                <a:cs typeface="Times New Roman" panose="02020603050405020304" pitchFamily="18" charset="0"/>
+              </a:rPr>
+              <a:t>event_type_col: str|None</a:t>
+            </a:r>
+            <a:br>
+              <a:rPr lang="en-US" sz="1200">
+                <a:latin typeface="Centaur" panose="02030504050205020304" pitchFamily="18" charset="0"/>
+                <a:cs typeface="Times New Roman" panose="02020603050405020304" pitchFamily="18" charset="0"/>
+              </a:rPr>
+            </a:br>
+            <a:r>
+              <a:rPr lang="en-US" sz="1200">
+                <a:latin typeface="Centaur" panose="02030504050205020304" pitchFamily="18" charset="0"/>
+                <a:cs typeface="Times New Roman" panose="02020603050405020304" pitchFamily="18" charset="0"/>
+              </a:rPr>
+              <a:t>metadata_cols: list[str]</a:t>
+            </a:r>
+          </a:p>
+        </p:txBody>
+      </p:sp>
+      <p:sp>
+        <p:nvSpPr>
+          <p:cNvPr id="6" name="TextBox 5">
             <a:extLst>
               <a:ext uri="{FF2B5EF4-FFF2-40B4-BE49-F238E27FC236}">
-                <a16:creationId xmlns:a16="http://schemas.microsoft.com/office/drawing/2014/main" id="{FBA8CA5A-1AF2-7D7C-93BC-CBA59E9C2203}"/>
-              </a:ext>
-            </a:extLst>
-          </p:cNvPr>
-          <p:cNvPicPr>
-            <a:picLocks noChangeAspect="1"/>
-          </p:cNvPicPr>
-          <p:nvPr/>
-        </p:nvPicPr>
-        <p:blipFill>
-          <a:blip r:embed="rId3"/>
-          <a:stretch>
-            <a:fillRect/>
-          </a:stretch>
-        </p:blipFill>
-        <p:spPr>
-          <a:xfrm>
-            <a:off x="2956560" y="2122714"/>
-            <a:ext cx="4861009" cy="2396087"/>
-          </a:xfrm>
-          <a:prstGeom prst="rect">
-            <a:avLst/>
-          </a:prstGeom>
-        </p:spPr>
-      </p:pic>
-      <p:pic>
-        <p:nvPicPr>
-          <p:cNvPr id="10" name="Picture 9">
-            <a:extLst>
-              <a:ext uri="{FF2B5EF4-FFF2-40B4-BE49-F238E27FC236}">
-                <a16:creationId xmlns:a16="http://schemas.microsoft.com/office/drawing/2014/main" id="{8C7DFFF6-2A9C-E282-051F-64144BC969AE}"/>
-              </a:ext>
-            </a:extLst>
-          </p:cNvPr>
-          <p:cNvPicPr>
-            <a:picLocks noChangeAspect="1"/>
-          </p:cNvPicPr>
-          <p:nvPr/>
-        </p:nvPicPr>
-        <p:blipFill>
-          <a:blip r:embed="rId4"/>
-          <a:stretch>
-            <a:fillRect/>
-          </a:stretch>
-        </p:blipFill>
-        <p:spPr>
-          <a:xfrm>
-            <a:off x="2776332" y="95287"/>
-            <a:ext cx="6216970" cy="1219263"/>
-          </a:xfrm>
-          <a:prstGeom prst="rect">
-            <a:avLst/>
-          </a:prstGeom>
-        </p:spPr>
-      </p:pic>
-      <p:sp>
-        <p:nvSpPr>
-          <p:cNvPr id="11" name="TextBox 10">
-            <a:extLst>
-              <a:ext uri="{FF2B5EF4-FFF2-40B4-BE49-F238E27FC236}">
-                <a16:creationId xmlns:a16="http://schemas.microsoft.com/office/drawing/2014/main" id="{B6A90517-91FF-381F-6013-3EE0FC11F50C}"/>
+                <a16:creationId xmlns:a16="http://schemas.microsoft.com/office/drawing/2014/main" id="{017B5E74-A7B8-53EB-11E3-8B38D86E6E97}"/>
               </a:ext>
             </a:extLst>
           </p:cNvPr>
@@ -16092,8 +18082,8 @@
         </p:nvSpPr>
         <p:spPr>
           <a:xfrm>
-            <a:off x="6642463" y="1371600"/>
-            <a:ext cx="2103120" cy="646331"/>
+            <a:off x="3352800" y="971450"/>
+            <a:ext cx="5882640" cy="1569660"/>
           </a:xfrm>
           <a:prstGeom prst="rect">
             <a:avLst/>
@@ -16107,8 +18097,66 @@
           <a:lstStyle/>
           <a:p>
             <a:r>
-              <a:rPr lang="en-US" sz="1200"/>
-              <a:t>*** gotta change the default for the title and allow months/years</a:t>
+              <a:rPr lang="en-US" sz="1200" b="1">
+                <a:latin typeface="Consolas" panose="020B0609020204030204" pitchFamily="49" charset="0"/>
+              </a:rPr>
+              <a:t>Constructor</a:t>
+            </a:r>
+          </a:p>
+          <a:p>
+            <a:r>
+              <a:rPr lang="en-US" sz="1200">
+                <a:latin typeface="Consolas" panose="020B0609020204030204" pitchFamily="49" charset="0"/>
+              </a:rPr>
+              <a:t>__post__init()</a:t>
+            </a:r>
+          </a:p>
+          <a:p>
+            <a:endParaRPr lang="en-US" sz="1200" b="1">
+              <a:latin typeface="Consolas" panose="020B0609020204030204" pitchFamily="49" charset="0"/>
+            </a:endParaRPr>
+          </a:p>
+          <a:p>
+            <a:r>
+              <a:rPr lang="en-US" sz="1200" b="1">
+                <a:latin typeface="Consolas" panose="020B0609020204030204" pitchFamily="49" charset="0"/>
+              </a:rPr>
+              <a:t>Constructors as Class Methods</a:t>
+            </a:r>
+          </a:p>
+          <a:p>
+            <a:r>
+              <a:rPr lang="en-US" sz="1200" i="1">
+                <a:latin typeface="Consolas" panose="020B0609020204030204" pitchFamily="49" charset="0"/>
+              </a:rPr>
+              <a:t>build_from_yaml</a:t>
+            </a:r>
+            <a:r>
+              <a:rPr lang="en-US" sz="1200">
+                <a:latin typeface="Consolas" panose="020B0609020204030204" pitchFamily="49" charset="0"/>
+              </a:rPr>
+              <a:t>(path) -&gt; EventSemantics</a:t>
+            </a:r>
+          </a:p>
+          <a:p>
+            <a:endParaRPr lang="en-US" sz="1200">
+              <a:latin typeface="Consolas" panose="020B0609020204030204" pitchFamily="49" charset="0"/>
+            </a:endParaRPr>
+          </a:p>
+          <a:p>
+            <a:r>
+              <a:rPr lang="en-US" sz="1200" b="1">
+                <a:latin typeface="Consolas" panose="020B0609020204030204" pitchFamily="49" charset="0"/>
+              </a:rPr>
+              <a:t>Methods</a:t>
+            </a:r>
+          </a:p>
+          <a:p>
+            <a:r>
+              <a:rPr lang="en-US" sz="1200">
+                <a:latin typeface="Consolas" panose="020B0609020204030204" pitchFamily="49" charset="0"/>
+              </a:rPr>
+              <a:t>__repr__() -&gt; str</a:t>
             </a:r>
           </a:p>
         </p:txBody>
@@ -16116,7 +18164,7 @@
     </p:spTree>
     <p:extLst>
       <p:ext uri="{BB962C8B-B14F-4D97-AF65-F5344CB8AC3E}">
-        <p14:creationId xmlns:p14="http://schemas.microsoft.com/office/powerpoint/2010/main" val="2029337452"/>
+        <p14:creationId xmlns:p14="http://schemas.microsoft.com/office/powerpoint/2010/main" val="4200737717"/>
       </p:ext>
     </p:extLst>
   </p:cSld>
@@ -16131,7 +18179,13 @@
   <p:cSld>
     <p:spTree>
       <p:nvGrpSpPr>
-        <p:cNvPr id="1" name=""/>
+        <p:cNvPr id="1" name="">
+          <a:extLst>
+            <a:ext uri="{FF2B5EF4-FFF2-40B4-BE49-F238E27FC236}">
+              <a16:creationId xmlns:a16="http://schemas.microsoft.com/office/drawing/2014/main" id="{FBCC83FA-FBCB-E98B-9AEF-B67CEA0DC897}"/>
+            </a:ext>
+          </a:extLst>
+        </p:cNvPr>
         <p:cNvGrpSpPr/>
         <p:nvPr/>
       </p:nvGrpSpPr>
@@ -16148,7 +18202,7 @@
           <p:cNvPr id="2" name="TextBox 1">
             <a:extLst>
               <a:ext uri="{FF2B5EF4-FFF2-40B4-BE49-F238E27FC236}">
-                <a16:creationId xmlns:a16="http://schemas.microsoft.com/office/drawing/2014/main" id="{0C378200-6871-541B-180D-80B335EA2BAA}"/>
+                <a16:creationId xmlns:a16="http://schemas.microsoft.com/office/drawing/2014/main" id="{8A59085B-5A58-8E86-2CE7-9B0A310534AE}"/>
               </a:ext>
             </a:extLst>
           </p:cNvPr>
@@ -16157,13 +18211,18 @@
         </p:nvSpPr>
         <p:spPr>
           <a:xfrm>
-            <a:off x="53340" y="175260"/>
-            <a:ext cx="8831580" cy="3754874"/>
-          </a:xfrm>
-          <a:prstGeom prst="rect">
-            <a:avLst/>
-          </a:prstGeom>
-          <a:noFill/>
+            <a:off x="5695406" y="0"/>
+            <a:ext cx="3448594" cy="646331"/>
+          </a:xfrm>
+          <a:prstGeom prst="rect">
+            <a:avLst/>
+          </a:prstGeom>
+          <a:noFill/>
+          <a:ln>
+            <a:solidFill>
+              <a:schemeClr val="tx1"/>
+            </a:solidFill>
+          </a:ln>
         </p:spPr>
         <p:txBody>
           <a:bodyPr wrap="square" rtlCol="0">
@@ -16171,78 +18230,419 @@
           </a:bodyPr>
           <a:lstStyle/>
           <a:p>
-            <a:r>
-              <a:rPr lang="en-US" sz="1400" b="1"/>
-              <a:t>Vignette # 3:</a:t>
-            </a:r>
-          </a:p>
-          <a:p>
-            <a:r>
-              <a:rPr lang="en-US" sz="1400" b="1"/>
-              <a:t>How many days was each patient hospitalized during their observation period?</a:t>
-            </a:r>
-          </a:p>
-          <a:p>
-            <a:r>
-              <a:rPr lang="en-US" sz="1400"/>
-              <a:t>This sounds like a simple aggregation. It is not.Before writing a single line of code you must make six decisions, each of which affects your scientific conclusions:</a:t>
-            </a:r>
-          </a:p>
-          <a:p>
-            <a:endParaRPr lang="en-US" sz="1400"/>
-          </a:p>
-          <a:p>
-            <a:r>
-              <a:rPr lang="en-US" sz="1400" b="1"/>
-              <a:t>Problem 1 </a:t>
-            </a:r>
-            <a:r>
-              <a:rPr lang="en-US" sz="1400"/>
-              <a:t>- What is the observation period? Fixed calendar, age window, or index date — three different designs, three different constructions, same downstream analysis.</a:t>
-            </a:r>
-          </a:p>
-          <a:p>
-            <a:endParaRPr lang="en-US" sz="1400"/>
-          </a:p>
-          <a:p>
-            <a:r>
-              <a:rPr lang="en-US" sz="1400" b="1"/>
-              <a:t>Problem 2 - </a:t>
-            </a:r>
-            <a:r>
-              <a:rPr lang="en-US" sz="1400"/>
-              <a:t>What happens when a hospitalization crosses the boundary? A patient admitted December 15 and discharged January 20 must be clipped to the period. A script that does not clip systematically overcounts.</a:t>
-            </a:r>
-          </a:p>
-          <a:p>
-            <a:endParaRPr lang="en-US" sz="1400"/>
-          </a:p>
-          <a:p>
-            <a:r>
-              <a:rPr lang="en-US" sz="1400" b="1"/>
-              <a:t>Problem 3 - </a:t>
-            </a:r>
-            <a:r>
-              <a:rPr lang="en-US" sz="1400"/>
-              <a:t> What is a meaningful gap? A discharge on March 14 and readmission on March 15 — one hospitalization or two? This decision must be explicit, documented, and consistent. A script buries it on line 47.</a:t>
-            </a:r>
-          </a:p>
-          <a:p>
-            <a:endParaRPr lang="en-US" sz="1400"/>
-          </a:p>
-          <a:p>
-            <a:r>
-              <a:rPr lang="en-US" sz="1400"/>
-              <a:t>Others - What about patients with no hospitalizations? What about overlapping stays?</a:t>
-            </a:r>
-          </a:p>
-          <a:p>
-            <a:endParaRPr lang="en-US" sz="1400"/>
-          </a:p>
-          <a:p>
-            <a:r>
-              <a:rPr lang="en-US" sz="1400"/>
-              <a:t>What you may want to plot: Hospitalized days? Gaps between hospitalizations? what follow</a:t>
+            <a:pPr algn="ctr"/>
+            <a:r>
+              <a:rPr lang="en-US"/>
+              <a:t>Reproducibility: </a:t>
+            </a:r>
+            <a:br>
+              <a:rPr lang="en-US"/>
+            </a:br>
+            <a:r>
+              <a:rPr lang="en-US"/>
+              <a:t>Configuration-friendly objects</a:t>
+            </a:r>
+          </a:p>
+        </p:txBody>
+      </p:sp>
+      <mc:AlternateContent xmlns:mc="http://schemas.openxmlformats.org/markup-compatibility/2006" xmlns:p14="http://schemas.microsoft.com/office/powerpoint/2010/main">
+        <mc:Choice Requires="p14">
+          <p:contentPart p14:bwMode="auto" r:id="rId2">
+            <p14:nvContentPartPr>
+              <p14:cNvPr id="25" name="Ink 24">
+                <a:extLst>
+                  <a:ext uri="{FF2B5EF4-FFF2-40B4-BE49-F238E27FC236}">
+                    <a16:creationId xmlns:a16="http://schemas.microsoft.com/office/drawing/2014/main" id="{3D758C38-C513-606F-2D08-6676F272D555}"/>
+                  </a:ext>
+                </a:extLst>
+              </p14:cNvPr>
+              <p14:cNvContentPartPr/>
+              <p14:nvPr/>
+            </p14:nvContentPartPr>
+            <p14:xfrm>
+              <a:off x="4036269" y="653091"/>
+              <a:ext cx="360" cy="360"/>
+            </p14:xfrm>
+          </p:contentPart>
+        </mc:Choice>
+        <mc:Fallback xmlns="">
+          <p:pic>
+            <p:nvPicPr>
+              <p:cNvPr id="25" name="Ink 24">
+                <a:extLst>
+                  <a:ext uri="{FF2B5EF4-FFF2-40B4-BE49-F238E27FC236}">
+                    <a16:creationId xmlns:a16="http://schemas.microsoft.com/office/drawing/2014/main" id="{68DB5CBF-D701-D322-4416-C438505D842C}"/>
+                  </a:ext>
+                </a:extLst>
+              </p:cNvPr>
+              <p:cNvPicPr/>
+              <p:nvPr/>
+            </p:nvPicPr>
+            <p:blipFill>
+              <a:blip r:embed="rId23"/>
+              <a:stretch>
+                <a:fillRect/>
+              </a:stretch>
+            </p:blipFill>
+            <p:spPr>
+              <a:xfrm>
+                <a:off x="4030149" y="646971"/>
+                <a:ext cx="12600" cy="12600"/>
+              </a:xfrm>
+              <a:prstGeom prst="rect">
+                <a:avLst/>
+              </a:prstGeom>
+            </p:spPr>
+          </p:pic>
+        </mc:Fallback>
+      </mc:AlternateContent>
+      <p:sp>
+        <p:nvSpPr>
+          <p:cNvPr id="5" name="TextBox 4">
+            <a:extLst>
+              <a:ext uri="{FF2B5EF4-FFF2-40B4-BE49-F238E27FC236}">
+                <a16:creationId xmlns:a16="http://schemas.microsoft.com/office/drawing/2014/main" id="{2AFE607F-FC0D-C0EC-244E-5063290D7460}"/>
+              </a:ext>
+            </a:extLst>
+          </p:cNvPr>
+          <p:cNvSpPr txBox="1"/>
+          <p:nvPr/>
+        </p:nvSpPr>
+        <p:spPr>
+          <a:xfrm>
+            <a:off x="3596184" y="1176866"/>
+            <a:ext cx="1951632" cy="400110"/>
+          </a:xfrm>
+          <a:prstGeom prst="rect">
+            <a:avLst/>
+          </a:prstGeom>
+          <a:noFill/>
+        </p:spPr>
+        <p:txBody>
+          <a:bodyPr wrap="square" rtlCol="0">
+            <a:spAutoFit/>
+          </a:bodyPr>
+          <a:lstStyle/>
+          <a:p>
+            <a:pPr algn="ctr"/>
+            <a:r>
+              <a:rPr lang="en-US" sz="1000" i="1"/>
+              <a:t>EventsCleanerConfig.build_from_yaml(filename)</a:t>
+            </a:r>
+          </a:p>
+        </p:txBody>
+      </p:sp>
+      <p:sp>
+        <p:nvSpPr>
+          <p:cNvPr id="7" name="TextBox 6">
+            <a:extLst>
+              <a:ext uri="{FF2B5EF4-FFF2-40B4-BE49-F238E27FC236}">
+                <a16:creationId xmlns:a16="http://schemas.microsoft.com/office/drawing/2014/main" id="{A7A1C2F2-5693-9B9B-A859-FEC5B12EE87A}"/>
+              </a:ext>
+            </a:extLst>
+          </p:cNvPr>
+          <p:cNvSpPr txBox="1"/>
+          <p:nvPr/>
+        </p:nvSpPr>
+        <p:spPr>
+          <a:xfrm>
+            <a:off x="6286784" y="1510849"/>
+            <a:ext cx="2468881" cy="276999"/>
+          </a:xfrm>
+          <a:prstGeom prst="rect">
+            <a:avLst/>
+          </a:prstGeom>
+          <a:noFill/>
+          <a:ln>
+            <a:solidFill>
+              <a:schemeClr val="accent5">
+                <a:lumMod val="20000"/>
+                <a:lumOff val="80000"/>
+              </a:schemeClr>
+            </a:solidFill>
+          </a:ln>
+          <a:effectLst>
+            <a:glow rad="101600">
+              <a:schemeClr val="accent2">
+                <a:satMod val="175000"/>
+                <a:alpha val="40000"/>
+              </a:schemeClr>
+            </a:glow>
+          </a:effectLst>
+          <a:scene3d>
+            <a:camera prst="orthographicFront"/>
+            <a:lightRig rig="threePt" dir="t"/>
+          </a:scene3d>
+          <a:sp3d>
+            <a:bevelT w="114300" prst="artDeco"/>
+          </a:sp3d>
+        </p:spPr>
+        <p:txBody>
+          <a:bodyPr wrap="square" rtlCol="0">
+            <a:spAutoFit/>
+          </a:bodyPr>
+          <a:lstStyle/>
+          <a:p>
+            <a:pPr algn="ctr"/>
+            <a:r>
+              <a:rPr lang="en-US" sz="1200" b="1">
+                <a:latin typeface="Consolas" panose="020B0609020204030204" pitchFamily="49" charset="0"/>
+                <a:cs typeface="Times New Roman" panose="02020603050405020304" pitchFamily="18" charset="0"/>
+              </a:rPr>
+              <a:t>EventsCleanerConfig </a:t>
+            </a:r>
+            <a:r>
+              <a:rPr lang="en-US" sz="1200">
+                <a:latin typeface="Consolas" panose="020B0609020204030204" pitchFamily="49" charset="0"/>
+                <a:cs typeface="Times New Roman" panose="02020603050405020304" pitchFamily="18" charset="0"/>
+              </a:rPr>
+              <a:t>object</a:t>
+            </a:r>
+            <a:endParaRPr lang="en-US" sz="1200" b="1">
+              <a:latin typeface="Consolas" panose="020B0609020204030204" pitchFamily="49" charset="0"/>
+              <a:cs typeface="Times New Roman" panose="02020603050405020304" pitchFamily="18" charset="0"/>
+            </a:endParaRPr>
+          </a:p>
+        </p:txBody>
+      </p:sp>
+      <p:sp>
+        <p:nvSpPr>
+          <p:cNvPr id="12" name="TextBox 11">
+            <a:extLst>
+              <a:ext uri="{FF2B5EF4-FFF2-40B4-BE49-F238E27FC236}">
+                <a16:creationId xmlns:a16="http://schemas.microsoft.com/office/drawing/2014/main" id="{F7EF3D30-5F23-AC86-BCD1-5C9737C8B31A}"/>
+              </a:ext>
+            </a:extLst>
+          </p:cNvPr>
+          <p:cNvSpPr txBox="1"/>
+          <p:nvPr/>
+        </p:nvSpPr>
+        <p:spPr>
+          <a:xfrm>
+            <a:off x="3128554" y="2038493"/>
+            <a:ext cx="5480075" cy="600164"/>
+          </a:xfrm>
+          <a:prstGeom prst="rect">
+            <a:avLst/>
+          </a:prstGeom>
+          <a:noFill/>
+        </p:spPr>
+        <p:txBody>
+          <a:bodyPr wrap="square">
+            <a:spAutoFit/>
+          </a:bodyPr>
+          <a:lstStyle/>
+          <a:p>
+            <a:pPr algn="ctr"/>
+            <a:r>
+              <a:rPr lang="en-US" sz="1100"/>
+              <a:t>Validates on construction that the entries in the configuration are sensical. If you write a cleaning-thing that does not exist or an option that does not exist, it throws the error. </a:t>
+            </a:r>
+          </a:p>
+          <a:p>
+            <a:pPr algn="ctr"/>
+            <a:r>
+              <a:rPr lang="en-US" sz="1100"/>
+              <a:t>Once again, declarative construction acts both as configuration and documentation"</a:t>
+            </a:r>
+          </a:p>
+        </p:txBody>
+      </p:sp>
+      <p:cxnSp>
+        <p:nvCxnSpPr>
+          <p:cNvPr id="14" name="Straight Arrow Connector 13">
+            <a:extLst>
+              <a:ext uri="{FF2B5EF4-FFF2-40B4-BE49-F238E27FC236}">
+                <a16:creationId xmlns:a16="http://schemas.microsoft.com/office/drawing/2014/main" id="{8DAD26CF-A897-05C7-88A9-1B6123373C46}"/>
+              </a:ext>
+            </a:extLst>
+          </p:cNvPr>
+          <p:cNvCxnSpPr/>
+          <p:nvPr/>
+        </p:nvCxnSpPr>
+        <p:spPr>
+          <a:xfrm>
+            <a:off x="3726814" y="1649348"/>
+            <a:ext cx="1690372" cy="0"/>
+          </a:xfrm>
+          <a:prstGeom prst="straightConnector1">
+            <a:avLst/>
+          </a:prstGeom>
+          <a:ln>
+            <a:tailEnd type="triangle"/>
+          </a:ln>
+        </p:spPr>
+        <p:style>
+          <a:lnRef idx="1">
+            <a:schemeClr val="accent1"/>
+          </a:lnRef>
+          <a:fillRef idx="0">
+            <a:schemeClr val="accent1"/>
+          </a:fillRef>
+          <a:effectRef idx="0">
+            <a:schemeClr val="accent1"/>
+          </a:effectRef>
+          <a:fontRef idx="minor">
+            <a:schemeClr val="tx1"/>
+          </a:fontRef>
+        </p:style>
+      </p:cxnSp>
+      <p:pic>
+        <p:nvPicPr>
+          <p:cNvPr id="8" name="Picture 7">
+            <a:extLst>
+              <a:ext uri="{FF2B5EF4-FFF2-40B4-BE49-F238E27FC236}">
+                <a16:creationId xmlns:a16="http://schemas.microsoft.com/office/drawing/2014/main" id="{CD0198F9-830A-6227-C7FE-0B8F23897F20}"/>
+              </a:ext>
+            </a:extLst>
+          </p:cNvPr>
+          <p:cNvPicPr>
+            <a:picLocks noChangeAspect="1"/>
+          </p:cNvPicPr>
+          <p:nvPr/>
+        </p:nvPicPr>
+        <p:blipFill>
+          <a:blip r:embed="rId24"/>
+          <a:stretch>
+            <a:fillRect/>
+          </a:stretch>
+        </p:blipFill>
+        <p:spPr>
+          <a:xfrm>
+            <a:off x="170819" y="1030867"/>
+            <a:ext cx="3225644" cy="808993"/>
+          </a:xfrm>
+          <a:prstGeom prst="rect">
+            <a:avLst/>
+          </a:prstGeom>
+        </p:spPr>
+      </p:pic>
+      <p:pic>
+        <p:nvPicPr>
+          <p:cNvPr id="11" name="Picture 10">
+            <a:extLst>
+              <a:ext uri="{FF2B5EF4-FFF2-40B4-BE49-F238E27FC236}">
+                <a16:creationId xmlns:a16="http://schemas.microsoft.com/office/drawing/2014/main" id="{7E8B8831-83F7-CD66-3C05-E59EDDE96CA4}"/>
+              </a:ext>
+            </a:extLst>
+          </p:cNvPr>
+          <p:cNvPicPr>
+            <a:picLocks noChangeAspect="1"/>
+          </p:cNvPicPr>
+          <p:nvPr/>
+        </p:nvPicPr>
+        <p:blipFill>
+          <a:blip r:embed="rId25"/>
+          <a:stretch>
+            <a:fillRect/>
+          </a:stretch>
+        </p:blipFill>
+        <p:spPr>
+          <a:xfrm>
+            <a:off x="1783641" y="3355649"/>
+            <a:ext cx="4703452" cy="738807"/>
+          </a:xfrm>
+          <a:prstGeom prst="rect">
+            <a:avLst/>
+          </a:prstGeom>
+        </p:spPr>
+      </p:pic>
+      <p:sp>
+        <p:nvSpPr>
+          <p:cNvPr id="13" name="TextBox 12">
+            <a:extLst>
+              <a:ext uri="{FF2B5EF4-FFF2-40B4-BE49-F238E27FC236}">
+                <a16:creationId xmlns:a16="http://schemas.microsoft.com/office/drawing/2014/main" id="{68487F23-EEC6-211A-C108-1682DC173C18}"/>
+              </a:ext>
+            </a:extLst>
+          </p:cNvPr>
+          <p:cNvSpPr txBox="1"/>
+          <p:nvPr/>
+        </p:nvSpPr>
+        <p:spPr>
+          <a:xfrm>
+            <a:off x="2560320" y="3035328"/>
+            <a:ext cx="2606226" cy="369332"/>
+          </a:xfrm>
+          <a:prstGeom prst="rect">
+            <a:avLst/>
+          </a:prstGeom>
+          <a:noFill/>
+        </p:spPr>
+        <p:txBody>
+          <a:bodyPr wrap="none" rtlCol="0">
+            <a:spAutoFit/>
+          </a:bodyPr>
+          <a:lstStyle/>
+          <a:p>
+            <a:r>
+              <a:rPr lang="en-US"/>
+              <a:t>Examples of raised errors:</a:t>
+            </a:r>
+          </a:p>
+        </p:txBody>
+      </p:sp>
+      <p:pic>
+        <p:nvPicPr>
+          <p:cNvPr id="16" name="Picture 15">
+            <a:extLst>
+              <a:ext uri="{FF2B5EF4-FFF2-40B4-BE49-F238E27FC236}">
+                <a16:creationId xmlns:a16="http://schemas.microsoft.com/office/drawing/2014/main" id="{8BA3B51E-EF4C-DEF2-045E-8336794BA8FD}"/>
+              </a:ext>
+            </a:extLst>
+          </p:cNvPr>
+          <p:cNvPicPr>
+            <a:picLocks noChangeAspect="1"/>
+          </p:cNvPicPr>
+          <p:nvPr/>
+        </p:nvPicPr>
+        <p:blipFill>
+          <a:blip r:embed="rId26"/>
+          <a:stretch>
+            <a:fillRect/>
+          </a:stretch>
+        </p:blipFill>
+        <p:spPr>
+          <a:xfrm>
+            <a:off x="1094677" y="4154446"/>
+            <a:ext cx="6902805" cy="615982"/>
+          </a:xfrm>
+          <a:prstGeom prst="rect">
+            <a:avLst/>
+          </a:prstGeom>
+        </p:spPr>
+      </p:pic>
+      <p:sp>
+        <p:nvSpPr>
+          <p:cNvPr id="17" name="TextBox 16">
+            <a:extLst>
+              <a:ext uri="{FF2B5EF4-FFF2-40B4-BE49-F238E27FC236}">
+                <a16:creationId xmlns:a16="http://schemas.microsoft.com/office/drawing/2014/main" id="{5DD0EF73-3561-6A72-7EFE-1C0EA11A8631}"/>
+              </a:ext>
+            </a:extLst>
+          </p:cNvPr>
+          <p:cNvSpPr txBox="1"/>
+          <p:nvPr/>
+        </p:nvSpPr>
+        <p:spPr>
+          <a:xfrm>
+            <a:off x="7055572" y="3274664"/>
+            <a:ext cx="1990457" cy="461665"/>
+          </a:xfrm>
+          <a:prstGeom prst="rect">
+            <a:avLst/>
+          </a:prstGeom>
+          <a:noFill/>
+        </p:spPr>
+        <p:txBody>
+          <a:bodyPr wrap="square" rtlCol="0">
+            <a:spAutoFit/>
+          </a:bodyPr>
+          <a:lstStyle/>
+          <a:p>
+            <a:r>
+              <a:rPr lang="en-US" sz="1200"/>
+              <a:t>*** Lets make this snapshot from either linux or VSCode</a:t>
             </a:r>
           </a:p>
         </p:txBody>
@@ -16250,7 +18650,7 @@
     </p:spTree>
     <p:extLst>
       <p:ext uri="{BB962C8B-B14F-4D97-AF65-F5344CB8AC3E}">
-        <p14:creationId xmlns:p14="http://schemas.microsoft.com/office/powerpoint/2010/main" val="3549107990"/>
+        <p14:creationId xmlns:p14="http://schemas.microsoft.com/office/powerpoint/2010/main" val="1997679603"/>
       </p:ext>
     </p:extLst>
   </p:cSld>
@@ -16279,10 +18679,10 @@
       </p:grpSpPr>
       <p:sp>
         <p:nvSpPr>
-          <p:cNvPr id="4" name="TextBox 3">
+          <p:cNvPr id="2" name="TextBox 1">
             <a:extLst>
               <a:ext uri="{FF2B5EF4-FFF2-40B4-BE49-F238E27FC236}">
-                <a16:creationId xmlns:a16="http://schemas.microsoft.com/office/drawing/2014/main" id="{E6F31E6C-6343-C599-499C-7C985D1DC1FA}"/>
+                <a16:creationId xmlns:a16="http://schemas.microsoft.com/office/drawing/2014/main" id="{52B9D03B-9E30-AA41-89DD-F52445622685}"/>
               </a:ext>
             </a:extLst>
           </p:cNvPr>
@@ -16291,43 +18691,109 @@
         </p:nvSpPr>
         <p:spPr>
           <a:xfrm>
-            <a:off x="2727960" y="3771346"/>
-            <a:ext cx="6187440" cy="1200329"/>
-          </a:xfrm>
-          <a:prstGeom prst="rect">
-            <a:avLst/>
-          </a:prstGeom>
-          <a:noFill/>
-        </p:spPr>
-        <p:txBody>
-          <a:bodyPr wrap="square">
+            <a:off x="6544491" y="614497"/>
+            <a:ext cx="2468881" cy="461665"/>
+          </a:xfrm>
+          <a:prstGeom prst="rect">
+            <a:avLst/>
+          </a:prstGeom>
+          <a:noFill/>
+          <a:ln>
+            <a:solidFill>
+              <a:schemeClr val="accent5">
+                <a:lumMod val="20000"/>
+                <a:lumOff val="80000"/>
+              </a:schemeClr>
+            </a:solidFill>
+          </a:ln>
+          <a:effectLst>
+            <a:glow rad="101600">
+              <a:schemeClr val="accent2">
+                <a:satMod val="175000"/>
+                <a:alpha val="40000"/>
+              </a:schemeClr>
+            </a:glow>
+          </a:effectLst>
+          <a:scene3d>
+            <a:camera prst="orthographicFront"/>
+            <a:lightRig rig="threePt" dir="t"/>
+          </a:scene3d>
+          <a:sp3d>
+            <a:bevelT w="114300" prst="artDeco"/>
+          </a:sp3d>
+        </p:spPr>
+        <p:txBody>
+          <a:bodyPr wrap="square" rtlCol="0">
             <a:spAutoFit/>
           </a:bodyPr>
           <a:lstStyle/>
           <a:p>
-            <a:r>
-              <a:rPr lang="en-US" sz="1200"/>
-              <a:t>No configuration files. No specific error messages — a wrong column name gives you a KeyError, a bad date gives you a silent NaN, a logic error gives you wrong numbers with no warning. The meaningful gap is hardcoded. </a:t>
-            </a:r>
-          </a:p>
-          <a:p>
-            <a:endParaRPr lang="en-US" sz="1200"/>
-          </a:p>
-          <a:p>
-            <a:r>
-              <a:rPr lang="en-US" sz="1200"/>
-              <a:t>The eventus version is 6 lines of code, two YAML files, and specific errors that tell you exactly what went wrong.</a:t>
-            </a:r>
-            <a:endParaRPr lang="en-US" sz="1200" i="1"/>
-          </a:p>
-        </p:txBody>
-      </p:sp>
+            <a:pPr algn="ctr"/>
+            <a:r>
+              <a:rPr lang="en-US" sz="1200" b="1">
+                <a:latin typeface="Consolas" panose="020B0609020204030204" pitchFamily="49" charset="0"/>
+                <a:cs typeface="Times New Roman" panose="02020603050405020304" pitchFamily="18" charset="0"/>
+              </a:rPr>
+              <a:t>CleanerConfig</a:t>
+            </a:r>
+          </a:p>
+          <a:p>
+            <a:pPr algn="ctr"/>
+            <a:endParaRPr lang="en-US" sz="1200">
+              <a:latin typeface="Consolas" panose="020B0609020204030204" pitchFamily="49" charset="0"/>
+              <a:cs typeface="Times New Roman" panose="02020603050405020304" pitchFamily="18" charset="0"/>
+            </a:endParaRPr>
+          </a:p>
+        </p:txBody>
+      </p:sp>
+      <p:cxnSp>
+        <p:nvCxnSpPr>
+          <p:cNvPr id="5" name="Straight Arrow Connector 4">
+            <a:extLst>
+              <a:ext uri="{FF2B5EF4-FFF2-40B4-BE49-F238E27FC236}">
+                <a16:creationId xmlns:a16="http://schemas.microsoft.com/office/drawing/2014/main" id="{E521C67B-8A1D-20FD-9FD3-55BA72734AA8}"/>
+              </a:ext>
+            </a:extLst>
+          </p:cNvPr>
+          <p:cNvCxnSpPr>
+            <a:cxnSpLocks/>
+            <a:endCxn id="2" idx="1"/>
+          </p:cNvCxnSpPr>
+          <p:nvPr/>
+        </p:nvCxnSpPr>
+        <p:spPr>
+          <a:xfrm flipV="1">
+            <a:off x="4467497" y="845330"/>
+            <a:ext cx="2076994" cy="6853"/>
+          </a:xfrm>
+          <a:prstGeom prst="straightConnector1">
+            <a:avLst/>
+          </a:prstGeom>
+          <a:ln>
+            <a:tailEnd type="triangle"/>
+          </a:ln>
+        </p:spPr>
+        <p:style>
+          <a:lnRef idx="1">
+            <a:schemeClr val="accent1"/>
+          </a:lnRef>
+          <a:fillRef idx="0">
+            <a:schemeClr val="accent1"/>
+          </a:fillRef>
+          <a:effectRef idx="0">
+            <a:schemeClr val="accent1"/>
+          </a:effectRef>
+          <a:fontRef idx="minor">
+            <a:schemeClr val="tx1"/>
+          </a:fontRef>
+        </p:style>
+      </p:cxnSp>
       <p:pic>
         <p:nvPicPr>
-          <p:cNvPr id="8" name="Picture 7">
+          <p:cNvPr id="7" name="Picture 6">
             <a:extLst>
               <a:ext uri="{FF2B5EF4-FFF2-40B4-BE49-F238E27FC236}">
-                <a16:creationId xmlns:a16="http://schemas.microsoft.com/office/drawing/2014/main" id="{6A1AEF2B-E7B4-9BA0-B09C-E25CF08B102D}"/>
+                <a16:creationId xmlns:a16="http://schemas.microsoft.com/office/drawing/2014/main" id="{AB67C89C-CCF8-66C4-25BF-471B65AD3881}"/>
               </a:ext>
             </a:extLst>
           </p:cNvPr>
@@ -16344,18 +18810,586 @@
         </p:blipFill>
         <p:spPr>
           <a:xfrm>
-            <a:off x="603975" y="413763"/>
-            <a:ext cx="7086964" cy="3124361"/>
+            <a:off x="117566" y="305041"/>
+            <a:ext cx="4264981" cy="1094285"/>
           </a:xfrm>
           <a:prstGeom prst="rect">
             <a:avLst/>
           </a:prstGeom>
         </p:spPr>
       </p:pic>
+      <p:sp>
+        <p:nvSpPr>
+          <p:cNvPr id="10" name="TextBox 9">
+            <a:extLst>
+              <a:ext uri="{FF2B5EF4-FFF2-40B4-BE49-F238E27FC236}">
+                <a16:creationId xmlns:a16="http://schemas.microsoft.com/office/drawing/2014/main" id="{70C30D90-97A8-97A0-5F73-057633CF0278}"/>
+              </a:ext>
+            </a:extLst>
+          </p:cNvPr>
+          <p:cNvSpPr txBox="1"/>
+          <p:nvPr/>
+        </p:nvSpPr>
+        <p:spPr>
+          <a:xfrm>
+            <a:off x="3083880" y="1399326"/>
+            <a:ext cx="3382233" cy="646331"/>
+          </a:xfrm>
+          <a:prstGeom prst="rect">
+            <a:avLst/>
+          </a:prstGeom>
+          <a:noFill/>
+        </p:spPr>
+        <p:txBody>
+          <a:bodyPr wrap="square">
+            <a:spAutoFit/>
+          </a:bodyPr>
+          <a:lstStyle/>
+          <a:p>
+            <a:r>
+              <a:rPr lang="en-US" sz="1200"/>
+              <a:t>Declarative construction. Unknown keys and invalid options raise immediately — your cleaning choices are explicit, versioned, and reproducible</a:t>
+            </a:r>
+          </a:p>
+        </p:txBody>
+      </p:sp>
+      <p:sp>
+        <p:nvSpPr>
+          <p:cNvPr id="11" name="TextBox 10">
+            <a:extLst>
+              <a:ext uri="{FF2B5EF4-FFF2-40B4-BE49-F238E27FC236}">
+                <a16:creationId xmlns:a16="http://schemas.microsoft.com/office/drawing/2014/main" id="{693F916D-6780-210A-4A25-08B7647C1569}"/>
+              </a:ext>
+            </a:extLst>
+          </p:cNvPr>
+          <p:cNvSpPr txBox="1"/>
+          <p:nvPr/>
+        </p:nvSpPr>
+        <p:spPr>
+          <a:xfrm>
+            <a:off x="7097555" y="3917966"/>
+            <a:ext cx="1170145" cy="276999"/>
+          </a:xfrm>
+          <a:prstGeom prst="rect">
+            <a:avLst/>
+          </a:prstGeom>
+          <a:noFill/>
+          <a:ln>
+            <a:solidFill>
+              <a:schemeClr val="tx1"/>
+            </a:solidFill>
+          </a:ln>
+        </p:spPr>
+        <p:txBody>
+          <a:bodyPr wrap="square">
+            <a:spAutoFit/>
+          </a:bodyPr>
+          <a:lstStyle/>
+          <a:p>
+            <a:pPr algn="ctr"/>
+            <a:r>
+              <a:rPr lang="en-US" sz="1200"/>
+              <a:t>pd.Dataframe</a:t>
+            </a:r>
+          </a:p>
+        </p:txBody>
+      </p:sp>
+      <p:cxnSp>
+        <p:nvCxnSpPr>
+          <p:cNvPr id="12" name="Straight Arrow Connector 11">
+            <a:extLst>
+              <a:ext uri="{FF2B5EF4-FFF2-40B4-BE49-F238E27FC236}">
+                <a16:creationId xmlns:a16="http://schemas.microsoft.com/office/drawing/2014/main" id="{5105D144-EE26-80B1-D87B-ECF15D63877E}"/>
+              </a:ext>
+            </a:extLst>
+          </p:cNvPr>
+          <p:cNvCxnSpPr>
+            <a:cxnSpLocks/>
+            <a:stCxn id="2" idx="2"/>
+          </p:cNvCxnSpPr>
+          <p:nvPr/>
+        </p:nvCxnSpPr>
+        <p:spPr>
+          <a:xfrm flipH="1">
+            <a:off x="6021421" y="1076162"/>
+            <a:ext cx="1757511" cy="1778626"/>
+          </a:xfrm>
+          <a:prstGeom prst="straightConnector1">
+            <a:avLst/>
+          </a:prstGeom>
+          <a:ln>
+            <a:tailEnd type="triangle"/>
+          </a:ln>
+        </p:spPr>
+        <p:style>
+          <a:lnRef idx="1">
+            <a:schemeClr val="accent1"/>
+          </a:lnRef>
+          <a:fillRef idx="0">
+            <a:schemeClr val="accent1"/>
+          </a:fillRef>
+          <a:effectRef idx="0">
+            <a:schemeClr val="accent1"/>
+          </a:effectRef>
+          <a:fontRef idx="minor">
+            <a:schemeClr val="tx1"/>
+          </a:fontRef>
+        </p:style>
+      </p:cxnSp>
+      <p:cxnSp>
+        <p:nvCxnSpPr>
+          <p:cNvPr id="15" name="Straight Arrow Connector 14">
+            <a:extLst>
+              <a:ext uri="{FF2B5EF4-FFF2-40B4-BE49-F238E27FC236}">
+                <a16:creationId xmlns:a16="http://schemas.microsoft.com/office/drawing/2014/main" id="{149B66A5-ECF9-8771-8E1A-37694D670FD2}"/>
+              </a:ext>
+            </a:extLst>
+          </p:cNvPr>
+          <p:cNvCxnSpPr>
+            <a:cxnSpLocks/>
+            <a:stCxn id="11" idx="0"/>
+          </p:cNvCxnSpPr>
+          <p:nvPr/>
+        </p:nvCxnSpPr>
+        <p:spPr>
+          <a:xfrm flipH="1" flipV="1">
+            <a:off x="6021421" y="3489042"/>
+            <a:ext cx="1661207" cy="428924"/>
+          </a:xfrm>
+          <a:prstGeom prst="straightConnector1">
+            <a:avLst/>
+          </a:prstGeom>
+          <a:ln>
+            <a:tailEnd type="triangle"/>
+          </a:ln>
+        </p:spPr>
+        <p:style>
+          <a:lnRef idx="1">
+            <a:schemeClr val="accent1"/>
+          </a:lnRef>
+          <a:fillRef idx="0">
+            <a:schemeClr val="accent1"/>
+          </a:fillRef>
+          <a:effectRef idx="0">
+            <a:schemeClr val="accent1"/>
+          </a:effectRef>
+          <a:fontRef idx="minor">
+            <a:schemeClr val="tx1"/>
+          </a:fontRef>
+        </p:style>
+      </p:cxnSp>
+      <p:cxnSp>
+        <p:nvCxnSpPr>
+          <p:cNvPr id="22" name="Straight Arrow Connector 21">
+            <a:extLst>
+              <a:ext uri="{FF2B5EF4-FFF2-40B4-BE49-F238E27FC236}">
+                <a16:creationId xmlns:a16="http://schemas.microsoft.com/office/drawing/2014/main" id="{F6172A34-DA94-F09E-1B60-7D53E8B1CD3D}"/>
+              </a:ext>
+            </a:extLst>
+          </p:cNvPr>
+          <p:cNvCxnSpPr>
+            <a:cxnSpLocks/>
+          </p:cNvCxnSpPr>
+          <p:nvPr/>
+        </p:nvCxnSpPr>
+        <p:spPr>
+          <a:xfrm flipH="1">
+            <a:off x="2834640" y="3277665"/>
+            <a:ext cx="1051560" cy="0"/>
+          </a:xfrm>
+          <a:prstGeom prst="straightConnector1">
+            <a:avLst/>
+          </a:prstGeom>
+          <a:ln>
+            <a:tailEnd type="triangle"/>
+          </a:ln>
+        </p:spPr>
+        <p:style>
+          <a:lnRef idx="1">
+            <a:schemeClr val="accent1"/>
+          </a:lnRef>
+          <a:fillRef idx="0">
+            <a:schemeClr val="accent1"/>
+          </a:fillRef>
+          <a:effectRef idx="0">
+            <a:schemeClr val="accent1"/>
+          </a:effectRef>
+          <a:fontRef idx="minor">
+            <a:schemeClr val="tx1"/>
+          </a:fontRef>
+        </p:style>
+      </p:cxnSp>
+      <p:sp>
+        <p:nvSpPr>
+          <p:cNvPr id="25" name="TextBox 24">
+            <a:extLst>
+              <a:ext uri="{FF2B5EF4-FFF2-40B4-BE49-F238E27FC236}">
+                <a16:creationId xmlns:a16="http://schemas.microsoft.com/office/drawing/2014/main" id="{03FDE468-392C-7953-BC87-B6245F73D380}"/>
+              </a:ext>
+            </a:extLst>
+          </p:cNvPr>
+          <p:cNvSpPr txBox="1"/>
+          <p:nvPr/>
+        </p:nvSpPr>
+        <p:spPr>
+          <a:xfrm>
+            <a:off x="106155" y="3119709"/>
+            <a:ext cx="2468881" cy="276999"/>
+          </a:xfrm>
+          <a:prstGeom prst="rect">
+            <a:avLst/>
+          </a:prstGeom>
+          <a:noFill/>
+          <a:ln>
+            <a:solidFill>
+              <a:srgbClr val="FFCCFF"/>
+            </a:solidFill>
+          </a:ln>
+          <a:effectLst>
+            <a:glow rad="101600">
+              <a:schemeClr val="accent1">
+                <a:satMod val="175000"/>
+                <a:alpha val="40000"/>
+              </a:schemeClr>
+            </a:glow>
+          </a:effectLst>
+          <a:scene3d>
+            <a:camera prst="orthographicFront"/>
+            <a:lightRig rig="threePt" dir="t"/>
+          </a:scene3d>
+          <a:sp3d>
+            <a:bevelT w="114300" prst="artDeco"/>
+          </a:sp3d>
+        </p:spPr>
+        <p:txBody>
+          <a:bodyPr wrap="square" rtlCol="0">
+            <a:spAutoFit/>
+          </a:bodyPr>
+          <a:lstStyle/>
+          <a:p>
+            <a:pPr algn="ctr"/>
+            <a:r>
+              <a:rPr lang="en-US" sz="1200" b="1">
+                <a:latin typeface="Consolas" panose="020B0609020204030204" pitchFamily="49" charset="0"/>
+                <a:cs typeface="Times New Roman" panose="02020603050405020304" pitchFamily="18" charset="0"/>
+              </a:rPr>
+              <a:t>Events</a:t>
+            </a:r>
+          </a:p>
+        </p:txBody>
+      </p:sp>
+      <p:sp>
+        <p:nvSpPr>
+          <p:cNvPr id="27" name="TextBox 26">
+            <a:extLst>
+              <a:ext uri="{FF2B5EF4-FFF2-40B4-BE49-F238E27FC236}">
+                <a16:creationId xmlns:a16="http://schemas.microsoft.com/office/drawing/2014/main" id="{C314148D-C7EC-BCEA-A0CC-AD8AAA07E6AC}"/>
+              </a:ext>
+            </a:extLst>
+          </p:cNvPr>
+          <p:cNvSpPr txBox="1"/>
+          <p:nvPr/>
+        </p:nvSpPr>
+        <p:spPr>
+          <a:xfrm>
+            <a:off x="56606" y="2208457"/>
+            <a:ext cx="2290354" cy="646331"/>
+          </a:xfrm>
+          <a:prstGeom prst="rect">
+            <a:avLst/>
+          </a:prstGeom>
+          <a:noFill/>
+        </p:spPr>
+        <p:txBody>
+          <a:bodyPr wrap="square">
+            <a:spAutoFit/>
+          </a:bodyPr>
+          <a:lstStyle/>
+          <a:p>
+            <a:r>
+              <a:rPr lang="en-US" sz="1200">
+                <a:latin typeface="Times New Roman" panose="02020603050405020304" pitchFamily="18" charset="0"/>
+                <a:cs typeface="Times New Roman" panose="02020603050405020304" pitchFamily="18" charset="0"/>
+              </a:rPr>
+              <a:t>The DataFrame inside this object is clean. Every row passed every rule.</a:t>
+            </a:r>
+          </a:p>
+        </p:txBody>
+      </p:sp>
+      <p:cxnSp>
+        <p:nvCxnSpPr>
+          <p:cNvPr id="28" name="Straight Arrow Connector 27">
+            <a:extLst>
+              <a:ext uri="{FF2B5EF4-FFF2-40B4-BE49-F238E27FC236}">
+                <a16:creationId xmlns:a16="http://schemas.microsoft.com/office/drawing/2014/main" id="{861F23B3-5D2D-B1CA-E42E-1224ED07F824}"/>
+              </a:ext>
+            </a:extLst>
+          </p:cNvPr>
+          <p:cNvCxnSpPr>
+            <a:cxnSpLocks/>
+          </p:cNvCxnSpPr>
+          <p:nvPr/>
+        </p:nvCxnSpPr>
+        <p:spPr>
+          <a:xfrm flipH="1">
+            <a:off x="2720340" y="3410609"/>
+            <a:ext cx="1318260" cy="784356"/>
+          </a:xfrm>
+          <a:prstGeom prst="straightConnector1">
+            <a:avLst/>
+          </a:prstGeom>
+          <a:ln>
+            <a:tailEnd type="triangle"/>
+          </a:ln>
+        </p:spPr>
+        <p:style>
+          <a:lnRef idx="1">
+            <a:schemeClr val="accent1"/>
+          </a:lnRef>
+          <a:fillRef idx="0">
+            <a:schemeClr val="accent1"/>
+          </a:fillRef>
+          <a:effectRef idx="0">
+            <a:schemeClr val="accent1"/>
+          </a:effectRef>
+          <a:fontRef idx="minor">
+            <a:schemeClr val="tx1"/>
+          </a:fontRef>
+        </p:style>
+      </p:cxnSp>
+      <p:pic>
+        <p:nvPicPr>
+          <p:cNvPr id="30" name="Picture 29">
+            <a:extLst>
+              <a:ext uri="{FF2B5EF4-FFF2-40B4-BE49-F238E27FC236}">
+                <a16:creationId xmlns:a16="http://schemas.microsoft.com/office/drawing/2014/main" id="{080462B5-7044-7E63-7220-2BC605656D70}"/>
+              </a:ext>
+            </a:extLst>
+          </p:cNvPr>
+          <p:cNvPicPr>
+            <a:picLocks noChangeAspect="1"/>
+          </p:cNvPicPr>
+          <p:nvPr/>
+        </p:nvPicPr>
+        <p:blipFill>
+          <a:blip r:embed="rId3"/>
+          <a:stretch>
+            <a:fillRect/>
+          </a:stretch>
+        </p:blipFill>
+        <p:spPr>
+          <a:xfrm>
+            <a:off x="117566" y="3917965"/>
+            <a:ext cx="2290354" cy="1191503"/>
+          </a:xfrm>
+          <a:prstGeom prst="rect">
+            <a:avLst/>
+          </a:prstGeom>
+        </p:spPr>
+      </p:pic>
+      <p:sp>
+        <p:nvSpPr>
+          <p:cNvPr id="32" name="TextBox 31">
+            <a:extLst>
+              <a:ext uri="{FF2B5EF4-FFF2-40B4-BE49-F238E27FC236}">
+                <a16:creationId xmlns:a16="http://schemas.microsoft.com/office/drawing/2014/main" id="{93A43601-9F93-A574-E5E1-9845D32F98A4}"/>
+              </a:ext>
+            </a:extLst>
+          </p:cNvPr>
+          <p:cNvSpPr txBox="1"/>
+          <p:nvPr/>
+        </p:nvSpPr>
+        <p:spPr>
+          <a:xfrm>
+            <a:off x="2539706" y="4563093"/>
+            <a:ext cx="4572000" cy="461665"/>
+          </a:xfrm>
+          <a:prstGeom prst="rect">
+            <a:avLst/>
+          </a:prstGeom>
+          <a:noFill/>
+        </p:spPr>
+        <p:txBody>
+          <a:bodyPr wrap="square">
+            <a:spAutoFit/>
+          </a:bodyPr>
+          <a:lstStyle/>
+          <a:p>
+            <a:r>
+              <a:rPr lang="en-US" sz="1200">
+                <a:latin typeface="Times New Roman" panose="02020603050405020304" pitchFamily="18" charset="0"/>
+                <a:cs typeface="Times New Roman" panose="02020603050405020304" pitchFamily="18" charset="0"/>
+              </a:rPr>
+              <a:t>Complete transparency — every dropped row has a named reason, with counts and percentages. Ready for your methods and results section.</a:t>
+            </a:r>
+          </a:p>
+        </p:txBody>
+      </p:sp>
+      <p:sp>
+        <p:nvSpPr>
+          <p:cNvPr id="33" name="TextBox 32">
+            <a:extLst>
+              <a:ext uri="{FF2B5EF4-FFF2-40B4-BE49-F238E27FC236}">
+                <a16:creationId xmlns:a16="http://schemas.microsoft.com/office/drawing/2014/main" id="{4D058370-16BA-CD8E-5BE4-F72C5B1E9594}"/>
+              </a:ext>
+            </a:extLst>
+          </p:cNvPr>
+          <p:cNvSpPr txBox="1"/>
+          <p:nvPr/>
+        </p:nvSpPr>
+        <p:spPr>
+          <a:xfrm>
+            <a:off x="4405407" y="3076569"/>
+            <a:ext cx="2922815" cy="276999"/>
+          </a:xfrm>
+          <a:custGeom>
+            <a:avLst/>
+            <a:gdLst>
+              <a:gd name="csX0" fmla="*/ 0 w 2922815"/>
+              <a:gd name="csY0" fmla="*/ 0 h 276999"/>
+              <a:gd name="csX1" fmla="*/ 2922815 w 2922815"/>
+              <a:gd name="csY1" fmla="*/ 0 h 276999"/>
+              <a:gd name="csX2" fmla="*/ 2922815 w 2922815"/>
+              <a:gd name="csY2" fmla="*/ 276999 h 276999"/>
+              <a:gd name="csX3" fmla="*/ 0 w 2922815"/>
+              <a:gd name="csY3" fmla="*/ 276999 h 276999"/>
+              <a:gd name="csX4" fmla="*/ 0 w 2922815"/>
+              <a:gd name="csY4" fmla="*/ 0 h 276999"/>
+            </a:gdLst>
+            <a:ahLst/>
+            <a:cxnLst>
+              <a:cxn ang="0">
+                <a:pos x="csX0" y="csY0"/>
+              </a:cxn>
+              <a:cxn ang="0">
+                <a:pos x="csX1" y="csY1"/>
+              </a:cxn>
+              <a:cxn ang="0">
+                <a:pos x="csX2" y="csY2"/>
+              </a:cxn>
+              <a:cxn ang="0">
+                <a:pos x="csX3" y="csY3"/>
+              </a:cxn>
+              <a:cxn ang="0">
+                <a:pos x="csX4" y="csY4"/>
+              </a:cxn>
+            </a:cxnLst>
+            <a:rect l="l" t="t" r="r" b="b"/>
+            <a:pathLst>
+              <a:path w="2922815" h="276999" fill="none" extrusionOk="0">
+                <a:moveTo>
+                  <a:pt x="0" y="0"/>
+                </a:moveTo>
+                <a:cubicBezTo>
+                  <a:pt x="355566" y="-130955"/>
+                  <a:pt x="1815757" y="60629"/>
+                  <a:pt x="2922815" y="0"/>
+                </a:cubicBezTo>
+                <a:cubicBezTo>
+                  <a:pt x="2917705" y="61300"/>
+                  <a:pt x="2912748" y="153708"/>
+                  <a:pt x="2922815" y="276999"/>
+                </a:cubicBezTo>
+                <a:cubicBezTo>
+                  <a:pt x="2415729" y="244168"/>
+                  <a:pt x="508035" y="187355"/>
+                  <a:pt x="0" y="276999"/>
+                </a:cubicBezTo>
+                <a:cubicBezTo>
+                  <a:pt x="-8774" y="238354"/>
+                  <a:pt x="11105" y="69729"/>
+                  <a:pt x="0" y="0"/>
+                </a:cubicBezTo>
+                <a:close/>
+              </a:path>
+              <a:path w="2922815" h="276999" stroke="0" extrusionOk="0">
+                <a:moveTo>
+                  <a:pt x="0" y="0"/>
+                </a:moveTo>
+                <a:cubicBezTo>
+                  <a:pt x="1326380" y="-145685"/>
+                  <a:pt x="1476772" y="120332"/>
+                  <a:pt x="2922815" y="0"/>
+                </a:cubicBezTo>
+                <a:cubicBezTo>
+                  <a:pt x="2929541" y="58512"/>
+                  <a:pt x="2933659" y="185972"/>
+                  <a:pt x="2922815" y="276999"/>
+                </a:cubicBezTo>
+                <a:cubicBezTo>
+                  <a:pt x="2105533" y="134500"/>
+                  <a:pt x="437425" y="427977"/>
+                  <a:pt x="0" y="276999"/>
+                </a:cubicBezTo>
+                <a:cubicBezTo>
+                  <a:pt x="6173" y="189448"/>
+                  <a:pt x="-16538" y="126583"/>
+                  <a:pt x="0" y="0"/>
+                </a:cubicBezTo>
+                <a:close/>
+              </a:path>
+            </a:pathLst>
+          </a:custGeom>
+          <a:ln>
+            <a:solidFill>
+              <a:schemeClr val="bg1"/>
+            </a:solidFill>
+            <a:extLst>
+              <a:ext uri="{C807C97D-BFC1-408E-A445-0C87EB9F89A2}">
+                <ask:lineSketchStyleProps xmlns:ask="http://schemas.microsoft.com/office/drawing/2018/sketchyshapes" sd="1730981762">
+                  <a:prstGeom prst="rect">
+                    <a:avLst/>
+                  </a:prstGeom>
+                  <ask:type>
+                    <ask:lineSketchCurved/>
+                  </ask:type>
+                </ask:lineSketchStyleProps>
+              </a:ext>
+            </a:extLst>
+          </a:ln>
+          <a:effectLst>
+            <a:glow rad="101600">
+              <a:srgbClr val="C00000">
+                <a:alpha val="60000"/>
+              </a:srgbClr>
+            </a:glow>
+          </a:effectLst>
+        </p:spPr>
+        <p:style>
+          <a:lnRef idx="2">
+            <a:schemeClr val="accent1"/>
+          </a:lnRef>
+          <a:fillRef idx="1">
+            <a:schemeClr val="lt1"/>
+          </a:fillRef>
+          <a:effectRef idx="0">
+            <a:schemeClr val="accent1"/>
+          </a:effectRef>
+          <a:fontRef idx="minor">
+            <a:schemeClr val="dk1"/>
+          </a:fontRef>
+        </p:style>
+        <p:txBody>
+          <a:bodyPr wrap="square" rtlCol="0">
+            <a:spAutoFit/>
+          </a:bodyPr>
+          <a:lstStyle/>
+          <a:p>
+            <a:pPr algn="ctr"/>
+            <a:r>
+              <a:rPr lang="en-US" sz="1200" b="1">
+                <a:latin typeface="Consolas" panose="020B0609020204030204" pitchFamily="49" charset="0"/>
+                <a:cs typeface="Times New Roman" panose="02020603050405020304" pitchFamily="18" charset="0"/>
+              </a:rPr>
+              <a:t>EventsCleaner</a:t>
+            </a:r>
+          </a:p>
+        </p:txBody>
+      </p:sp>
     </p:spTree>
     <p:extLst>
       <p:ext uri="{BB962C8B-B14F-4D97-AF65-F5344CB8AC3E}">
-        <p14:creationId xmlns:p14="http://schemas.microsoft.com/office/powerpoint/2010/main" val="2387680696"/>
+        <p14:creationId xmlns:p14="http://schemas.microsoft.com/office/powerpoint/2010/main" val="390510471"/>
       </p:ext>
     </p:extLst>
   </p:cSld>
@@ -16373,7 +19407,7 @@
         <p:cNvPr id="1" name="">
           <a:extLst>
             <a:ext uri="{FF2B5EF4-FFF2-40B4-BE49-F238E27FC236}">
-              <a16:creationId xmlns:a16="http://schemas.microsoft.com/office/drawing/2014/main" id="{9FA8E370-2D86-267B-C161-050A9525F147}"/>
+              <a16:creationId xmlns:a16="http://schemas.microsoft.com/office/drawing/2014/main" id="{31D0075B-BD41-D2E6-3846-891E48C58571}"/>
             </a:ext>
           </a:extLst>
         </p:cNvPr>
@@ -16393,7 +19427,7 @@
           <p:cNvPr id="3" name="TextBox 2">
             <a:extLst>
               <a:ext uri="{FF2B5EF4-FFF2-40B4-BE49-F238E27FC236}">
-                <a16:creationId xmlns:a16="http://schemas.microsoft.com/office/drawing/2014/main" id="{63A2609B-A8FE-52AB-94BD-9EA64CC875B8}"/>
+                <a16:creationId xmlns:a16="http://schemas.microsoft.com/office/drawing/2014/main" id="{3EC86F6A-2D08-2CD3-14B3-7960846FF045}"/>
               </a:ext>
             </a:extLst>
           </p:cNvPr>
@@ -16402,98 +19436,182 @@
         </p:nvSpPr>
         <p:spPr>
           <a:xfrm>
-            <a:off x="53340" y="175260"/>
-            <a:ext cx="8831580" cy="2893100"/>
-          </a:xfrm>
-          <a:prstGeom prst="rect">
-            <a:avLst/>
-          </a:prstGeom>
-          <a:noFill/>
-        </p:spPr>
+            <a:off x="209005" y="2961550"/>
+            <a:ext cx="2922815" cy="830997"/>
+          </a:xfrm>
+          <a:custGeom>
+            <a:avLst/>
+            <a:gdLst>
+              <a:gd name="csX0" fmla="*/ 0 w 2922815"/>
+              <a:gd name="csY0" fmla="*/ 0 h 830997"/>
+              <a:gd name="csX1" fmla="*/ 2922815 w 2922815"/>
+              <a:gd name="csY1" fmla="*/ 0 h 830997"/>
+              <a:gd name="csX2" fmla="*/ 2922815 w 2922815"/>
+              <a:gd name="csY2" fmla="*/ 830997 h 830997"/>
+              <a:gd name="csX3" fmla="*/ 0 w 2922815"/>
+              <a:gd name="csY3" fmla="*/ 830997 h 830997"/>
+              <a:gd name="csX4" fmla="*/ 0 w 2922815"/>
+              <a:gd name="csY4" fmla="*/ 0 h 830997"/>
+            </a:gdLst>
+            <a:ahLst/>
+            <a:cxnLst>
+              <a:cxn ang="0">
+                <a:pos x="csX0" y="csY0"/>
+              </a:cxn>
+              <a:cxn ang="0">
+                <a:pos x="csX1" y="csY1"/>
+              </a:cxn>
+              <a:cxn ang="0">
+                <a:pos x="csX2" y="csY2"/>
+              </a:cxn>
+              <a:cxn ang="0">
+                <a:pos x="csX3" y="csY3"/>
+              </a:cxn>
+              <a:cxn ang="0">
+                <a:pos x="csX4" y="csY4"/>
+              </a:cxn>
+            </a:cxnLst>
+            <a:rect l="l" t="t" r="r" b="b"/>
+            <a:pathLst>
+              <a:path w="2922815" h="830997" fill="none" extrusionOk="0">
+                <a:moveTo>
+                  <a:pt x="0" y="0"/>
+                </a:moveTo>
+                <a:cubicBezTo>
+                  <a:pt x="355566" y="-130955"/>
+                  <a:pt x="1815757" y="60629"/>
+                  <a:pt x="2922815" y="0"/>
+                </a:cubicBezTo>
+                <a:cubicBezTo>
+                  <a:pt x="2917705" y="121524"/>
+                  <a:pt x="2862889" y="451653"/>
+                  <a:pt x="2922815" y="830997"/>
+                </a:cubicBezTo>
+                <a:cubicBezTo>
+                  <a:pt x="2415729" y="798166"/>
+                  <a:pt x="508035" y="741353"/>
+                  <a:pt x="0" y="830997"/>
+                </a:cubicBezTo>
+                <a:cubicBezTo>
+                  <a:pt x="41085" y="721302"/>
+                  <a:pt x="11105" y="326204"/>
+                  <a:pt x="0" y="0"/>
+                </a:cubicBezTo>
+                <a:close/>
+              </a:path>
+              <a:path w="2922815" h="830997" stroke="0" extrusionOk="0">
+                <a:moveTo>
+                  <a:pt x="0" y="0"/>
+                </a:moveTo>
+                <a:cubicBezTo>
+                  <a:pt x="1326380" y="-145685"/>
+                  <a:pt x="1476772" y="120332"/>
+                  <a:pt x="2922815" y="0"/>
+                </a:cubicBezTo>
+                <a:cubicBezTo>
+                  <a:pt x="2979401" y="341217"/>
+                  <a:pt x="2883799" y="468452"/>
+                  <a:pt x="2922815" y="830997"/>
+                </a:cubicBezTo>
+                <a:cubicBezTo>
+                  <a:pt x="2105533" y="688498"/>
+                  <a:pt x="437425" y="981975"/>
+                  <a:pt x="0" y="830997"/>
+                </a:cubicBezTo>
+                <a:cubicBezTo>
+                  <a:pt x="6173" y="664514"/>
+                  <a:pt x="-16538" y="379586"/>
+                  <a:pt x="0" y="0"/>
+                </a:cubicBezTo>
+                <a:close/>
+              </a:path>
+            </a:pathLst>
+          </a:custGeom>
+          <a:solidFill>
+            <a:schemeClr val="bg1"/>
+          </a:solidFill>
+          <a:ln>
+            <a:solidFill>
+              <a:schemeClr val="bg1"/>
+            </a:solidFill>
+            <a:extLst>
+              <a:ext uri="{C807C97D-BFC1-408E-A445-0C87EB9F89A2}">
+                <ask:lineSketchStyleProps xmlns:ask="http://schemas.microsoft.com/office/drawing/2018/sketchyshapes" sd="1730981762">
+                  <a:prstGeom prst="rect">
+                    <a:avLst/>
+                  </a:prstGeom>
+                  <ask:type>
+                    <ask:lineSketchCurved/>
+                  </ask:type>
+                </ask:lineSketchStyleProps>
+              </a:ext>
+            </a:extLst>
+          </a:ln>
+          <a:effectLst>
+            <a:glow rad="101600">
+              <a:srgbClr val="C00000">
+                <a:alpha val="60000"/>
+              </a:srgbClr>
+            </a:glow>
+          </a:effectLst>
+        </p:spPr>
+        <p:style>
+          <a:lnRef idx="2">
+            <a:schemeClr val="accent1"/>
+          </a:lnRef>
+          <a:fillRef idx="1">
+            <a:schemeClr val="lt1"/>
+          </a:fillRef>
+          <a:effectRef idx="0">
+            <a:schemeClr val="accent1"/>
+          </a:effectRef>
+          <a:fontRef idx="minor">
+            <a:schemeClr val="dk1"/>
+          </a:fontRef>
+        </p:style>
         <p:txBody>
           <a:bodyPr wrap="square" rtlCol="0">
             <a:spAutoFit/>
           </a:bodyPr>
           <a:lstStyle/>
           <a:p>
-            <a:r>
-              <a:rPr lang="en-US" sz="1400" b="1"/>
-              <a:t>Vignette #4:</a:t>
-            </a:r>
-          </a:p>
-          <a:p>
-            <a:r>
-              <a:rPr lang="en-US" sz="1400"/>
-              <a:t>You have clean hospitalization data. You want to see it — not a summary statistic, but the actual events: where in each patient's period did they occur? Were they clustered early? Spread throughout? Did some patients have long gaps and then a burst? These questions generate hypotheses. You cannot ask them from a table.The right visualization is a stacked bar chart. </a:t>
-            </a:r>
-          </a:p>
-          <a:p>
-            <a:endParaRPr lang="en-US" sz="1400"/>
-          </a:p>
-          <a:p>
-            <a:r>
-              <a:rPr lang="en-US" sz="1400"/>
-              <a:t>The problems:</a:t>
-            </a:r>
-          </a:p>
-          <a:p>
-            <a:pPr marL="285750" indent="-285750">
-              <a:buFont typeface="Arial" panose="020B0604020202020204" pitchFamily="34" charset="0"/>
-              <a:buChar char="•"/>
-            </a:pPr>
-            <a:r>
-              <a:rPr lang="en-US" sz="1400"/>
-              <a:t>Cleaning the events: null dates, duplicates, causality violations, overlapping stays</a:t>
-            </a:r>
-          </a:p>
-          <a:p>
-            <a:pPr marL="285750" indent="-285750">
-              <a:buFont typeface="Arial" panose="020B0604020202020204" pitchFamily="34" charset="0"/>
-              <a:buChar char="•"/>
-            </a:pPr>
-            <a:r>
-              <a:rPr lang="en-US" sz="1400"/>
-              <a:t>Building the observation period: calendar, age window, or index date — each requires different logic</a:t>
-            </a:r>
-          </a:p>
-          <a:p>
-            <a:pPr marL="285750" indent="-285750">
-              <a:buFont typeface="Arial" panose="020B0604020202020204" pitchFamily="34" charset="0"/>
-              <a:buChar char="•"/>
-            </a:pPr>
-            <a:r>
-              <a:rPr lang="en-US" sz="1400"/>
-              <a:t>Clipping events to each patient's personal period boundary</a:t>
-            </a:r>
-          </a:p>
-          <a:p>
-            <a:pPr marL="285750" indent="-285750">
-              <a:buFont typeface="Arial" panose="020B0604020202020204" pitchFamily="34" charset="0"/>
-              <a:buChar char="•"/>
-            </a:pPr>
-            <a:r>
-              <a:rPr lang="en-US" sz="1400"/>
-              <a:t>Normalizing every event to each patient's own timeline — a different calculation per patient</a:t>
-            </a:r>
-          </a:p>
-          <a:p>
-            <a:pPr marL="285750" indent="-285750">
-              <a:buFont typeface="Arial" panose="020B0604020202020204" pitchFamily="34" charset="0"/>
-              <a:buChar char="•"/>
-            </a:pPr>
-            <a:r>
-              <a:rPr lang="en-US" sz="1400"/>
-              <a:t>Handling patients with no hospitalizations — they still get a row</a:t>
-            </a:r>
-          </a:p>
-          <a:p>
-            <a:pPr marL="285750" indent="-285750">
-              <a:buFont typeface="Arial" panose="020B0604020202020204" pitchFamily="34" charset="0"/>
-              <a:buChar char="•"/>
-            </a:pPr>
-            <a:r>
-              <a:rPr lang="en-US" sz="1400"/>
-              <a:t>Every visual choice hardcoded — colors, bar height, marker style, figure size</a:t>
+            <a:pPr algn="ctr"/>
+            <a:r>
+              <a:rPr lang="en-US" sz="1200" b="1">
+                <a:latin typeface="Consolas" panose="020B0609020204030204" pitchFamily="49" charset="0"/>
+                <a:cs typeface="Times New Roman" panose="02020603050405020304" pitchFamily="18" charset="0"/>
+              </a:rPr>
+              <a:t>EventsCleaner</a:t>
+            </a:r>
+          </a:p>
+          <a:p>
+            <a:pPr algn="ctr"/>
+            <a:r>
+              <a:rPr lang="en-US" sz="1200">
+                <a:latin typeface="Consolas" panose="020B0609020204030204" pitchFamily="49" charset="0"/>
+                <a:cs typeface="Times New Roman" panose="02020603050405020304" pitchFamily="18" charset="0"/>
+              </a:rPr>
+              <a:t>data: pd.DataFrame</a:t>
+            </a:r>
+          </a:p>
+          <a:p>
+            <a:pPr algn="ctr"/>
+            <a:r>
+              <a:rPr lang="en-US" sz="1200">
+                <a:latin typeface="Consolas" panose="020B0609020204030204" pitchFamily="49" charset="0"/>
+                <a:cs typeface="Times New Roman" panose="02020603050405020304" pitchFamily="18" charset="0"/>
+              </a:rPr>
+              <a:t>semantics: EventSemantics</a:t>
+            </a:r>
+          </a:p>
+          <a:p>
+            <a:pPr algn="ctr"/>
+            <a:r>
+              <a:rPr lang="en-US" sz="1200">
+                <a:latin typeface="Consolas" panose="020B0609020204030204" pitchFamily="49" charset="0"/>
+                <a:cs typeface="Times New Roman" panose="02020603050405020304" pitchFamily="18" charset="0"/>
+              </a:rPr>
+              <a:t>config: EventsCleanerConfig|None</a:t>
             </a:r>
           </a:p>
         </p:txBody>
@@ -16503,7 +19621,7 @@
           <p:cNvPr id="4" name="TextBox 3">
             <a:extLst>
               <a:ext uri="{FF2B5EF4-FFF2-40B4-BE49-F238E27FC236}">
-                <a16:creationId xmlns:a16="http://schemas.microsoft.com/office/drawing/2014/main" id="{B53CA666-4A15-491F-E8A2-CC7C25141802}"/>
+                <a16:creationId xmlns:a16="http://schemas.microsoft.com/office/drawing/2014/main" id="{A03A41F1-3A6A-4945-F046-F079500918C9}"/>
               </a:ext>
             </a:extLst>
           </p:cNvPr>
@@ -16512,41 +19630,346 @@
         </p:nvSpPr>
         <p:spPr>
           <a:xfrm>
-            <a:off x="2598420" y="3308925"/>
-            <a:ext cx="6187440" cy="1015663"/>
-          </a:xfrm>
-          <a:prstGeom prst="rect">
-            <a:avLst/>
-          </a:prstGeom>
-          <a:noFill/>
-        </p:spPr>
-        <p:txBody>
-          <a:bodyPr wrap="square">
+            <a:off x="3424646" y="172630"/>
+            <a:ext cx="5882640" cy="1384995"/>
+          </a:xfrm>
+          <a:prstGeom prst="rect">
+            <a:avLst/>
+          </a:prstGeom>
+          <a:noFill/>
+        </p:spPr>
+        <p:txBody>
+          <a:bodyPr wrap="square" rtlCol="0">
             <a:spAutoFit/>
           </a:bodyPr>
           <a:lstStyle/>
           <a:p>
             <a:r>
-              <a:rPr lang="en-US" sz="1200"/>
-              <a:t>We used Claude to estimate the equivalent pandas and matplotlib script: approximately 490 lines for one observation period type. No configuration file. Switching observation period type requires rewriting three sections. The normalization logic alone is 50 lines.</a:t>
-            </a:r>
-          </a:p>
-          <a:p>
+              <a:rPr lang="en-US" sz="1200" b="1">
+                <a:latin typeface="Consolas" panose="020B0609020204030204" pitchFamily="49" charset="0"/>
+              </a:rPr>
+              <a:t>Constructors as Class Methods</a:t>
+            </a:r>
+          </a:p>
+          <a:p>
+            <a:r>
+              <a:rPr lang="en-US" sz="1200" i="1">
+                <a:latin typeface="Consolas" panose="020B0609020204030204" pitchFamily="49" charset="0"/>
+              </a:rPr>
+              <a:t>build_from_yaml</a:t>
+            </a:r>
             <a:r>
               <a:rPr lang="en-US" sz="1200">
-                <a:solidFill>
-                  <a:srgbClr val="FF0000"/>
-                </a:solidFill>
-              </a:rPr>
-              <a:t>At this length, plotting choices are hardcoded in the script and there are no specific errors thrown. </a:t>
-            </a:r>
+                <a:latin typeface="Consolas" panose="020B0609020204030204" pitchFamily="49" charset="0"/>
+              </a:rPr>
+              <a:t>(path) -&gt; EventsCleanerConfig</a:t>
+            </a:r>
+          </a:p>
+          <a:p>
+            <a:r>
+              <a:rPr lang="en-US" sz="1200">
+                <a:latin typeface="Consolas" panose="020B0609020204030204" pitchFamily="49" charset="0"/>
+              </a:rPr>
+              <a:t>build_with_defaults() -&gt; EventsCleanerConfig</a:t>
+            </a:r>
+          </a:p>
+          <a:p>
+            <a:endParaRPr lang="en-US" sz="1200">
+              <a:latin typeface="Consolas" panose="020B0609020204030204" pitchFamily="49" charset="0"/>
+            </a:endParaRPr>
+          </a:p>
+          <a:p>
+            <a:r>
+              <a:rPr lang="en-US" sz="1200" b="1">
+                <a:latin typeface="Consolas" panose="020B0609020204030204" pitchFamily="49" charset="0"/>
+              </a:rPr>
+              <a:t>Methods</a:t>
+            </a:r>
+          </a:p>
+          <a:p>
+            <a:r>
+              <a:rPr lang="en-US" sz="1200">
+                <a:latin typeface="Consolas" panose="020B0609020204030204" pitchFamily="49" charset="0"/>
+              </a:rPr>
+              <a:t>to_yaml(path) -&gt; None</a:t>
+            </a:r>
+          </a:p>
+          <a:p>
+            <a:r>
+              <a:rPr lang="en-US" sz="1200">
+                <a:latin typeface="Consolas" panose="020B0609020204030204" pitchFamily="49" charset="0"/>
+              </a:rPr>
+              <a:t>__repr__() -&gt; str</a:t>
+            </a:r>
+          </a:p>
+        </p:txBody>
+      </p:sp>
+      <p:sp>
+        <p:nvSpPr>
+          <p:cNvPr id="2" name="TextBox 1">
+            <a:extLst>
+              <a:ext uri="{FF2B5EF4-FFF2-40B4-BE49-F238E27FC236}">
+                <a16:creationId xmlns:a16="http://schemas.microsoft.com/office/drawing/2014/main" id="{4F674944-ABAD-1C25-36A6-3DDEE6FF7A9D}"/>
+              </a:ext>
+            </a:extLst>
+          </p:cNvPr>
+          <p:cNvSpPr txBox="1"/>
+          <p:nvPr/>
+        </p:nvSpPr>
+        <p:spPr>
+          <a:xfrm>
+            <a:off x="209005" y="172630"/>
+            <a:ext cx="2922815" cy="2123658"/>
+          </a:xfrm>
+          <a:prstGeom prst="rect">
+            <a:avLst/>
+          </a:prstGeom>
+          <a:ln w="38100">
+            <a:solidFill>
+              <a:schemeClr val="bg1"/>
+            </a:solidFill>
+          </a:ln>
+          <a:effectLst>
+            <a:glow rad="139700">
+              <a:schemeClr val="accent2">
+                <a:satMod val="175000"/>
+                <a:alpha val="40000"/>
+              </a:schemeClr>
+            </a:glow>
+          </a:effectLst>
+        </p:spPr>
+        <p:style>
+          <a:lnRef idx="2">
+            <a:schemeClr val="accent1"/>
+          </a:lnRef>
+          <a:fillRef idx="1">
+            <a:schemeClr val="lt1"/>
+          </a:fillRef>
+          <a:effectRef idx="0">
+            <a:schemeClr val="accent1"/>
+          </a:effectRef>
+          <a:fontRef idx="minor">
+            <a:schemeClr val="dk1"/>
+          </a:fontRef>
+        </p:style>
+        <p:txBody>
+          <a:bodyPr wrap="square" rtlCol="0">
+            <a:spAutoFit/>
+          </a:bodyPr>
+          <a:lstStyle/>
+          <a:p>
+            <a:pPr algn="ctr"/>
+            <a:r>
+              <a:rPr lang="en-US" sz="1200" b="1">
+                <a:latin typeface="Consolas" panose="020B0609020204030204" pitchFamily="49" charset="0"/>
+                <a:cs typeface="Times New Roman" panose="02020603050405020304" pitchFamily="18" charset="0"/>
+              </a:rPr>
+              <a:t>EventsCleanerConfig</a:t>
+            </a:r>
+          </a:p>
+          <a:p>
+            <a:pPr algn="ctr"/>
+            <a:r>
+              <a:rPr lang="en-US" sz="1200">
+                <a:latin typeface="Consolas" panose="020B0609020204030204" pitchFamily="49" charset="0"/>
+                <a:cs typeface="Times New Roman" panose="02020603050405020304" pitchFamily="18" charset="0"/>
+              </a:rPr>
+              <a:t>normalize_dates: bool</a:t>
+            </a:r>
+          </a:p>
+          <a:p>
+            <a:pPr algn="ctr"/>
+            <a:r>
+              <a:rPr lang="en-US" sz="1200">
+                <a:latin typeface="Consolas" panose="020B0609020204030204" pitchFamily="49" charset="0"/>
+                <a:cs typeface="Times New Roman" panose="02020603050405020304" pitchFamily="18" charset="0"/>
+              </a:rPr>
+              <a:t>coalesce_dates: bool</a:t>
+            </a:r>
+          </a:p>
+          <a:p>
+            <a:pPr algn="ctr"/>
+            <a:r>
+              <a:rPr lang="en-US" sz="1200">
+                <a:latin typeface="Consolas" panose="020B0609020204030204" pitchFamily="49" charset="0"/>
+                <a:cs typeface="Times New Roman" panose="02020603050405020304" pitchFamily="18" charset="0"/>
+              </a:rPr>
+              <a:t>causality_check: bool</a:t>
+            </a:r>
+          </a:p>
+          <a:p>
+            <a:pPr algn="ctr"/>
+            <a:r>
+              <a:rPr lang="en-US" sz="1200">
+                <a:latin typeface="Consolas" panose="020B0609020204030204" pitchFamily="49" charset="0"/>
+                <a:cs typeface="Times New Roman" panose="02020603050405020304" pitchFamily="18" charset="0"/>
+              </a:rPr>
+              <a:t>parse_dates: bool</a:t>
+            </a:r>
+          </a:p>
+          <a:p>
+            <a:pPr algn="ctr"/>
+            <a:r>
+              <a:rPr lang="en-US" sz="1200">
+                <a:latin typeface="Consolas" panose="020B0609020204030204" pitchFamily="49" charset="0"/>
+                <a:cs typeface="Times New Roman" panose="02020603050405020304" pitchFamily="18" charset="0"/>
+              </a:rPr>
+              <a:t>drop_duplicates: bool</a:t>
+            </a:r>
+          </a:p>
+          <a:p>
+            <a:pPr algn="ctr"/>
+            <a:r>
+              <a:rPr lang="en-US" sz="1200">
+                <a:latin typeface="Consolas" panose="020B0609020204030204" pitchFamily="49" charset="0"/>
+                <a:cs typeface="Times New Roman" panose="02020603050405020304" pitchFamily="18" charset="0"/>
+              </a:rPr>
+              <a:t>merge_overlapping: bool</a:t>
+            </a:r>
+          </a:p>
+          <a:p>
+            <a:pPr algn="ctr"/>
+            <a:r>
+              <a:rPr lang="en-US" sz="1200">
+                <a:latin typeface="Consolas" panose="020B0609020204030204" pitchFamily="49" charset="0"/>
+                <a:cs typeface="Times New Roman" panose="02020603050405020304" pitchFamily="18" charset="0"/>
+              </a:rPr>
+              <a:t>meaningful_gap: int</a:t>
+            </a:r>
+          </a:p>
+          <a:p>
+            <a:pPr algn="ctr"/>
+            <a:r>
+              <a:rPr lang="en-US" sz="1200">
+                <a:latin typeface="Consolas" panose="020B0609020204030204" pitchFamily="49" charset="0"/>
+                <a:cs typeface="Times New Roman" panose="02020603050405020304" pitchFamily="18" charset="0"/>
+              </a:rPr>
+              <a:t>date_floor: str</a:t>
+            </a:r>
+          </a:p>
+          <a:p>
+            <a:pPr algn="ctr"/>
+            <a:r>
+              <a:rPr lang="en-US" sz="1200">
+                <a:latin typeface="Consolas" panose="020B0609020204030204" pitchFamily="49" charset="0"/>
+                <a:cs typeface="Times New Roman" panose="02020603050405020304" pitchFamily="18" charset="0"/>
+              </a:rPr>
+              <a:t>date_celing: str</a:t>
+            </a:r>
+          </a:p>
+          <a:p>
+            <a:pPr algn="ctr"/>
+            <a:endParaRPr lang="en-US" sz="1200" b="1">
+              <a:latin typeface="Consolas" panose="020B0609020204030204" pitchFamily="49" charset="0"/>
+              <a:cs typeface="Times New Roman" panose="02020603050405020304" pitchFamily="18" charset="0"/>
+            </a:endParaRPr>
+          </a:p>
+        </p:txBody>
+      </p:sp>
+      <p:sp>
+        <p:nvSpPr>
+          <p:cNvPr id="5" name="TextBox 4">
+            <a:extLst>
+              <a:ext uri="{FF2B5EF4-FFF2-40B4-BE49-F238E27FC236}">
+                <a16:creationId xmlns:a16="http://schemas.microsoft.com/office/drawing/2014/main" id="{5D105680-9BEB-6204-9EBE-CE24059395C3}"/>
+              </a:ext>
+            </a:extLst>
+          </p:cNvPr>
+          <p:cNvSpPr txBox="1"/>
+          <p:nvPr/>
+        </p:nvSpPr>
+        <p:spPr>
+          <a:xfrm>
+            <a:off x="3424646" y="2943680"/>
+            <a:ext cx="5882640" cy="1938992"/>
+          </a:xfrm>
+          <a:prstGeom prst="rect">
+            <a:avLst/>
+          </a:prstGeom>
+          <a:noFill/>
+        </p:spPr>
+        <p:txBody>
+          <a:bodyPr wrap="square" rtlCol="0">
+            <a:spAutoFit/>
+          </a:bodyPr>
+          <a:lstStyle/>
+          <a:p>
+            <a:r>
+              <a:rPr lang="en-US" sz="1200" b="1">
+                <a:latin typeface="Consolas" panose="020B0609020204030204" pitchFamily="49" charset="0"/>
+              </a:rPr>
+              <a:t>Constructor</a:t>
+            </a:r>
+          </a:p>
+          <a:p>
+            <a:r>
+              <a:rPr lang="en-US" sz="1200">
+                <a:latin typeface="Consolas" panose="020B0609020204030204" pitchFamily="49" charset="0"/>
+              </a:rPr>
+              <a:t>__init__(dataframe, semantics, config|None) -&gt; EventsCleaner</a:t>
+            </a:r>
+          </a:p>
+          <a:p>
+            <a:endParaRPr lang="en-US" sz="1200">
+              <a:latin typeface="Consolas" panose="020B0609020204030204" pitchFamily="49" charset="0"/>
+            </a:endParaRPr>
+          </a:p>
+          <a:p>
+            <a:r>
+              <a:rPr lang="en-US" sz="1200" b="1">
+                <a:latin typeface="Consolas" panose="020B0609020204030204" pitchFamily="49" charset="0"/>
+              </a:rPr>
+              <a:t>Methods</a:t>
+            </a:r>
+          </a:p>
+          <a:p>
+            <a:r>
+              <a:rPr lang="en-US" sz="1200">
+                <a:latin typeface="Consolas" panose="020B0609020204030204" pitchFamily="49" charset="0"/>
+              </a:rPr>
+              <a:t>clean() -&gt; Events</a:t>
+            </a:r>
+          </a:p>
+          <a:p>
+            <a:r>
+              <a:rPr lang="en-US" sz="1200">
+                <a:latin typeface="Consolas" panose="020B0609020204030204" pitchFamily="49" charset="0"/>
+              </a:rPr>
+              <a:t>calc_report() -&gt; dict</a:t>
+            </a:r>
+          </a:p>
+          <a:p>
+            <a:r>
+              <a:rPr lang="en-US" sz="1200">
+                <a:latin typeface="Consolas" panose="020B0609020204030204" pitchFamily="49" charset="0"/>
+              </a:rPr>
+              <a:t>print_report() -&gt; None</a:t>
+            </a:r>
+          </a:p>
+          <a:p>
+            <a:r>
+              <a:rPr lang="en-US" sz="1200">
+                <a:latin typeface="Consolas" panose="020B0609020204030204" pitchFamily="49" charset="0"/>
+              </a:rPr>
+              <a:t>__repr__() -&gt; str</a:t>
+            </a:r>
+          </a:p>
+          <a:p>
+            <a:endParaRPr lang="en-US" sz="1200">
+              <a:latin typeface="Consolas" panose="020B0609020204030204" pitchFamily="49" charset="0"/>
+            </a:endParaRPr>
+          </a:p>
+          <a:p>
+            <a:endParaRPr lang="en-US" sz="1200">
+              <a:latin typeface="Consolas" panose="020B0609020204030204" pitchFamily="49" charset="0"/>
+            </a:endParaRPr>
           </a:p>
         </p:txBody>
       </p:sp>
     </p:spTree>
     <p:extLst>
       <p:ext uri="{BB962C8B-B14F-4D97-AF65-F5344CB8AC3E}">
-        <p14:creationId xmlns:p14="http://schemas.microsoft.com/office/powerpoint/2010/main" val="2155384216"/>
+        <p14:creationId xmlns:p14="http://schemas.microsoft.com/office/powerpoint/2010/main" val="941891264"/>
       </p:ext>
     </p:extLst>
   </p:cSld>
@@ -16561,7 +19984,13 @@
   <p:cSld>
     <p:spTree>
       <p:nvGrpSpPr>
-        <p:cNvPr id="1" name=""/>
+        <p:cNvPr id="1" name="">
+          <a:extLst>
+            <a:ext uri="{FF2B5EF4-FFF2-40B4-BE49-F238E27FC236}">
+              <a16:creationId xmlns:a16="http://schemas.microsoft.com/office/drawing/2014/main" id="{2949D45B-602C-6A14-57FD-8DFBC4C3526E}"/>
+            </a:ext>
+          </a:extLst>
+        </p:cNvPr>
         <p:cNvGrpSpPr/>
         <p:nvPr/>
       </p:nvGrpSpPr>
@@ -16573,10 +20002,109 @@
           <a:chExt cx="0" cy="0"/>
         </a:xfrm>
       </p:grpSpPr>
+      <p:sp>
+        <p:nvSpPr>
+          <p:cNvPr id="3" name="TextBox 2">
+            <a:extLst>
+              <a:ext uri="{FF2B5EF4-FFF2-40B4-BE49-F238E27FC236}">
+                <a16:creationId xmlns:a16="http://schemas.microsoft.com/office/drawing/2014/main" id="{E9C38CE3-D1D3-E9D6-3CD7-0E62FCF64D73}"/>
+              </a:ext>
+            </a:extLst>
+          </p:cNvPr>
+          <p:cNvSpPr txBox="1"/>
+          <p:nvPr/>
+        </p:nvSpPr>
+        <p:spPr>
+          <a:xfrm>
+            <a:off x="53340" y="114300"/>
+            <a:ext cx="8831580" cy="5047536"/>
+          </a:xfrm>
+          <a:prstGeom prst="rect">
+            <a:avLst/>
+          </a:prstGeom>
+          <a:noFill/>
+        </p:spPr>
+        <p:txBody>
+          <a:bodyPr wrap="square" rtlCol="0">
+            <a:spAutoFit/>
+          </a:bodyPr>
+          <a:lstStyle/>
+          <a:p>
+            <a:r>
+              <a:rPr lang="en-US" sz="1400" b="1"/>
+              <a:t>Vignette # 2:</a:t>
+            </a:r>
+          </a:p>
+          <a:p>
+            <a:r>
+              <a:rPr lang="en-US" sz="1400"/>
+              <a:t>You have cleaned your hospitalization data. You now have 11,200 stays across 8,400 patients. Before you can report anything, you need to understand how long hospitalizations last. You reach for matplotlib.Before you write a single line of plotting code, you need to answer a question that sounds trivial: "What exactly am I plotting, and will I be able to reproduce it?</a:t>
+            </a:r>
+          </a:p>
+          <a:p>
+            <a:endParaRPr lang="en-US" sz="1400"/>
+          </a:p>
+          <a:p>
+            <a:r>
+              <a:rPr lang="en-US" sz="1400" b="1"/>
+              <a:t>Problem 1</a:t>
+            </a:r>
+            <a:r>
+              <a:rPr lang="en-US" sz="1400"/>
+              <a:t> — The bin width is a scientific choice, not a formatting detail: A 1-day bin width shows noise. A 30-day bin width hides clinically meaningful variation. 7-day bins align with weekly discharge patterns. The choice belongs in your methods section — not buried in bins=range(0, 180, 7) on line 34 of a script.</a:t>
+            </a:r>
+          </a:p>
+          <a:p>
+            <a:endParaRPr lang="en-US" sz="1400"/>
+          </a:p>
+          <a:p>
+            <a:r>
+              <a:rPr lang="en-US" sz="1400" b="1"/>
+              <a:t>Problem 2</a:t>
+            </a:r>
+            <a:r>
+              <a:rPr lang="en-US" sz="1400"/>
+              <a:t> — Percentile lines require decisions too: Which percentiles do you report — 25th, 50th, 75th, 90th? Do you label them on the plot? At what font size? A script that hardcodes np.percentile(durations, [25, 50, 75]) has made all of these choices silently.</a:t>
+            </a:r>
+          </a:p>
+          <a:p>
+            <a:endParaRPr lang="en-US" sz="1400"/>
+          </a:p>
+          <a:p>
+            <a:r>
+              <a:rPr lang="en-US" sz="1400" b="1"/>
+              <a:t>Problem 3</a:t>
+            </a:r>
+            <a:r>
+              <a:rPr lang="en-US" sz="1400"/>
+              <a:t> — Stratification multiplies the problem: When your supervisor asks you to break the histogram down by hospital or DRG category, you now need consistent bin widths, consistent colors, and consistent percentile lines across every stratum. A script that hardcodes these for the unstratified case has to be rewritten for every stratification. </a:t>
+            </a:r>
+          </a:p>
+          <a:p>
+            <a:endParaRPr lang="en-US" sz="1400"/>
+          </a:p>
+          <a:p>
+            <a:r>
+              <a:rPr lang="en-US" sz="1400" b="1"/>
+              <a:t>Problem 4</a:t>
+            </a:r>
+            <a:r>
+              <a:rPr lang="en-US" sz="1400"/>
+              <a:t> — Rerunning next month on updated data: Your data warehouse refreshes quarterly. When you rerun the analysis, are you using the same bins? The same color? The same percentile cutoffs? If these choices live in your script, the answer is "probably, unless someone edited it."</a:t>
+            </a:r>
+          </a:p>
+          <a:p>
+            <a:endParaRPr lang="en-US" sz="1400"/>
+          </a:p>
+          <a:p>
+            <a:endParaRPr lang="en-US" sz="1400"/>
+          </a:p>
+        </p:txBody>
+      </p:sp>
     </p:spTree>
     <p:extLst>
       <p:ext uri="{BB962C8B-B14F-4D97-AF65-F5344CB8AC3E}">
-        <p14:creationId xmlns:p14="http://schemas.microsoft.com/office/powerpoint/2010/main" val="1996516940"/>
+        <p14:creationId xmlns:p14="http://schemas.microsoft.com/office/powerpoint/2010/main" val="4279013652"/>
       </p:ext>
     </p:extLst>
   </p:cSld>

--- a/eventus_architecture.pptx
+++ b/eventus_architecture.pptx
@@ -5298,7 +5298,7 @@
         <p:spPr>
           <a:xfrm>
             <a:off x="3424646" y="272582"/>
-            <a:ext cx="5882640" cy="1015663"/>
+            <a:ext cx="5882640" cy="1200329"/>
           </a:xfrm>
           <a:prstGeom prst="rect">
             <a:avLst/>
@@ -5356,14 +5356,19 @@
               <a:rPr lang="en-US" sz="1200" i="1">
                 <a:latin typeface="Consolas" panose="020B0609020204030204" pitchFamily="49" charset="0"/>
               </a:rPr>
-              <a:t>to_yaml</a:t>
+              <a:t>compute_event_coverage</a:t>
             </a:r>
             <a:r>
               <a:rPr lang="en-US" sz="1200">
                 <a:latin typeface="Consolas" panose="020B0609020204030204" pitchFamily="49" charset="0"/>
               </a:rPr>
-              <a:t>(path) -&gt; None</a:t>
-            </a:r>
+              <a:t>() -&gt; PipeDelimitedIntermediateEvents</a:t>
+            </a:r>
+          </a:p>
+          <a:p>
+            <a:endParaRPr lang="en-US" sz="1200">
+              <a:latin typeface="Consolas" panose="020B0609020204030204" pitchFamily="49" charset="0"/>
+            </a:endParaRPr>
           </a:p>
         </p:txBody>
       </p:sp>
@@ -5553,7 +5558,7 @@
         <p:spPr>
           <a:xfrm>
             <a:off x="53340" y="175260"/>
-            <a:ext cx="8831580" cy="2893100"/>
+            <a:ext cx="8831580" cy="4401205"/>
           </a:xfrm>
           <a:prstGeom prst="rect">
             <a:avLst/>
@@ -5574,121 +5579,47 @@
           <a:p>
             <a:r>
               <a:rPr lang="en-US" sz="1400"/>
-              <a:t>You have clean hospitalization data. You want to see it — not a summary statistic, but the actual events: where in each patient's period did they occur? Were they clustered early? Spread throughout? Did some patients have long gaps and then a burst? These questions generate hypotheses. You cannot ask them from a table.The right visualization is a stacked bar chart. </a:t>
-            </a:r>
-          </a:p>
-          <a:p>
-            <a:endParaRPr lang="en-US" sz="1400"/>
-          </a:p>
-          <a:p>
+              <a:t>You have cleaned your Medicaid coverage data. Each row represents one continuous coverage episode — a span of days during which a senior was enrolled. Now you want to understand the structure of coverage gaps across your cohort from age 65 to 70.Before running any statistical models, you want to do something simple first: look at a sample of the data. Then you want to understand the distribution of coverage gaps — not just how many days patients were uncovered, but where in their five-year window those gaps fell</a:t>
+            </a:r>
+          </a:p>
+          <a:p>
+            <a:r>
+              <a:rPr lang="en-US" sz="1400" b="1"/>
+              <a:t>Problem 1</a:t>
+            </a:r>
             <a:r>
               <a:rPr lang="en-US" sz="1400"/>
-              <a:t>The problems:</a:t>
-            </a:r>
-          </a:p>
-          <a:p>
-            <a:pPr marL="285750" indent="-285750">
-              <a:buFont typeface="Arial" panose="020B0604020202020204" pitchFamily="34" charset="0"/>
-              <a:buChar char="•"/>
-            </a:pPr>
+              <a:t> — Coverage gaps are not one thing: A patient uncovered for 90 days before their first coverage episode is scientifically different from a patient uncovered for 90 days between two episodes. The first may reflect delayed enrollment. The second may reflect a lapse. A script that computes inactive_days as a single number destroys this distinction.</a:t>
+            </a:r>
+          </a:p>
+          <a:p>
+            <a:r>
+              <a:rPr lang="en-US" sz="1400" b="1"/>
+              <a:t>Problem 2</a:t>
+            </a:r>
             <a:r>
               <a:rPr lang="en-US" sz="1400"/>
-              <a:t>Cleaning the events: null dates, duplicates, causality violations, overlapping stays</a:t>
-            </a:r>
-          </a:p>
-          <a:p>
-            <a:pPr marL="285750" indent="-285750">
-              <a:buFont typeface="Arial" panose="020B0604020202020204" pitchFamily="34" charset="0"/>
-              <a:buChar char="•"/>
-            </a:pPr>
+              <a:t> — The denominator changes for each question: "Days before first coverage" only applies to patients whose coverage started after age 65. "Gap between coverage episodes" only applies to patients with ≥ 2 episodes. A script that computes these without tracking the denominator produces misleading statistics.</a:t>
+            </a:r>
+          </a:p>
+          <a:p>
+            <a:r>
+              <a:rPr lang="en-US" sz="1400" b="1"/>
+              <a:t>Problem 3</a:t>
+            </a:r>
             <a:r>
               <a:rPr lang="en-US" sz="1400"/>
-              <a:t>Building the observation period: calendar, age window, or index date — each requires different logic</a:t>
-            </a:r>
-          </a:p>
-          <a:p>
-            <a:pPr marL="285750" indent="-285750">
-              <a:buFont typeface="Arial" panose="020B0604020202020204" pitchFamily="34" charset="0"/>
-              <a:buChar char="•"/>
-            </a:pPr>
+              <a:t> — Problem 3 — The distributions are only comparable if the denominators are visible: If 800 patients had any gap but only 200 had gaps between episodes, percentiles are only understandable if you know what fraction of the cohort each violin represents. A plot where both violins appear the same width implies equal denominators — and is actively misleading.</a:t>
+            </a:r>
+          </a:p>
+          <a:p>
+            <a:r>
+              <a:rPr lang="en-US" sz="1400" b="1"/>
+              <a:t>Problem 4</a:t>
+            </a:r>
             <a:r>
               <a:rPr lang="en-US" sz="1400"/>
-              <a:t>Clipping events to each patient's personal period boundary</a:t>
-            </a:r>
-          </a:p>
-          <a:p>
-            <a:pPr marL="285750" indent="-285750">
-              <a:buFont typeface="Arial" panose="020B0604020202020204" pitchFamily="34" charset="0"/>
-              <a:buChar char="•"/>
-            </a:pPr>
-            <a:r>
-              <a:rPr lang="en-US" sz="1400"/>
-              <a:t>Normalizing every event to each patient's own timeline — a different calculation per patient</a:t>
-            </a:r>
-          </a:p>
-          <a:p>
-            <a:pPr marL="285750" indent="-285750">
-              <a:buFont typeface="Arial" panose="020B0604020202020204" pitchFamily="34" charset="0"/>
-              <a:buChar char="•"/>
-            </a:pPr>
-            <a:r>
-              <a:rPr lang="en-US" sz="1400"/>
-              <a:t>Handling patients with no hospitalizations — they still get a row</a:t>
-            </a:r>
-          </a:p>
-          <a:p>
-            <a:pPr marL="285750" indent="-285750">
-              <a:buFont typeface="Arial" panose="020B0604020202020204" pitchFamily="34" charset="0"/>
-              <a:buChar char="•"/>
-            </a:pPr>
-            <a:r>
-              <a:rPr lang="en-US" sz="1400"/>
-              <a:t>Every visual choice hardcoded — colors, bar height, marker style, figure size</a:t>
-            </a:r>
-          </a:p>
-        </p:txBody>
-      </p:sp>
-      <p:sp>
-        <p:nvSpPr>
-          <p:cNvPr id="4" name="TextBox 3">
-            <a:extLst>
-              <a:ext uri="{FF2B5EF4-FFF2-40B4-BE49-F238E27FC236}">
-                <a16:creationId xmlns:a16="http://schemas.microsoft.com/office/drawing/2014/main" id="{B53CA666-4A15-491F-E8A2-CC7C25141802}"/>
-              </a:ext>
-            </a:extLst>
-          </p:cNvPr>
-          <p:cNvSpPr txBox="1"/>
-          <p:nvPr/>
-        </p:nvSpPr>
-        <p:spPr>
-          <a:xfrm>
-            <a:off x="2598420" y="3308925"/>
-            <a:ext cx="6187440" cy="1015663"/>
-          </a:xfrm>
-          <a:prstGeom prst="rect">
-            <a:avLst/>
-          </a:prstGeom>
-          <a:noFill/>
-        </p:spPr>
-        <p:txBody>
-          <a:bodyPr wrap="square">
-            <a:spAutoFit/>
-          </a:bodyPr>
-          <a:lstStyle/>
-          <a:p>
-            <a:r>
-              <a:rPr lang="en-US" sz="1200"/>
-              <a:t>We used Claude to estimate the equivalent pandas and matplotlib script: approximately 490 lines for one observation period type. No configuration file. Switching observation period type requires rewriting three sections. The normalization logic alone is 50 lines.</a:t>
-            </a:r>
-          </a:p>
-          <a:p>
-            <a:r>
-              <a:rPr lang="en-US" sz="1200">
-                <a:solidFill>
-                  <a:srgbClr val="FF0000"/>
-                </a:solidFill>
-              </a:rPr>
-              <a:t>At this length, plotting choices are hardcoded in the script and there are no specific errors thrown. </a:t>
+              <a:t> — The observation period is age-derived: Each patient's window runs from their 65th to their 70th birthday — a different calendar range for every patient. A script that hardcodes a fixed calendar period assigns the wrong observation window to every patient.</a:t>
             </a:r>
           </a:p>
         </p:txBody>
@@ -5723,6 +5654,36 @@
           <a:chExt cx="0" cy="0"/>
         </a:xfrm>
       </p:grpSpPr>
+      <p:pic>
+        <p:nvPicPr>
+          <p:cNvPr id="3" name="Picture 2">
+            <a:extLst>
+              <a:ext uri="{FF2B5EF4-FFF2-40B4-BE49-F238E27FC236}">
+                <a16:creationId xmlns:a16="http://schemas.microsoft.com/office/drawing/2014/main" id="{00353574-C264-E6FD-62B9-69AA6733C57B}"/>
+              </a:ext>
+            </a:extLst>
+          </p:cNvPr>
+          <p:cNvPicPr>
+            <a:picLocks noChangeAspect="1"/>
+          </p:cNvPicPr>
+          <p:nvPr/>
+        </p:nvPicPr>
+        <p:blipFill>
+          <a:blip r:embed="rId2"/>
+          <a:stretch>
+            <a:fillRect/>
+          </a:stretch>
+        </p:blipFill>
+        <p:spPr>
+          <a:xfrm>
+            <a:off x="4279417" y="132234"/>
+            <a:ext cx="4673840" cy="4578585"/>
+          </a:xfrm>
+          <a:prstGeom prst="rect">
+            <a:avLst/>
+          </a:prstGeom>
+        </p:spPr>
+      </p:pic>
     </p:spTree>
     <p:extLst>
       <p:ext uri="{BB962C8B-B14F-4D97-AF65-F5344CB8AC3E}">
